--- a/pptx/output/delivered/supporting/Vopak_Manish_Handback_2026_10_07.pptx
+++ b/pptx/output/delivered/supporting/Vopak_Manish_Handback_2026_10_07.pptx
@@ -10868,7 +10868,7 @@
                         <a:spcAft>
                           <a:spcPts val="100"/>
                         </a:spcAft>
-                        <a:defRPr sz="1050" b="1">
+                        <a:defRPr sz="1000" b="1">
                           <a:solidFill>
                             <a:srgbClr val="0A2373"/>
                           </a:solidFill>
@@ -10909,7 +10909,7 @@
                         <a:spcAft>
                           <a:spcPts val="100"/>
                         </a:spcAft>
-                        <a:defRPr sz="1050" b="1">
+                        <a:defRPr sz="1000" b="1">
                           <a:solidFill>
                             <a:srgbClr val="11151A"/>
                           </a:solidFill>
@@ -10950,7 +10950,7 @@
                         <a:spcAft>
                           <a:spcPts val="100"/>
                         </a:spcAft>
-                        <a:defRPr sz="1050" b="1">
+                        <a:defRPr sz="1000" b="1">
                           <a:solidFill>
                             <a:srgbClr val="11151A"/>
                           </a:solidFill>
@@ -10991,7 +10991,7 @@
                         <a:spcAft>
                           <a:spcPts val="100"/>
                         </a:spcAft>
-                        <a:defRPr sz="1050" b="1">
+                        <a:defRPr sz="1000" b="1">
                           <a:solidFill>
                             <a:srgbClr val="11151A"/>
                           </a:solidFill>
@@ -11034,7 +11034,7 @@
                         <a:spcAft>
                           <a:spcPts val="100"/>
                         </a:spcAft>
-                        <a:defRPr sz="1050" b="1">
+                        <a:defRPr sz="1000" b="1">
                           <a:solidFill>
                             <a:srgbClr val="0A2373"/>
                           </a:solidFill>
@@ -11075,7 +11075,7 @@
                         <a:spcAft>
                           <a:spcPts val="100"/>
                         </a:spcAft>
-                        <a:defRPr sz="1050" b="0">
+                        <a:defRPr sz="1000" b="0">
                           <a:solidFill>
                             <a:srgbClr val="11151A"/>
                           </a:solidFill>
@@ -11116,7 +11116,7 @@
                         <a:spcAft>
                           <a:spcPts val="100"/>
                         </a:spcAft>
-                        <a:defRPr sz="1050" b="0">
+                        <a:defRPr sz="1000" b="0">
                           <a:solidFill>
                             <a:srgbClr val="11151A"/>
                           </a:solidFill>
@@ -11157,7 +11157,7 @@
                         <a:spcAft>
                           <a:spcPts val="100"/>
                         </a:spcAft>
-                        <a:defRPr sz="1050" b="0">
+                        <a:defRPr sz="1000" b="0">
                           <a:solidFill>
                             <a:srgbClr val="11151A"/>
                           </a:solidFill>
@@ -11200,7 +11200,7 @@
                         <a:spcAft>
                           <a:spcPts val="100"/>
                         </a:spcAft>
-                        <a:defRPr sz="1050" b="1">
+                        <a:defRPr sz="1000" b="1">
                           <a:solidFill>
                             <a:srgbClr val="0A2373"/>
                           </a:solidFill>
@@ -11241,7 +11241,7 @@
                         <a:spcAft>
                           <a:spcPts val="100"/>
                         </a:spcAft>
-                        <a:defRPr sz="1050" b="0">
+                        <a:defRPr sz="1000" b="0">
                           <a:solidFill>
                             <a:srgbClr val="11151A"/>
                           </a:solidFill>
@@ -11282,7 +11282,7 @@
                         <a:spcAft>
                           <a:spcPts val="100"/>
                         </a:spcAft>
-                        <a:defRPr sz="1050" b="0">
+                        <a:defRPr sz="1000" b="0">
                           <a:solidFill>
                             <a:srgbClr val="11151A"/>
                           </a:solidFill>
@@ -11323,7 +11323,7 @@
                         <a:spcAft>
                           <a:spcPts val="100"/>
                         </a:spcAft>
-                        <a:defRPr sz="1050" b="0">
+                        <a:defRPr sz="1000" b="0">
                           <a:solidFill>
                             <a:srgbClr val="11151A"/>
                           </a:solidFill>
@@ -11366,7 +11366,7 @@
                         <a:spcAft>
                           <a:spcPts val="100"/>
                         </a:spcAft>
-                        <a:defRPr sz="1050" b="1">
+                        <a:defRPr sz="1000" b="1">
                           <a:solidFill>
                             <a:srgbClr val="0A2373"/>
                           </a:solidFill>
@@ -11407,7 +11407,7 @@
                         <a:spcAft>
                           <a:spcPts val="100"/>
                         </a:spcAft>
-                        <a:defRPr sz="1050" b="0">
+                        <a:defRPr sz="1000" b="0">
                           <a:solidFill>
                             <a:srgbClr val="11151A"/>
                           </a:solidFill>
@@ -11415,7 +11415,7 @@
                         </a:defRPr>
                       </a:pPr>
                       <a:r>
-                        <a:t>2018 diesel: customs 5.12, FIASA 6.11; petrol: 1.83 and 2.19. 2019 diesel: 5.59 and 5.86. 2018 exports are also lower in customs. Cause not found.</a:t>
+                        <a:t>2018 diesel: customs 5.12, FIASA 6.11; petrol: 1.83 and 2.19. 2019 diesel: 5.59 and 5.86. 2018 exports are also lower in customs. FIASA and the department's 2018 balance share one earlier reading; today's customs data and UN Comtrade agree with each other. No missing month or tariff line.</a:t>
                       </a:r>
                     </a:p>
                   </a:txBody>
@@ -11448,7 +11448,7 @@
                         <a:spcAft>
                           <a:spcPts val="100"/>
                         </a:spcAft>
-                        <a:defRPr sz="1050" b="0">
+                        <a:defRPr sz="1000" b="0">
                           <a:solidFill>
                             <a:srgbClr val="11151A"/>
                           </a:solidFill>
@@ -11456,7 +11456,7 @@
                         </a:defRPr>
                       </a:pPr>
                       <a:r>
-                        <a:t>Customs</a:t>
+                        <a:t>Customs; likely a later customs revision, not proven</a:t>
                       </a:r>
                     </a:p>
                   </a:txBody>
@@ -11489,7 +11489,7 @@
                         <a:spcAft>
                           <a:spcPts val="100"/>
                         </a:spcAft>
-                        <a:defRPr sz="1050" b="0">
+                        <a:defRPr sz="1000" b="0">
                           <a:solidFill>
                             <a:srgbClr val="11151A"/>
                           </a:solidFill>
@@ -11497,7 +11497,7 @@
                         </a:defRPr>
                       </a:pPr>
                       <a:r>
-                        <a:t>Nigel: review; Manish to trace</a:t>
+                        <a:t>Nigel: review</a:t>
                       </a:r>
                     </a:p>
                   </a:txBody>
@@ -11532,7 +11532,7 @@
                         <a:spcAft>
                           <a:spcPts val="100"/>
                         </a:spcAft>
-                        <a:defRPr sz="1050" b="1">
+                        <a:defRPr sz="1000" b="1">
                           <a:solidFill>
                             <a:srgbClr val="0A2373"/>
                           </a:solidFill>
@@ -11573,7 +11573,7 @@
                         <a:spcAft>
                           <a:spcPts val="100"/>
                         </a:spcAft>
-                        <a:defRPr sz="1050" b="0">
+                        <a:defRPr sz="1000" b="0">
                           <a:solidFill>
                             <a:srgbClr val="11151A"/>
                           </a:solidFill>
@@ -11614,7 +11614,7 @@
                         <a:spcAft>
                           <a:spcPts val="100"/>
                         </a:spcAft>
-                        <a:defRPr sz="1050" b="0">
+                        <a:defRPr sz="1000" b="0">
                           <a:solidFill>
                             <a:srgbClr val="11151A"/>
                           </a:solidFill>
@@ -11655,7 +11655,7 @@
                         <a:spcAft>
                           <a:spcPts val="100"/>
                         </a:spcAft>
-                        <a:defRPr sz="1050" b="0">
+                        <a:defRPr sz="1000" b="0">
                           <a:solidFill>
                             <a:srgbClr val="11151A"/>
                           </a:solidFill>
@@ -11698,7 +11698,7 @@
                         <a:spcAft>
                           <a:spcPts val="100"/>
                         </a:spcAft>
-                        <a:defRPr sz="1050" b="1">
+                        <a:defRPr sz="1000" b="1">
                           <a:solidFill>
                             <a:srgbClr val="0A2373"/>
                           </a:solidFill>
@@ -11739,7 +11739,7 @@
                         <a:spcAft>
                           <a:spcPts val="100"/>
                         </a:spcAft>
-                        <a:defRPr sz="1050" b="0">
+                        <a:defRPr sz="1000" b="0">
                           <a:solidFill>
                             <a:srgbClr val="11151A"/>
                           </a:solidFill>
@@ -11780,7 +11780,7 @@
                         <a:spcAft>
                           <a:spcPts val="100"/>
                         </a:spcAft>
-                        <a:defRPr sz="1050" b="0">
+                        <a:defRPr sz="1000" b="0">
                           <a:solidFill>
                             <a:srgbClr val="11151A"/>
                           </a:solidFill>
@@ -11821,7 +11821,7 @@
                         <a:spcAft>
                           <a:spcPts val="100"/>
                         </a:spcAft>
-                        <a:defRPr sz="1050" b="0">
+                        <a:defRPr sz="1000" b="0">
                           <a:solidFill>
                             <a:srgbClr val="11151A"/>
                           </a:solidFill>

--- a/pptx/output/delivered/supporting/Vopak_Manish_Handback_2026_10_07.pptx
+++ b/pptx/output/delivered/supporting/Vopak_Manish_Handback_2026_10_07.pptx
@@ -10983,7 +10983,7 @@
           <a:lstStyle/>
           <a:p>
             <a:r>
-              <a:t>Diesel: rail diversion and the top of the freight range need lower values</a:t>
+              <a:t>Diesel: rail diversion is capped near 13% by rail-friendly freight; yields move up</a:t>
             </a:r>
           </a:p>
         </p:txBody>
@@ -11022,7 +11022,7 @@
               </a:defRPr>
             </a:pPr>
             <a:r>
-              <a:t>Diesel inputs | low / medium / high for 2030 and 2035 | 5 of 42 values have a proposed replacement</a:t>
+              <a:t>Diesel inputs | low / medium / high for 2030 and 2035 | 11 of 42 values have a proposed replacement</a:t>
             </a:r>
           </a:p>
         </p:txBody>
@@ -11632,7 +11632,7 @@
                         </a:defRPr>
                       </a:pPr>
                       <a:r>
-                        <a:t>Stats SA road tonnes grew 2.4% a year over 2014-2024; fastest eleven years 3.7%. 175 has no precedent.</a:t>
+                        <a:t>Stats SA tonnes: 2.4% a year over 2014-2024, at most 3.7% over eleven years. Only tonne-km figure found: 221 bn for 2013.</a:t>
                       </a:r>
                     </a:p>
                   </a:txBody>
@@ -11691,7 +11691,7 @@
                         </a:defRPr>
                       </a:pPr>
                       <a:r>
-                        <a:t>% of 2024 road tonnes</a:t>
+                        <a:t>% of road freight</a:t>
                       </a:r>
                     </a:p>
                   </a:txBody>
@@ -11846,7 +11846,7 @@
                         </a:defRPr>
                       </a:pPr>
                       <a:r>
-                        <a:t>0 / 7 / 15</a:t>
+                        <a:t>0 / 7 / 13</a:t>
                       </a:r>
                     </a:p>
                     <a:p>
@@ -11903,7 +11903,7 @@
                         </a:defRPr>
                       </a:pPr>
                       <a:r>
-                        <a:t>Stats SA: rail back to its 2017 peak is 7%; Transnet's 250 Mt target met in full is 9%. 15% is unsourced.</a:t>
+                        <a:t>Rail Master Plan (2026): 250 Mt target is 9%, 280 Mt market appetite 12%. Freight Roadmap (2023): rail-friendly general freight left on road is 13%.</a:t>
                       </a:r>
                     </a:p>
                   </a:txBody>
@@ -12620,7 +12620,7 @@
                         </a:defRPr>
                       </a:pPr>
                       <a:r>
-                        <a:t>Operators' reports: Secunda 53%, Natref 71%, Astron 84%. Registered Secunda nameplate (75) is half FIASA's.</a:t>
+                        <a:t>Operators' reports: Secunda 53%, Natref 71%, Astron 84%. Secunda capacity corrected to FIASA's 150; output unchanged.</a:t>
                       </a:r>
                     </a:p>
                   </a:txBody>
@@ -12679,7 +12679,7 @@
                         </a:defRPr>
                       </a:pPr>
                       <a:r>
-                        <a:t>% of throughput</a:t>
+                        <a:t>% of refinery output</a:t>
                       </a:r>
                     </a:p>
                   </a:txBody>
@@ -12720,7 +12720,7 @@
                         </a:defRPr>
                       </a:pPr>
                       <a:r>
-                        <a:t>25</a:t>
+                        <a:t>29</a:t>
                       </a:r>
                     </a:p>
                     <a:p>
@@ -12736,7 +12736,7 @@
                         </a:defRPr>
                       </a:pPr>
                       <a:r>
-                        <a:t>legacy, not observed</a:t>
+                        <a:t>JODI 2024, low reliability</a:t>
                       </a:r>
                     </a:p>
                   </a:txBody>
@@ -12777,34 +12777,9 @@
                         </a:defRPr>
                       </a:pPr>
                       <a:r>
-                        <a:t>20 / 25 / 30</a:t>
-                      </a:r>
-                    </a:p>
-                  </a:txBody>
-                  <a:tcPr marL="64008" marR="64008" marT="54864" marB="27432" anchor="t">
-                    <a:lnL w="0">
-                      <a:noFill/>
-                    </a:lnL>
-                    <a:lnR w="0">
-                      <a:noFill/>
-                    </a:lnR>
-                    <a:lnT w="0">
-                      <a:noFill/>
-                    </a:lnT>
-                    <a:lnB w="5080">
-                      <a:solidFill>
-                        <a:srgbClr val="B8B8B8"/>
-                      </a:solidFill>
-                    </a:lnB>
-                    <a:solidFill>
-                      <a:srgbClr val="FFFFFF"/>
-                    </a:solidFill>
-                  </a:tcPr>
-                </a:tc>
-                <a:tc>
-                  <a:txBody>
-                    <a:bodyPr/>
-                    <a:lstStyle/>
+                        <a:t>25 / 30 / 40</a:t>
+                      </a:r>
+                    </a:p>
                     <a:p>
                       <a:pPr>
                         <a:spcAft>
@@ -12818,7 +12793,7 @@
                         </a:defRPr>
                       </a:pPr>
                       <a:r>
-                        <a:t>20 / 25 / 30</a:t>
+                        <a:t>was 20 / 25 / 30</a:t>
                       </a:r>
                     </a:p>
                   </a:txBody>
@@ -12859,7 +12834,64 @@
                         </a:defRPr>
                       </a:pPr>
                       <a:r>
-                        <a:t>Energy balances give 0.84-0.87 litres of diesel per litre of petrol; legacy yields imply 0.56. Unsettled.</a:t>
+                        <a:t>25 / 30 / 40</a:t>
+                      </a:r>
+                    </a:p>
+                    <a:p>
+                      <a:pPr>
+                        <a:spcAft>
+                          <a:spcPts val="100"/>
+                        </a:spcAft>
+                        <a:defRPr sz="950" b="0">
+                          <a:solidFill>
+                            <a:srgbClr val="11151A"/>
+                          </a:solidFill>
+                          <a:latin typeface="Lato"/>
+                        </a:defRPr>
+                      </a:pPr>
+                      <a:r>
+                        <a:t>was 20 / 25 / 30</a:t>
+                      </a:r>
+                    </a:p>
+                  </a:txBody>
+                  <a:tcPr marL="64008" marR="64008" marT="54864" marB="27432" anchor="t">
+                    <a:lnL w="0">
+                      <a:noFill/>
+                    </a:lnL>
+                    <a:lnR w="0">
+                      <a:noFill/>
+                    </a:lnR>
+                    <a:lnT w="0">
+                      <a:noFill/>
+                    </a:lnT>
+                    <a:lnB w="5080">
+                      <a:solidFill>
+                        <a:srgbClr val="B8B8B8"/>
+                      </a:solidFill>
+                    </a:lnB>
+                    <a:solidFill>
+                      <a:srgbClr val="FFFFFF"/>
+                    </a:solidFill>
+                  </a:tcPr>
+                </a:tc>
+                <a:tc>
+                  <a:txBody>
+                    <a:bodyPr/>
+                    <a:lstStyle/>
+                    <a:p>
+                      <a:pPr>
+                        <a:spcAft>
+                          <a:spcPts val="100"/>
+                        </a:spcAft>
+                        <a:defRPr sz="950" b="0">
+                          <a:solidFill>
+                            <a:srgbClr val="11151A"/>
+                          </a:solidFill>
+                          <a:latin typeface="Lato"/>
+                        </a:defRPr>
+                      </a:pPr>
+                      <a:r>
+                        <a:t>JODI: 31% in 2023, 29% in 2024. Energy balances before the Durban closures: 40-42% of five fuels. Legacy 25%.</a:t>
                       </a:r>
                     </a:p>
                   </a:txBody>
@@ -15642,7 +15674,7 @@
           <a:lstStyle/>
           <a:p>
             <a:r>
-              <a:t>Petrol: mileage, growth and battery electric uptake all sit above the evidence</a:t>
+              <a:t>Petrol: mileage and growth sit above the evidence; electric cases now follow named markets</a:t>
             </a:r>
           </a:p>
         </p:txBody>
@@ -15681,7 +15713,7 @@
               </a:defRPr>
             </a:pPr>
             <a:r>
-              <a:t>Petrol inputs | low / medium / high for 2030 and 2035 | 18 of 42 values have a proposed replacement</a:t>
+              <a:t>Petrol inputs | low / medium / high for 2030 and 2035 | 22 of 42 values have a proposed replacement</a:t>
             </a:r>
           </a:p>
         </p:txBody>
@@ -16735,7 +16767,7 @@
                         </a:defRPr>
                       </a:pPr>
                       <a:r>
-                        <a:t>0.5 / 3 / 10</a:t>
+                        <a:t>0.5 / 4 / 20</a:t>
                       </a:r>
                     </a:p>
                     <a:p>
@@ -16792,7 +16824,7 @@
                         </a:defRPr>
                       </a:pPr>
                       <a:r>
-                        <a:t>2 / 10 / 30</a:t>
+                        <a:t>2 / 15 / 40</a:t>
                       </a:r>
                     </a:p>
                     <a:p>
@@ -16849,7 +16881,7 @@
                         </a:defRPr>
                       </a:pPr>
                       <a:r>
-                        <a:t>naamsa: sales fell in 2025. IEA: Brazil over 6%, Southeast Asia 9% in 2024. 5% by 2030 is a 27-fold rise.</a:t>
+                        <a:t>IEA Global EV Outlook 2026, 2025 shares: India nearly 4%, Indonesia 15%, Turkiye over 20% (from 1% in 2022), Vietnam nearly 40%.</a:t>
                       </a:r>
                     </a:p>
                   </a:txBody>
@@ -17386,7 +17418,7 @@
                         </a:defRPr>
                       </a:pPr>
                       <a:r>
-                        <a:t>% of throughput</a:t>
+                        <a:t>% of refinery output</a:t>
                       </a:r>
                     </a:p>
                   </a:txBody>
@@ -17427,7 +17459,7 @@
                         </a:defRPr>
                       </a:pPr>
                       <a:r>
-                        <a:t>45</a:t>
+                        <a:t>54</a:t>
                       </a:r>
                     </a:p>
                     <a:p>
@@ -17443,7 +17475,7 @@
                         </a:defRPr>
                       </a:pPr>
                       <a:r>
-                        <a:t>legacy, not observed</a:t>
+                        <a:t>JODI 2024, low reliability</a:t>
                       </a:r>
                     </a:p>
                   </a:txBody>
@@ -17484,34 +17516,9 @@
                         </a:defRPr>
                       </a:pPr>
                       <a:r>
-                        <a:t>35 / 45 / 55</a:t>
-                      </a:r>
-                    </a:p>
-                  </a:txBody>
-                  <a:tcPr marL="64008" marR="64008" marT="54864" marB="27432" anchor="t">
-                    <a:lnL w="0">
-                      <a:noFill/>
-                    </a:lnL>
-                    <a:lnR w="0">
-                      <a:noFill/>
-                    </a:lnR>
-                    <a:lnT w="0">
-                      <a:noFill/>
-                    </a:lnT>
-                    <a:lnB w="5080">
-                      <a:solidFill>
-                        <a:srgbClr val="B8B8B8"/>
-                      </a:solidFill>
-                    </a:lnB>
-                    <a:solidFill>
-                      <a:srgbClr val="FFFFFF"/>
-                    </a:solidFill>
-                  </a:tcPr>
-                </a:tc>
-                <a:tc>
-                  <a:txBody>
-                    <a:bodyPr/>
-                    <a:lstStyle/>
+                        <a:t>45 / 50 / 55</a:t>
+                      </a:r>
+                    </a:p>
                     <a:p>
                       <a:pPr>
                         <a:spcAft>
@@ -17525,7 +17532,7 @@
                         </a:defRPr>
                       </a:pPr>
                       <a:r>
-                        <a:t>35 / 45 / 55</a:t>
+                        <a:t>was 35 / 45 / 55</a:t>
                       </a:r>
                     </a:p>
                   </a:txBody>
@@ -17566,7 +17573,64 @@
                         </a:defRPr>
                       </a:pPr>
                       <a:r>
-                        <a:t>Petrol was 47-50% of the five fuels produced, 2017-2021; set together with diesel, by plant.</a:t>
+                        <a:t>45 / 50 / 55</a:t>
+                      </a:r>
+                    </a:p>
+                    <a:p>
+                      <a:pPr>
+                        <a:spcAft>
+                          <a:spcPts val="100"/>
+                        </a:spcAft>
+                        <a:defRPr sz="950" b="0">
+                          <a:solidFill>
+                            <a:srgbClr val="11151A"/>
+                          </a:solidFill>
+                          <a:latin typeface="Lato"/>
+                        </a:defRPr>
+                      </a:pPr>
+                      <a:r>
+                        <a:t>was 35 / 45 / 55</a:t>
+                      </a:r>
+                    </a:p>
+                  </a:txBody>
+                  <a:tcPr marL="64008" marR="64008" marT="54864" marB="27432" anchor="t">
+                    <a:lnL w="0">
+                      <a:noFill/>
+                    </a:lnL>
+                    <a:lnR w="0">
+                      <a:noFill/>
+                    </a:lnR>
+                    <a:lnT w="0">
+                      <a:noFill/>
+                    </a:lnT>
+                    <a:lnB w="5080">
+                      <a:solidFill>
+                        <a:srgbClr val="B8B8B8"/>
+                      </a:solidFill>
+                    </a:lnB>
+                    <a:solidFill>
+                      <a:srgbClr val="FFFFFF"/>
+                    </a:solidFill>
+                  </a:tcPr>
+                </a:tc>
+                <a:tc>
+                  <a:txBody>
+                    <a:bodyPr/>
+                    <a:lstStyle/>
+                    <a:p>
+                      <a:pPr>
+                        <a:spcAft>
+                          <a:spcPts val="100"/>
+                        </a:spcAft>
+                        <a:defRPr sz="950" b="0">
+                          <a:solidFill>
+                            <a:srgbClr val="11151A"/>
+                          </a:solidFill>
+                          <a:latin typeface="Lato"/>
+                        </a:defRPr>
+                      </a:pPr>
+                      <a:r>
+                        <a:t>JODI: 51% in 2023, 54% in 2024. Energy balances 2017-2021: 47-50% of five fuels. Legacy 45%. Set with diesel.</a:t>
                       </a:r>
                     </a:p>
                   </a:txBody>

--- a/pptx/output/delivered/supporting/Vopak_Manish_Handback_2026_10_07.pptx
+++ b/pptx/output/delivered/supporting/Vopak_Manish_Handback_2026_10_07.pptx
@@ -15,6 +15,8 @@
     <p:sldId id="265" r:id="rId5"/>
     <p:sldId id="266" r:id="rId19"/>
     <p:sldId id="267" r:id="rId20"/>
+    <p:sldId id="268" r:id="rId21"/>
+    <p:sldId id="269" r:id="rId22"/>
     <p:sldId id="261" r:id="rId18"/>
   </p:sldIdLst>
   <p:sldSz cx="11588750" cy="6858000"/>
@@ -4321,6 +4323,1721 @@
 </p:sld>
 </file>
 
+<file path=ppt/slides/slide10.xml><?xml version="1.0" encoding="utf-8"?>
+<p:sld xmlns:a="http://schemas.openxmlformats.org/drawingml/2006/main" xmlns:p="http://schemas.openxmlformats.org/presentationml/2006/main" xmlns:r="http://schemas.openxmlformats.org/officeDocument/2006/relationships">
+  <p:cSld>
+    <p:spTree>
+      <p:nvGrpSpPr>
+        <p:cNvPr id="1" name=""/>
+        <p:cNvGrpSpPr/>
+        <p:nvPr/>
+      </p:nvGrpSpPr>
+      <p:grpSpPr/>
+      <p:sp>
+        <p:nvSpPr>
+          <p:cNvPr id="2" name="Title 1"/>
+          <p:cNvSpPr>
+            <a:spLocks noGrp="1"/>
+          </p:cNvSpPr>
+          <p:nvPr>
+            <p:ph type="title"/>
+          </p:nvPr>
+        </p:nvSpPr>
+        <p:spPr/>
+        <p:txBody>
+          <a:bodyPr/>
+          <a:lstStyle/>
+          <a:p>
+            <a:r>
+              <a:t>The totals show no double counting from the two sectors; the excess is in power generation</a:t>
+            </a:r>
+          </a:p>
+        </p:txBody>
+      </p:sp>
+      <p:sp>
+        <p:nvSpPr>
+          <p:cNvPr id="3" name="TextBox 2"/>
+          <p:cNvSpPr txBox="1"/>
+          <p:nvPr/>
+        </p:nvSpPr>
+        <p:spPr>
+          <a:xfrm>
+            <a:off x="457200" y="1627632"/>
+            <a:ext cx="10652760" cy="274320"/>
+          </a:xfrm>
+          <a:prstGeom prst="rect">
+            <a:avLst/>
+          </a:prstGeom>
+          <a:noFill/>
+        </p:spPr>
+        <p:txBody>
+          <a:bodyPr wrap="square" lIns="22860" rIns="22860" tIns="0" bIns="0">
+            <a:spAutoFit/>
+          </a:bodyPr>
+          <a:lstStyle/>
+          <a:p>
+            <a:pPr>
+              <a:spcAft>
+                <a:spcPts val="300"/>
+              </a:spcAft>
+              <a:defRPr sz="1300" b="1">
+                <a:solidFill>
+                  <a:srgbClr val="11151A"/>
+                </a:solidFill>
+                <a:latin typeface="Lato"/>
+              </a:defRPr>
+            </a:pPr>
+            <a:r>
+              <a:t>Overlaps and double counting | model diesel for 2024 by segment against the evidence, billion litres</a:t>
+            </a:r>
+          </a:p>
+        </p:txBody>
+      </p:sp>
+      <p:cxnSp>
+        <p:nvCxnSpPr>
+          <p:cNvPr id="4" name="Connector 3"/>
+          <p:cNvCxnSpPr/>
+          <p:nvPr/>
+        </p:nvCxnSpPr>
+        <p:spPr>
+          <a:xfrm>
+            <a:off x="457200" y="1920240"/>
+            <a:ext cx="10652760" cy="0"/>
+          </a:xfrm>
+          <a:prstGeom prst="line">
+            <a:avLst/>
+          </a:prstGeom>
+          <a:ln w="7620">
+            <a:solidFill>
+              <a:srgbClr val="A0A0A0"/>
+            </a:solidFill>
+          </a:ln>
+        </p:spPr>
+        <p:style>
+          <a:lnRef idx="2">
+            <a:schemeClr val="accent1"/>
+          </a:lnRef>
+          <a:fillRef idx="0">
+            <a:schemeClr val="accent1"/>
+          </a:fillRef>
+          <a:effectRef idx="1">
+            <a:schemeClr val="accent1"/>
+          </a:effectRef>
+          <a:fontRef idx="minor">
+            <a:schemeClr val="tx1"/>
+          </a:fontRef>
+        </p:style>
+      </p:cxnSp>
+      <p:sp>
+        <p:nvSpPr>
+          <p:cNvPr id="5" name="TextBox 4"/>
+          <p:cNvSpPr txBox="1"/>
+          <p:nvPr/>
+        </p:nvSpPr>
+        <p:spPr>
+          <a:xfrm>
+            <a:off x="457200" y="6547104"/>
+            <a:ext cx="9692640" cy="182880"/>
+          </a:xfrm>
+          <a:prstGeom prst="rect">
+            <a:avLst/>
+          </a:prstGeom>
+          <a:noFill/>
+        </p:spPr>
+        <p:txBody>
+          <a:bodyPr wrap="square" lIns="22860" rIns="22860" tIns="0" bIns="0">
+            <a:spAutoFit/>
+          </a:bodyPr>
+          <a:lstStyle/>
+          <a:p>
+            <a:pPr>
+              <a:spcAft>
+                <a:spcPts val="300"/>
+              </a:spcAft>
+              <a:defRPr sz="800" b="0">
+                <a:solidFill>
+                  <a:srgbClr val="11151A"/>
+                </a:solidFill>
+                <a:latin typeface="Lato"/>
+              </a:defRPr>
+            </a:pPr>
+            <a:r>
+              <a:t>Source: sector_baselines_2026-10-07.md and .csv on manish-branch; department energy balances 2012-2021. A proposal for Nigel's decision; nothing is accepted.</a:t>
+            </a:r>
+          </a:p>
+        </p:txBody>
+      </p:sp>
+      <p:sp>
+        <p:nvSpPr>
+          <p:cNvPr id="6" name="TextBox 5"/>
+          <p:cNvSpPr txBox="1"/>
+          <p:nvPr/>
+        </p:nvSpPr>
+        <p:spPr>
+          <a:xfrm>
+            <a:off x="457200" y="6711696"/>
+            <a:ext cx="2011680" cy="128016"/>
+          </a:xfrm>
+          <a:prstGeom prst="rect">
+            <a:avLst/>
+          </a:prstGeom>
+          <a:noFill/>
+        </p:spPr>
+        <p:txBody>
+          <a:bodyPr wrap="square" lIns="22860" rIns="22860" tIns="0" bIns="0">
+            <a:spAutoFit/>
+          </a:bodyPr>
+          <a:lstStyle/>
+          <a:p>
+            <a:pPr>
+              <a:spcAft>
+                <a:spcPts val="300"/>
+              </a:spcAft>
+              <a:defRPr sz="700" b="0">
+                <a:solidFill>
+                  <a:srgbClr val="11151A"/>
+                </a:solidFill>
+                <a:latin typeface="Lato"/>
+              </a:defRPr>
+            </a:pPr>
+            <a:r>
+              <a:t>Strictly Confidential</a:t>
+            </a:r>
+          </a:p>
+        </p:txBody>
+      </p:sp>
+      <p:graphicFrame>
+        <p:nvGraphicFramePr>
+          <p:cNvPr id="7" name="Table 6"/>
+          <p:cNvGraphicFramePr>
+            <a:graphicFrameLocks noGrp="1"/>
+          </p:cNvGraphicFramePr>
+          <p:nvPr/>
+        </p:nvGraphicFramePr>
+        <p:xfrm>
+          <a:off x="457200" y="2029968"/>
+          <a:ext cx="10652760" cy="3657600"/>
+        </p:xfrm>
+        <a:graphic>
+          <a:graphicData uri="http://schemas.openxmlformats.org/drawingml/2006/table">
+            <a:tbl>
+              <a:tblPr firstRow="0" bandRow="0"/>
+              <a:tblGrid>
+                <a:gridCol w="1600200"/>
+                <a:gridCol w="822960"/>
+                <a:gridCol w="3657600"/>
+                <a:gridCol w="4572000"/>
+              </a:tblGrid>
+              <a:tr h="522514">
+                <a:tc>
+                  <a:txBody>
+                    <a:bodyPr/>
+                    <a:lstStyle/>
+                    <a:p>
+                      <a:pPr>
+                        <a:spcAft>
+                          <a:spcPts val="100"/>
+                        </a:spcAft>
+                        <a:defRPr sz="1000" b="1">
+                          <a:solidFill>
+                            <a:srgbClr val="0A2373"/>
+                          </a:solidFill>
+                          <a:latin typeface="Lato"/>
+                        </a:defRPr>
+                      </a:pPr>
+                      <a:r>
+                        <a:t>Model segment</a:t>
+                      </a:r>
+                    </a:p>
+                  </a:txBody>
+                  <a:tcPr marL="64008" marR="64008" marT="54864" marB="27432" anchor="t">
+                    <a:lnL w="0">
+                      <a:noFill/>
+                    </a:lnL>
+                    <a:lnR w="0">
+                      <a:noFill/>
+                    </a:lnR>
+                    <a:lnT w="0">
+                      <a:noFill/>
+                    </a:lnT>
+                    <a:lnB w="5080">
+                      <a:solidFill>
+                        <a:srgbClr val="B8B8B8"/>
+                      </a:solidFill>
+                    </a:lnB>
+                    <a:solidFill>
+                      <a:srgbClr val="FFFFFF"/>
+                    </a:solidFill>
+                  </a:tcPr>
+                </a:tc>
+                <a:tc>
+                  <a:txBody>
+                    <a:bodyPr/>
+                    <a:lstStyle/>
+                    <a:p>
+                      <a:pPr>
+                        <a:spcAft>
+                          <a:spcPts val="100"/>
+                        </a:spcAft>
+                        <a:defRPr sz="1000" b="1">
+                          <a:solidFill>
+                            <a:srgbClr val="11151A"/>
+                          </a:solidFill>
+                          <a:latin typeface="Lato"/>
+                        </a:defRPr>
+                      </a:pPr>
+                      <a:r>
+                        <a:t>Model</a:t>
+                      </a:r>
+                    </a:p>
+                    <a:p>
+                      <a:pPr>
+                        <a:spcAft>
+                          <a:spcPts val="100"/>
+                        </a:spcAft>
+                        <a:defRPr sz="1000" b="1">
+                          <a:solidFill>
+                            <a:srgbClr val="11151A"/>
+                          </a:solidFill>
+                          <a:latin typeface="Lato"/>
+                        </a:defRPr>
+                      </a:pPr>
+                      <a:r>
+                        <a:t>2024</a:t>
+                      </a:r>
+                    </a:p>
+                  </a:txBody>
+                  <a:tcPr marL="64008" marR="64008" marT="54864" marB="27432" anchor="t">
+                    <a:lnL w="0">
+                      <a:noFill/>
+                    </a:lnL>
+                    <a:lnR w="0">
+                      <a:noFill/>
+                    </a:lnR>
+                    <a:lnT w="0">
+                      <a:noFill/>
+                    </a:lnT>
+                    <a:lnB w="5080">
+                      <a:solidFill>
+                        <a:srgbClr val="B8B8B8"/>
+                      </a:solidFill>
+                    </a:lnB>
+                    <a:solidFill>
+                      <a:srgbClr val="FFFFFF"/>
+                    </a:solidFill>
+                  </a:tcPr>
+                </a:tc>
+                <a:tc>
+                  <a:txBody>
+                    <a:bodyPr/>
+                    <a:lstStyle/>
+                    <a:p>
+                      <a:pPr>
+                        <a:spcAft>
+                          <a:spcPts val="100"/>
+                        </a:spcAft>
+                        <a:defRPr sz="1000" b="1">
+                          <a:solidFill>
+                            <a:srgbClr val="11151A"/>
+                          </a:solidFill>
+                          <a:latin typeface="Lato"/>
+                        </a:defRPr>
+                      </a:pPr>
+                      <a:r>
+                        <a:t>Evidence</a:t>
+                      </a:r>
+                    </a:p>
+                  </a:txBody>
+                  <a:tcPr marL="64008" marR="64008" marT="54864" marB="27432" anchor="t">
+                    <a:lnL w="0">
+                      <a:noFill/>
+                    </a:lnL>
+                    <a:lnR w="0">
+                      <a:noFill/>
+                    </a:lnR>
+                    <a:lnT w="0">
+                      <a:noFill/>
+                    </a:lnT>
+                    <a:lnB w="5080">
+                      <a:solidFill>
+                        <a:srgbClr val="B8B8B8"/>
+                      </a:solidFill>
+                    </a:lnB>
+                    <a:solidFill>
+                      <a:srgbClr val="FFFFFF"/>
+                    </a:solidFill>
+                  </a:tcPr>
+                </a:tc>
+                <a:tc>
+                  <a:txBody>
+                    <a:bodyPr/>
+                    <a:lstStyle/>
+                    <a:p>
+                      <a:pPr>
+                        <a:spcAft>
+                          <a:spcPts val="100"/>
+                        </a:spcAft>
+                        <a:defRPr sz="1000" b="1">
+                          <a:solidFill>
+                            <a:srgbClr val="11151A"/>
+                          </a:solidFill>
+                          <a:latin typeface="Lato"/>
+                        </a:defRPr>
+                      </a:pPr>
+                      <a:r>
+                        <a:t>Overlap or gap</a:t>
+                      </a:r>
+                    </a:p>
+                  </a:txBody>
+                  <a:tcPr marL="64008" marR="64008" marT="54864" marB="27432" anchor="t">
+                    <a:lnL w="0">
+                      <a:noFill/>
+                    </a:lnL>
+                    <a:lnR w="0">
+                      <a:noFill/>
+                    </a:lnR>
+                    <a:lnT w="0">
+                      <a:noFill/>
+                    </a:lnT>
+                    <a:lnB w="5080">
+                      <a:solidFill>
+                        <a:srgbClr val="B8B8B8"/>
+                      </a:solidFill>
+                    </a:lnB>
+                    <a:solidFill>
+                      <a:srgbClr val="FFFFFF"/>
+                    </a:solidFill>
+                  </a:tcPr>
+                </a:tc>
+              </a:tr>
+              <a:tr h="522514">
+                <a:tc>
+                  <a:txBody>
+                    <a:bodyPr/>
+                    <a:lstStyle/>
+                    <a:p>
+                      <a:pPr>
+                        <a:spcAft>
+                          <a:spcPts val="100"/>
+                        </a:spcAft>
+                        <a:defRPr sz="1000" b="1">
+                          <a:solidFill>
+                            <a:srgbClr val="0A2373"/>
+                          </a:solidFill>
+                          <a:latin typeface="Lato"/>
+                        </a:defRPr>
+                      </a:pPr>
+                      <a:r>
+                        <a:t>Road vehicles</a:t>
+                      </a:r>
+                    </a:p>
+                  </a:txBody>
+                  <a:tcPr marL="64008" marR="64008" marT="54864" marB="27432" anchor="t">
+                    <a:lnL w="0">
+                      <a:noFill/>
+                    </a:lnL>
+                    <a:lnR w="0">
+                      <a:noFill/>
+                    </a:lnR>
+                    <a:lnT w="0">
+                      <a:noFill/>
+                    </a:lnT>
+                    <a:lnB w="5080">
+                      <a:solidFill>
+                        <a:srgbClr val="B8B8B8"/>
+                      </a:solidFill>
+                    </a:lnB>
+                    <a:solidFill>
+                      <a:srgbClr val="FFFFFF"/>
+                    </a:solidFill>
+                  </a:tcPr>
+                </a:tc>
+                <a:tc>
+                  <a:txBody>
+                    <a:bodyPr/>
+                    <a:lstStyle/>
+                    <a:p>
+                      <a:pPr>
+                        <a:spcAft>
+                          <a:spcPts val="100"/>
+                        </a:spcAft>
+                        <a:defRPr sz="1000" b="0">
+                          <a:solidFill>
+                            <a:srgbClr val="11151A"/>
+                          </a:solidFill>
+                          <a:latin typeface="Lato"/>
+                        </a:defRPr>
+                      </a:pPr>
+                      <a:r>
+                        <a:t>8.50</a:t>
+                      </a:r>
+                    </a:p>
+                  </a:txBody>
+                  <a:tcPr marL="64008" marR="64008" marT="54864" marB="27432" anchor="t">
+                    <a:lnL w="0">
+                      <a:noFill/>
+                    </a:lnL>
+                    <a:lnR w="0">
+                      <a:noFill/>
+                    </a:lnR>
+                    <a:lnT w="0">
+                      <a:noFill/>
+                    </a:lnT>
+                    <a:lnB w="5080">
+                      <a:solidFill>
+                        <a:srgbClr val="B8B8B8"/>
+                      </a:solidFill>
+                    </a:lnB>
+                    <a:solidFill>
+                      <a:srgbClr val="FFFFFF"/>
+                    </a:solidFill>
+                  </a:tcPr>
+                </a:tc>
+                <a:tc>
+                  <a:txBody>
+                    <a:bodyPr/>
+                    <a:lstStyle/>
+                    <a:p>
+                      <a:pPr>
+                        <a:spcAft>
+                          <a:spcPts val="100"/>
+                        </a:spcAft>
+                        <a:defRPr sz="1000" b="0">
+                          <a:solidFill>
+                            <a:srgbClr val="11151A"/>
+                          </a:solidFill>
+                          <a:latin typeface="Lato"/>
+                        </a:defRPr>
+                      </a:pPr>
+                      <a:r>
+                        <a:t>Balance 2021: road 6.33; commercial and public services 4.30; together 10.63</a:t>
+                      </a:r>
+                    </a:p>
+                  </a:txBody>
+                  <a:tcPr marL="64008" marR="64008" marT="54864" marB="27432" anchor="t">
+                    <a:lnL w="0">
+                      <a:noFill/>
+                    </a:lnL>
+                    <a:lnR w="0">
+                      <a:noFill/>
+                    </a:lnR>
+                    <a:lnT w="0">
+                      <a:noFill/>
+                    </a:lnT>
+                    <a:lnB w="5080">
+                      <a:solidFill>
+                        <a:srgbClr val="B8B8B8"/>
+                      </a:solidFill>
+                    </a:lnB>
+                    <a:solidFill>
+                      <a:srgbClr val="FFFFFF"/>
+                    </a:solidFill>
+                  </a:tcPr>
+                </a:tc>
+                <a:tc>
+                  <a:txBody>
+                    <a:bodyPr/>
+                    <a:lstStyle/>
+                    <a:p>
+                      <a:pPr>
+                        <a:spcAft>
+                          <a:spcPts val="100"/>
+                        </a:spcAft>
+                        <a:defRPr sz="1000" b="0">
+                          <a:solidFill>
+                            <a:srgbClr val="11151A"/>
+                          </a:solidFill>
+                          <a:latin typeface="Lato"/>
+                        </a:defRPr>
+                      </a:pPr>
+                      <a:r>
+                        <a:t>The two balance lines swap volume between years while their sum holds, so the split shows who bought the fuel, not where it was burned</a:t>
+                      </a:r>
+                    </a:p>
+                  </a:txBody>
+                  <a:tcPr marL="64008" marR="64008" marT="54864" marB="27432" anchor="t">
+                    <a:lnL w="0">
+                      <a:noFill/>
+                    </a:lnL>
+                    <a:lnR w="0">
+                      <a:noFill/>
+                    </a:lnR>
+                    <a:lnT w="0">
+                      <a:noFill/>
+                    </a:lnT>
+                    <a:lnB w="5080">
+                      <a:solidFill>
+                        <a:srgbClr val="B8B8B8"/>
+                      </a:solidFill>
+                    </a:lnB>
+                    <a:solidFill>
+                      <a:srgbClr val="FFFFFF"/>
+                    </a:solidFill>
+                  </a:tcPr>
+                </a:tc>
+              </a:tr>
+              <a:tr h="522514">
+                <a:tc>
+                  <a:txBody>
+                    <a:bodyPr/>
+                    <a:lstStyle/>
+                    <a:p>
+                      <a:pPr>
+                        <a:spcAft>
+                          <a:spcPts val="100"/>
+                        </a:spcAft>
+                        <a:defRPr sz="1000" b="1">
+                          <a:solidFill>
+                            <a:srgbClr val="0A2373"/>
+                          </a:solidFill>
+                          <a:latin typeface="Lato"/>
+                        </a:defRPr>
+                      </a:pPr>
+                      <a:r>
+                        <a:t>Agriculture</a:t>
+                      </a:r>
+                    </a:p>
+                  </a:txBody>
+                  <a:tcPr marL="64008" marR="64008" marT="54864" marB="27432" anchor="t">
+                    <a:lnL w="0">
+                      <a:noFill/>
+                    </a:lnL>
+                    <a:lnR w="0">
+                      <a:noFill/>
+                    </a:lnR>
+                    <a:lnT w="0">
+                      <a:noFill/>
+                    </a:lnT>
+                    <a:lnB w="5080">
+                      <a:solidFill>
+                        <a:srgbClr val="B8B8B8"/>
+                      </a:solidFill>
+                    </a:lnB>
+                    <a:solidFill>
+                      <a:srgbClr val="FFFFFF"/>
+                    </a:solidFill>
+                  </a:tcPr>
+                </a:tc>
+                <a:tc>
+                  <a:txBody>
+                    <a:bodyPr/>
+                    <a:lstStyle/>
+                    <a:p>
+                      <a:pPr>
+                        <a:spcAft>
+                          <a:spcPts val="100"/>
+                        </a:spcAft>
+                        <a:defRPr sz="1000" b="0">
+                          <a:solidFill>
+                            <a:srgbClr val="11151A"/>
+                          </a:solidFill>
+                          <a:latin typeface="Lato"/>
+                        </a:defRPr>
+                      </a:pPr>
+                      <a:r>
+                        <a:t>1.06</a:t>
+                      </a:r>
+                    </a:p>
+                  </a:txBody>
+                  <a:tcPr marL="64008" marR="64008" marT="54864" marB="27432" anchor="t">
+                    <a:lnL w="0">
+                      <a:noFill/>
+                    </a:lnL>
+                    <a:lnR w="0">
+                      <a:noFill/>
+                    </a:lnR>
+                    <a:lnT w="0">
+                      <a:noFill/>
+                    </a:lnT>
+                    <a:lnB w="5080">
+                      <a:solidFill>
+                        <a:srgbClr val="B8B8B8"/>
+                      </a:solidFill>
+                    </a:lnB>
+                    <a:solidFill>
+                      <a:srgbClr val="FFFFFF"/>
+                    </a:solidFill>
+                  </a:tcPr>
+                </a:tc>
+                <a:tc>
+                  <a:txBody>
+                    <a:bodyPr/>
+                    <a:lstStyle/>
+                    <a:p>
+                      <a:pPr>
+                        <a:spcAft>
+                          <a:spcPts val="100"/>
+                        </a:spcAft>
+                        <a:defRPr sz="1000" b="0">
+                          <a:solidFill>
+                            <a:srgbClr val="11151A"/>
+                          </a:solidFill>
+                          <a:latin typeface="Lato"/>
+                        </a:defRPr>
+                      </a:pPr>
+                      <a:r>
+                        <a:t>Balance 2021: 1.06</a:t>
+                      </a:r>
+                    </a:p>
+                  </a:txBody>
+                  <a:tcPr marL="64008" marR="64008" marT="54864" marB="27432" anchor="t">
+                    <a:lnL w="0">
+                      <a:noFill/>
+                    </a:lnL>
+                    <a:lnR w="0">
+                      <a:noFill/>
+                    </a:lnR>
+                    <a:lnT w="0">
+                      <a:noFill/>
+                    </a:lnT>
+                    <a:lnB w="5080">
+                      <a:solidFill>
+                        <a:srgbClr val="B8B8B8"/>
+                      </a:solidFill>
+                    </a:lnB>
+                    <a:solidFill>
+                      <a:srgbClr val="FFFFFF"/>
+                    </a:solidFill>
+                  </a:tcPr>
+                </a:tc>
+                <a:tc>
+                  <a:txBody>
+                    <a:bodyPr/>
+                    <a:lstStyle/>
+                    <a:p>
+                      <a:pPr>
+                        <a:spcAft>
+                          <a:spcPts val="100"/>
+                        </a:spcAft>
+                        <a:defRPr sz="1000" b="0">
+                          <a:solidFill>
+                            <a:srgbClr val="11151A"/>
+                          </a:solidFill>
+                          <a:latin typeface="Lato"/>
+                        </a:defRPr>
+                      </a:pPr>
+                      <a:r>
+                        <a:t>Includes farm vehicles on public roads, which are also in the registered fleet. Size unknown</a:t>
+                      </a:r>
+                    </a:p>
+                  </a:txBody>
+                  <a:tcPr marL="64008" marR="64008" marT="54864" marB="27432" anchor="t">
+                    <a:lnL w="0">
+                      <a:noFill/>
+                    </a:lnL>
+                    <a:lnR w="0">
+                      <a:noFill/>
+                    </a:lnR>
+                    <a:lnT w="0">
+                      <a:noFill/>
+                    </a:lnT>
+                    <a:lnB w="5080">
+                      <a:solidFill>
+                        <a:srgbClr val="B8B8B8"/>
+                      </a:solidFill>
+                    </a:lnB>
+                    <a:solidFill>
+                      <a:srgbClr val="FFFFFF"/>
+                    </a:solidFill>
+                  </a:tcPr>
+                </a:tc>
+              </a:tr>
+              <a:tr h="522514">
+                <a:tc>
+                  <a:txBody>
+                    <a:bodyPr/>
+                    <a:lstStyle/>
+                    <a:p>
+                      <a:pPr>
+                        <a:spcAft>
+                          <a:spcPts val="100"/>
+                        </a:spcAft>
+                        <a:defRPr sz="1000" b="1">
+                          <a:solidFill>
+                            <a:srgbClr val="0A2373"/>
+                          </a:solidFill>
+                          <a:latin typeface="Lato"/>
+                        </a:defRPr>
+                      </a:pPr>
+                      <a:r>
+                        <a:t>Industry</a:t>
+                      </a:r>
+                    </a:p>
+                  </a:txBody>
+                  <a:tcPr marL="64008" marR="64008" marT="54864" marB="27432" anchor="t">
+                    <a:lnL w="0">
+                      <a:noFill/>
+                    </a:lnL>
+                    <a:lnR w="0">
+                      <a:noFill/>
+                    </a:lnR>
+                    <a:lnT w="0">
+                      <a:noFill/>
+                    </a:lnT>
+                    <a:lnB w="5080">
+                      <a:solidFill>
+                        <a:srgbClr val="B8B8B8"/>
+                      </a:solidFill>
+                    </a:lnB>
+                    <a:solidFill>
+                      <a:srgbClr val="FFFFFF"/>
+                    </a:solidFill>
+                  </a:tcPr>
+                </a:tc>
+                <a:tc>
+                  <a:txBody>
+                    <a:bodyPr/>
+                    <a:lstStyle/>
+                    <a:p>
+                      <a:pPr>
+                        <a:spcAft>
+                          <a:spcPts val="100"/>
+                        </a:spcAft>
+                        <a:defRPr sz="1000" b="0">
+                          <a:solidFill>
+                            <a:srgbClr val="11151A"/>
+                          </a:solidFill>
+                          <a:latin typeface="Lato"/>
+                        </a:defRPr>
+                      </a:pPr>
+                      <a:r>
+                        <a:t>1.51</a:t>
+                      </a:r>
+                    </a:p>
+                  </a:txBody>
+                  <a:tcPr marL="64008" marR="64008" marT="54864" marB="27432" anchor="t">
+                    <a:lnL w="0">
+                      <a:noFill/>
+                    </a:lnL>
+                    <a:lnR w="0">
+                      <a:noFill/>
+                    </a:lnR>
+                    <a:lnT w="0">
+                      <a:noFill/>
+                    </a:lnT>
+                    <a:lnB w="5080">
+                      <a:solidFill>
+                        <a:srgbClr val="B8B8B8"/>
+                      </a:solidFill>
+                    </a:lnB>
+                    <a:solidFill>
+                      <a:srgbClr val="FFFFFF"/>
+                    </a:solidFill>
+                  </a:tcPr>
+                </a:tc>
+                <a:tc>
+                  <a:txBody>
+                    <a:bodyPr/>
+                    <a:lstStyle/>
+                    <a:p>
+                      <a:pPr>
+                        <a:spcAft>
+                          <a:spcPts val="100"/>
+                        </a:spcAft>
+                        <a:defRPr sz="1000" b="0">
+                          <a:solidFill>
+                            <a:srgbClr val="11151A"/>
+                          </a:solidFill>
+                          <a:latin typeface="Lato"/>
+                        </a:defRPr>
+                      </a:pPr>
+                      <a:r>
+                        <a:t>Balance 2021: 1.50; mining 1.29, construction 0.05</a:t>
+                      </a:r>
+                    </a:p>
+                  </a:txBody>
+                  <a:tcPr marL="64008" marR="64008" marT="54864" marB="27432" anchor="t">
+                    <a:lnL w="0">
+                      <a:noFill/>
+                    </a:lnL>
+                    <a:lnR w="0">
+                      <a:noFill/>
+                    </a:lnR>
+                    <a:lnT w="0">
+                      <a:noFill/>
+                    </a:lnT>
+                    <a:lnB w="5080">
+                      <a:solidFill>
+                        <a:srgbClr val="B8B8B8"/>
+                      </a:solidFill>
+                    </a:lnB>
+                    <a:solidFill>
+                      <a:srgbClr val="FFFFFF"/>
+                    </a:solidFill>
+                  </a:tcPr>
+                </a:tc>
+                <a:tc>
+                  <a:txBody>
+                    <a:bodyPr/>
+                    <a:lstStyle/>
+                    <a:p>
+                      <a:pPr>
+                        <a:spcAft>
+                          <a:spcPts val="100"/>
+                        </a:spcAft>
+                        <a:defRPr sz="1000" b="0">
+                          <a:solidFill>
+                            <a:srgbClr val="11151A"/>
+                          </a:solidFill>
+                          <a:latin typeface="Lato"/>
+                        </a:defRPr>
+                      </a:pPr>
+                      <a:r>
+                        <a:t>Mine haul trucks are unregistered, so no overlap; mines' road vehicles do overlap</a:t>
+                      </a:r>
+                    </a:p>
+                  </a:txBody>
+                  <a:tcPr marL="64008" marR="64008" marT="54864" marB="27432" anchor="t">
+                    <a:lnL w="0">
+                      <a:noFill/>
+                    </a:lnL>
+                    <a:lnR w="0">
+                      <a:noFill/>
+                    </a:lnR>
+                    <a:lnT w="0">
+                      <a:noFill/>
+                    </a:lnT>
+                    <a:lnB w="5080">
+                      <a:solidFill>
+                        <a:srgbClr val="B8B8B8"/>
+                      </a:solidFill>
+                    </a:lnB>
+                    <a:solidFill>
+                      <a:srgbClr val="FFFFFF"/>
+                    </a:solidFill>
+                  </a:tcPr>
+                </a:tc>
+              </a:tr>
+              <a:tr h="522514">
+                <a:tc>
+                  <a:txBody>
+                    <a:bodyPr/>
+                    <a:lstStyle/>
+                    <a:p>
+                      <a:pPr>
+                        <a:spcAft>
+                          <a:spcPts val="100"/>
+                        </a:spcAft>
+                        <a:defRPr sz="1000" b="1">
+                          <a:solidFill>
+                            <a:srgbClr val="0A2373"/>
+                          </a:solidFill>
+                          <a:latin typeface="Lato"/>
+                        </a:defRPr>
+                      </a:pPr>
+                      <a:r>
+                        <a:t>Power generation</a:t>
+                      </a:r>
+                    </a:p>
+                  </a:txBody>
+                  <a:tcPr marL="64008" marR="64008" marT="54864" marB="27432" anchor="t">
+                    <a:lnL w="0">
+                      <a:noFill/>
+                    </a:lnL>
+                    <a:lnR w="0">
+                      <a:noFill/>
+                    </a:lnR>
+                    <a:lnT w="0">
+                      <a:noFill/>
+                    </a:lnT>
+                    <a:lnB w="5080">
+                      <a:solidFill>
+                        <a:srgbClr val="B8B8B8"/>
+                      </a:solidFill>
+                    </a:lnB>
+                    <a:solidFill>
+                      <a:srgbClr val="FFFFFF"/>
+                    </a:solidFill>
+                  </a:tcPr>
+                </a:tc>
+                <a:tc>
+                  <a:txBody>
+                    <a:bodyPr/>
+                    <a:lstStyle/>
+                    <a:p>
+                      <a:pPr>
+                        <a:spcAft>
+                          <a:spcPts val="100"/>
+                        </a:spcAft>
+                        <a:defRPr sz="1000" b="0">
+                          <a:solidFill>
+                            <a:srgbClr val="11151A"/>
+                          </a:solidFill>
+                          <a:latin typeface="Lato"/>
+                        </a:defRPr>
+                      </a:pPr>
+                      <a:r>
+                        <a:t>3.58</a:t>
+                      </a:r>
+                    </a:p>
+                  </a:txBody>
+                  <a:tcPr marL="64008" marR="64008" marT="54864" marB="27432" anchor="t">
+                    <a:lnL w="0">
+                      <a:noFill/>
+                    </a:lnL>
+                    <a:lnR w="0">
+                      <a:noFill/>
+                    </a:lnR>
+                    <a:lnT w="0">
+                      <a:noFill/>
+                    </a:lnT>
+                    <a:lnB w="5080">
+                      <a:solidFill>
+                        <a:srgbClr val="B8B8B8"/>
+                      </a:solidFill>
+                    </a:lnB>
+                    <a:solidFill>
+                      <a:srgbClr val="FFFFFF"/>
+                    </a:solidFill>
+                  </a:tcPr>
+                </a:tc>
+                <a:tc>
+                  <a:txBody>
+                    <a:bodyPr/>
+                    <a:lstStyle/>
+                    <a:p>
+                      <a:pPr>
+                        <a:spcAft>
+                          <a:spcPts val="100"/>
+                        </a:spcAft>
+                        <a:defRPr sz="1000" b="0">
+                          <a:solidFill>
+                            <a:srgbClr val="11151A"/>
+                          </a:solidFill>
+                          <a:latin typeface="Lato"/>
+                        </a:defRPr>
+                      </a:pPr>
+                      <a:r>
+                        <a:t>Eskom: 0.94 (year to March 2023), 0.68 (to March 2025); about 1.6 for all plants in the peak year</a:t>
+                      </a:r>
+                    </a:p>
+                  </a:txBody>
+                  <a:tcPr marL="64008" marR="64008" marT="54864" marB="27432" anchor="t">
+                    <a:lnL w="0">
+                      <a:noFill/>
+                    </a:lnL>
+                    <a:lnR w="0">
+                      <a:noFill/>
+                    </a:lnR>
+                    <a:lnT w="0">
+                      <a:noFill/>
+                    </a:lnT>
+                    <a:lnB w="5080">
+                      <a:solidFill>
+                        <a:srgbClr val="B8B8B8"/>
+                      </a:solidFill>
+                    </a:lnB>
+                    <a:solidFill>
+                      <a:srgbClr val="FFFFFF"/>
+                    </a:solidFill>
+                  </a:tcPr>
+                </a:tc>
+                <a:tc>
+                  <a:txBody>
+                    <a:bodyPr/>
+                    <a:lstStyle/>
+                    <a:p>
+                      <a:pPr>
+                        <a:spcAft>
+                          <a:spcPts val="100"/>
+                        </a:spcAft>
+                        <a:defRPr sz="1000" b="0">
+                          <a:solidFill>
+                            <a:srgbClr val="11151A"/>
+                          </a:solidFill>
+                          <a:latin typeface="Lato"/>
+                        </a:defRPr>
+                      </a:pPr>
+                      <a:r>
+                        <a:t>Not an overlap: the model is at least 2 bn litres above reported burn</a:t>
+                      </a:r>
+                    </a:p>
+                  </a:txBody>
+                  <a:tcPr marL="64008" marR="64008" marT="54864" marB="27432" anchor="t">
+                    <a:lnL w="0">
+                      <a:noFill/>
+                    </a:lnL>
+                    <a:lnR w="0">
+                      <a:noFill/>
+                    </a:lnR>
+                    <a:lnT w="0">
+                      <a:noFill/>
+                    </a:lnT>
+                    <a:lnB w="5080">
+                      <a:solidFill>
+                        <a:srgbClr val="B8B8B8"/>
+                      </a:solidFill>
+                    </a:lnB>
+                    <a:solidFill>
+                      <a:srgbClr val="FFFFFF"/>
+                    </a:solidFill>
+                  </a:tcPr>
+                </a:tc>
+              </a:tr>
+              <a:tr h="522514">
+                <a:tc>
+                  <a:txBody>
+                    <a:bodyPr/>
+                    <a:lstStyle/>
+                    <a:p>
+                      <a:pPr>
+                        <a:spcAft>
+                          <a:spcPts val="100"/>
+                        </a:spcAft>
+                        <a:defRPr sz="1000" b="1">
+                          <a:solidFill>
+                            <a:srgbClr val="0A2373"/>
+                          </a:solidFill>
+                          <a:latin typeface="Lato"/>
+                        </a:defRPr>
+                      </a:pPr>
+                      <a:r>
+                        <a:t>Marine gas oil</a:t>
+                      </a:r>
+                    </a:p>
+                  </a:txBody>
+                  <a:tcPr marL="64008" marR="64008" marT="54864" marB="27432" anchor="t">
+                    <a:lnL w="0">
+                      <a:noFill/>
+                    </a:lnL>
+                    <a:lnR w="0">
+                      <a:noFill/>
+                    </a:lnR>
+                    <a:lnT w="0">
+                      <a:noFill/>
+                    </a:lnT>
+                    <a:lnB w="5080">
+                      <a:solidFill>
+                        <a:srgbClr val="B8B8B8"/>
+                      </a:solidFill>
+                    </a:lnB>
+                    <a:solidFill>
+                      <a:srgbClr val="FFFFFF"/>
+                    </a:solidFill>
+                  </a:tcPr>
+                </a:tc>
+                <a:tc>
+                  <a:txBody>
+                    <a:bodyPr/>
+                    <a:lstStyle/>
+                    <a:p>
+                      <a:pPr>
+                        <a:spcAft>
+                          <a:spcPts val="100"/>
+                        </a:spcAft>
+                        <a:defRPr sz="1000" b="0">
+                          <a:solidFill>
+                            <a:srgbClr val="11151A"/>
+                          </a:solidFill>
+                          <a:latin typeface="Lato"/>
+                        </a:defRPr>
+                      </a:pPr>
+                      <a:r>
+                        <a:t>0.77</a:t>
+                      </a:r>
+                    </a:p>
+                  </a:txBody>
+                  <a:tcPr marL="64008" marR="64008" marT="54864" marB="27432" anchor="t">
+                    <a:lnL w="0">
+                      <a:noFill/>
+                    </a:lnL>
+                    <a:lnR w="0">
+                      <a:noFill/>
+                    </a:lnR>
+                    <a:lnT w="0">
+                      <a:noFill/>
+                    </a:lnT>
+                    <a:lnB w="5080">
+                      <a:solidFill>
+                        <a:srgbClr val="B8B8B8"/>
+                      </a:solidFill>
+                    </a:lnB>
+                    <a:solidFill>
+                      <a:srgbClr val="FFFFFF"/>
+                    </a:solidFill>
+                  </a:tcPr>
+                </a:tc>
+                <a:tc>
+                  <a:txBody>
+                    <a:bodyPr/>
+                    <a:lstStyle/>
+                    <a:p>
+                      <a:pPr>
+                        <a:spcAft>
+                          <a:spcPts val="100"/>
+                        </a:spcAft>
+                        <a:defRPr sz="1000" b="0">
+                          <a:solidFill>
+                            <a:srgbClr val="11151A"/>
+                          </a:solidFill>
+                          <a:latin typeface="Lato"/>
+                        </a:defRPr>
+                      </a:pPr>
+                      <a:r>
+                        <a:t>No observed figure</a:t>
+                      </a:r>
+                    </a:p>
+                  </a:txBody>
+                  <a:tcPr marL="64008" marR="64008" marT="54864" marB="27432" anchor="t">
+                    <a:lnL w="0">
+                      <a:noFill/>
+                    </a:lnL>
+                    <a:lnR w="0">
+                      <a:noFill/>
+                    </a:lnR>
+                    <a:lnT w="0">
+                      <a:noFill/>
+                    </a:lnT>
+                    <a:lnB w="5080">
+                      <a:solidFill>
+                        <a:srgbClr val="B8B8B8"/>
+                      </a:solidFill>
+                    </a:lnB>
+                    <a:solidFill>
+                      <a:srgbClr val="FFFFFF"/>
+                    </a:solidFill>
+                  </a:tcPr>
+                </a:tc>
+                <a:tc>
+                  <a:txBody>
+                    <a:bodyPr/>
+                    <a:lstStyle/>
+                    <a:p>
+                      <a:pPr>
+                        <a:spcAft>
+                          <a:spcPts val="100"/>
+                        </a:spcAft>
+                        <a:defRPr sz="1000" b="0">
+                          <a:solidFill>
+                            <a:srgbClr val="11151A"/>
+                          </a:solidFill>
+                          <a:latin typeface="Lato"/>
+                        </a:defRPr>
+                      </a:pPr>
+                      <a:r>
+                        <a:t>Not established whether ships' diesel is inside inland sales</a:t>
+                      </a:r>
+                    </a:p>
+                  </a:txBody>
+                  <a:tcPr marL="64008" marR="64008" marT="54864" marB="27432" anchor="t">
+                    <a:lnL w="0">
+                      <a:noFill/>
+                    </a:lnL>
+                    <a:lnR w="0">
+                      <a:noFill/>
+                    </a:lnR>
+                    <a:lnT w="0">
+                      <a:noFill/>
+                    </a:lnT>
+                    <a:lnB w="5080">
+                      <a:solidFill>
+                        <a:srgbClr val="B8B8B8"/>
+                      </a:solidFill>
+                    </a:lnB>
+                    <a:solidFill>
+                      <a:srgbClr val="FFFFFF"/>
+                    </a:solidFill>
+                  </a:tcPr>
+                </a:tc>
+              </a:tr>
+              <a:tr h="522516">
+                <a:tc>
+                  <a:txBody>
+                    <a:bodyPr/>
+                    <a:lstStyle/>
+                    <a:p>
+                      <a:pPr>
+                        <a:spcAft>
+                          <a:spcPts val="100"/>
+                        </a:spcAft>
+                        <a:defRPr sz="1000" b="1">
+                          <a:solidFill>
+                            <a:srgbClr val="0A2373"/>
+                          </a:solidFill>
+                          <a:latin typeface="Lato"/>
+                        </a:defRPr>
+                      </a:pPr>
+                      <a:r>
+                        <a:t>Total</a:t>
+                      </a:r>
+                    </a:p>
+                  </a:txBody>
+                  <a:tcPr marL="64008" marR="64008" marT="54864" marB="27432" anchor="t">
+                    <a:lnL w="0">
+                      <a:noFill/>
+                    </a:lnL>
+                    <a:lnR w="0">
+                      <a:noFill/>
+                    </a:lnR>
+                    <a:lnT w="0">
+                      <a:noFill/>
+                    </a:lnT>
+                    <a:lnB w="5080">
+                      <a:solidFill>
+                        <a:srgbClr val="B8B8B8"/>
+                      </a:solidFill>
+                    </a:lnB>
+                    <a:solidFill>
+                      <a:srgbClr val="FFFFFF"/>
+                    </a:solidFill>
+                  </a:tcPr>
+                </a:tc>
+                <a:tc>
+                  <a:txBody>
+                    <a:bodyPr/>
+                    <a:lstStyle/>
+                    <a:p>
+                      <a:pPr>
+                        <a:spcAft>
+                          <a:spcPts val="100"/>
+                        </a:spcAft>
+                        <a:defRPr sz="1000" b="0">
+                          <a:solidFill>
+                            <a:srgbClr val="11151A"/>
+                          </a:solidFill>
+                          <a:latin typeface="Lato"/>
+                        </a:defRPr>
+                      </a:pPr>
+                      <a:r>
+                        <a:t>15.42</a:t>
+                      </a:r>
+                    </a:p>
+                  </a:txBody>
+                  <a:tcPr marL="64008" marR="64008" marT="54864" marB="27432" anchor="t">
+                    <a:lnL w="0">
+                      <a:noFill/>
+                    </a:lnL>
+                    <a:lnR w="0">
+                      <a:noFill/>
+                    </a:lnR>
+                    <a:lnT w="0">
+                      <a:noFill/>
+                    </a:lnT>
+                    <a:lnB w="5080">
+                      <a:solidFill>
+                        <a:srgbClr val="B8B8B8"/>
+                      </a:solidFill>
+                    </a:lnB>
+                    <a:solidFill>
+                      <a:srgbClr val="FFFFFF"/>
+                    </a:solidFill>
+                  </a:tcPr>
+                </a:tc>
+                <a:tc>
+                  <a:txBody>
+                    <a:bodyPr/>
+                    <a:lstStyle/>
+                    <a:p>
+                      <a:pPr>
+                        <a:spcAft>
+                          <a:spcPts val="100"/>
+                        </a:spcAft>
+                        <a:defRPr sz="1000" b="0">
+                          <a:solidFill>
+                            <a:srgbClr val="11151A"/>
+                          </a:solidFill>
+                          <a:latin typeface="Lato"/>
+                        </a:defRPr>
+                      </a:pPr>
+                      <a:r>
+                        <a:t>Recorded sales: 12.91 (2023); 11.73 (2024, unverified)</a:t>
+                      </a:r>
+                    </a:p>
+                  </a:txBody>
+                  <a:tcPr marL="64008" marR="64008" marT="54864" marB="27432" anchor="t">
+                    <a:lnL w="0">
+                      <a:noFill/>
+                    </a:lnL>
+                    <a:lnR w="0">
+                      <a:noFill/>
+                    </a:lnR>
+                    <a:lnT w="0">
+                      <a:noFill/>
+                    </a:lnT>
+                    <a:lnB w="5080">
+                      <a:solidFill>
+                        <a:srgbClr val="B8B8B8"/>
+                      </a:solidFill>
+                    </a:lnB>
+                    <a:solidFill>
+                      <a:srgbClr val="FFFFFF"/>
+                    </a:solidFill>
+                  </a:tcPr>
+                </a:tc>
+                <a:tc>
+                  <a:txBody>
+                    <a:bodyPr/>
+                    <a:lstStyle/>
+                    <a:p>
+                      <a:pPr>
+                        <a:spcAft>
+                          <a:spcPts val="100"/>
+                        </a:spcAft>
+                        <a:defRPr sz="1000" b="0">
+                          <a:solidFill>
+                            <a:srgbClr val="11151A"/>
+                          </a:solidFill>
+                          <a:latin typeface="Lato"/>
+                        </a:defRPr>
+                      </a:pPr>
+                      <a:r>
+                        <a:t>Model is 2.5 to 3.7 above recorded sales</a:t>
+                      </a:r>
+                    </a:p>
+                  </a:txBody>
+                  <a:tcPr marL="64008" marR="64008" marT="54864" marB="27432" anchor="t">
+                    <a:lnL w="0">
+                      <a:noFill/>
+                    </a:lnL>
+                    <a:lnR w="0">
+                      <a:noFill/>
+                    </a:lnR>
+                    <a:lnT w="0">
+                      <a:noFill/>
+                    </a:lnT>
+                    <a:lnB w="5080">
+                      <a:solidFill>
+                        <a:srgbClr val="B8B8B8"/>
+                      </a:solidFill>
+                    </a:lnB>
+                    <a:solidFill>
+                      <a:srgbClr val="FFFFFF"/>
+                    </a:solidFill>
+                  </a:tcPr>
+                </a:tc>
+              </a:tr>
+            </a:tbl>
+          </a:graphicData>
+        </a:graphic>
+      </p:graphicFrame>
+      <p:sp>
+        <p:nvSpPr>
+          <p:cNvPr id="8" name="TextBox 7"/>
+          <p:cNvSpPr txBox="1"/>
+          <p:nvPr/>
+        </p:nvSpPr>
+        <p:spPr>
+          <a:xfrm>
+            <a:off x="457200" y="5852160"/>
+            <a:ext cx="10652760" cy="548640"/>
+          </a:xfrm>
+          <a:prstGeom prst="rect">
+            <a:avLst/>
+          </a:prstGeom>
+          <a:noFill/>
+        </p:spPr>
+        <p:txBody>
+          <a:bodyPr wrap="square" lIns="22860" rIns="22860" tIns="0" bIns="0">
+            <a:spAutoFit/>
+          </a:bodyPr>
+          <a:lstStyle/>
+          <a:p>
+            <a:pPr>
+              <a:spcAft>
+                <a:spcPts val="300"/>
+              </a:spcAft>
+              <a:defRPr sz="1100" b="1">
+                <a:solidFill>
+                  <a:srgbClr val="0A2373"/>
+                </a:solidFill>
+                <a:latin typeface="Lato"/>
+              </a:defRPr>
+            </a:pPr>
+            <a:r>
+              <a:t>Road vehicles, agriculture and industry are 11.07 in the model against 13.41 of final consumption in the 2021 balance, so those three are short, not double counted. At most 2.56 could overlap with road vehicles; no source sizes it.</a:t>
+            </a:r>
+          </a:p>
+        </p:txBody>
+      </p:sp>
+      <p:sp>
+        <p:nvSpPr>
+          <p:cNvPr id="9" name="Chevron 8">
+            <a:hlinkClick action="ppaction://hlinksldjump" r:id="rId2"/>
+          </p:cNvPr>
+          <p:cNvSpPr/>
+          <p:nvPr/>
+        </p:nvSpPr>
+        <p:spPr>
+          <a:xfrm>
+            <a:off x="457200" y="73152"/>
+            <a:ext cx="2075688" cy="384048"/>
+          </a:xfrm>
+          <a:prstGeom prst="chevron">
+            <a:avLst>
+              <a:gd name="adj" fmla="val 12000"/>
+            </a:avLst>
+          </a:prstGeom>
+          <a:solidFill>
+            <a:srgbClr val="EEEEEE"/>
+          </a:solidFill>
+          <a:ln>
+            <a:noFill/>
+          </a:ln>
+        </p:spPr>
+        <p:style>
+          <a:lnRef idx="1">
+            <a:schemeClr val="accent1"/>
+          </a:lnRef>
+          <a:fillRef idx="3">
+            <a:schemeClr val="accent1"/>
+          </a:fillRef>
+          <a:effectRef idx="2">
+            <a:schemeClr val="accent1"/>
+          </a:effectRef>
+          <a:fontRef idx="minor">
+            <a:schemeClr val="lt1"/>
+          </a:fontRef>
+        </p:style>
+        <p:txBody>
+          <a:bodyPr rtlCol="0" anchor="ctr" tIns="0" bIns="0"/>
+          <a:lstStyle/>
+          <a:p>
+            <a:pPr algn="ctr">
+              <a:defRPr sz="1100" b="0">
+                <a:solidFill>
+                  <a:srgbClr val="0A2373"/>
+                </a:solidFill>
+                <a:latin typeface="Lato"/>
+              </a:defRPr>
+            </a:pPr>
+            <a:r>
+              <a:t>1  National balance</a:t>
+            </a:r>
+          </a:p>
+        </p:txBody>
+      </p:sp>
+      <p:sp>
+        <p:nvSpPr>
+          <p:cNvPr id="10" name="Chevron 9">
+            <a:hlinkClick action="ppaction://hlinksldjump" r:id="rId3"/>
+          </p:cNvPr>
+          <p:cNvSpPr/>
+          <p:nvPr/>
+        </p:nvSpPr>
+        <p:spPr>
+          <a:xfrm>
+            <a:off x="2587752" y="73152"/>
+            <a:ext cx="2075688" cy="384048"/>
+          </a:xfrm>
+          <a:prstGeom prst="chevron">
+            <a:avLst>
+              <a:gd name="adj" fmla="val 12000"/>
+            </a:avLst>
+          </a:prstGeom>
+          <a:solidFill>
+            <a:srgbClr val="EEEEEE"/>
+          </a:solidFill>
+          <a:ln>
+            <a:noFill/>
+          </a:ln>
+        </p:spPr>
+        <p:style>
+          <a:lnRef idx="1">
+            <a:schemeClr val="accent1"/>
+          </a:lnRef>
+          <a:fillRef idx="3">
+            <a:schemeClr val="accent1"/>
+          </a:fillRef>
+          <a:effectRef idx="2">
+            <a:schemeClr val="accent1"/>
+          </a:effectRef>
+          <a:fontRef idx="minor">
+            <a:schemeClr val="lt1"/>
+          </a:fontRef>
+        </p:style>
+        <p:txBody>
+          <a:bodyPr rtlCol="0" anchor="ctr" tIns="0" bIns="0"/>
+          <a:lstStyle/>
+          <a:p>
+            <a:pPr algn="ctr">
+              <a:defRPr sz="1100" b="0">
+                <a:solidFill>
+                  <a:srgbClr val="0A2373"/>
+                </a:solidFill>
+                <a:latin typeface="Lato"/>
+              </a:defRPr>
+            </a:pPr>
+            <a:r>
+              <a:t>2  Forecast levers</a:t>
+            </a:r>
+          </a:p>
+        </p:txBody>
+      </p:sp>
+      <p:sp>
+        <p:nvSpPr>
+          <p:cNvPr id="11" name="Chevron 10">
+            <a:hlinkClick action="ppaction://hlinksldjump" r:id="rId4"/>
+          </p:cNvPr>
+          <p:cNvSpPr/>
+          <p:nvPr/>
+        </p:nvSpPr>
+        <p:spPr>
+          <a:xfrm>
+            <a:off x="4718304" y="73152"/>
+            <a:ext cx="2075688" cy="384048"/>
+          </a:xfrm>
+          <a:prstGeom prst="chevron">
+            <a:avLst>
+              <a:gd name="adj" fmla="val 12000"/>
+            </a:avLst>
+          </a:prstGeom>
+          <a:solidFill>
+            <a:srgbClr val="0A2373"/>
+          </a:solidFill>
+          <a:ln>
+            <a:noFill/>
+          </a:ln>
+        </p:spPr>
+        <p:style>
+          <a:lnRef idx="1">
+            <a:schemeClr val="accent1"/>
+          </a:lnRef>
+          <a:fillRef idx="3">
+            <a:schemeClr val="accent1"/>
+          </a:fillRef>
+          <a:effectRef idx="2">
+            <a:schemeClr val="accent1"/>
+          </a:effectRef>
+          <a:fontRef idx="minor">
+            <a:schemeClr val="lt1"/>
+          </a:fontRef>
+        </p:style>
+        <p:txBody>
+          <a:bodyPr rtlCol="0" anchor="ctr" tIns="0" bIns="0"/>
+          <a:lstStyle/>
+          <a:p>
+            <a:pPr algn="ctr">
+              <a:defRPr sz="1100" b="1">
+                <a:solidFill>
+                  <a:srgbClr val="FFFFFF"/>
+                </a:solidFill>
+                <a:latin typeface="Lato"/>
+              </a:defRPr>
+            </a:pPr>
+            <a:r>
+              <a:t>3  Sector baselines</a:t>
+            </a:r>
+          </a:p>
+        </p:txBody>
+      </p:sp>
+      <p:sp>
+        <p:nvSpPr>
+          <p:cNvPr id="12" name="Chevron 11"/>
+          <p:cNvSpPr/>
+          <p:nvPr/>
+        </p:nvSpPr>
+        <p:spPr>
+          <a:xfrm>
+            <a:off x="6848856" y="73152"/>
+            <a:ext cx="2075688" cy="384048"/>
+          </a:xfrm>
+          <a:prstGeom prst="chevron">
+            <a:avLst>
+              <a:gd name="adj" fmla="val 12000"/>
+            </a:avLst>
+          </a:prstGeom>
+          <a:solidFill>
+            <a:srgbClr val="EEEEEE"/>
+          </a:solidFill>
+          <a:ln>
+            <a:noFill/>
+          </a:ln>
+        </p:spPr>
+        <p:style>
+          <a:lnRef idx="1">
+            <a:schemeClr val="accent1"/>
+          </a:lnRef>
+          <a:fillRef idx="3">
+            <a:schemeClr val="accent1"/>
+          </a:fillRef>
+          <a:effectRef idx="2">
+            <a:schemeClr val="accent1"/>
+          </a:effectRef>
+          <a:fontRef idx="minor">
+            <a:schemeClr val="lt1"/>
+          </a:fontRef>
+        </p:style>
+        <p:txBody>
+          <a:bodyPr rtlCol="0" anchor="ctr" tIns="0" bIns="0"/>
+          <a:lstStyle/>
+          <a:p>
+            <a:pPr algn="ctr">
+              <a:defRPr sz="1100" b="0">
+                <a:solidFill>
+                  <a:srgbClr val="0A2373"/>
+                </a:solidFill>
+                <a:latin typeface="Lato"/>
+              </a:defRPr>
+            </a:pPr>
+            <a:r>
+              <a:t>4  Tank handling</a:t>
+            </a:r>
+          </a:p>
+        </p:txBody>
+      </p:sp>
+      <p:sp>
+        <p:nvSpPr>
+          <p:cNvPr id="13" name="Chevron 12"/>
+          <p:cNvSpPr/>
+          <p:nvPr/>
+        </p:nvSpPr>
+        <p:spPr>
+          <a:xfrm>
+            <a:off x="8979408" y="73152"/>
+            <a:ext cx="2075688" cy="384048"/>
+          </a:xfrm>
+          <a:prstGeom prst="chevron">
+            <a:avLst>
+              <a:gd name="adj" fmla="val 12000"/>
+            </a:avLst>
+          </a:prstGeom>
+          <a:solidFill>
+            <a:srgbClr val="EEEEEE"/>
+          </a:solidFill>
+          <a:ln>
+            <a:noFill/>
+          </a:ln>
+        </p:spPr>
+        <p:style>
+          <a:lnRef idx="1">
+            <a:schemeClr val="accent1"/>
+          </a:lnRef>
+          <a:fillRef idx="3">
+            <a:schemeClr val="accent1"/>
+          </a:fillRef>
+          <a:effectRef idx="2">
+            <a:schemeClr val="accent1"/>
+          </a:effectRef>
+          <a:fontRef idx="minor">
+            <a:schemeClr val="lt1"/>
+          </a:fontRef>
+        </p:style>
+        <p:txBody>
+          <a:bodyPr rtlCol="0" anchor="ctr" tIns="0" bIns="0"/>
+          <a:lstStyle/>
+          <a:p>
+            <a:pPr algn="ctr">
+              <a:defRPr sz="1100" b="0">
+                <a:solidFill>
+                  <a:srgbClr val="0A2373"/>
+                </a:solidFill>
+                <a:latin typeface="Lato"/>
+              </a:defRPr>
+            </a:pPr>
+            <a:r>
+              <a:t>5  Hand-back</a:t>
+            </a:r>
+          </a:p>
+        </p:txBody>
+      </p:sp>
+    </p:spTree>
+  </p:cSld>
+  <p:clrMapOvr>
+    <a:masterClrMapping/>
+  </p:clrMapOvr>
+</p:sld>
+</file>
+
 <file path=ppt/slides/slide16.xml><?xml version="1.0" encoding="utf-8"?>
 <p:sld xmlns:a="http://schemas.openxmlformats.org/drawingml/2006/main" xmlns:p="http://schemas.openxmlformats.org/presentationml/2006/main" xmlns:r="http://schemas.openxmlformats.org/officeDocument/2006/relationships">
   <p:cSld>
@@ -8185,7 +9902,9 @@
       </p:sp>
       <p:sp>
         <p:nvSpPr>
-          <p:cNvPr id="13" name="Chevron 12"/>
+          <p:cNvPr id="13" name="Chevron 12">
+            <a:hlinkClick action="ppaction://hlinksldjump" r:id="rId4"/>
+          </p:cNvPr>
           <p:cNvSpPr/>
           <p:nvPr/>
         </p:nvSpPr>
@@ -9716,7 +11435,9 @@
       </p:sp>
       <p:sp>
         <p:nvSpPr>
-          <p:cNvPr id="11" name="Chevron 10"/>
+          <p:cNvPr id="11" name="Chevron 10">
+            <a:hlinkClick action="ppaction://hlinksldjump" r:id="rId4"/>
+          </p:cNvPr>
           <p:cNvSpPr/>
           <p:nvPr/>
         </p:nvSpPr>
@@ -10786,7 +12507,9 @@
       </p:sp>
       <p:sp>
         <p:nvSpPr>
-          <p:cNvPr id="13" name="Chevron 12"/>
+          <p:cNvPr id="13" name="Chevron 12">
+            <a:hlinkClick action="ppaction://hlinksldjump" r:id="rId6"/>
+          </p:cNvPr>
           <p:cNvSpPr/>
           <p:nvPr/>
         </p:nvSpPr>
@@ -13259,7 +14982,9 @@
       </p:sp>
       <p:sp>
         <p:nvSpPr>
-          <p:cNvPr id="10" name="Chevron 9"/>
+          <p:cNvPr id="10" name="Chevron 9">
+            <a:hlinkClick action="ppaction://hlinksldjump" r:id="rId4"/>
+          </p:cNvPr>
           <p:cNvSpPr/>
           <p:nvPr/>
         </p:nvSpPr>
@@ -15477,7 +17202,9 @@
       </p:sp>
       <p:sp>
         <p:nvSpPr>
-          <p:cNvPr id="10" name="Chevron 9"/>
+          <p:cNvPr id="10" name="Chevron 9">
+            <a:hlinkClick action="ppaction://hlinksldjump" r:id="rId4"/>
+          </p:cNvPr>
           <p:cNvSpPr/>
           <p:nvPr/>
         </p:nvSpPr>
@@ -17998,7 +19725,9 @@
       </p:sp>
       <p:sp>
         <p:nvSpPr>
-          <p:cNvPr id="10" name="Chevron 9"/>
+          <p:cNvPr id="10" name="Chevron 9">
+            <a:hlinkClick action="ppaction://hlinksldjump" r:id="rId4"/>
+          </p:cNvPr>
           <p:cNvSpPr/>
           <p:nvPr/>
         </p:nvSpPr>
@@ -18109,6 +19838,1662 @@
       <p:sp>
         <p:nvSpPr>
           <p:cNvPr id="12" name="Chevron 11"/>
+          <p:cNvSpPr/>
+          <p:nvPr/>
+        </p:nvSpPr>
+        <p:spPr>
+          <a:xfrm>
+            <a:off x="8979408" y="73152"/>
+            <a:ext cx="2075688" cy="384048"/>
+          </a:xfrm>
+          <a:prstGeom prst="chevron">
+            <a:avLst>
+              <a:gd name="adj" fmla="val 12000"/>
+            </a:avLst>
+          </a:prstGeom>
+          <a:solidFill>
+            <a:srgbClr val="EEEEEE"/>
+          </a:solidFill>
+          <a:ln>
+            <a:noFill/>
+          </a:ln>
+        </p:spPr>
+        <p:style>
+          <a:lnRef idx="1">
+            <a:schemeClr val="accent1"/>
+          </a:lnRef>
+          <a:fillRef idx="3">
+            <a:schemeClr val="accent1"/>
+          </a:fillRef>
+          <a:effectRef idx="2">
+            <a:schemeClr val="accent1"/>
+          </a:effectRef>
+          <a:fontRef idx="minor">
+            <a:schemeClr val="lt1"/>
+          </a:fontRef>
+        </p:style>
+        <p:txBody>
+          <a:bodyPr rtlCol="0" anchor="ctr" tIns="0" bIns="0"/>
+          <a:lstStyle/>
+          <a:p>
+            <a:pPr algn="ctr">
+              <a:defRPr sz="1100" b="0">
+                <a:solidFill>
+                  <a:srgbClr val="0A2373"/>
+                </a:solidFill>
+                <a:latin typeface="Lato"/>
+              </a:defRPr>
+            </a:pPr>
+            <a:r>
+              <a:t>5  Hand-back</a:t>
+            </a:r>
+          </a:p>
+        </p:txBody>
+      </p:sp>
+    </p:spTree>
+  </p:cSld>
+  <p:clrMapOvr>
+    <a:masterClrMapping/>
+  </p:clrMapOvr>
+</p:sld>
+</file>
+
+<file path=ppt/slides/slide9.xml><?xml version="1.0" encoding="utf-8"?>
+<p:sld xmlns:a="http://schemas.openxmlformats.org/drawingml/2006/main" xmlns:p="http://schemas.openxmlformats.org/presentationml/2006/main" xmlns:r="http://schemas.openxmlformats.org/officeDocument/2006/relationships">
+  <p:cSld>
+    <p:spTree>
+      <p:nvGrpSpPr>
+        <p:cNvPr id="1" name=""/>
+        <p:cNvGrpSpPr/>
+        <p:nvPr/>
+      </p:nvGrpSpPr>
+      <p:grpSpPr/>
+      <p:sp>
+        <p:nvSpPr>
+          <p:cNvPr id="2" name="Title 1"/>
+          <p:cNvSpPr>
+            <a:spLocks noGrp="1"/>
+          </p:cNvSpPr>
+          <p:nvPr>
+            <p:ph type="title"/>
+          </p:nvPr>
+        </p:nvSpPr>
+        <p:spPr/>
+        <p:txBody>
+          <a:bodyPr/>
+          <a:lstStyle/>
+          <a:p>
+            <a:r>
+              <a:t>Sourced starting values lower 2024 diesel demand by 0.63 bn litres</a:t>
+            </a:r>
+          </a:p>
+        </p:txBody>
+      </p:sp>
+      <p:sp>
+        <p:nvSpPr>
+          <p:cNvPr id="3" name="TextBox 2"/>
+          <p:cNvSpPr txBox="1"/>
+          <p:nvPr/>
+        </p:nvSpPr>
+        <p:spPr>
+          <a:xfrm>
+            <a:off x="457200" y="1627632"/>
+            <a:ext cx="10652760" cy="274320"/>
+          </a:xfrm>
+          <a:prstGeom prst="rect">
+            <a:avLst/>
+          </a:prstGeom>
+          <a:noFill/>
+        </p:spPr>
+        <p:txBody>
+          <a:bodyPr wrap="square" lIns="22860" rIns="22860" tIns="0" bIns="0">
+            <a:spAutoFit/>
+          </a:bodyPr>
+          <a:lstStyle/>
+          <a:p>
+            <a:pPr>
+              <a:spcAft>
+                <a:spcPts val="300"/>
+              </a:spcAft>
+              <a:defRPr sz="1300" b="1">
+                <a:solidFill>
+                  <a:srgbClr val="11151A"/>
+                </a:solidFill>
+                <a:latin typeface="Lato"/>
+              </a:defRPr>
+            </a:pPr>
+            <a:r>
+              <a:t>Agriculture and industry | diesel, billion litres a year | proposed as provisional starting values</a:t>
+            </a:r>
+          </a:p>
+        </p:txBody>
+      </p:sp>
+      <p:cxnSp>
+        <p:nvCxnSpPr>
+          <p:cNvPr id="4" name="Connector 3"/>
+          <p:cNvCxnSpPr/>
+          <p:nvPr/>
+        </p:nvCxnSpPr>
+        <p:spPr>
+          <a:xfrm>
+            <a:off x="457200" y="1920240"/>
+            <a:ext cx="10652760" cy="0"/>
+          </a:xfrm>
+          <a:prstGeom prst="line">
+            <a:avLst/>
+          </a:prstGeom>
+          <a:ln w="7620">
+            <a:solidFill>
+              <a:srgbClr val="A0A0A0"/>
+            </a:solidFill>
+          </a:ln>
+        </p:spPr>
+        <p:style>
+          <a:lnRef idx="2">
+            <a:schemeClr val="accent1"/>
+          </a:lnRef>
+          <a:fillRef idx="0">
+            <a:schemeClr val="accent1"/>
+          </a:fillRef>
+          <a:effectRef idx="1">
+            <a:schemeClr val="accent1"/>
+          </a:effectRef>
+          <a:fontRef idx="minor">
+            <a:schemeClr val="tx1"/>
+          </a:fontRef>
+        </p:style>
+      </p:cxnSp>
+      <p:sp>
+        <p:nvSpPr>
+          <p:cNvPr id="5" name="TextBox 4"/>
+          <p:cNvSpPr txBox="1"/>
+          <p:nvPr/>
+        </p:nvSpPr>
+        <p:spPr>
+          <a:xfrm>
+            <a:off x="457200" y="6547104"/>
+            <a:ext cx="9692640" cy="182880"/>
+          </a:xfrm>
+          <a:prstGeom prst="rect">
+            <a:avLst/>
+          </a:prstGeom>
+          <a:noFill/>
+        </p:spPr>
+        <p:txBody>
+          <a:bodyPr wrap="square" lIns="22860" rIns="22860" tIns="0" bIns="0">
+            <a:spAutoFit/>
+          </a:bodyPr>
+          <a:lstStyle/>
+          <a:p>
+            <a:pPr>
+              <a:spcAft>
+                <a:spcPts val="300"/>
+              </a:spcAft>
+              <a:defRPr sz="800" b="0">
+                <a:solidFill>
+                  <a:srgbClr val="11151A"/>
+                </a:solidFill>
+                <a:latin typeface="Lato"/>
+              </a:defRPr>
+            </a:pPr>
+            <a:r>
+              <a:t>Source: sector_baselines_2026-10-07.md and .csv on manish-branch; department energy balances 2012-2021. A proposal for Nigel's decision; nothing is accepted.</a:t>
+            </a:r>
+          </a:p>
+        </p:txBody>
+      </p:sp>
+      <p:sp>
+        <p:nvSpPr>
+          <p:cNvPr id="6" name="TextBox 5"/>
+          <p:cNvSpPr txBox="1"/>
+          <p:nvPr/>
+        </p:nvSpPr>
+        <p:spPr>
+          <a:xfrm>
+            <a:off x="457200" y="6711696"/>
+            <a:ext cx="2011680" cy="128016"/>
+          </a:xfrm>
+          <a:prstGeom prst="rect">
+            <a:avLst/>
+          </a:prstGeom>
+          <a:noFill/>
+        </p:spPr>
+        <p:txBody>
+          <a:bodyPr wrap="square" lIns="22860" rIns="22860" tIns="0" bIns="0">
+            <a:spAutoFit/>
+          </a:bodyPr>
+          <a:lstStyle/>
+          <a:p>
+            <a:pPr>
+              <a:spcAft>
+                <a:spcPts val="300"/>
+              </a:spcAft>
+              <a:defRPr sz="700" b="0">
+                <a:solidFill>
+                  <a:srgbClr val="11151A"/>
+                </a:solidFill>
+                <a:latin typeface="Lato"/>
+              </a:defRPr>
+            </a:pPr>
+            <a:r>
+              <a:t>Strictly Confidential</a:t>
+            </a:r>
+          </a:p>
+        </p:txBody>
+      </p:sp>
+      <p:graphicFrame>
+        <p:nvGraphicFramePr>
+          <p:cNvPr id="7" name="Table 6"/>
+          <p:cNvGraphicFramePr>
+            <a:graphicFrameLocks noGrp="1"/>
+          </p:cNvGraphicFramePr>
+          <p:nvPr/>
+        </p:nvGraphicFramePr>
+        <p:xfrm>
+          <a:off x="457200" y="2029968"/>
+          <a:ext cx="10652760" cy="2651760"/>
+        </p:xfrm>
+        <a:graphic>
+          <a:graphicData uri="http://schemas.openxmlformats.org/drawingml/2006/table">
+            <a:tbl>
+              <a:tblPr firstRow="0" bandRow="0"/>
+              <a:tblGrid>
+                <a:gridCol w="1188720"/>
+                <a:gridCol w="1143000"/>
+                <a:gridCol w="2286000"/>
+                <a:gridCol w="2743200"/>
+                <a:gridCol w="1463040"/>
+                <a:gridCol w="1828800"/>
+              </a:tblGrid>
+              <a:tr h="662940">
+                <a:tc>
+                  <a:txBody>
+                    <a:bodyPr/>
+                    <a:lstStyle/>
+                    <a:p>
+                      <a:pPr>
+                        <a:spcAft>
+                          <a:spcPts val="100"/>
+                        </a:spcAft>
+                        <a:defRPr sz="1050" b="1">
+                          <a:solidFill>
+                            <a:srgbClr val="0A2373"/>
+                          </a:solidFill>
+                          <a:latin typeface="Lato"/>
+                        </a:defRPr>
+                      </a:pPr>
+                      <a:r>
+                        <a:t>Sector</a:t>
+                      </a:r>
+                    </a:p>
+                  </a:txBody>
+                  <a:tcPr marL="64008" marR="64008" marT="54864" marB="27432" anchor="t">
+                    <a:lnL w="0">
+                      <a:noFill/>
+                    </a:lnL>
+                    <a:lnR w="0">
+                      <a:noFill/>
+                    </a:lnR>
+                    <a:lnT w="0">
+                      <a:noFill/>
+                    </a:lnT>
+                    <a:lnB w="5080">
+                      <a:solidFill>
+                        <a:srgbClr val="B8B8B8"/>
+                      </a:solidFill>
+                    </a:lnB>
+                    <a:solidFill>
+                      <a:srgbClr val="FFFFFF"/>
+                    </a:solidFill>
+                  </a:tcPr>
+                </a:tc>
+                <a:tc>
+                  <a:txBody>
+                    <a:bodyPr/>
+                    <a:lstStyle/>
+                    <a:p>
+                      <a:pPr>
+                        <a:spcAft>
+                          <a:spcPts val="100"/>
+                        </a:spcAft>
+                        <a:defRPr sz="1050" b="1">
+                          <a:solidFill>
+                            <a:srgbClr val="11151A"/>
+                          </a:solidFill>
+                          <a:latin typeface="Lato"/>
+                        </a:defRPr>
+                      </a:pPr>
+                      <a:r>
+                        <a:t>Earlier</a:t>
+                      </a:r>
+                    </a:p>
+                    <a:p>
+                      <a:pPr>
+                        <a:spcAft>
+                          <a:spcPts val="100"/>
+                        </a:spcAft>
+                        <a:defRPr sz="1050" b="1">
+                          <a:solidFill>
+                            <a:srgbClr val="11151A"/>
+                          </a:solidFill>
+                          <a:latin typeface="Lato"/>
+                        </a:defRPr>
+                      </a:pPr>
+                      <a:r>
+                        <a:t>placeholder</a:t>
+                      </a:r>
+                    </a:p>
+                  </a:txBody>
+                  <a:tcPr marL="64008" marR="64008" marT="54864" marB="27432" anchor="t">
+                    <a:lnL w="0">
+                      <a:noFill/>
+                    </a:lnL>
+                    <a:lnR w="0">
+                      <a:noFill/>
+                    </a:lnR>
+                    <a:lnT w="0">
+                      <a:noFill/>
+                    </a:lnT>
+                    <a:lnB w="5080">
+                      <a:solidFill>
+                        <a:srgbClr val="B8B8B8"/>
+                      </a:solidFill>
+                    </a:lnB>
+                    <a:solidFill>
+                      <a:srgbClr val="FFFFFF"/>
+                    </a:solidFill>
+                  </a:tcPr>
+                </a:tc>
+                <a:tc>
+                  <a:txBody>
+                    <a:bodyPr/>
+                    <a:lstStyle/>
+                    <a:p>
+                      <a:pPr>
+                        <a:spcAft>
+                          <a:spcPts val="100"/>
+                        </a:spcAft>
+                        <a:defRPr sz="1050" b="1">
+                          <a:solidFill>
+                            <a:srgbClr val="11151A"/>
+                          </a:solidFill>
+                          <a:latin typeface="Lato"/>
+                        </a:defRPr>
+                      </a:pPr>
+                      <a:r>
+                        <a:t>On the branch</a:t>
+                      </a:r>
+                    </a:p>
+                  </a:txBody>
+                  <a:tcPr marL="64008" marR="64008" marT="54864" marB="27432" anchor="t">
+                    <a:lnL w="0">
+                      <a:noFill/>
+                    </a:lnL>
+                    <a:lnR w="0">
+                      <a:noFill/>
+                    </a:lnR>
+                    <a:lnT w="0">
+                      <a:noFill/>
+                    </a:lnT>
+                    <a:lnB w="5080">
+                      <a:solidFill>
+                        <a:srgbClr val="B8B8B8"/>
+                      </a:solidFill>
+                    </a:lnB>
+                    <a:solidFill>
+                      <a:srgbClr val="FFFFFF"/>
+                    </a:solidFill>
+                  </a:tcPr>
+                </a:tc>
+                <a:tc>
+                  <a:txBody>
+                    <a:bodyPr/>
+                    <a:lstStyle/>
+                    <a:p>
+                      <a:pPr>
+                        <a:spcAft>
+                          <a:spcPts val="100"/>
+                        </a:spcAft>
+                        <a:defRPr sz="1050" b="1">
+                          <a:solidFill>
+                            <a:srgbClr val="11151A"/>
+                          </a:solidFill>
+                          <a:latin typeface="Lato"/>
+                        </a:defRPr>
+                      </a:pPr>
+                      <a:r>
+                        <a:t>Range in the evidence</a:t>
+                      </a:r>
+                    </a:p>
+                  </a:txBody>
+                  <a:tcPr marL="64008" marR="64008" marT="54864" marB="27432" anchor="t">
+                    <a:lnL w="0">
+                      <a:noFill/>
+                    </a:lnL>
+                    <a:lnR w="0">
+                      <a:noFill/>
+                    </a:lnR>
+                    <a:lnT w="0">
+                      <a:noFill/>
+                    </a:lnT>
+                    <a:lnB w="5080">
+                      <a:solidFill>
+                        <a:srgbClr val="B8B8B8"/>
+                      </a:solidFill>
+                    </a:lnB>
+                    <a:solidFill>
+                      <a:srgbClr val="FFFFFF"/>
+                    </a:solidFill>
+                  </a:tcPr>
+                </a:tc>
+                <a:tc>
+                  <a:txBody>
+                    <a:bodyPr/>
+                    <a:lstStyle/>
+                    <a:p>
+                      <a:pPr>
+                        <a:spcAft>
+                          <a:spcPts val="100"/>
+                        </a:spcAft>
+                        <a:defRPr sz="1050" b="1">
+                          <a:solidFill>
+                            <a:srgbClr val="11151A"/>
+                          </a:solidFill>
+                          <a:latin typeface="Lato"/>
+                        </a:defRPr>
+                      </a:pPr>
+                      <a:r>
+                        <a:t>Proposed</a:t>
+                      </a:r>
+                    </a:p>
+                  </a:txBody>
+                  <a:tcPr marL="64008" marR="64008" marT="54864" marB="27432" anchor="t">
+                    <a:lnL w="0">
+                      <a:noFill/>
+                    </a:lnL>
+                    <a:lnR w="0">
+                      <a:noFill/>
+                    </a:lnR>
+                    <a:lnT w="0">
+                      <a:noFill/>
+                    </a:lnT>
+                    <a:lnB w="5080">
+                      <a:solidFill>
+                        <a:srgbClr val="B8B8B8"/>
+                      </a:solidFill>
+                    </a:lnB>
+                    <a:solidFill>
+                      <a:srgbClr val="FFFFFF"/>
+                    </a:solidFill>
+                  </a:tcPr>
+                </a:tc>
+                <a:tc>
+                  <a:txBody>
+                    <a:bodyPr/>
+                    <a:lstStyle/>
+                    <a:p>
+                      <a:pPr>
+                        <a:spcAft>
+                          <a:spcPts val="100"/>
+                        </a:spcAft>
+                        <a:defRPr sz="1050" b="1">
+                          <a:solidFill>
+                            <a:srgbClr val="11151A"/>
+                          </a:solidFill>
+                          <a:latin typeface="Lato"/>
+                        </a:defRPr>
+                      </a:pPr>
+                      <a:r>
+                        <a:t>Effect in 2024; 2035</a:t>
+                      </a:r>
+                    </a:p>
+                  </a:txBody>
+                  <a:tcPr marL="64008" marR="64008" marT="54864" marB="27432" anchor="t">
+                    <a:lnL w="0">
+                      <a:noFill/>
+                    </a:lnL>
+                    <a:lnR w="0">
+                      <a:noFill/>
+                    </a:lnR>
+                    <a:lnT w="0">
+                      <a:noFill/>
+                    </a:lnT>
+                    <a:lnB w="5080">
+                      <a:solidFill>
+                        <a:srgbClr val="B8B8B8"/>
+                      </a:solidFill>
+                    </a:lnB>
+                    <a:solidFill>
+                      <a:srgbClr val="FFFFFF"/>
+                    </a:solidFill>
+                  </a:tcPr>
+                </a:tc>
+              </a:tr>
+              <a:tr h="662940">
+                <a:tc>
+                  <a:txBody>
+                    <a:bodyPr/>
+                    <a:lstStyle/>
+                    <a:p>
+                      <a:pPr>
+                        <a:spcAft>
+                          <a:spcPts val="100"/>
+                        </a:spcAft>
+                        <a:defRPr sz="1050" b="1">
+                          <a:solidFill>
+                            <a:srgbClr val="0A2373"/>
+                          </a:solidFill>
+                          <a:latin typeface="Lato"/>
+                        </a:defRPr>
+                      </a:pPr>
+                      <a:r>
+                        <a:t>Agriculture</a:t>
+                      </a:r>
+                    </a:p>
+                  </a:txBody>
+                  <a:tcPr marL="64008" marR="64008" marT="54864" marB="27432" anchor="t">
+                    <a:lnL w="0">
+                      <a:noFill/>
+                    </a:lnL>
+                    <a:lnR w="0">
+                      <a:noFill/>
+                    </a:lnR>
+                    <a:lnT w="0">
+                      <a:noFill/>
+                    </a:lnT>
+                    <a:lnB w="5080">
+                      <a:solidFill>
+                        <a:srgbClr val="B8B8B8"/>
+                      </a:solidFill>
+                    </a:lnB>
+                    <a:solidFill>
+                      <a:srgbClr val="FFFFFF"/>
+                    </a:solidFill>
+                  </a:tcPr>
+                </a:tc>
+                <a:tc>
+                  <a:txBody>
+                    <a:bodyPr/>
+                    <a:lstStyle/>
+                    <a:p>
+                      <a:pPr>
+                        <a:spcAft>
+                          <a:spcPts val="100"/>
+                        </a:spcAft>
+                        <a:defRPr sz="1050" b="0">
+                          <a:solidFill>
+                            <a:srgbClr val="11151A"/>
+                          </a:solidFill>
+                          <a:latin typeface="Lato"/>
+                        </a:defRPr>
+                      </a:pPr>
+                      <a:r>
+                        <a:t>0.70</a:t>
+                      </a:r>
+                    </a:p>
+                    <a:p>
+                      <a:pPr>
+                        <a:spcAft>
+                          <a:spcPts val="100"/>
+                        </a:spcAft>
+                        <a:defRPr sz="1050" b="0">
+                          <a:solidFill>
+                            <a:srgbClr val="11151A"/>
+                          </a:solidFill>
+                          <a:latin typeface="Lato"/>
+                        </a:defRPr>
+                      </a:pPr>
+                      <a:r>
+                        <a:t>no source</a:t>
+                      </a:r>
+                    </a:p>
+                  </a:txBody>
+                  <a:tcPr marL="64008" marR="64008" marT="54864" marB="27432" anchor="t">
+                    <a:lnL w="0">
+                      <a:noFill/>
+                    </a:lnL>
+                    <a:lnR w="0">
+                      <a:noFill/>
+                    </a:lnR>
+                    <a:lnT w="0">
+                      <a:noFill/>
+                    </a:lnT>
+                    <a:lnB w="5080">
+                      <a:solidFill>
+                        <a:srgbClr val="B8B8B8"/>
+                      </a:solidFill>
+                    </a:lnB>
+                    <a:solidFill>
+                      <a:srgbClr val="FFFFFF"/>
+                    </a:solidFill>
+                  </a:tcPr>
+                </a:tc>
+                <a:tc>
+                  <a:txBody>
+                    <a:bodyPr/>
+                    <a:lstStyle/>
+                    <a:p>
+                      <a:pPr>
+                        <a:spcAft>
+                          <a:spcPts val="100"/>
+                        </a:spcAft>
+                        <a:defRPr sz="1050" b="0">
+                          <a:solidFill>
+                            <a:srgbClr val="11151A"/>
+                          </a:solidFill>
+                          <a:latin typeface="Lato"/>
+                        </a:defRPr>
+                      </a:pPr>
+                      <a:r>
+                        <a:t>1.06 for 2021</a:t>
+                      </a:r>
+                    </a:p>
+                    <a:p>
+                      <a:pPr>
+                        <a:spcAft>
+                          <a:spcPts val="100"/>
+                        </a:spcAft>
+                        <a:defRPr sz="1050" b="0">
+                          <a:solidFill>
+                            <a:srgbClr val="11151A"/>
+                          </a:solidFill>
+                          <a:latin typeface="Lato"/>
+                        </a:defRPr>
+                      </a:pPr>
+                      <a:r>
+                        <a:t>energy balance, agriculture and forestry</a:t>
+                      </a:r>
+                    </a:p>
+                  </a:txBody>
+                  <a:tcPr marL="64008" marR="64008" marT="54864" marB="27432" anchor="t">
+                    <a:lnL w="0">
+                      <a:noFill/>
+                    </a:lnL>
+                    <a:lnR w="0">
+                      <a:noFill/>
+                    </a:lnR>
+                    <a:lnT w="0">
+                      <a:noFill/>
+                    </a:lnT>
+                    <a:lnB w="5080">
+                      <a:solidFill>
+                        <a:srgbClr val="B8B8B8"/>
+                      </a:solidFill>
+                    </a:lnB>
+                    <a:solidFill>
+                      <a:srgbClr val="FFFFFF"/>
+                    </a:solidFill>
+                  </a:tcPr>
+                </a:tc>
+                <a:tc>
+                  <a:txBody>
+                    <a:bodyPr/>
+                    <a:lstStyle/>
+                    <a:p>
+                      <a:pPr>
+                        <a:spcAft>
+                          <a:spcPts val="100"/>
+                        </a:spcAft>
+                        <a:defRPr sz="1050" b="0">
+                          <a:solidFill>
+                            <a:srgbClr val="11151A"/>
+                          </a:solidFill>
+                          <a:latin typeface="Lato"/>
+                        </a:defRPr>
+                      </a:pPr>
+                      <a:r>
+                        <a:t>0.90-1.09 in eight of ten years, 2012-2021; 1.89 and 1.88 in 2016 and 2017</a:t>
+                      </a:r>
+                    </a:p>
+                  </a:txBody>
+                  <a:tcPr marL="64008" marR="64008" marT="54864" marB="27432" anchor="t">
+                    <a:lnL w="0">
+                      <a:noFill/>
+                    </a:lnL>
+                    <a:lnR w="0">
+                      <a:noFill/>
+                    </a:lnR>
+                    <a:lnT w="0">
+                      <a:noFill/>
+                    </a:lnT>
+                    <a:lnB w="5080">
+                      <a:solidFill>
+                        <a:srgbClr val="B8B8B8"/>
+                      </a:solidFill>
+                    </a:lnB>
+                    <a:solidFill>
+                      <a:srgbClr val="FFFFFF"/>
+                    </a:solidFill>
+                  </a:tcPr>
+                </a:tc>
+                <a:tc>
+                  <a:txBody>
+                    <a:bodyPr/>
+                    <a:lstStyle/>
+                    <a:p>
+                      <a:pPr>
+                        <a:spcAft>
+                          <a:spcPts val="100"/>
+                        </a:spcAft>
+                        <a:defRPr sz="1050" b="0">
+                          <a:solidFill>
+                            <a:srgbClr val="11151A"/>
+                          </a:solidFill>
+                          <a:latin typeface="Lato"/>
+                        </a:defRPr>
+                      </a:pPr>
+                      <a:r>
+                        <a:t>1.06</a:t>
+                      </a:r>
+                    </a:p>
+                    <a:p>
+                      <a:pPr>
+                        <a:spcAft>
+                          <a:spcPts val="100"/>
+                        </a:spcAft>
+                        <a:defRPr sz="1050" b="0">
+                          <a:solidFill>
+                            <a:srgbClr val="11151A"/>
+                          </a:solidFill>
+                          <a:latin typeface="Lato"/>
+                        </a:defRPr>
+                      </a:pPr>
+                      <a:r>
+                        <a:t>provisional, about +/-0.1</a:t>
+                      </a:r>
+                    </a:p>
+                  </a:txBody>
+                  <a:tcPr marL="64008" marR="64008" marT="54864" marB="27432" anchor="t">
+                    <a:lnL w="0">
+                      <a:noFill/>
+                    </a:lnL>
+                    <a:lnR w="0">
+                      <a:noFill/>
+                    </a:lnR>
+                    <a:lnT w="0">
+                      <a:noFill/>
+                    </a:lnT>
+                    <a:lnB w="5080">
+                      <a:solidFill>
+                        <a:srgbClr val="B8B8B8"/>
+                      </a:solidFill>
+                    </a:lnB>
+                    <a:solidFill>
+                      <a:srgbClr val="FFFFFF"/>
+                    </a:solidFill>
+                  </a:tcPr>
+                </a:tc>
+                <a:tc>
+                  <a:txBody>
+                    <a:bodyPr/>
+                    <a:lstStyle/>
+                    <a:p>
+                      <a:pPr>
+                        <a:spcAft>
+                          <a:spcPts val="100"/>
+                        </a:spcAft>
+                        <a:defRPr sz="1050" b="0">
+                          <a:solidFill>
+                            <a:srgbClr val="11151A"/>
+                          </a:solidFill>
+                          <a:latin typeface="Lato"/>
+                        </a:defRPr>
+                      </a:pPr>
+                      <a:r>
+                        <a:t>+0.36; +0.36</a:t>
+                      </a:r>
+                    </a:p>
+                  </a:txBody>
+                  <a:tcPr marL="64008" marR="64008" marT="54864" marB="27432" anchor="t">
+                    <a:lnL w="0">
+                      <a:noFill/>
+                    </a:lnL>
+                    <a:lnR w="0">
+                      <a:noFill/>
+                    </a:lnR>
+                    <a:lnT w="0">
+                      <a:noFill/>
+                    </a:lnT>
+                    <a:lnB w="5080">
+                      <a:solidFill>
+                        <a:srgbClr val="B8B8B8"/>
+                      </a:solidFill>
+                    </a:lnB>
+                    <a:solidFill>
+                      <a:srgbClr val="FFFFFF"/>
+                    </a:solidFill>
+                  </a:tcPr>
+                </a:tc>
+              </a:tr>
+              <a:tr h="662940">
+                <a:tc>
+                  <a:txBody>
+                    <a:bodyPr/>
+                    <a:lstStyle/>
+                    <a:p>
+                      <a:pPr>
+                        <a:spcAft>
+                          <a:spcPts val="100"/>
+                        </a:spcAft>
+                        <a:defRPr sz="1050" b="1">
+                          <a:solidFill>
+                            <a:srgbClr val="0A2373"/>
+                          </a:solidFill>
+                          <a:latin typeface="Lato"/>
+                        </a:defRPr>
+                      </a:pPr>
+                      <a:r>
+                        <a:t>Industry</a:t>
+                      </a:r>
+                    </a:p>
+                  </a:txBody>
+                  <a:tcPr marL="64008" marR="64008" marT="54864" marB="27432" anchor="t">
+                    <a:lnL w="0">
+                      <a:noFill/>
+                    </a:lnL>
+                    <a:lnR w="0">
+                      <a:noFill/>
+                    </a:lnR>
+                    <a:lnT w="0">
+                      <a:noFill/>
+                    </a:lnT>
+                    <a:lnB w="5080">
+                      <a:solidFill>
+                        <a:srgbClr val="B8B8B8"/>
+                      </a:solidFill>
+                    </a:lnB>
+                    <a:solidFill>
+                      <a:srgbClr val="FFFFFF"/>
+                    </a:solidFill>
+                  </a:tcPr>
+                </a:tc>
+                <a:tc>
+                  <a:txBody>
+                    <a:bodyPr/>
+                    <a:lstStyle/>
+                    <a:p>
+                      <a:pPr>
+                        <a:spcAft>
+                          <a:spcPts val="100"/>
+                        </a:spcAft>
+                        <a:defRPr sz="1050" b="0">
+                          <a:solidFill>
+                            <a:srgbClr val="11151A"/>
+                          </a:solidFill>
+                          <a:latin typeface="Lato"/>
+                        </a:defRPr>
+                      </a:pPr>
+                      <a:r>
+                        <a:t>2.50</a:t>
+                      </a:r>
+                    </a:p>
+                    <a:p>
+                      <a:pPr>
+                        <a:spcAft>
+                          <a:spcPts val="100"/>
+                        </a:spcAft>
+                        <a:defRPr sz="1050" b="0">
+                          <a:solidFill>
+                            <a:srgbClr val="11151A"/>
+                          </a:solidFill>
+                          <a:latin typeface="Lato"/>
+                        </a:defRPr>
+                      </a:pPr>
+                      <a:r>
+                        <a:t>no source</a:t>
+                      </a:r>
+                    </a:p>
+                  </a:txBody>
+                  <a:tcPr marL="64008" marR="64008" marT="54864" marB="27432" anchor="t">
+                    <a:lnL w="0">
+                      <a:noFill/>
+                    </a:lnL>
+                    <a:lnR w="0">
+                      <a:noFill/>
+                    </a:lnR>
+                    <a:lnT w="0">
+                      <a:noFill/>
+                    </a:lnT>
+                    <a:lnB w="5080">
+                      <a:solidFill>
+                        <a:srgbClr val="B8B8B8"/>
+                      </a:solidFill>
+                    </a:lnB>
+                    <a:solidFill>
+                      <a:srgbClr val="FFFFFF"/>
+                    </a:solidFill>
+                  </a:tcPr>
+                </a:tc>
+                <a:tc>
+                  <a:txBody>
+                    <a:bodyPr/>
+                    <a:lstStyle/>
+                    <a:p>
+                      <a:pPr>
+                        <a:spcAft>
+                          <a:spcPts val="100"/>
+                        </a:spcAft>
+                        <a:defRPr sz="1050" b="0">
+                          <a:solidFill>
+                            <a:srgbClr val="11151A"/>
+                          </a:solidFill>
+                          <a:latin typeface="Lato"/>
+                        </a:defRPr>
+                      </a:pPr>
+                      <a:r>
+                        <a:t>1.50 for 2021</a:t>
+                      </a:r>
+                    </a:p>
+                    <a:p>
+                      <a:pPr>
+                        <a:spcAft>
+                          <a:spcPts val="100"/>
+                        </a:spcAft>
+                        <a:defRPr sz="1050" b="0">
+                          <a:solidFill>
+                            <a:srgbClr val="11151A"/>
+                          </a:solidFill>
+                          <a:latin typeface="Lato"/>
+                        </a:defRPr>
+                      </a:pPr>
+                      <a:r>
+                        <a:t>energy balance, industry; mining is 1.29 of it</a:t>
+                      </a:r>
+                    </a:p>
+                  </a:txBody>
+                  <a:tcPr marL="64008" marR="64008" marT="54864" marB="27432" anchor="t">
+                    <a:lnL w="0">
+                      <a:noFill/>
+                    </a:lnL>
+                    <a:lnR w="0">
+                      <a:noFill/>
+                    </a:lnR>
+                    <a:lnT w="0">
+                      <a:noFill/>
+                    </a:lnT>
+                    <a:lnB w="5080">
+                      <a:solidFill>
+                        <a:srgbClr val="B8B8B8"/>
+                      </a:solidFill>
+                    </a:lnB>
+                    <a:solidFill>
+                      <a:srgbClr val="FFFFFF"/>
+                    </a:solidFill>
+                  </a:tcPr>
+                </a:tc>
+                <a:tc>
+                  <a:txBody>
+                    <a:bodyPr/>
+                    <a:lstStyle/>
+                    <a:p>
+                      <a:pPr>
+                        <a:spcAft>
+                          <a:spcPts val="100"/>
+                        </a:spcAft>
+                        <a:defRPr sz="1050" b="0">
+                          <a:solidFill>
+                            <a:srgbClr val="11151A"/>
+                          </a:solidFill>
+                          <a:latin typeface="Lato"/>
+                        </a:defRPr>
+                      </a:pPr>
+                      <a:r>
+                        <a:t>1.32-1.93 over 2012-2021. Mining volume is 7% lower in 2024 than 2021, which would give 1.40</a:t>
+                      </a:r>
+                    </a:p>
+                  </a:txBody>
+                  <a:tcPr marL="64008" marR="64008" marT="54864" marB="27432" anchor="t">
+                    <a:lnL w="0">
+                      <a:noFill/>
+                    </a:lnL>
+                    <a:lnR w="0">
+                      <a:noFill/>
+                    </a:lnR>
+                    <a:lnT w="0">
+                      <a:noFill/>
+                    </a:lnT>
+                    <a:lnB w="5080">
+                      <a:solidFill>
+                        <a:srgbClr val="B8B8B8"/>
+                      </a:solidFill>
+                    </a:lnB>
+                    <a:solidFill>
+                      <a:srgbClr val="FFFFFF"/>
+                    </a:solidFill>
+                  </a:tcPr>
+                </a:tc>
+                <a:tc>
+                  <a:txBody>
+                    <a:bodyPr/>
+                    <a:lstStyle/>
+                    <a:p>
+                      <a:pPr>
+                        <a:spcAft>
+                          <a:spcPts val="100"/>
+                        </a:spcAft>
+                        <a:defRPr sz="1050" b="0">
+                          <a:solidFill>
+                            <a:srgbClr val="11151A"/>
+                          </a:solidFill>
+                          <a:latin typeface="Lato"/>
+                        </a:defRPr>
+                      </a:pPr>
+                      <a:r>
+                        <a:t>1.50</a:t>
+                      </a:r>
+                    </a:p>
+                    <a:p>
+                      <a:pPr>
+                        <a:spcAft>
+                          <a:spcPts val="100"/>
+                        </a:spcAft>
+                        <a:defRPr sz="1050" b="0">
+                          <a:solidFill>
+                            <a:srgbClr val="11151A"/>
+                          </a:solidFill>
+                          <a:latin typeface="Lato"/>
+                        </a:defRPr>
+                      </a:pPr>
+                      <a:r>
+                        <a:t>provisional, about +/-0.3</a:t>
+                      </a:r>
+                    </a:p>
+                  </a:txBody>
+                  <a:tcPr marL="64008" marR="64008" marT="54864" marB="27432" anchor="t">
+                    <a:lnL w="0">
+                      <a:noFill/>
+                    </a:lnL>
+                    <a:lnR w="0">
+                      <a:noFill/>
+                    </a:lnR>
+                    <a:lnT w="0">
+                      <a:noFill/>
+                    </a:lnT>
+                    <a:lnB w="5080">
+                      <a:solidFill>
+                        <a:srgbClr val="B8B8B8"/>
+                      </a:solidFill>
+                    </a:lnB>
+                    <a:solidFill>
+                      <a:srgbClr val="FFFFFF"/>
+                    </a:solidFill>
+                  </a:tcPr>
+                </a:tc>
+                <a:tc>
+                  <a:txBody>
+                    <a:bodyPr/>
+                    <a:lstStyle/>
+                    <a:p>
+                      <a:pPr>
+                        <a:spcAft>
+                          <a:spcPts val="100"/>
+                        </a:spcAft>
+                        <a:defRPr sz="1050" b="0">
+                          <a:solidFill>
+                            <a:srgbClr val="11151A"/>
+                          </a:solidFill>
+                          <a:latin typeface="Lato"/>
+                        </a:defRPr>
+                      </a:pPr>
+                      <a:r>
+                        <a:t>-0.99; -1.06 (high), -1.00 (low)</a:t>
+                      </a:r>
+                    </a:p>
+                  </a:txBody>
+                  <a:tcPr marL="64008" marR="64008" marT="54864" marB="27432" anchor="t">
+                    <a:lnL w="0">
+                      <a:noFill/>
+                    </a:lnL>
+                    <a:lnR w="0">
+                      <a:noFill/>
+                    </a:lnR>
+                    <a:lnT w="0">
+                      <a:noFill/>
+                    </a:lnT>
+                    <a:lnB w="5080">
+                      <a:solidFill>
+                        <a:srgbClr val="B8B8B8"/>
+                      </a:solidFill>
+                    </a:lnB>
+                    <a:solidFill>
+                      <a:srgbClr val="FFFFFF"/>
+                    </a:solidFill>
+                  </a:tcPr>
+                </a:tc>
+              </a:tr>
+              <a:tr h="662940">
+                <a:tc>
+                  <a:txBody>
+                    <a:bodyPr/>
+                    <a:lstStyle/>
+                    <a:p>
+                      <a:pPr>
+                        <a:spcAft>
+                          <a:spcPts val="100"/>
+                        </a:spcAft>
+                        <a:defRPr sz="1050" b="1">
+                          <a:solidFill>
+                            <a:srgbClr val="0A2373"/>
+                          </a:solidFill>
+                          <a:latin typeface="Lato"/>
+                        </a:defRPr>
+                      </a:pPr>
+                      <a:r>
+                        <a:t>Both</a:t>
+                      </a:r>
+                    </a:p>
+                  </a:txBody>
+                  <a:tcPr marL="64008" marR="64008" marT="54864" marB="27432" anchor="t">
+                    <a:lnL w="0">
+                      <a:noFill/>
+                    </a:lnL>
+                    <a:lnR w="0">
+                      <a:noFill/>
+                    </a:lnR>
+                    <a:lnT w="0">
+                      <a:noFill/>
+                    </a:lnT>
+                    <a:lnB w="5080">
+                      <a:solidFill>
+                        <a:srgbClr val="B8B8B8"/>
+                      </a:solidFill>
+                    </a:lnB>
+                    <a:solidFill>
+                      <a:srgbClr val="FFFFFF"/>
+                    </a:solidFill>
+                  </a:tcPr>
+                </a:tc>
+                <a:tc>
+                  <a:txBody>
+                    <a:bodyPr/>
+                    <a:lstStyle/>
+                    <a:p>
+                      <a:pPr>
+                        <a:spcAft>
+                          <a:spcPts val="100"/>
+                        </a:spcAft>
+                        <a:defRPr sz="1050" b="0">
+                          <a:solidFill>
+                            <a:srgbClr val="11151A"/>
+                          </a:solidFill>
+                          <a:latin typeface="Lato"/>
+                        </a:defRPr>
+                      </a:pPr>
+                      <a:r>
+                        <a:t>3.20</a:t>
+                      </a:r>
+                    </a:p>
+                  </a:txBody>
+                  <a:tcPr marL="64008" marR="64008" marT="54864" marB="27432" anchor="t">
+                    <a:lnL w="0">
+                      <a:noFill/>
+                    </a:lnL>
+                    <a:lnR w="0">
+                      <a:noFill/>
+                    </a:lnR>
+                    <a:lnT w="0">
+                      <a:noFill/>
+                    </a:lnT>
+                    <a:lnB w="5080">
+                      <a:solidFill>
+                        <a:srgbClr val="B8B8B8"/>
+                      </a:solidFill>
+                    </a:lnB>
+                    <a:solidFill>
+                      <a:srgbClr val="FFFFFF"/>
+                    </a:solidFill>
+                  </a:tcPr>
+                </a:tc>
+                <a:tc>
+                  <a:txBody>
+                    <a:bodyPr/>
+                    <a:lstStyle/>
+                    <a:p>
+                      <a:pPr>
+                        <a:spcAft>
+                          <a:spcPts val="100"/>
+                        </a:spcAft>
+                        <a:defRPr sz="1050" b="0">
+                          <a:solidFill>
+                            <a:srgbClr val="11151A"/>
+                          </a:solidFill>
+                          <a:latin typeface="Lato"/>
+                        </a:defRPr>
+                      </a:pPr>
+                      <a:r>
+                        <a:t>2.56</a:t>
+                      </a:r>
+                    </a:p>
+                  </a:txBody>
+                  <a:tcPr marL="64008" marR="64008" marT="54864" marB="27432" anchor="t">
+                    <a:lnL w="0">
+                      <a:noFill/>
+                    </a:lnL>
+                    <a:lnR w="0">
+                      <a:noFill/>
+                    </a:lnR>
+                    <a:lnT w="0">
+                      <a:noFill/>
+                    </a:lnT>
+                    <a:lnB w="5080">
+                      <a:solidFill>
+                        <a:srgbClr val="B8B8B8"/>
+                      </a:solidFill>
+                    </a:lnB>
+                    <a:solidFill>
+                      <a:srgbClr val="FFFFFF"/>
+                    </a:solidFill>
+                  </a:tcPr>
+                </a:tc>
+                <a:tc>
+                  <a:txBody>
+                    <a:bodyPr/>
+                    <a:lstStyle/>
+                    <a:p>
+                      <a:pPr>
+                        <a:spcAft>
+                          <a:spcPts val="100"/>
+                        </a:spcAft>
+                        <a:defRPr sz="1050" b="0">
+                          <a:solidFill>
+                            <a:srgbClr val="11151A"/>
+                          </a:solidFill>
+                          <a:latin typeface="Lato"/>
+                        </a:defRPr>
+                      </a:pPr>
+                    </a:p>
+                  </a:txBody>
+                  <a:tcPr marL="64008" marR="64008" marT="54864" marB="27432" anchor="t">
+                    <a:lnL w="0">
+                      <a:noFill/>
+                    </a:lnL>
+                    <a:lnR w="0">
+                      <a:noFill/>
+                    </a:lnR>
+                    <a:lnT w="0">
+                      <a:noFill/>
+                    </a:lnT>
+                    <a:lnB w="5080">
+                      <a:solidFill>
+                        <a:srgbClr val="B8B8B8"/>
+                      </a:solidFill>
+                    </a:lnB>
+                    <a:solidFill>
+                      <a:srgbClr val="FFFFFF"/>
+                    </a:solidFill>
+                  </a:tcPr>
+                </a:tc>
+                <a:tc>
+                  <a:txBody>
+                    <a:bodyPr/>
+                    <a:lstStyle/>
+                    <a:p>
+                      <a:pPr>
+                        <a:spcAft>
+                          <a:spcPts val="100"/>
+                        </a:spcAft>
+                        <a:defRPr sz="1050" b="0">
+                          <a:solidFill>
+                            <a:srgbClr val="11151A"/>
+                          </a:solidFill>
+                          <a:latin typeface="Lato"/>
+                        </a:defRPr>
+                      </a:pPr>
+                      <a:r>
+                        <a:t>2.56</a:t>
+                      </a:r>
+                    </a:p>
+                  </a:txBody>
+                  <a:tcPr marL="64008" marR="64008" marT="54864" marB="27432" anchor="t">
+                    <a:lnL w="0">
+                      <a:noFill/>
+                    </a:lnL>
+                    <a:lnR w="0">
+                      <a:noFill/>
+                    </a:lnR>
+                    <a:lnT w="0">
+                      <a:noFill/>
+                    </a:lnT>
+                    <a:lnB w="5080">
+                      <a:solidFill>
+                        <a:srgbClr val="B8B8B8"/>
+                      </a:solidFill>
+                    </a:lnB>
+                    <a:solidFill>
+                      <a:srgbClr val="FFFFFF"/>
+                    </a:solidFill>
+                  </a:tcPr>
+                </a:tc>
+                <a:tc>
+                  <a:txBody>
+                    <a:bodyPr/>
+                    <a:lstStyle/>
+                    <a:p>
+                      <a:pPr>
+                        <a:spcAft>
+                          <a:spcPts val="100"/>
+                        </a:spcAft>
+                        <a:defRPr sz="1050" b="0">
+                          <a:solidFill>
+                            <a:srgbClr val="11151A"/>
+                          </a:solidFill>
+                          <a:latin typeface="Lato"/>
+                        </a:defRPr>
+                      </a:pPr>
+                      <a:r>
+                        <a:t>-0.63; -0.69 (high), -0.64 (low)</a:t>
+                      </a:r>
+                    </a:p>
+                  </a:txBody>
+                  <a:tcPr marL="64008" marR="64008" marT="54864" marB="27432" anchor="t">
+                    <a:lnL w="0">
+                      <a:noFill/>
+                    </a:lnL>
+                    <a:lnR w="0">
+                      <a:noFill/>
+                    </a:lnR>
+                    <a:lnT w="0">
+                      <a:noFill/>
+                    </a:lnT>
+                    <a:lnB w="5080">
+                      <a:solidFill>
+                        <a:srgbClr val="B8B8B8"/>
+                      </a:solidFill>
+                    </a:lnB>
+                    <a:solidFill>
+                      <a:srgbClr val="FFFFFF"/>
+                    </a:solidFill>
+                  </a:tcPr>
+                </a:tc>
+              </a:tr>
+            </a:tbl>
+          </a:graphicData>
+        </a:graphic>
+      </p:graphicFrame>
+      <p:sp>
+        <p:nvSpPr>
+          <p:cNvPr id="8" name="TextBox 7"/>
+          <p:cNvSpPr txBox="1"/>
+          <p:nvPr/>
+        </p:nvSpPr>
+        <p:spPr>
+          <a:xfrm>
+            <a:off x="457200" y="4983480"/>
+            <a:ext cx="10652760" cy="1097280"/>
+          </a:xfrm>
+          <a:prstGeom prst="rect">
+            <a:avLst/>
+          </a:prstGeom>
+          <a:noFill/>
+        </p:spPr>
+        <p:txBody>
+          <a:bodyPr wrap="square" lIns="22860" rIns="22860" tIns="0" bIns="0">
+            <a:spAutoFit/>
+          </a:bodyPr>
+          <a:lstStyle/>
+          <a:p>
+            <a:pPr>
+              <a:spcAft>
+                <a:spcPts val="300"/>
+              </a:spcAft>
+              <a:defRPr sz="1100" b="0">
+                <a:solidFill>
+                  <a:srgbClr val="11151A"/>
+                </a:solidFill>
+                <a:latin typeface="Lato"/>
+              </a:defRPr>
+            </a:pPr>
+            <a:r>
+              <a:t>Why 2021 and not an average: it is the latest balance and one consistent year for both sectors. A 2018-2021 average gives 0.98 and 1.68; the industry average is pulled up by the years before mining output fell.</a:t>
+            </a:r>
+          </a:p>
+          <a:p>
+            <a:pPr>
+              <a:spcAft>
+                <a:spcPts val="300"/>
+              </a:spcAft>
+              <a:defRPr sz="1100" b="0">
+                <a:solidFill>
+                  <a:srgbClr val="11151A"/>
+                </a:solidFill>
+                <a:latin typeface="Lato"/>
+              </a:defRPr>
+            </a:pPr>
+            <a:r>
+              <a:t>Decision for Nigel: accept both as provisional, or take the activity-adjusted 1.40 for industry. Both keep the needs-verification flag.</a:t>
+            </a:r>
+          </a:p>
+        </p:txBody>
+      </p:sp>
+      <p:sp>
+        <p:nvSpPr>
+          <p:cNvPr id="9" name="Chevron 8">
+            <a:hlinkClick action="ppaction://hlinksldjump" r:id="rId2"/>
+          </p:cNvPr>
+          <p:cNvSpPr/>
+          <p:nvPr/>
+        </p:nvSpPr>
+        <p:spPr>
+          <a:xfrm>
+            <a:off x="457200" y="73152"/>
+            <a:ext cx="2075688" cy="384048"/>
+          </a:xfrm>
+          <a:prstGeom prst="chevron">
+            <a:avLst>
+              <a:gd name="adj" fmla="val 12000"/>
+            </a:avLst>
+          </a:prstGeom>
+          <a:solidFill>
+            <a:srgbClr val="EEEEEE"/>
+          </a:solidFill>
+          <a:ln>
+            <a:noFill/>
+          </a:ln>
+        </p:spPr>
+        <p:style>
+          <a:lnRef idx="1">
+            <a:schemeClr val="accent1"/>
+          </a:lnRef>
+          <a:fillRef idx="3">
+            <a:schemeClr val="accent1"/>
+          </a:fillRef>
+          <a:effectRef idx="2">
+            <a:schemeClr val="accent1"/>
+          </a:effectRef>
+          <a:fontRef idx="minor">
+            <a:schemeClr val="lt1"/>
+          </a:fontRef>
+        </p:style>
+        <p:txBody>
+          <a:bodyPr rtlCol="0" anchor="ctr" tIns="0" bIns="0"/>
+          <a:lstStyle/>
+          <a:p>
+            <a:pPr algn="ctr">
+              <a:defRPr sz="1100" b="0">
+                <a:solidFill>
+                  <a:srgbClr val="0A2373"/>
+                </a:solidFill>
+                <a:latin typeface="Lato"/>
+              </a:defRPr>
+            </a:pPr>
+            <a:r>
+              <a:t>1  National balance</a:t>
+            </a:r>
+          </a:p>
+        </p:txBody>
+      </p:sp>
+      <p:sp>
+        <p:nvSpPr>
+          <p:cNvPr id="10" name="Chevron 9">
+            <a:hlinkClick action="ppaction://hlinksldjump" r:id="rId3"/>
+          </p:cNvPr>
+          <p:cNvSpPr/>
+          <p:nvPr/>
+        </p:nvSpPr>
+        <p:spPr>
+          <a:xfrm>
+            <a:off x="2587752" y="73152"/>
+            <a:ext cx="2075688" cy="384048"/>
+          </a:xfrm>
+          <a:prstGeom prst="chevron">
+            <a:avLst>
+              <a:gd name="adj" fmla="val 12000"/>
+            </a:avLst>
+          </a:prstGeom>
+          <a:solidFill>
+            <a:srgbClr val="EEEEEE"/>
+          </a:solidFill>
+          <a:ln>
+            <a:noFill/>
+          </a:ln>
+        </p:spPr>
+        <p:style>
+          <a:lnRef idx="1">
+            <a:schemeClr val="accent1"/>
+          </a:lnRef>
+          <a:fillRef idx="3">
+            <a:schemeClr val="accent1"/>
+          </a:fillRef>
+          <a:effectRef idx="2">
+            <a:schemeClr val="accent1"/>
+          </a:effectRef>
+          <a:fontRef idx="minor">
+            <a:schemeClr val="lt1"/>
+          </a:fontRef>
+        </p:style>
+        <p:txBody>
+          <a:bodyPr rtlCol="0" anchor="ctr" tIns="0" bIns="0"/>
+          <a:lstStyle/>
+          <a:p>
+            <a:pPr algn="ctr">
+              <a:defRPr sz="1100" b="0">
+                <a:solidFill>
+                  <a:srgbClr val="0A2373"/>
+                </a:solidFill>
+                <a:latin typeface="Lato"/>
+              </a:defRPr>
+            </a:pPr>
+            <a:r>
+              <a:t>2  Forecast levers</a:t>
+            </a:r>
+          </a:p>
+        </p:txBody>
+      </p:sp>
+      <p:sp>
+        <p:nvSpPr>
+          <p:cNvPr id="11" name="Chevron 10">
+            <a:hlinkClick action="ppaction://hlinksldjump" r:id="rId4"/>
+          </p:cNvPr>
+          <p:cNvSpPr/>
+          <p:nvPr/>
+        </p:nvSpPr>
+        <p:spPr>
+          <a:xfrm>
+            <a:off x="4718304" y="73152"/>
+            <a:ext cx="2075688" cy="384048"/>
+          </a:xfrm>
+          <a:prstGeom prst="chevron">
+            <a:avLst>
+              <a:gd name="adj" fmla="val 12000"/>
+            </a:avLst>
+          </a:prstGeom>
+          <a:solidFill>
+            <a:srgbClr val="0A2373"/>
+          </a:solidFill>
+          <a:ln>
+            <a:noFill/>
+          </a:ln>
+        </p:spPr>
+        <p:style>
+          <a:lnRef idx="1">
+            <a:schemeClr val="accent1"/>
+          </a:lnRef>
+          <a:fillRef idx="3">
+            <a:schemeClr val="accent1"/>
+          </a:fillRef>
+          <a:effectRef idx="2">
+            <a:schemeClr val="accent1"/>
+          </a:effectRef>
+          <a:fontRef idx="minor">
+            <a:schemeClr val="lt1"/>
+          </a:fontRef>
+        </p:style>
+        <p:txBody>
+          <a:bodyPr rtlCol="0" anchor="ctr" tIns="0" bIns="0"/>
+          <a:lstStyle/>
+          <a:p>
+            <a:pPr algn="ctr">
+              <a:defRPr sz="1100" b="1">
+                <a:solidFill>
+                  <a:srgbClr val="FFFFFF"/>
+                </a:solidFill>
+                <a:latin typeface="Lato"/>
+              </a:defRPr>
+            </a:pPr>
+            <a:r>
+              <a:t>3  Sector baselines</a:t>
+            </a:r>
+          </a:p>
+        </p:txBody>
+      </p:sp>
+      <p:sp>
+        <p:nvSpPr>
+          <p:cNvPr id="12" name="Chevron 11"/>
+          <p:cNvSpPr/>
+          <p:nvPr/>
+        </p:nvSpPr>
+        <p:spPr>
+          <a:xfrm>
+            <a:off x="6848856" y="73152"/>
+            <a:ext cx="2075688" cy="384048"/>
+          </a:xfrm>
+          <a:prstGeom prst="chevron">
+            <a:avLst>
+              <a:gd name="adj" fmla="val 12000"/>
+            </a:avLst>
+          </a:prstGeom>
+          <a:solidFill>
+            <a:srgbClr val="EEEEEE"/>
+          </a:solidFill>
+          <a:ln>
+            <a:noFill/>
+          </a:ln>
+        </p:spPr>
+        <p:style>
+          <a:lnRef idx="1">
+            <a:schemeClr val="accent1"/>
+          </a:lnRef>
+          <a:fillRef idx="3">
+            <a:schemeClr val="accent1"/>
+          </a:fillRef>
+          <a:effectRef idx="2">
+            <a:schemeClr val="accent1"/>
+          </a:effectRef>
+          <a:fontRef idx="minor">
+            <a:schemeClr val="lt1"/>
+          </a:fontRef>
+        </p:style>
+        <p:txBody>
+          <a:bodyPr rtlCol="0" anchor="ctr" tIns="0" bIns="0"/>
+          <a:lstStyle/>
+          <a:p>
+            <a:pPr algn="ctr">
+              <a:defRPr sz="1100" b="0">
+                <a:solidFill>
+                  <a:srgbClr val="0A2373"/>
+                </a:solidFill>
+                <a:latin typeface="Lato"/>
+              </a:defRPr>
+            </a:pPr>
+            <a:r>
+              <a:t>4  Tank handling</a:t>
+            </a:r>
+          </a:p>
+        </p:txBody>
+      </p:sp>
+      <p:sp>
+        <p:nvSpPr>
+          <p:cNvPr id="13" name="Chevron 12"/>
           <p:cNvSpPr/>
           <p:nvPr/>
         </p:nvSpPr>

--- a/pptx/output/delivered/supporting/Vopak_Manish_Handback_2026_10_07.pptx
+++ b/pptx/output/delivered/supporting/Vopak_Manish_Handback_2026_10_07.pptx
@@ -17,6 +17,8 @@
     <p:sldId id="267" r:id="rId20"/>
     <p:sldId id="268" r:id="rId21"/>
     <p:sldId id="269" r:id="rId22"/>
+    <p:sldId id="270" r:id="rId23"/>
+    <p:sldId id="271" r:id="rId24"/>
     <p:sldId id="261" r:id="rId18"/>
   </p:sldIdLst>
   <p:sldSz cx="11588750" cy="6858000"/>
@@ -5922,7 +5924,9 @@
       </p:sp>
       <p:sp>
         <p:nvSpPr>
-          <p:cNvPr id="12" name="Chevron 11"/>
+          <p:cNvPr id="12" name="Chevron 11">
+            <a:hlinkClick action="ppaction://hlinksldjump" r:id="rId5"/>
+          </p:cNvPr>
           <p:cNvSpPr/>
           <p:nvPr/>
         </p:nvSpPr>
@@ -5965,6 +5969,3740 @@
               <a:defRPr sz="1100" b="0">
                 <a:solidFill>
                   <a:srgbClr val="0A2373"/>
+                </a:solidFill>
+                <a:latin typeface="Lato"/>
+              </a:defRPr>
+            </a:pPr>
+            <a:r>
+              <a:t>4  Tank handling</a:t>
+            </a:r>
+          </a:p>
+        </p:txBody>
+      </p:sp>
+      <p:sp>
+        <p:nvSpPr>
+          <p:cNvPr id="13" name="Chevron 12"/>
+          <p:cNvSpPr/>
+          <p:nvPr/>
+        </p:nvSpPr>
+        <p:spPr>
+          <a:xfrm>
+            <a:off x="8979408" y="73152"/>
+            <a:ext cx="2075688" cy="384048"/>
+          </a:xfrm>
+          <a:prstGeom prst="chevron">
+            <a:avLst>
+              <a:gd name="adj" fmla="val 12000"/>
+            </a:avLst>
+          </a:prstGeom>
+          <a:solidFill>
+            <a:srgbClr val="EEEEEE"/>
+          </a:solidFill>
+          <a:ln>
+            <a:noFill/>
+          </a:ln>
+        </p:spPr>
+        <p:style>
+          <a:lnRef idx="1">
+            <a:schemeClr val="accent1"/>
+          </a:lnRef>
+          <a:fillRef idx="3">
+            <a:schemeClr val="accent1"/>
+          </a:fillRef>
+          <a:effectRef idx="2">
+            <a:schemeClr val="accent1"/>
+          </a:effectRef>
+          <a:fontRef idx="minor">
+            <a:schemeClr val="lt1"/>
+          </a:fontRef>
+        </p:style>
+        <p:txBody>
+          <a:bodyPr rtlCol="0" anchor="ctr" tIns="0" bIns="0"/>
+          <a:lstStyle/>
+          <a:p>
+            <a:pPr algn="ctr">
+              <a:defRPr sz="1100" b="0">
+                <a:solidFill>
+                  <a:srgbClr val="0A2373"/>
+                </a:solidFill>
+                <a:latin typeface="Lato"/>
+              </a:defRPr>
+            </a:pPr>
+            <a:r>
+              <a:t>5  Hand-back</a:t>
+            </a:r>
+          </a:p>
+        </p:txBody>
+      </p:sp>
+    </p:spTree>
+  </p:cSld>
+  <p:clrMapOvr>
+    <a:masterClrMapping/>
+  </p:clrMapOvr>
+</p:sld>
+</file>
+
+<file path=ppt/slides/slide11.xml><?xml version="1.0" encoding="utf-8"?>
+<p:sld xmlns:a="http://schemas.openxmlformats.org/drawingml/2006/main" xmlns:p="http://schemas.openxmlformats.org/presentationml/2006/main" xmlns:r="http://schemas.openxmlformats.org/officeDocument/2006/relationships">
+  <p:cSld>
+    <p:spTree>
+      <p:nvGrpSpPr>
+        <p:cNvPr id="1" name=""/>
+        <p:cNvGrpSpPr/>
+        <p:nvPr/>
+      </p:nvGrpSpPr>
+      <p:grpSpPr/>
+      <p:sp>
+        <p:nvSpPr>
+          <p:cNvPr id="2" name="Title 1"/>
+          <p:cNvSpPr>
+            <a:spLocks noGrp="1"/>
+          </p:cNvSpPr>
+          <p:nvPr>
+            <p:ph type="title"/>
+          </p:nvPr>
+        </p:nvSpPr>
+        <p:spPr/>
+        <p:txBody>
+          <a:bodyPr/>
+          <a:lstStyle/>
+          <a:p>
+            <a:r>
+              <a:t>Lesedi: eight loading bays cap the high case near 2.4 turns a month, not 3</a:t>
+            </a:r>
+          </a:p>
+        </p:txBody>
+      </p:sp>
+      <p:sp>
+        <p:nvSpPr>
+          <p:cNvPr id="3" name="TextBox 2"/>
+          <p:cNvSpPr txBox="1"/>
+          <p:nvPr/>
+        </p:nvSpPr>
+        <p:spPr>
+          <a:xfrm>
+            <a:off x="457200" y="1627632"/>
+            <a:ext cx="10652760" cy="274320"/>
+          </a:xfrm>
+          <a:prstGeom prst="rect">
+            <a:avLst/>
+          </a:prstGeom>
+          <a:noFill/>
+        </p:spPr>
+        <p:txBody>
+          <a:bodyPr wrap="square" lIns="22860" rIns="22860" tIns="0" bIns="0">
+            <a:spAutoFit/>
+          </a:bodyPr>
+          <a:lstStyle/>
+          <a:p>
+            <a:pPr>
+              <a:spcAft>
+                <a:spcPts val="300"/>
+              </a:spcAft>
+              <a:defRPr sz="1300" b="1">
+                <a:solidFill>
+                  <a:srgbClr val="11151A"/>
+                </a:solidFill>
+                <a:latin typeface="Lato"/>
+              </a:defRPr>
+            </a:pPr>
+            <a:r>
+              <a:t>Vopak Lesedi, Jameson Park | proposed site assumptions | each row marked evidence or estimate</a:t>
+            </a:r>
+          </a:p>
+        </p:txBody>
+      </p:sp>
+      <p:cxnSp>
+        <p:nvCxnSpPr>
+          <p:cNvPr id="4" name="Connector 3"/>
+          <p:cNvCxnSpPr/>
+          <p:nvPr/>
+        </p:nvCxnSpPr>
+        <p:spPr>
+          <a:xfrm>
+            <a:off x="457200" y="1920240"/>
+            <a:ext cx="10652760" cy="0"/>
+          </a:xfrm>
+          <a:prstGeom prst="line">
+            <a:avLst/>
+          </a:prstGeom>
+          <a:ln w="7620">
+            <a:solidFill>
+              <a:srgbClr val="A0A0A0"/>
+            </a:solidFill>
+          </a:ln>
+        </p:spPr>
+        <p:style>
+          <a:lnRef idx="2">
+            <a:schemeClr val="accent1"/>
+          </a:lnRef>
+          <a:fillRef idx="0">
+            <a:schemeClr val="accent1"/>
+          </a:fillRef>
+          <a:effectRef idx="1">
+            <a:schemeClr val="accent1"/>
+          </a:effectRef>
+          <a:fontRef idx="minor">
+            <a:schemeClr val="tx1"/>
+          </a:fontRef>
+        </p:style>
+      </p:cxnSp>
+      <p:sp>
+        <p:nvSpPr>
+          <p:cNvPr id="5" name="TextBox 4"/>
+          <p:cNvSpPr txBox="1"/>
+          <p:nvPr/>
+        </p:nvSpPr>
+        <p:spPr>
+          <a:xfrm>
+            <a:off x="457200" y="6547104"/>
+            <a:ext cx="9692640" cy="182880"/>
+          </a:xfrm>
+          <a:prstGeom prst="rect">
+            <a:avLst/>
+          </a:prstGeom>
+          <a:noFill/>
+        </p:spPr>
+        <p:txBody>
+          <a:bodyPr wrap="square" lIns="22860" rIns="22860" tIns="0" bIns="0">
+            <a:spAutoFit/>
+          </a:bodyPr>
+          <a:lstStyle/>
+          <a:p>
+            <a:pPr>
+              <a:spcAft>
+                <a:spcPts val="300"/>
+              </a:spcAft>
+              <a:defRPr sz="800" b="0">
+                <a:solidFill>
+                  <a:srgbClr val="11151A"/>
+                </a:solidFill>
+                <a:latin typeface="Lato"/>
+              </a:defRPr>
+            </a:pPr>
+            <a:r>
+              <a:t>Source: terminal_site_assumptions.csv and tank_handling_site_assumptions_2026-10-07.md on manish-branch; NERSA licence documents, Vopak and Transnet. No Vopak operating data used.</a:t>
+            </a:r>
+          </a:p>
+        </p:txBody>
+      </p:sp>
+      <p:sp>
+        <p:nvSpPr>
+          <p:cNvPr id="6" name="TextBox 5"/>
+          <p:cNvSpPr txBox="1"/>
+          <p:nvPr/>
+        </p:nvSpPr>
+        <p:spPr>
+          <a:xfrm>
+            <a:off x="457200" y="6711696"/>
+            <a:ext cx="2011680" cy="128016"/>
+          </a:xfrm>
+          <a:prstGeom prst="rect">
+            <a:avLst/>
+          </a:prstGeom>
+          <a:noFill/>
+        </p:spPr>
+        <p:txBody>
+          <a:bodyPr wrap="square" lIns="22860" rIns="22860" tIns="0" bIns="0">
+            <a:spAutoFit/>
+          </a:bodyPr>
+          <a:lstStyle/>
+          <a:p>
+            <a:pPr>
+              <a:spcAft>
+                <a:spcPts val="300"/>
+              </a:spcAft>
+              <a:defRPr sz="700" b="0">
+                <a:solidFill>
+                  <a:srgbClr val="11151A"/>
+                </a:solidFill>
+                <a:latin typeface="Lato"/>
+              </a:defRPr>
+            </a:pPr>
+            <a:r>
+              <a:t>Strictly Confidential</a:t>
+            </a:r>
+          </a:p>
+        </p:txBody>
+      </p:sp>
+      <p:graphicFrame>
+        <p:nvGraphicFramePr>
+          <p:cNvPr id="7" name="Table 6"/>
+          <p:cNvGraphicFramePr>
+            <a:graphicFrameLocks noGrp="1"/>
+          </p:cNvGraphicFramePr>
+          <p:nvPr/>
+        </p:nvGraphicFramePr>
+        <p:xfrm>
+          <a:off x="457200" y="2029968"/>
+          <a:ext cx="10652760" cy="3657600"/>
+        </p:xfrm>
+        <a:graphic>
+          <a:graphicData uri="http://schemas.openxmlformats.org/drawingml/2006/table">
+            <a:tbl>
+              <a:tblPr firstRow="0" bandRow="0"/>
+              <a:tblGrid>
+                <a:gridCol w="1828800"/>
+                <a:gridCol w="4663440"/>
+                <a:gridCol w="1828800"/>
+                <a:gridCol w="2331720"/>
+              </a:tblGrid>
+              <a:tr h="457200">
+                <a:tc>
+                  <a:txBody>
+                    <a:bodyPr/>
+                    <a:lstStyle/>
+                    <a:p>
+                      <a:pPr>
+                        <a:spcAft>
+                          <a:spcPts val="100"/>
+                        </a:spcAft>
+                        <a:defRPr sz="1000" b="1">
+                          <a:solidFill>
+                            <a:srgbClr val="0A2373"/>
+                          </a:solidFill>
+                          <a:latin typeface="Lato"/>
+                        </a:defRPr>
+                      </a:pPr>
+                      <a:r>
+                        <a:t>Item</a:t>
+                      </a:r>
+                    </a:p>
+                  </a:txBody>
+                  <a:tcPr marL="64008" marR="64008" marT="54864" marB="27432" anchor="t">
+                    <a:lnL w="0">
+                      <a:noFill/>
+                    </a:lnL>
+                    <a:lnR w="0">
+                      <a:noFill/>
+                    </a:lnR>
+                    <a:lnT w="0">
+                      <a:noFill/>
+                    </a:lnT>
+                    <a:lnB w="5080">
+                      <a:solidFill>
+                        <a:srgbClr val="B8B8B8"/>
+                      </a:solidFill>
+                    </a:lnB>
+                    <a:solidFill>
+                      <a:srgbClr val="FFFFFF"/>
+                    </a:solidFill>
+                  </a:tcPr>
+                </a:tc>
+                <a:tc>
+                  <a:txBody>
+                    <a:bodyPr/>
+                    <a:lstStyle/>
+                    <a:p>
+                      <a:pPr>
+                        <a:spcAft>
+                          <a:spcPts val="100"/>
+                        </a:spcAft>
+                        <a:defRPr sz="1000" b="1">
+                          <a:solidFill>
+                            <a:srgbClr val="11151A"/>
+                          </a:solidFill>
+                          <a:latin typeface="Lato"/>
+                        </a:defRPr>
+                      </a:pPr>
+                      <a:r>
+                        <a:t>Value</a:t>
+                      </a:r>
+                    </a:p>
+                  </a:txBody>
+                  <a:tcPr marL="64008" marR="64008" marT="54864" marB="27432" anchor="t">
+                    <a:lnL w="0">
+                      <a:noFill/>
+                    </a:lnL>
+                    <a:lnR w="0">
+                      <a:noFill/>
+                    </a:lnR>
+                    <a:lnT w="0">
+                      <a:noFill/>
+                    </a:lnT>
+                    <a:lnB w="5080">
+                      <a:solidFill>
+                        <a:srgbClr val="B8B8B8"/>
+                      </a:solidFill>
+                    </a:lnB>
+                    <a:solidFill>
+                      <a:srgbClr val="FFFFFF"/>
+                    </a:solidFill>
+                  </a:tcPr>
+                </a:tc>
+                <a:tc>
+                  <a:txBody>
+                    <a:bodyPr/>
+                    <a:lstStyle/>
+                    <a:p>
+                      <a:pPr>
+                        <a:spcAft>
+                          <a:spcPts val="100"/>
+                        </a:spcAft>
+                        <a:defRPr sz="1000" b="1">
+                          <a:solidFill>
+                            <a:srgbClr val="11151A"/>
+                          </a:solidFill>
+                          <a:latin typeface="Lato"/>
+                        </a:defRPr>
+                      </a:pPr>
+                      <a:r>
+                        <a:t>Basis</a:t>
+                      </a:r>
+                    </a:p>
+                  </a:txBody>
+                  <a:tcPr marL="64008" marR="64008" marT="54864" marB="27432" anchor="t">
+                    <a:lnL w="0">
+                      <a:noFill/>
+                    </a:lnL>
+                    <a:lnR w="0">
+                      <a:noFill/>
+                    </a:lnR>
+                    <a:lnT w="0">
+                      <a:noFill/>
+                    </a:lnT>
+                    <a:lnB w="5080">
+                      <a:solidFill>
+                        <a:srgbClr val="B8B8B8"/>
+                      </a:solidFill>
+                    </a:lnB>
+                    <a:solidFill>
+                      <a:srgbClr val="FFFFFF"/>
+                    </a:solidFill>
+                  </a:tcPr>
+                </a:tc>
+                <a:tc>
+                  <a:txBody>
+                    <a:bodyPr/>
+                    <a:lstStyle/>
+                    <a:p>
+                      <a:pPr>
+                        <a:spcAft>
+                          <a:spcPts val="100"/>
+                        </a:spcAft>
+                        <a:defRPr sz="1000" b="1">
+                          <a:solidFill>
+                            <a:srgbClr val="11151A"/>
+                          </a:solidFill>
+                          <a:latin typeface="Lato"/>
+                        </a:defRPr>
+                      </a:pPr>
+                      <a:r>
+                        <a:t>Source</a:t>
+                      </a:r>
+                    </a:p>
+                  </a:txBody>
+                  <a:tcPr marL="64008" marR="64008" marT="54864" marB="27432" anchor="t">
+                    <a:lnL w="0">
+                      <a:noFill/>
+                    </a:lnL>
+                    <a:lnR w="0">
+                      <a:noFill/>
+                    </a:lnR>
+                    <a:lnT w="0">
+                      <a:noFill/>
+                    </a:lnT>
+                    <a:lnB w="5080">
+                      <a:solidFill>
+                        <a:srgbClr val="B8B8B8"/>
+                      </a:solidFill>
+                    </a:lnB>
+                    <a:solidFill>
+                      <a:srgbClr val="FFFFFF"/>
+                    </a:solidFill>
+                  </a:tcPr>
+                </a:tc>
+              </a:tr>
+              <a:tr h="457200">
+                <a:tc>
+                  <a:txBody>
+                    <a:bodyPr/>
+                    <a:lstStyle/>
+                    <a:p>
+                      <a:pPr>
+                        <a:spcAft>
+                          <a:spcPts val="100"/>
+                        </a:spcAft>
+                        <a:defRPr sz="1000" b="1">
+                          <a:solidFill>
+                            <a:srgbClr val="0A2373"/>
+                          </a:solidFill>
+                          <a:latin typeface="Lato"/>
+                        </a:defRPr>
+                      </a:pPr>
+                      <a:r>
+                        <a:t>Design capacity</a:t>
+                      </a:r>
+                    </a:p>
+                  </a:txBody>
+                  <a:tcPr marL="64008" marR="64008" marT="54864" marB="27432" anchor="t">
+                    <a:lnL w="0">
+                      <a:noFill/>
+                    </a:lnL>
+                    <a:lnR w="0">
+                      <a:noFill/>
+                    </a:lnR>
+                    <a:lnT w="0">
+                      <a:noFill/>
+                    </a:lnT>
+                    <a:lnB w="5080">
+                      <a:solidFill>
+                        <a:srgbClr val="B8B8B8"/>
+                      </a:solidFill>
+                    </a:lnB>
+                    <a:solidFill>
+                      <a:srgbClr val="FFFFFF"/>
+                    </a:solidFill>
+                  </a:tcPr>
+                </a:tc>
+                <a:tc>
+                  <a:txBody>
+                    <a:bodyPr/>
+                    <a:lstStyle/>
+                    <a:p>
+                      <a:pPr>
+                        <a:spcAft>
+                          <a:spcPts val="100"/>
+                        </a:spcAft>
+                        <a:defRPr sz="1000" b="0">
+                          <a:solidFill>
+                            <a:srgbClr val="11151A"/>
+                          </a:solidFill>
+                          <a:latin typeface="Lato"/>
+                        </a:defRPr>
+                      </a:pPr>
+                      <a:r>
+                        <a:t>140,000 m3: petrol 40,000, diesel 80,000, one 20,000 tank for either</a:t>
+                      </a:r>
+                    </a:p>
+                  </a:txBody>
+                  <a:tcPr marL="64008" marR="64008" marT="54864" marB="27432" anchor="t">
+                    <a:lnL w="0">
+                      <a:noFill/>
+                    </a:lnL>
+                    <a:lnR w="0">
+                      <a:noFill/>
+                    </a:lnR>
+                    <a:lnT w="0">
+                      <a:noFill/>
+                    </a:lnT>
+                    <a:lnB w="5080">
+                      <a:solidFill>
+                        <a:srgbClr val="B8B8B8"/>
+                      </a:solidFill>
+                    </a:lnB>
+                    <a:solidFill>
+                      <a:srgbClr val="FFFFFF"/>
+                    </a:solidFill>
+                  </a:tcPr>
+                </a:tc>
+                <a:tc>
+                  <a:txBody>
+                    <a:bodyPr/>
+                    <a:lstStyle/>
+                    <a:p>
+                      <a:pPr>
+                        <a:spcAft>
+                          <a:spcPts val="100"/>
+                        </a:spcAft>
+                        <a:defRPr sz="1000" b="0">
+                          <a:solidFill>
+                            <a:srgbClr val="11151A"/>
+                          </a:solidFill>
+                          <a:latin typeface="Lato"/>
+                        </a:defRPr>
+                      </a:pPr>
+                      <a:r>
+                        <a:t>Evidence</a:t>
+                      </a:r>
+                    </a:p>
+                  </a:txBody>
+                  <a:tcPr marL="64008" marR="64008" marT="54864" marB="27432" anchor="t">
+                    <a:lnL w="0">
+                      <a:noFill/>
+                    </a:lnL>
+                    <a:lnR w="0">
+                      <a:noFill/>
+                    </a:lnR>
+                    <a:lnT w="0">
+                      <a:noFill/>
+                    </a:lnT>
+                    <a:lnB w="5080">
+                      <a:solidFill>
+                        <a:srgbClr val="B8B8B8"/>
+                      </a:solidFill>
+                    </a:lnB>
+                    <a:solidFill>
+                      <a:srgbClr val="FFFFFF"/>
+                    </a:solidFill>
+                  </a:tcPr>
+                </a:tc>
+                <a:tc>
+                  <a:txBody>
+                    <a:bodyPr/>
+                    <a:lstStyle/>
+                    <a:p>
+                      <a:pPr>
+                        <a:spcAft>
+                          <a:spcPts val="100"/>
+                        </a:spcAft>
+                        <a:defRPr sz="1000" b="0">
+                          <a:solidFill>
+                            <a:srgbClr val="11151A"/>
+                          </a:solidFill>
+                          <a:latin typeface="Lato"/>
+                        </a:defRPr>
+                      </a:pPr>
+                      <a:r>
+                        <a:t>NERSA licence amendment, 6 August 2025</a:t>
+                      </a:r>
+                    </a:p>
+                  </a:txBody>
+                  <a:tcPr marL="64008" marR="64008" marT="54864" marB="27432" anchor="t">
+                    <a:lnL w="0">
+                      <a:noFill/>
+                    </a:lnL>
+                    <a:lnR w="0">
+                      <a:noFill/>
+                    </a:lnR>
+                    <a:lnT w="0">
+                      <a:noFill/>
+                    </a:lnT>
+                    <a:lnB w="5080">
+                      <a:solidFill>
+                        <a:srgbClr val="B8B8B8"/>
+                      </a:solidFill>
+                    </a:lnB>
+                    <a:solidFill>
+                      <a:srgbClr val="FFFFFF"/>
+                    </a:solidFill>
+                  </a:tcPr>
+                </a:tc>
+              </a:tr>
+              <a:tr h="457200">
+                <a:tc>
+                  <a:txBody>
+                    <a:bodyPr/>
+                    <a:lstStyle/>
+                    <a:p>
+                      <a:pPr>
+                        <a:spcAft>
+                          <a:spcPts val="100"/>
+                        </a:spcAft>
+                        <a:defRPr sz="1000" b="1">
+                          <a:solidFill>
+                            <a:srgbClr val="0A2373"/>
+                          </a:solidFill>
+                          <a:latin typeface="Lato"/>
+                        </a:defRPr>
+                      </a:pPr>
+                      <a:r>
+                        <a:t>Operational capacity</a:t>
+                      </a:r>
+                    </a:p>
+                  </a:txBody>
+                  <a:tcPr marL="64008" marR="64008" marT="54864" marB="27432" anchor="t">
+                    <a:lnL w="0">
+                      <a:noFill/>
+                    </a:lnL>
+                    <a:lnR w="0">
+                      <a:noFill/>
+                    </a:lnR>
+                    <a:lnT w="0">
+                      <a:noFill/>
+                    </a:lnT>
+                    <a:lnB w="5080">
+                      <a:solidFill>
+                        <a:srgbClr val="B8B8B8"/>
+                      </a:solidFill>
+                    </a:lnB>
+                    <a:solidFill>
+                      <a:srgbClr val="FFFFFF"/>
+                    </a:solidFill>
+                  </a:tcPr>
+                </a:tc>
+                <a:tc>
+                  <a:txBody>
+                    <a:bodyPr/>
+                    <a:lstStyle/>
+                    <a:p>
+                      <a:pPr>
+                        <a:spcAft>
+                          <a:spcPts val="100"/>
+                        </a:spcAft>
+                        <a:defRPr sz="1000" b="0">
+                          <a:solidFill>
+                            <a:srgbClr val="11151A"/>
+                          </a:solidFill>
+                          <a:latin typeface="Lato"/>
+                        </a:defRPr>
+                      </a:pPr>
+                      <a:r>
+                        <a:t>124,000 m3: 88,000 in the six original tanks; 18,000 assumed for each new tank</a:t>
+                      </a:r>
+                    </a:p>
+                  </a:txBody>
+                  <a:tcPr marL="64008" marR="64008" marT="54864" marB="27432" anchor="t">
+                    <a:lnL w="0">
+                      <a:noFill/>
+                    </a:lnL>
+                    <a:lnR w="0">
+                      <a:noFill/>
+                    </a:lnR>
+                    <a:lnT w="0">
+                      <a:noFill/>
+                    </a:lnT>
+                    <a:lnB w="5080">
+                      <a:solidFill>
+                        <a:srgbClr val="B8B8B8"/>
+                      </a:solidFill>
+                    </a:lnB>
+                    <a:solidFill>
+                      <a:srgbClr val="FFFFFF"/>
+                    </a:solidFill>
+                  </a:tcPr>
+                </a:tc>
+                <a:tc>
+                  <a:txBody>
+                    <a:bodyPr/>
+                    <a:lstStyle/>
+                    <a:p>
+                      <a:pPr>
+                        <a:spcAft>
+                          <a:spcPts val="100"/>
+                        </a:spcAft>
+                        <a:defRPr sz="1000" b="0">
+                          <a:solidFill>
+                            <a:srgbClr val="11151A"/>
+                          </a:solidFill>
+                          <a:latin typeface="Lato"/>
+                        </a:defRPr>
+                      </a:pPr>
+                      <a:r>
+                        <a:t>Evidence; new tanks estimated</a:t>
+                      </a:r>
+                    </a:p>
+                  </a:txBody>
+                  <a:tcPr marL="64008" marR="64008" marT="54864" marB="27432" anchor="t">
+                    <a:lnL w="0">
+                      <a:noFill/>
+                    </a:lnL>
+                    <a:lnR w="0">
+                      <a:noFill/>
+                    </a:lnR>
+                    <a:lnT w="0">
+                      <a:noFill/>
+                    </a:lnT>
+                    <a:lnB w="5080">
+                      <a:solidFill>
+                        <a:srgbClr val="B8B8B8"/>
+                      </a:solidFill>
+                    </a:lnB>
+                    <a:solidFill>
+                      <a:srgbClr val="FFFFFF"/>
+                    </a:solidFill>
+                  </a:tcPr>
+                </a:tc>
+                <a:tc>
+                  <a:txBody>
+                    <a:bodyPr/>
+                    <a:lstStyle/>
+                    <a:p>
+                      <a:pPr>
+                        <a:spcAft>
+                          <a:spcPts val="100"/>
+                        </a:spcAft>
+                        <a:defRPr sz="1000" b="0">
+                          <a:solidFill>
+                            <a:srgbClr val="11151A"/>
+                          </a:solidFill>
+                          <a:latin typeface="Lato"/>
+                        </a:defRPr>
+                      </a:pPr>
+                      <a:r>
+                        <a:t>Vopak licence application to NERSA, 2020, p.8-9</a:t>
+                      </a:r>
+                    </a:p>
+                  </a:txBody>
+                  <a:tcPr marL="64008" marR="64008" marT="54864" marB="27432" anchor="t">
+                    <a:lnL w="0">
+                      <a:noFill/>
+                    </a:lnL>
+                    <a:lnR w="0">
+                      <a:noFill/>
+                    </a:lnR>
+                    <a:lnT w="0">
+                      <a:noFill/>
+                    </a:lnT>
+                    <a:lnB w="5080">
+                      <a:solidFill>
+                        <a:srgbClr val="B8B8B8"/>
+                      </a:solidFill>
+                    </a:lnB>
+                    <a:solidFill>
+                      <a:srgbClr val="FFFFFF"/>
+                    </a:solidFill>
+                  </a:tcPr>
+                </a:tc>
+              </a:tr>
+              <a:tr h="457200">
+                <a:tc>
+                  <a:txBody>
+                    <a:bodyPr/>
+                    <a:lstStyle/>
+                    <a:p>
+                      <a:pPr>
+                        <a:spcAft>
+                          <a:spcPts val="100"/>
+                        </a:spcAft>
+                        <a:defRPr sz="1000" b="1">
+                          <a:solidFill>
+                            <a:srgbClr val="0A2373"/>
+                          </a:solidFill>
+                          <a:latin typeface="Lato"/>
+                        </a:defRPr>
+                      </a:pPr>
+                      <a:r>
+                        <a:t>Receipts</a:t>
+                      </a:r>
+                    </a:p>
+                  </a:txBody>
+                  <a:tcPr marL="64008" marR="64008" marT="54864" marB="27432" anchor="t">
+                    <a:lnL w="0">
+                      <a:noFill/>
+                    </a:lnL>
+                    <a:lnR w="0">
+                      <a:noFill/>
+                    </a:lnR>
+                    <a:lnT w="0">
+                      <a:noFill/>
+                    </a:lnT>
+                    <a:lnB w="5080">
+                      <a:solidFill>
+                        <a:srgbClr val="B8B8B8"/>
+                      </a:solidFill>
+                    </a:lnB>
+                    <a:solidFill>
+                      <a:srgbClr val="FFFFFF"/>
+                    </a:solidFill>
+                  </a:tcPr>
+                </a:tc>
+                <a:tc>
+                  <a:txBody>
+                    <a:bodyPr/>
+                    <a:lstStyle/>
+                    <a:p>
+                      <a:pPr>
+                        <a:spcAft>
+                          <a:spcPts val="100"/>
+                        </a:spcAft>
+                        <a:defRPr sz="1000" b="0">
+                          <a:solidFill>
+                            <a:srgbClr val="11151A"/>
+                          </a:solidFill>
+                          <a:latin typeface="Lato"/>
+                        </a:defRPr>
+                      </a:pPr>
+                      <a:r>
+                        <a:t>Pipeline only, at most 1,500 m3 an hour</a:t>
+                      </a:r>
+                    </a:p>
+                  </a:txBody>
+                  <a:tcPr marL="64008" marR="64008" marT="54864" marB="27432" anchor="t">
+                    <a:lnL w="0">
+                      <a:noFill/>
+                    </a:lnL>
+                    <a:lnR w="0">
+                      <a:noFill/>
+                    </a:lnR>
+                    <a:lnT w="0">
+                      <a:noFill/>
+                    </a:lnT>
+                    <a:lnB w="5080">
+                      <a:solidFill>
+                        <a:srgbClr val="B8B8B8"/>
+                      </a:solidFill>
+                    </a:lnB>
+                    <a:solidFill>
+                      <a:srgbClr val="FFFFFF"/>
+                    </a:solidFill>
+                  </a:tcPr>
+                </a:tc>
+                <a:tc>
+                  <a:txBody>
+                    <a:bodyPr/>
+                    <a:lstStyle/>
+                    <a:p>
+                      <a:pPr>
+                        <a:spcAft>
+                          <a:spcPts val="100"/>
+                        </a:spcAft>
+                        <a:defRPr sz="1000" b="0">
+                          <a:solidFill>
+                            <a:srgbClr val="11151A"/>
+                          </a:solidFill>
+                          <a:latin typeface="Lato"/>
+                        </a:defRPr>
+                      </a:pPr>
+                      <a:r>
+                        <a:t>Evidence</a:t>
+                      </a:r>
+                    </a:p>
+                  </a:txBody>
+                  <a:tcPr marL="64008" marR="64008" marT="54864" marB="27432" anchor="t">
+                    <a:lnL w="0">
+                      <a:noFill/>
+                    </a:lnL>
+                    <a:lnR w="0">
+                      <a:noFill/>
+                    </a:lnR>
+                    <a:lnT w="0">
+                      <a:noFill/>
+                    </a:lnT>
+                    <a:lnB w="5080">
+                      <a:solidFill>
+                        <a:srgbClr val="B8B8B8"/>
+                      </a:solidFill>
+                    </a:lnB>
+                    <a:solidFill>
+                      <a:srgbClr val="FFFFFF"/>
+                    </a:solidFill>
+                  </a:tcPr>
+                </a:tc>
+                <a:tc>
+                  <a:txBody>
+                    <a:bodyPr/>
+                    <a:lstStyle/>
+                    <a:p>
+                      <a:pPr>
+                        <a:spcAft>
+                          <a:spcPts val="100"/>
+                        </a:spcAft>
+                        <a:defRPr sz="1000" b="0">
+                          <a:solidFill>
+                            <a:srgbClr val="11151A"/>
+                          </a:solidFill>
+                          <a:latin typeface="Lato"/>
+                        </a:defRPr>
+                      </a:pPr>
+                      <a:r>
+                        <a:t>Licence application, p.9</a:t>
+                      </a:r>
+                    </a:p>
+                  </a:txBody>
+                  <a:tcPr marL="64008" marR="64008" marT="54864" marB="27432" anchor="t">
+                    <a:lnL w="0">
+                      <a:noFill/>
+                    </a:lnL>
+                    <a:lnR w="0">
+                      <a:noFill/>
+                    </a:lnR>
+                    <a:lnT w="0">
+                      <a:noFill/>
+                    </a:lnT>
+                    <a:lnB w="5080">
+                      <a:solidFill>
+                        <a:srgbClr val="B8B8B8"/>
+                      </a:solidFill>
+                    </a:lnB>
+                    <a:solidFill>
+                      <a:srgbClr val="FFFFFF"/>
+                    </a:solidFill>
+                  </a:tcPr>
+                </a:tc>
+              </a:tr>
+              <a:tr h="457200">
+                <a:tc>
+                  <a:txBody>
+                    <a:bodyPr/>
+                    <a:lstStyle/>
+                    <a:p>
+                      <a:pPr>
+                        <a:spcAft>
+                          <a:spcPts val="100"/>
+                        </a:spcAft>
+                        <a:defRPr sz="1000" b="1">
+                          <a:solidFill>
+                            <a:srgbClr val="0A2373"/>
+                          </a:solidFill>
+                          <a:latin typeface="Lato"/>
+                        </a:defRPr>
+                      </a:pPr>
+                      <a:r>
+                        <a:t>Dispatch</a:t>
+                      </a:r>
+                    </a:p>
+                  </a:txBody>
+                  <a:tcPr marL="64008" marR="64008" marT="54864" marB="27432" anchor="t">
+                    <a:lnL w="0">
+                      <a:noFill/>
+                    </a:lnL>
+                    <a:lnR w="0">
+                      <a:noFill/>
+                    </a:lnR>
+                    <a:lnT w="0">
+                      <a:noFill/>
+                    </a:lnT>
+                    <a:lnB w="5080">
+                      <a:solidFill>
+                        <a:srgbClr val="B8B8B8"/>
+                      </a:solidFill>
+                    </a:lnB>
+                    <a:solidFill>
+                      <a:srgbClr val="FFFFFF"/>
+                    </a:solidFill>
+                  </a:tcPr>
+                </a:tc>
+                <a:tc>
+                  <a:txBody>
+                    <a:bodyPr/>
+                    <a:lstStyle/>
+                    <a:p>
+                      <a:pPr>
+                        <a:spcAft>
+                          <a:spcPts val="100"/>
+                        </a:spcAft>
+                        <a:defRPr sz="1000" b="0">
+                          <a:solidFill>
+                            <a:srgbClr val="11151A"/>
+                          </a:solidFill>
+                          <a:latin typeface="Lato"/>
+                        </a:defRPr>
+                      </a:pPr>
+                      <a:r>
+                        <a:t>At most 1,500 m3 an hour; 80% road, 20% pipeline. 8 bays at 125 m3 an hour</a:t>
+                      </a:r>
+                    </a:p>
+                  </a:txBody>
+                  <a:tcPr marL="64008" marR="64008" marT="54864" marB="27432" anchor="t">
+                    <a:lnL w="0">
+                      <a:noFill/>
+                    </a:lnL>
+                    <a:lnR w="0">
+                      <a:noFill/>
+                    </a:lnR>
+                    <a:lnT w="0">
+                      <a:noFill/>
+                    </a:lnT>
+                    <a:lnB w="5080">
+                      <a:solidFill>
+                        <a:srgbClr val="B8B8B8"/>
+                      </a:solidFill>
+                    </a:lnB>
+                    <a:solidFill>
+                      <a:srgbClr val="FFFFFF"/>
+                    </a:solidFill>
+                  </a:tcPr>
+                </a:tc>
+                <a:tc>
+                  <a:txBody>
+                    <a:bodyPr/>
+                    <a:lstStyle/>
+                    <a:p>
+                      <a:pPr>
+                        <a:spcAft>
+                          <a:spcPts val="100"/>
+                        </a:spcAft>
+                        <a:defRPr sz="1000" b="0">
+                          <a:solidFill>
+                            <a:srgbClr val="11151A"/>
+                          </a:solidFill>
+                          <a:latin typeface="Lato"/>
+                        </a:defRPr>
+                      </a:pPr>
+                      <a:r>
+                        <a:t>Evidence</a:t>
+                      </a:r>
+                    </a:p>
+                  </a:txBody>
+                  <a:tcPr marL="64008" marR="64008" marT="54864" marB="27432" anchor="t">
+                    <a:lnL w="0">
+                      <a:noFill/>
+                    </a:lnL>
+                    <a:lnR w="0">
+                      <a:noFill/>
+                    </a:lnR>
+                    <a:lnT w="0">
+                      <a:noFill/>
+                    </a:lnT>
+                    <a:lnB w="5080">
+                      <a:solidFill>
+                        <a:srgbClr val="B8B8B8"/>
+                      </a:solidFill>
+                    </a:lnB>
+                    <a:solidFill>
+                      <a:srgbClr val="FFFFFF"/>
+                    </a:solidFill>
+                  </a:tcPr>
+                </a:tc>
+                <a:tc>
+                  <a:txBody>
+                    <a:bodyPr/>
+                    <a:lstStyle/>
+                    <a:p>
+                      <a:pPr>
+                        <a:spcAft>
+                          <a:spcPts val="100"/>
+                        </a:spcAft>
+                        <a:defRPr sz="1000" b="0">
+                          <a:solidFill>
+                            <a:srgbClr val="11151A"/>
+                          </a:solidFill>
+                          <a:latin typeface="Lato"/>
+                        </a:defRPr>
+                      </a:pPr>
+                      <a:r>
+                        <a:t>Licence application, p.9; NERSA 2025</a:t>
+                      </a:r>
+                    </a:p>
+                  </a:txBody>
+                  <a:tcPr marL="64008" marR="64008" marT="54864" marB="27432" anchor="t">
+                    <a:lnL w="0">
+                      <a:noFill/>
+                    </a:lnL>
+                    <a:lnR w="0">
+                      <a:noFill/>
+                    </a:lnR>
+                    <a:lnT w="0">
+                      <a:noFill/>
+                    </a:lnT>
+                    <a:lnB w="5080">
+                      <a:solidFill>
+                        <a:srgbClr val="B8B8B8"/>
+                      </a:solidFill>
+                    </a:lnB>
+                    <a:solidFill>
+                      <a:srgbClr val="FFFFFF"/>
+                    </a:solidFill>
+                  </a:tcPr>
+                </a:tc>
+              </a:tr>
+              <a:tr h="457200">
+                <a:tc>
+                  <a:txBody>
+                    <a:bodyPr/>
+                    <a:lstStyle/>
+                    <a:p>
+                      <a:pPr>
+                        <a:spcAft>
+                          <a:spcPts val="100"/>
+                        </a:spcAft>
+                        <a:defRPr sz="1000" b="1">
+                          <a:solidFill>
+                            <a:srgbClr val="0A2373"/>
+                          </a:solidFill>
+                          <a:latin typeface="Lato"/>
+                        </a:defRPr>
+                      </a:pPr>
+                      <a:r>
+                        <a:t>Practical road dispatch</a:t>
+                      </a:r>
+                    </a:p>
+                  </a:txBody>
+                  <a:tcPr marL="64008" marR="64008" marT="54864" marB="27432" anchor="t">
+                    <a:lnL w="0">
+                      <a:noFill/>
+                    </a:lnL>
+                    <a:lnR w="0">
+                      <a:noFill/>
+                    </a:lnR>
+                    <a:lnT w="0">
+                      <a:noFill/>
+                    </a:lnT>
+                    <a:lnB w="5080">
+                      <a:solidFill>
+                        <a:srgbClr val="B8B8B8"/>
+                      </a:solidFill>
+                    </a:lnB>
+                    <a:solidFill>
+                      <a:srgbClr val="FFFFFF"/>
+                    </a:solidFill>
+                  </a:tcPr>
+                </a:tc>
+                <a:tc>
+                  <a:txBody>
+                    <a:bodyPr/>
+                    <a:lstStyle/>
+                    <a:p>
+                      <a:pPr>
+                        <a:spcAft>
+                          <a:spcPts val="100"/>
+                        </a:spcAft>
+                        <a:defRPr sz="1000" b="0">
+                          <a:solidFill>
+                            <a:srgbClr val="11151A"/>
+                          </a:solidFill>
+                          <a:latin typeface="Lato"/>
+                        </a:defRPr>
+                      </a:pPr>
+                      <a:r>
+                        <a:t>About 300,000 m3 a month</a:t>
+                      </a:r>
+                    </a:p>
+                  </a:txBody>
+                  <a:tcPr marL="64008" marR="64008" marT="54864" marB="27432" anchor="t">
+                    <a:lnL w="0">
+                      <a:noFill/>
+                    </a:lnL>
+                    <a:lnR w="0">
+                      <a:noFill/>
+                    </a:lnR>
+                    <a:lnT w="0">
+                      <a:noFill/>
+                    </a:lnT>
+                    <a:lnB w="5080">
+                      <a:solidFill>
+                        <a:srgbClr val="B8B8B8"/>
+                      </a:solidFill>
+                    </a:lnB>
+                    <a:solidFill>
+                      <a:srgbClr val="FFFFFF"/>
+                    </a:solidFill>
+                  </a:tcPr>
+                </a:tc>
+                <a:tc>
+                  <a:txBody>
+                    <a:bodyPr/>
+                    <a:lstStyle/>
+                    <a:p>
+                      <a:pPr>
+                        <a:spcAft>
+                          <a:spcPts val="100"/>
+                        </a:spcAft>
+                        <a:defRPr sz="1000" b="0">
+                          <a:solidFill>
+                            <a:srgbClr val="11151A"/>
+                          </a:solidFill>
+                          <a:latin typeface="Lato"/>
+                        </a:defRPr>
+                      </a:pPr>
+                      <a:r>
+                        <a:t>Estimate</a:t>
+                      </a:r>
+                    </a:p>
+                  </a:txBody>
+                  <a:tcPr marL="64008" marR="64008" marT="54864" marB="27432" anchor="t">
+                    <a:lnL w="0">
+                      <a:noFill/>
+                    </a:lnL>
+                    <a:lnR w="0">
+                      <a:noFill/>
+                    </a:lnR>
+                    <a:lnT w="0">
+                      <a:noFill/>
+                    </a:lnT>
+                    <a:lnB w="5080">
+                      <a:solidFill>
+                        <a:srgbClr val="B8B8B8"/>
+                      </a:solidFill>
+                    </a:lnB>
+                    <a:solidFill>
+                      <a:srgbClr val="FFFFFF"/>
+                    </a:solidFill>
+                  </a:tcPr>
+                </a:tc>
+                <a:tc>
+                  <a:txBody>
+                    <a:bodyPr/>
+                    <a:lstStyle/>
+                    <a:p>
+                      <a:pPr>
+                        <a:spcAft>
+                          <a:spcPts val="100"/>
+                        </a:spcAft>
+                        <a:defRPr sz="1000" b="0">
+                          <a:solidFill>
+                            <a:srgbClr val="11151A"/>
+                          </a:solidFill>
+                          <a:latin typeface="Lato"/>
+                        </a:defRPr>
+                      </a:pPr>
+                      <a:r>
+                        <a:t>Bays pumping half the time, 20 hours a day</a:t>
+                      </a:r>
+                    </a:p>
+                  </a:txBody>
+                  <a:tcPr marL="64008" marR="64008" marT="54864" marB="27432" anchor="t">
+                    <a:lnL w="0">
+                      <a:noFill/>
+                    </a:lnL>
+                    <a:lnR w="0">
+                      <a:noFill/>
+                    </a:lnR>
+                    <a:lnT w="0">
+                      <a:noFill/>
+                    </a:lnT>
+                    <a:lnB w="5080">
+                      <a:solidFill>
+                        <a:srgbClr val="B8B8B8"/>
+                      </a:solidFill>
+                    </a:lnB>
+                    <a:solidFill>
+                      <a:srgbClr val="FFFFFF"/>
+                    </a:solidFill>
+                  </a:tcPr>
+                </a:tc>
+              </a:tr>
+              <a:tr h="457200">
+                <a:tc>
+                  <a:txBody>
+                    <a:bodyPr/>
+                    <a:lstStyle/>
+                    <a:p>
+                      <a:pPr>
+                        <a:spcAft>
+                          <a:spcPts val="100"/>
+                        </a:spcAft>
+                        <a:defRPr sz="1000" b="1">
+                          <a:solidFill>
+                            <a:srgbClr val="0A2373"/>
+                          </a:solidFill>
+                          <a:latin typeface="Lato"/>
+                        </a:defRPr>
+                      </a:pPr>
+                      <a:r>
+                        <a:t>Monthly turns</a:t>
+                      </a:r>
+                    </a:p>
+                  </a:txBody>
+                  <a:tcPr marL="64008" marR="64008" marT="54864" marB="27432" anchor="t">
+                    <a:lnL w="0">
+                      <a:noFill/>
+                    </a:lnL>
+                    <a:lnR w="0">
+                      <a:noFill/>
+                    </a:lnR>
+                    <a:lnT w="0">
+                      <a:noFill/>
+                    </a:lnT>
+                    <a:lnB w="5080">
+                      <a:solidFill>
+                        <a:srgbClr val="B8B8B8"/>
+                      </a:solidFill>
+                    </a:lnB>
+                    <a:solidFill>
+                      <a:srgbClr val="FFFFFF"/>
+                    </a:solidFill>
+                  </a:tcPr>
+                </a:tc>
+                <a:tc>
+                  <a:txBody>
+                    <a:bodyPr/>
+                    <a:lstStyle/>
+                    <a:p>
+                      <a:pPr>
+                        <a:spcAft>
+                          <a:spcPts val="100"/>
+                        </a:spcAft>
+                        <a:defRPr sz="1000" b="0">
+                          <a:solidFill>
+                            <a:srgbClr val="11151A"/>
+                          </a:solidFill>
+                          <a:latin typeface="Lato"/>
+                        </a:defRPr>
+                      </a:pPr>
+                      <a:r>
+                        <a:t>1 / 2 / 2.4 (low / base / high), on operational capacity</a:t>
+                      </a:r>
+                    </a:p>
+                  </a:txBody>
+                  <a:tcPr marL="64008" marR="64008" marT="54864" marB="27432" anchor="t">
+                    <a:lnL w="0">
+                      <a:noFill/>
+                    </a:lnL>
+                    <a:lnR w="0">
+                      <a:noFill/>
+                    </a:lnR>
+                    <a:lnT w="0">
+                      <a:noFill/>
+                    </a:lnT>
+                    <a:lnB w="5080">
+                      <a:solidFill>
+                        <a:srgbClr val="B8B8B8"/>
+                      </a:solidFill>
+                    </a:lnB>
+                    <a:solidFill>
+                      <a:srgbClr val="FFFFFF"/>
+                    </a:solidFill>
+                  </a:tcPr>
+                </a:tc>
+                <a:tc>
+                  <a:txBody>
+                    <a:bodyPr/>
+                    <a:lstStyle/>
+                    <a:p>
+                      <a:pPr>
+                        <a:spcAft>
+                          <a:spcPts val="100"/>
+                        </a:spcAft>
+                        <a:defRPr sz="1000" b="0">
+                          <a:solidFill>
+                            <a:srgbClr val="11151A"/>
+                          </a:solidFill>
+                          <a:latin typeface="Lato"/>
+                        </a:defRPr>
+                      </a:pPr>
+                      <a:r>
+                        <a:t>Estimate</a:t>
+                      </a:r>
+                    </a:p>
+                  </a:txBody>
+                  <a:tcPr marL="64008" marR="64008" marT="54864" marB="27432" anchor="t">
+                    <a:lnL w="0">
+                      <a:noFill/>
+                    </a:lnL>
+                    <a:lnR w="0">
+                      <a:noFill/>
+                    </a:lnR>
+                    <a:lnT w="0">
+                      <a:noFill/>
+                    </a:lnT>
+                    <a:lnB w="5080">
+                      <a:solidFill>
+                        <a:srgbClr val="B8B8B8"/>
+                      </a:solidFill>
+                    </a:lnB>
+                    <a:solidFill>
+                      <a:srgbClr val="FFFFFF"/>
+                    </a:solidFill>
+                  </a:tcPr>
+                </a:tc>
+                <a:tc>
+                  <a:txBody>
+                    <a:bodyPr/>
+                    <a:lstStyle/>
+                    <a:p>
+                      <a:pPr>
+                        <a:spcAft>
+                          <a:spcPts val="100"/>
+                        </a:spcAft>
+                        <a:defRPr sz="1000" b="0">
+                          <a:solidFill>
+                            <a:srgbClr val="11151A"/>
+                          </a:solidFill>
+                          <a:latin typeface="Lato"/>
+                        </a:defRPr>
+                      </a:pPr>
+                      <a:r>
+                        <a:t>Base from Vopak's Durban target; high from road dispatch</a:t>
+                      </a:r>
+                    </a:p>
+                  </a:txBody>
+                  <a:tcPr marL="64008" marR="64008" marT="54864" marB="27432" anchor="t">
+                    <a:lnL w="0">
+                      <a:noFill/>
+                    </a:lnL>
+                    <a:lnR w="0">
+                      <a:noFill/>
+                    </a:lnR>
+                    <a:lnT w="0">
+                      <a:noFill/>
+                    </a:lnT>
+                    <a:lnB w="5080">
+                      <a:solidFill>
+                        <a:srgbClr val="B8B8B8"/>
+                      </a:solidFill>
+                    </a:lnB>
+                    <a:solidFill>
+                      <a:srgbClr val="FFFFFF"/>
+                    </a:solidFill>
+                  </a:tcPr>
+                </a:tc>
+              </a:tr>
+              <a:tr h="457200">
+                <a:tc>
+                  <a:txBody>
+                    <a:bodyPr/>
+                    <a:lstStyle/>
+                    <a:p>
+                      <a:pPr>
+                        <a:spcAft>
+                          <a:spcPts val="100"/>
+                        </a:spcAft>
+                        <a:defRPr sz="1000" b="1">
+                          <a:solidFill>
+                            <a:srgbClr val="0A2373"/>
+                          </a:solidFill>
+                          <a:latin typeface="Lato"/>
+                        </a:defRPr>
+                      </a:pPr>
+                      <a:r>
+                        <a:t>Annual handling</a:t>
+                      </a:r>
+                    </a:p>
+                  </a:txBody>
+                  <a:tcPr marL="64008" marR="64008" marT="54864" marB="27432" anchor="t">
+                    <a:lnL w="0">
+                      <a:noFill/>
+                    </a:lnL>
+                    <a:lnR w="0">
+                      <a:noFill/>
+                    </a:lnR>
+                    <a:lnT w="0">
+                      <a:noFill/>
+                    </a:lnT>
+                    <a:lnB w="5080">
+                      <a:solidFill>
+                        <a:srgbClr val="B8B8B8"/>
+                      </a:solidFill>
+                    </a:lnB>
+                    <a:solidFill>
+                      <a:srgbClr val="FFFFFF"/>
+                    </a:solidFill>
+                  </a:tcPr>
+                </a:tc>
+                <a:tc>
+                  <a:txBody>
+                    <a:bodyPr/>
+                    <a:lstStyle/>
+                    <a:p>
+                      <a:pPr>
+                        <a:spcAft>
+                          <a:spcPts val="100"/>
+                        </a:spcAft>
+                        <a:defRPr sz="1000" b="0">
+                          <a:solidFill>
+                            <a:srgbClr val="11151A"/>
+                          </a:solidFill>
+                          <a:latin typeface="Lato"/>
+                        </a:defRPr>
+                      </a:pPr>
+                      <a:r>
+                        <a:t>1.5 / 3.0 / 3.6 million m3</a:t>
+                      </a:r>
+                    </a:p>
+                  </a:txBody>
+                  <a:tcPr marL="64008" marR="64008" marT="54864" marB="27432" anchor="t">
+                    <a:lnL w="0">
+                      <a:noFill/>
+                    </a:lnL>
+                    <a:lnR w="0">
+                      <a:noFill/>
+                    </a:lnR>
+                    <a:lnT w="0">
+                      <a:noFill/>
+                    </a:lnT>
+                    <a:lnB w="5080">
+                      <a:solidFill>
+                        <a:srgbClr val="B8B8B8"/>
+                      </a:solidFill>
+                    </a:lnB>
+                    <a:solidFill>
+                      <a:srgbClr val="FFFFFF"/>
+                    </a:solidFill>
+                  </a:tcPr>
+                </a:tc>
+                <a:tc>
+                  <a:txBody>
+                    <a:bodyPr/>
+                    <a:lstStyle/>
+                    <a:p>
+                      <a:pPr>
+                        <a:spcAft>
+                          <a:spcPts val="100"/>
+                        </a:spcAft>
+                        <a:defRPr sz="1000" b="0">
+                          <a:solidFill>
+                            <a:srgbClr val="11151A"/>
+                          </a:solidFill>
+                          <a:latin typeface="Lato"/>
+                        </a:defRPr>
+                      </a:pPr>
+                      <a:r>
+                        <a:t>Calculated</a:t>
+                      </a:r>
+                    </a:p>
+                  </a:txBody>
+                  <a:tcPr marL="64008" marR="64008" marT="54864" marB="27432" anchor="t">
+                    <a:lnL w="0">
+                      <a:noFill/>
+                    </a:lnL>
+                    <a:lnR w="0">
+                      <a:noFill/>
+                    </a:lnR>
+                    <a:lnT w="0">
+                      <a:noFill/>
+                    </a:lnT>
+                    <a:lnB w="5080">
+                      <a:solidFill>
+                        <a:srgbClr val="B8B8B8"/>
+                      </a:solidFill>
+                    </a:lnB>
+                    <a:solidFill>
+                      <a:srgbClr val="FFFFFF"/>
+                    </a:solidFill>
+                  </a:tcPr>
+                </a:tc>
+                <a:tc>
+                  <a:txBody>
+                    <a:bodyPr/>
+                    <a:lstStyle/>
+                    <a:p>
+                      <a:pPr>
+                        <a:spcAft>
+                          <a:spcPts val="100"/>
+                        </a:spcAft>
+                        <a:defRPr sz="1000" b="0">
+                          <a:solidFill>
+                            <a:srgbClr val="11151A"/>
+                          </a:solidFill>
+                          <a:latin typeface="Lato"/>
+                        </a:defRPr>
+                      </a:pPr>
+                      <a:r>
+                        <a:t>Pack today: 1.7 / 3.4 / 5.0 on gross capacity and 1 / 2 / 3 turns</a:t>
+                      </a:r>
+                    </a:p>
+                  </a:txBody>
+                  <a:tcPr marL="64008" marR="64008" marT="54864" marB="27432" anchor="t">
+                    <a:lnL w="0">
+                      <a:noFill/>
+                    </a:lnL>
+                    <a:lnR w="0">
+                      <a:noFill/>
+                    </a:lnR>
+                    <a:lnT w="0">
+                      <a:noFill/>
+                    </a:lnT>
+                    <a:lnB w="5080">
+                      <a:solidFill>
+                        <a:srgbClr val="B8B8B8"/>
+                      </a:solidFill>
+                    </a:lnB>
+                    <a:solidFill>
+                      <a:srgbClr val="FFFFFF"/>
+                    </a:solidFill>
+                  </a:tcPr>
+                </a:tc>
+              </a:tr>
+            </a:tbl>
+          </a:graphicData>
+        </a:graphic>
+      </p:graphicFrame>
+      <p:sp>
+        <p:nvSpPr>
+          <p:cNvPr id="8" name="TextBox 7"/>
+          <p:cNvSpPr txBox="1"/>
+          <p:nvPr/>
+        </p:nvSpPr>
+        <p:spPr>
+          <a:xfrm>
+            <a:off x="457200" y="5852160"/>
+            <a:ext cx="10652760" cy="548640"/>
+          </a:xfrm>
+          <a:prstGeom prst="rect">
+            <a:avLst/>
+          </a:prstGeom>
+          <a:noFill/>
+        </p:spPr>
+        <p:txBody>
+          <a:bodyPr wrap="square" lIns="22860" rIns="22860" tIns="0" bIns="0">
+            <a:spAutoFit/>
+          </a:bodyPr>
+          <a:lstStyle/>
+          <a:p>
+            <a:pPr>
+              <a:spcAft>
+                <a:spcPts val="300"/>
+              </a:spcAft>
+              <a:defRPr sz="1100" b="1">
+                <a:solidFill>
+                  <a:srgbClr val="0A2373"/>
+                </a:solidFill>
+                <a:latin typeface="Lato"/>
+              </a:defRPr>
+            </a:pPr>
+            <a:r>
+              <a:t>Still needed from Vopak: twelve months of outbound volume by product and mode, the new tanks' operational capacity and loading hours. These replace every estimate above.</a:t>
+            </a:r>
+          </a:p>
+        </p:txBody>
+      </p:sp>
+      <p:sp>
+        <p:nvSpPr>
+          <p:cNvPr id="9" name="Chevron 8">
+            <a:hlinkClick action="ppaction://hlinksldjump" r:id="rId2"/>
+          </p:cNvPr>
+          <p:cNvSpPr/>
+          <p:nvPr/>
+        </p:nvSpPr>
+        <p:spPr>
+          <a:xfrm>
+            <a:off x="457200" y="73152"/>
+            <a:ext cx="2075688" cy="384048"/>
+          </a:xfrm>
+          <a:prstGeom prst="chevron">
+            <a:avLst>
+              <a:gd name="adj" fmla="val 12000"/>
+            </a:avLst>
+          </a:prstGeom>
+          <a:solidFill>
+            <a:srgbClr val="EEEEEE"/>
+          </a:solidFill>
+          <a:ln>
+            <a:noFill/>
+          </a:ln>
+        </p:spPr>
+        <p:style>
+          <a:lnRef idx="1">
+            <a:schemeClr val="accent1"/>
+          </a:lnRef>
+          <a:fillRef idx="3">
+            <a:schemeClr val="accent1"/>
+          </a:fillRef>
+          <a:effectRef idx="2">
+            <a:schemeClr val="accent1"/>
+          </a:effectRef>
+          <a:fontRef idx="minor">
+            <a:schemeClr val="lt1"/>
+          </a:fontRef>
+        </p:style>
+        <p:txBody>
+          <a:bodyPr rtlCol="0" anchor="ctr" tIns="0" bIns="0"/>
+          <a:lstStyle/>
+          <a:p>
+            <a:pPr algn="ctr">
+              <a:defRPr sz="1100" b="0">
+                <a:solidFill>
+                  <a:srgbClr val="0A2373"/>
+                </a:solidFill>
+                <a:latin typeface="Lato"/>
+              </a:defRPr>
+            </a:pPr>
+            <a:r>
+              <a:t>1  National balance</a:t>
+            </a:r>
+          </a:p>
+        </p:txBody>
+      </p:sp>
+      <p:sp>
+        <p:nvSpPr>
+          <p:cNvPr id="10" name="Chevron 9">
+            <a:hlinkClick action="ppaction://hlinksldjump" r:id="rId3"/>
+          </p:cNvPr>
+          <p:cNvSpPr/>
+          <p:nvPr/>
+        </p:nvSpPr>
+        <p:spPr>
+          <a:xfrm>
+            <a:off x="2587752" y="73152"/>
+            <a:ext cx="2075688" cy="384048"/>
+          </a:xfrm>
+          <a:prstGeom prst="chevron">
+            <a:avLst>
+              <a:gd name="adj" fmla="val 12000"/>
+            </a:avLst>
+          </a:prstGeom>
+          <a:solidFill>
+            <a:srgbClr val="EEEEEE"/>
+          </a:solidFill>
+          <a:ln>
+            <a:noFill/>
+          </a:ln>
+        </p:spPr>
+        <p:style>
+          <a:lnRef idx="1">
+            <a:schemeClr val="accent1"/>
+          </a:lnRef>
+          <a:fillRef idx="3">
+            <a:schemeClr val="accent1"/>
+          </a:fillRef>
+          <a:effectRef idx="2">
+            <a:schemeClr val="accent1"/>
+          </a:effectRef>
+          <a:fontRef idx="minor">
+            <a:schemeClr val="lt1"/>
+          </a:fontRef>
+        </p:style>
+        <p:txBody>
+          <a:bodyPr rtlCol="0" anchor="ctr" tIns="0" bIns="0"/>
+          <a:lstStyle/>
+          <a:p>
+            <a:pPr algn="ctr">
+              <a:defRPr sz="1100" b="0">
+                <a:solidFill>
+                  <a:srgbClr val="0A2373"/>
+                </a:solidFill>
+                <a:latin typeface="Lato"/>
+              </a:defRPr>
+            </a:pPr>
+            <a:r>
+              <a:t>2  Forecast levers</a:t>
+            </a:r>
+          </a:p>
+        </p:txBody>
+      </p:sp>
+      <p:sp>
+        <p:nvSpPr>
+          <p:cNvPr id="11" name="Chevron 10">
+            <a:hlinkClick action="ppaction://hlinksldjump" r:id="rId4"/>
+          </p:cNvPr>
+          <p:cNvSpPr/>
+          <p:nvPr/>
+        </p:nvSpPr>
+        <p:spPr>
+          <a:xfrm>
+            <a:off x="4718304" y="73152"/>
+            <a:ext cx="2075688" cy="384048"/>
+          </a:xfrm>
+          <a:prstGeom prst="chevron">
+            <a:avLst>
+              <a:gd name="adj" fmla="val 12000"/>
+            </a:avLst>
+          </a:prstGeom>
+          <a:solidFill>
+            <a:srgbClr val="EEEEEE"/>
+          </a:solidFill>
+          <a:ln>
+            <a:noFill/>
+          </a:ln>
+        </p:spPr>
+        <p:style>
+          <a:lnRef idx="1">
+            <a:schemeClr val="accent1"/>
+          </a:lnRef>
+          <a:fillRef idx="3">
+            <a:schemeClr val="accent1"/>
+          </a:fillRef>
+          <a:effectRef idx="2">
+            <a:schemeClr val="accent1"/>
+          </a:effectRef>
+          <a:fontRef idx="minor">
+            <a:schemeClr val="lt1"/>
+          </a:fontRef>
+        </p:style>
+        <p:txBody>
+          <a:bodyPr rtlCol="0" anchor="ctr" tIns="0" bIns="0"/>
+          <a:lstStyle/>
+          <a:p>
+            <a:pPr algn="ctr">
+              <a:defRPr sz="1100" b="0">
+                <a:solidFill>
+                  <a:srgbClr val="0A2373"/>
+                </a:solidFill>
+                <a:latin typeface="Lato"/>
+              </a:defRPr>
+            </a:pPr>
+            <a:r>
+              <a:t>3  Sector baselines</a:t>
+            </a:r>
+          </a:p>
+        </p:txBody>
+      </p:sp>
+      <p:sp>
+        <p:nvSpPr>
+          <p:cNvPr id="12" name="Chevron 11">
+            <a:hlinkClick action="ppaction://hlinksldjump" r:id="rId5"/>
+          </p:cNvPr>
+          <p:cNvSpPr/>
+          <p:nvPr/>
+        </p:nvSpPr>
+        <p:spPr>
+          <a:xfrm>
+            <a:off x="6848856" y="73152"/>
+            <a:ext cx="2075688" cy="384048"/>
+          </a:xfrm>
+          <a:prstGeom prst="chevron">
+            <a:avLst>
+              <a:gd name="adj" fmla="val 12000"/>
+            </a:avLst>
+          </a:prstGeom>
+          <a:solidFill>
+            <a:srgbClr val="0A2373"/>
+          </a:solidFill>
+          <a:ln>
+            <a:noFill/>
+          </a:ln>
+        </p:spPr>
+        <p:style>
+          <a:lnRef idx="1">
+            <a:schemeClr val="accent1"/>
+          </a:lnRef>
+          <a:fillRef idx="3">
+            <a:schemeClr val="accent1"/>
+          </a:fillRef>
+          <a:effectRef idx="2">
+            <a:schemeClr val="accent1"/>
+          </a:effectRef>
+          <a:fontRef idx="minor">
+            <a:schemeClr val="lt1"/>
+          </a:fontRef>
+        </p:style>
+        <p:txBody>
+          <a:bodyPr rtlCol="0" anchor="ctr" tIns="0" bIns="0"/>
+          <a:lstStyle/>
+          <a:p>
+            <a:pPr algn="ctr">
+              <a:defRPr sz="1100" b="1">
+                <a:solidFill>
+                  <a:srgbClr val="FFFFFF"/>
+                </a:solidFill>
+                <a:latin typeface="Lato"/>
+              </a:defRPr>
+            </a:pPr>
+            <a:r>
+              <a:t>4  Tank handling</a:t>
+            </a:r>
+          </a:p>
+        </p:txBody>
+      </p:sp>
+      <p:sp>
+        <p:nvSpPr>
+          <p:cNvPr id="13" name="Chevron 12"/>
+          <p:cNvSpPr/>
+          <p:nvPr/>
+        </p:nvSpPr>
+        <p:spPr>
+          <a:xfrm>
+            <a:off x="8979408" y="73152"/>
+            <a:ext cx="2075688" cy="384048"/>
+          </a:xfrm>
+          <a:prstGeom prst="chevron">
+            <a:avLst>
+              <a:gd name="adj" fmla="val 12000"/>
+            </a:avLst>
+          </a:prstGeom>
+          <a:solidFill>
+            <a:srgbClr val="EEEEEE"/>
+          </a:solidFill>
+          <a:ln>
+            <a:noFill/>
+          </a:ln>
+        </p:spPr>
+        <p:style>
+          <a:lnRef idx="1">
+            <a:schemeClr val="accent1"/>
+          </a:lnRef>
+          <a:fillRef idx="3">
+            <a:schemeClr val="accent1"/>
+          </a:fillRef>
+          <a:effectRef idx="2">
+            <a:schemeClr val="accent1"/>
+          </a:effectRef>
+          <a:fontRef idx="minor">
+            <a:schemeClr val="lt1"/>
+          </a:fontRef>
+        </p:style>
+        <p:txBody>
+          <a:bodyPr rtlCol="0" anchor="ctr" tIns="0" bIns="0"/>
+          <a:lstStyle/>
+          <a:p>
+            <a:pPr algn="ctr">
+              <a:defRPr sz="1100" b="0">
+                <a:solidFill>
+                  <a:srgbClr val="0A2373"/>
+                </a:solidFill>
+                <a:latin typeface="Lato"/>
+              </a:defRPr>
+            </a:pPr>
+            <a:r>
+              <a:t>5  Hand-back</a:t>
+            </a:r>
+          </a:p>
+        </p:txBody>
+      </p:sp>
+    </p:spTree>
+  </p:cSld>
+  <p:clrMapOvr>
+    <a:masterClrMapping/>
+  </p:clrMapOvr>
+</p:sld>
+</file>
+
+<file path=ppt/slides/slide12.xml><?xml version="1.0" encoding="utf-8"?>
+<p:sld xmlns:a="http://schemas.openxmlformats.org/drawingml/2006/main" xmlns:p="http://schemas.openxmlformats.org/presentationml/2006/main" xmlns:r="http://schemas.openxmlformats.org/officeDocument/2006/relationships">
+  <p:cSld>
+    <p:spTree>
+      <p:nvGrpSpPr>
+        <p:cNvPr id="1" name=""/>
+        <p:cNvGrpSpPr/>
+        <p:nvPr/>
+      </p:nvGrpSpPr>
+      <p:grpSpPr/>
+      <p:sp>
+        <p:nvSpPr>
+          <p:cNvPr id="2" name="Title 1"/>
+          <p:cNvSpPr>
+            <a:spLocks noGrp="1"/>
+          </p:cNvSpPr>
+          <p:nvPr>
+            <p:ph type="title"/>
+          </p:nvPr>
+        </p:nvSpPr>
+        <p:spPr/>
+        <p:txBody>
+          <a:bodyPr/>
+          <a:lstStyle/>
+          <a:p>
+            <a:r>
+              <a:t>Durban: fuel tanks are under half the site, so handling is far below the gross-capacity figure</a:t>
+            </a:r>
+          </a:p>
+        </p:txBody>
+      </p:sp>
+      <p:sp>
+        <p:nvSpPr>
+          <p:cNvPr id="3" name="TextBox 2"/>
+          <p:cNvSpPr txBox="1"/>
+          <p:nvPr/>
+        </p:nvSpPr>
+        <p:spPr>
+          <a:xfrm>
+            <a:off x="457200" y="1627632"/>
+            <a:ext cx="10652760" cy="274320"/>
+          </a:xfrm>
+          <a:prstGeom prst="rect">
+            <a:avLst/>
+          </a:prstGeom>
+          <a:noFill/>
+        </p:spPr>
+        <p:txBody>
+          <a:bodyPr wrap="square" lIns="22860" rIns="22860" tIns="0" bIns="0">
+            <a:spAutoFit/>
+          </a:bodyPr>
+          <a:lstStyle/>
+          <a:p>
+            <a:pPr>
+              <a:spcAft>
+                <a:spcPts val="300"/>
+              </a:spcAft>
+              <a:defRPr sz="1300" b="1">
+                <a:solidFill>
+                  <a:srgbClr val="11151A"/>
+                </a:solidFill>
+                <a:latin typeface="Lato"/>
+              </a:defRPr>
+            </a:pPr>
+            <a:r>
+              <a:t>Vopak Durban, Island View | proposed site assumptions | each row marked evidence or estimate</a:t>
+            </a:r>
+          </a:p>
+        </p:txBody>
+      </p:sp>
+      <p:cxnSp>
+        <p:nvCxnSpPr>
+          <p:cNvPr id="4" name="Connector 3"/>
+          <p:cNvCxnSpPr/>
+          <p:nvPr/>
+        </p:nvCxnSpPr>
+        <p:spPr>
+          <a:xfrm>
+            <a:off x="457200" y="1920240"/>
+            <a:ext cx="10652760" cy="0"/>
+          </a:xfrm>
+          <a:prstGeom prst="line">
+            <a:avLst/>
+          </a:prstGeom>
+          <a:ln w="7620">
+            <a:solidFill>
+              <a:srgbClr val="A0A0A0"/>
+            </a:solidFill>
+          </a:ln>
+        </p:spPr>
+        <p:style>
+          <a:lnRef idx="2">
+            <a:schemeClr val="accent1"/>
+          </a:lnRef>
+          <a:fillRef idx="0">
+            <a:schemeClr val="accent1"/>
+          </a:fillRef>
+          <a:effectRef idx="1">
+            <a:schemeClr val="accent1"/>
+          </a:effectRef>
+          <a:fontRef idx="minor">
+            <a:schemeClr val="tx1"/>
+          </a:fontRef>
+        </p:style>
+      </p:cxnSp>
+      <p:sp>
+        <p:nvSpPr>
+          <p:cNvPr id="5" name="TextBox 4"/>
+          <p:cNvSpPr txBox="1"/>
+          <p:nvPr/>
+        </p:nvSpPr>
+        <p:spPr>
+          <a:xfrm>
+            <a:off x="457200" y="6547104"/>
+            <a:ext cx="9692640" cy="182880"/>
+          </a:xfrm>
+          <a:prstGeom prst="rect">
+            <a:avLst/>
+          </a:prstGeom>
+          <a:noFill/>
+        </p:spPr>
+        <p:txBody>
+          <a:bodyPr wrap="square" lIns="22860" rIns="22860" tIns="0" bIns="0">
+            <a:spAutoFit/>
+          </a:bodyPr>
+          <a:lstStyle/>
+          <a:p>
+            <a:pPr>
+              <a:spcAft>
+                <a:spcPts val="300"/>
+              </a:spcAft>
+              <a:defRPr sz="800" b="0">
+                <a:solidFill>
+                  <a:srgbClr val="11151A"/>
+                </a:solidFill>
+                <a:latin typeface="Lato"/>
+              </a:defRPr>
+            </a:pPr>
+            <a:r>
+              <a:t>Source: terminal_site_assumptions.csv and tank_handling_site_assumptions_2026-10-07.md on manish-branch; NERSA licence documents, Vopak and Transnet. No Vopak operating data used.</a:t>
+            </a:r>
+          </a:p>
+        </p:txBody>
+      </p:sp>
+      <p:sp>
+        <p:nvSpPr>
+          <p:cNvPr id="6" name="TextBox 5"/>
+          <p:cNvSpPr txBox="1"/>
+          <p:nvPr/>
+        </p:nvSpPr>
+        <p:spPr>
+          <a:xfrm>
+            <a:off x="457200" y="6711696"/>
+            <a:ext cx="2011680" cy="128016"/>
+          </a:xfrm>
+          <a:prstGeom prst="rect">
+            <a:avLst/>
+          </a:prstGeom>
+          <a:noFill/>
+        </p:spPr>
+        <p:txBody>
+          <a:bodyPr wrap="square" lIns="22860" rIns="22860" tIns="0" bIns="0">
+            <a:spAutoFit/>
+          </a:bodyPr>
+          <a:lstStyle/>
+          <a:p>
+            <a:pPr>
+              <a:spcAft>
+                <a:spcPts val="300"/>
+              </a:spcAft>
+              <a:defRPr sz="700" b="0">
+                <a:solidFill>
+                  <a:srgbClr val="11151A"/>
+                </a:solidFill>
+                <a:latin typeface="Lato"/>
+              </a:defRPr>
+            </a:pPr>
+            <a:r>
+              <a:t>Strictly Confidential</a:t>
+            </a:r>
+          </a:p>
+        </p:txBody>
+      </p:sp>
+      <p:graphicFrame>
+        <p:nvGraphicFramePr>
+          <p:cNvPr id="7" name="Table 6"/>
+          <p:cNvGraphicFramePr>
+            <a:graphicFrameLocks noGrp="1"/>
+          </p:cNvGraphicFramePr>
+          <p:nvPr/>
+        </p:nvGraphicFramePr>
+        <p:xfrm>
+          <a:off x="457200" y="2029968"/>
+          <a:ext cx="10652760" cy="3657600"/>
+        </p:xfrm>
+        <a:graphic>
+          <a:graphicData uri="http://schemas.openxmlformats.org/drawingml/2006/table">
+            <a:tbl>
+              <a:tblPr firstRow="0" bandRow="0"/>
+              <a:tblGrid>
+                <a:gridCol w="1828800"/>
+                <a:gridCol w="4663440"/>
+                <a:gridCol w="1828800"/>
+                <a:gridCol w="2331720"/>
+              </a:tblGrid>
+              <a:tr h="457200">
+                <a:tc>
+                  <a:txBody>
+                    <a:bodyPr/>
+                    <a:lstStyle/>
+                    <a:p>
+                      <a:pPr>
+                        <a:spcAft>
+                          <a:spcPts val="100"/>
+                        </a:spcAft>
+                        <a:defRPr sz="1000" b="1">
+                          <a:solidFill>
+                            <a:srgbClr val="0A2373"/>
+                          </a:solidFill>
+                          <a:latin typeface="Lato"/>
+                        </a:defRPr>
+                      </a:pPr>
+                      <a:r>
+                        <a:t>Item</a:t>
+                      </a:r>
+                    </a:p>
+                  </a:txBody>
+                  <a:tcPr marL="64008" marR="64008" marT="54864" marB="27432" anchor="t">
+                    <a:lnL w="0">
+                      <a:noFill/>
+                    </a:lnL>
+                    <a:lnR w="0">
+                      <a:noFill/>
+                    </a:lnR>
+                    <a:lnT w="0">
+                      <a:noFill/>
+                    </a:lnT>
+                    <a:lnB w="5080">
+                      <a:solidFill>
+                        <a:srgbClr val="B8B8B8"/>
+                      </a:solidFill>
+                    </a:lnB>
+                    <a:solidFill>
+                      <a:srgbClr val="FFFFFF"/>
+                    </a:solidFill>
+                  </a:tcPr>
+                </a:tc>
+                <a:tc>
+                  <a:txBody>
+                    <a:bodyPr/>
+                    <a:lstStyle/>
+                    <a:p>
+                      <a:pPr>
+                        <a:spcAft>
+                          <a:spcPts val="100"/>
+                        </a:spcAft>
+                        <a:defRPr sz="1000" b="1">
+                          <a:solidFill>
+                            <a:srgbClr val="11151A"/>
+                          </a:solidFill>
+                          <a:latin typeface="Lato"/>
+                        </a:defRPr>
+                      </a:pPr>
+                      <a:r>
+                        <a:t>Value</a:t>
+                      </a:r>
+                    </a:p>
+                  </a:txBody>
+                  <a:tcPr marL="64008" marR="64008" marT="54864" marB="27432" anchor="t">
+                    <a:lnL w="0">
+                      <a:noFill/>
+                    </a:lnL>
+                    <a:lnR w="0">
+                      <a:noFill/>
+                    </a:lnR>
+                    <a:lnT w="0">
+                      <a:noFill/>
+                    </a:lnT>
+                    <a:lnB w="5080">
+                      <a:solidFill>
+                        <a:srgbClr val="B8B8B8"/>
+                      </a:solidFill>
+                    </a:lnB>
+                    <a:solidFill>
+                      <a:srgbClr val="FFFFFF"/>
+                    </a:solidFill>
+                  </a:tcPr>
+                </a:tc>
+                <a:tc>
+                  <a:txBody>
+                    <a:bodyPr/>
+                    <a:lstStyle/>
+                    <a:p>
+                      <a:pPr>
+                        <a:spcAft>
+                          <a:spcPts val="100"/>
+                        </a:spcAft>
+                        <a:defRPr sz="1000" b="1">
+                          <a:solidFill>
+                            <a:srgbClr val="11151A"/>
+                          </a:solidFill>
+                          <a:latin typeface="Lato"/>
+                        </a:defRPr>
+                      </a:pPr>
+                      <a:r>
+                        <a:t>Basis</a:t>
+                      </a:r>
+                    </a:p>
+                  </a:txBody>
+                  <a:tcPr marL="64008" marR="64008" marT="54864" marB="27432" anchor="t">
+                    <a:lnL w="0">
+                      <a:noFill/>
+                    </a:lnL>
+                    <a:lnR w="0">
+                      <a:noFill/>
+                    </a:lnR>
+                    <a:lnT w="0">
+                      <a:noFill/>
+                    </a:lnT>
+                    <a:lnB w="5080">
+                      <a:solidFill>
+                        <a:srgbClr val="B8B8B8"/>
+                      </a:solidFill>
+                    </a:lnB>
+                    <a:solidFill>
+                      <a:srgbClr val="FFFFFF"/>
+                    </a:solidFill>
+                  </a:tcPr>
+                </a:tc>
+                <a:tc>
+                  <a:txBody>
+                    <a:bodyPr/>
+                    <a:lstStyle/>
+                    <a:p>
+                      <a:pPr>
+                        <a:spcAft>
+                          <a:spcPts val="100"/>
+                        </a:spcAft>
+                        <a:defRPr sz="1000" b="1">
+                          <a:solidFill>
+                            <a:srgbClr val="11151A"/>
+                          </a:solidFill>
+                          <a:latin typeface="Lato"/>
+                        </a:defRPr>
+                      </a:pPr>
+                      <a:r>
+                        <a:t>Source</a:t>
+                      </a:r>
+                    </a:p>
+                  </a:txBody>
+                  <a:tcPr marL="64008" marR="64008" marT="54864" marB="27432" anchor="t">
+                    <a:lnL w="0">
+                      <a:noFill/>
+                    </a:lnL>
+                    <a:lnR w="0">
+                      <a:noFill/>
+                    </a:lnR>
+                    <a:lnT w="0">
+                      <a:noFill/>
+                    </a:lnT>
+                    <a:lnB w="5080">
+                      <a:solidFill>
+                        <a:srgbClr val="B8B8B8"/>
+                      </a:solidFill>
+                    </a:lnB>
+                    <a:solidFill>
+                      <a:srgbClr val="FFFFFF"/>
+                    </a:solidFill>
+                  </a:tcPr>
+                </a:tc>
+              </a:tr>
+              <a:tr h="457200">
+                <a:tc>
+                  <a:txBody>
+                    <a:bodyPr/>
+                    <a:lstStyle/>
+                    <a:p>
+                      <a:pPr>
+                        <a:spcAft>
+                          <a:spcPts val="100"/>
+                        </a:spcAft>
+                        <a:defRPr sz="1000" b="1">
+                          <a:solidFill>
+                            <a:srgbClr val="0A2373"/>
+                          </a:solidFill>
+                          <a:latin typeface="Lato"/>
+                        </a:defRPr>
+                      </a:pPr>
+                      <a:r>
+                        <a:t>Gross capacity</a:t>
+                      </a:r>
+                    </a:p>
+                  </a:txBody>
+                  <a:tcPr marL="64008" marR="64008" marT="54864" marB="27432" anchor="t">
+                    <a:lnL w="0">
+                      <a:noFill/>
+                    </a:lnL>
+                    <a:lnR w="0">
+                      <a:noFill/>
+                    </a:lnR>
+                    <a:lnT w="0">
+                      <a:noFill/>
+                    </a:lnT>
+                    <a:lnB w="5080">
+                      <a:solidFill>
+                        <a:srgbClr val="B8B8B8"/>
+                      </a:solidFill>
+                    </a:lnB>
+                    <a:solidFill>
+                      <a:srgbClr val="FFFFFF"/>
+                    </a:solidFill>
+                  </a:tcPr>
+                </a:tc>
+                <a:tc>
+                  <a:txBody>
+                    <a:bodyPr/>
+                    <a:lstStyle/>
+                    <a:p>
+                      <a:pPr>
+                        <a:spcAft>
+                          <a:spcPts val="100"/>
+                        </a:spcAft>
+                        <a:defRPr sz="1000" b="0">
+                          <a:solidFill>
+                            <a:srgbClr val="11151A"/>
+                          </a:solidFill>
+                          <a:latin typeface="Lato"/>
+                        </a:defRPr>
+                      </a:pPr>
+                      <a:r>
+                        <a:t>360,246 m3 for petroleum, chemicals and oleochemicals</a:t>
+                      </a:r>
+                    </a:p>
+                  </a:txBody>
+                  <a:tcPr marL="64008" marR="64008" marT="54864" marB="27432" anchor="t">
+                    <a:lnL w="0">
+                      <a:noFill/>
+                    </a:lnL>
+                    <a:lnR w="0">
+                      <a:noFill/>
+                    </a:lnR>
+                    <a:lnT w="0">
+                      <a:noFill/>
+                    </a:lnT>
+                    <a:lnB w="5080">
+                      <a:solidFill>
+                        <a:srgbClr val="B8B8B8"/>
+                      </a:solidFill>
+                    </a:lnB>
+                    <a:solidFill>
+                      <a:srgbClr val="FFFFFF"/>
+                    </a:solidFill>
+                  </a:tcPr>
+                </a:tc>
+                <a:tc>
+                  <a:txBody>
+                    <a:bodyPr/>
+                    <a:lstStyle/>
+                    <a:p>
+                      <a:pPr>
+                        <a:spcAft>
+                          <a:spcPts val="100"/>
+                        </a:spcAft>
+                        <a:defRPr sz="1000" b="0">
+                          <a:solidFill>
+                            <a:srgbClr val="11151A"/>
+                          </a:solidFill>
+                          <a:latin typeface="Lato"/>
+                        </a:defRPr>
+                      </a:pPr>
+                      <a:r>
+                        <a:t>Evidence</a:t>
+                      </a:r>
+                    </a:p>
+                  </a:txBody>
+                  <a:tcPr marL="64008" marR="64008" marT="54864" marB="27432" anchor="t">
+                    <a:lnL w="0">
+                      <a:noFill/>
+                    </a:lnL>
+                    <a:lnR w="0">
+                      <a:noFill/>
+                    </a:lnR>
+                    <a:lnT w="0">
+                      <a:noFill/>
+                    </a:lnT>
+                    <a:lnB w="5080">
+                      <a:solidFill>
+                        <a:srgbClr val="B8B8B8"/>
+                      </a:solidFill>
+                    </a:lnB>
+                    <a:solidFill>
+                      <a:srgbClr val="FFFFFF"/>
+                    </a:solidFill>
+                  </a:tcPr>
+                </a:tc>
+                <a:tc>
+                  <a:txBody>
+                    <a:bodyPr/>
+                    <a:lstStyle/>
+                    <a:p>
+                      <a:pPr>
+                        <a:spcAft>
+                          <a:spcPts val="100"/>
+                        </a:spcAft>
+                        <a:defRPr sz="1000" b="0">
+                          <a:solidFill>
+                            <a:srgbClr val="11151A"/>
+                          </a:solidFill>
+                          <a:latin typeface="Lato"/>
+                        </a:defRPr>
+                      </a:pPr>
+                      <a:r>
+                        <a:t>Vopak terminal page, checked 6 October 2026</a:t>
+                      </a:r>
+                    </a:p>
+                  </a:txBody>
+                  <a:tcPr marL="64008" marR="64008" marT="54864" marB="27432" anchor="t">
+                    <a:lnL w="0">
+                      <a:noFill/>
+                    </a:lnL>
+                    <a:lnR w="0">
+                      <a:noFill/>
+                    </a:lnR>
+                    <a:lnT w="0">
+                      <a:noFill/>
+                    </a:lnT>
+                    <a:lnB w="5080">
+                      <a:solidFill>
+                        <a:srgbClr val="B8B8B8"/>
+                      </a:solidFill>
+                    </a:lnB>
+                    <a:solidFill>
+                      <a:srgbClr val="FFFFFF"/>
+                    </a:solidFill>
+                  </a:tcPr>
+                </a:tc>
+              </a:tr>
+              <a:tr h="457200">
+                <a:tc>
+                  <a:txBody>
+                    <a:bodyPr/>
+                    <a:lstStyle/>
+                    <a:p>
+                      <a:pPr>
+                        <a:spcAft>
+                          <a:spcPts val="100"/>
+                        </a:spcAft>
+                        <a:defRPr sz="1000" b="1">
+                          <a:solidFill>
+                            <a:srgbClr val="0A2373"/>
+                          </a:solidFill>
+                          <a:latin typeface="Lato"/>
+                        </a:defRPr>
+                      </a:pPr>
+                      <a:r>
+                        <a:t>Built for petrol and diesel</a:t>
+                      </a:r>
+                    </a:p>
+                  </a:txBody>
+                  <a:tcPr marL="64008" marR="64008" marT="54864" marB="27432" anchor="t">
+                    <a:lnL w="0">
+                      <a:noFill/>
+                    </a:lnL>
+                    <a:lnR w="0">
+                      <a:noFill/>
+                    </a:lnR>
+                    <a:lnT w="0">
+                      <a:noFill/>
+                    </a:lnT>
+                    <a:lnB w="5080">
+                      <a:solidFill>
+                        <a:srgbClr val="B8B8B8"/>
+                      </a:solidFill>
+                    </a:lnB>
+                    <a:solidFill>
+                      <a:srgbClr val="FFFFFF"/>
+                    </a:solidFill>
+                  </a:tcPr>
+                </a:tc>
+                <a:tc>
+                  <a:txBody>
+                    <a:bodyPr/>
+                    <a:lstStyle/>
+                    <a:p>
+                      <a:pPr>
+                        <a:spcAft>
+                          <a:spcPts val="100"/>
+                        </a:spcAft>
+                        <a:defRPr sz="1000" b="0">
+                          <a:solidFill>
+                            <a:srgbClr val="11151A"/>
+                          </a:solidFill>
+                          <a:latin typeface="Lato"/>
+                        </a:defRPr>
+                      </a:pPr>
+                      <a:r>
+                        <a:t>162,000 m3 in ten tanks; a floor, older tanks not counted</a:t>
+                      </a:r>
+                    </a:p>
+                  </a:txBody>
+                  <a:tcPr marL="64008" marR="64008" marT="54864" marB="27432" anchor="t">
+                    <a:lnL w="0">
+                      <a:noFill/>
+                    </a:lnL>
+                    <a:lnR w="0">
+                      <a:noFill/>
+                    </a:lnR>
+                    <a:lnT w="0">
+                      <a:noFill/>
+                    </a:lnT>
+                    <a:lnB w="5080">
+                      <a:solidFill>
+                        <a:srgbClr val="B8B8B8"/>
+                      </a:solidFill>
+                    </a:lnB>
+                    <a:solidFill>
+                      <a:srgbClr val="FFFFFF"/>
+                    </a:solidFill>
+                  </a:tcPr>
+                </a:tc>
+                <a:tc>
+                  <a:txBody>
+                    <a:bodyPr/>
+                    <a:lstStyle/>
+                    <a:p>
+                      <a:pPr>
+                        <a:spcAft>
+                          <a:spcPts val="100"/>
+                        </a:spcAft>
+                        <a:defRPr sz="1000" b="0">
+                          <a:solidFill>
+                            <a:srgbClr val="11151A"/>
+                          </a:solidFill>
+                          <a:latin typeface="Lato"/>
+                        </a:defRPr>
+                      </a:pPr>
+                      <a:r>
+                        <a:t>Evidence</a:t>
+                      </a:r>
+                    </a:p>
+                  </a:txBody>
+                  <a:tcPr marL="64008" marR="64008" marT="54864" marB="27432" anchor="t">
+                    <a:lnL w="0">
+                      <a:noFill/>
+                    </a:lnL>
+                    <a:lnR w="0">
+                      <a:noFill/>
+                    </a:lnR>
+                    <a:lnT w="0">
+                      <a:noFill/>
+                    </a:lnT>
+                    <a:lnB w="5080">
+                      <a:solidFill>
+                        <a:srgbClr val="B8B8B8"/>
+                      </a:solidFill>
+                    </a:lnB>
+                    <a:solidFill>
+                      <a:srgbClr val="FFFFFF"/>
+                    </a:solidFill>
+                  </a:tcPr>
+                </a:tc>
+                <a:tc>
+                  <a:txBody>
+                    <a:bodyPr/>
+                    <a:lstStyle/>
+                    <a:p>
+                      <a:pPr>
+                        <a:spcAft>
+                          <a:spcPts val="100"/>
+                        </a:spcAft>
+                        <a:defRPr sz="1000" b="0">
+                          <a:solidFill>
+                            <a:srgbClr val="11151A"/>
+                          </a:solidFill>
+                          <a:latin typeface="Lato"/>
+                        </a:defRPr>
+                      </a:pPr>
+                      <a:r>
+                        <a:t>Vopak news release, 17 February 2017</a:t>
+                      </a:r>
+                    </a:p>
+                  </a:txBody>
+                  <a:tcPr marL="64008" marR="64008" marT="54864" marB="27432" anchor="t">
+                    <a:lnL w="0">
+                      <a:noFill/>
+                    </a:lnL>
+                    <a:lnR w="0">
+                      <a:noFill/>
+                    </a:lnR>
+                    <a:lnT w="0">
+                      <a:noFill/>
+                    </a:lnT>
+                    <a:lnB w="5080">
+                      <a:solidFill>
+                        <a:srgbClr val="B8B8B8"/>
+                      </a:solidFill>
+                    </a:lnB>
+                    <a:solidFill>
+                      <a:srgbClr val="FFFFFF"/>
+                    </a:solidFill>
+                  </a:tcPr>
+                </a:tc>
+              </a:tr>
+              <a:tr h="457200">
+                <a:tc>
+                  <a:txBody>
+                    <a:bodyPr/>
+                    <a:lstStyle/>
+                    <a:p>
+                      <a:pPr>
+                        <a:spcAft>
+                          <a:spcPts val="100"/>
+                        </a:spcAft>
+                        <a:defRPr sz="1000" b="1">
+                          <a:solidFill>
+                            <a:srgbClr val="0A2373"/>
+                          </a:solidFill>
+                          <a:latin typeface="Lato"/>
+                        </a:defRPr>
+                      </a:pPr>
+                      <a:r>
+                        <a:t>Operational capacity, fuel</a:t>
+                      </a:r>
+                    </a:p>
+                  </a:txBody>
+                  <a:tcPr marL="64008" marR="64008" marT="54864" marB="27432" anchor="t">
+                    <a:lnL w="0">
+                      <a:noFill/>
+                    </a:lnL>
+                    <a:lnR w="0">
+                      <a:noFill/>
+                    </a:lnR>
+                    <a:lnT w="0">
+                      <a:noFill/>
+                    </a:lnT>
+                    <a:lnB w="5080">
+                      <a:solidFill>
+                        <a:srgbClr val="B8B8B8"/>
+                      </a:solidFill>
+                    </a:lnB>
+                    <a:solidFill>
+                      <a:srgbClr val="FFFFFF"/>
+                    </a:solidFill>
+                  </a:tcPr>
+                </a:tc>
+                <a:tc>
+                  <a:txBody>
+                    <a:bodyPr/>
+                    <a:lstStyle/>
+                    <a:p>
+                      <a:pPr>
+                        <a:spcAft>
+                          <a:spcPts val="100"/>
+                        </a:spcAft>
+                        <a:defRPr sz="1000" b="0">
+                          <a:solidFill>
+                            <a:srgbClr val="11151A"/>
+                          </a:solidFill>
+                          <a:latin typeface="Lato"/>
+                        </a:defRPr>
+                      </a:pPr>
+                      <a:r>
+                        <a:t>146,000 m3</a:t>
+                      </a:r>
+                    </a:p>
+                  </a:txBody>
+                  <a:tcPr marL="64008" marR="64008" marT="54864" marB="27432" anchor="t">
+                    <a:lnL w="0">
+                      <a:noFill/>
+                    </a:lnL>
+                    <a:lnR w="0">
+                      <a:noFill/>
+                    </a:lnR>
+                    <a:lnT w="0">
+                      <a:noFill/>
+                    </a:lnT>
+                    <a:lnB w="5080">
+                      <a:solidFill>
+                        <a:srgbClr val="B8B8B8"/>
+                      </a:solidFill>
+                    </a:lnB>
+                    <a:solidFill>
+                      <a:srgbClr val="FFFFFF"/>
+                    </a:solidFill>
+                  </a:tcPr>
+                </a:tc>
+                <a:tc>
+                  <a:txBody>
+                    <a:bodyPr/>
+                    <a:lstStyle/>
+                    <a:p>
+                      <a:pPr>
+                        <a:spcAft>
+                          <a:spcPts val="100"/>
+                        </a:spcAft>
+                        <a:defRPr sz="1000" b="0">
+                          <a:solidFill>
+                            <a:srgbClr val="11151A"/>
+                          </a:solidFill>
+                          <a:latin typeface="Lato"/>
+                        </a:defRPr>
+                      </a:pPr>
+                      <a:r>
+                        <a:t>Estimate</a:t>
+                      </a:r>
+                    </a:p>
+                  </a:txBody>
+                  <a:tcPr marL="64008" marR="64008" marT="54864" marB="27432" anchor="t">
+                    <a:lnL w="0">
+                      <a:noFill/>
+                    </a:lnL>
+                    <a:lnR w="0">
+                      <a:noFill/>
+                    </a:lnR>
+                    <a:lnT w="0">
+                      <a:noFill/>
+                    </a:lnT>
+                    <a:lnB w="5080">
+                      <a:solidFill>
+                        <a:srgbClr val="B8B8B8"/>
+                      </a:solidFill>
+                    </a:lnB>
+                    <a:solidFill>
+                      <a:srgbClr val="FFFFFF"/>
+                    </a:solidFill>
+                  </a:tcPr>
+                </a:tc>
+                <a:tc>
+                  <a:txBody>
+                    <a:bodyPr/>
+                    <a:lstStyle/>
+                    <a:p>
+                      <a:pPr>
+                        <a:spcAft>
+                          <a:spcPts val="100"/>
+                        </a:spcAft>
+                        <a:defRPr sz="1000" b="0">
+                          <a:solidFill>
+                            <a:srgbClr val="11151A"/>
+                          </a:solidFill>
+                          <a:latin typeface="Lato"/>
+                        </a:defRPr>
+                      </a:pPr>
+                      <a:r>
+                        <a:t>90% of design, as at Lesedi</a:t>
+                      </a:r>
+                    </a:p>
+                  </a:txBody>
+                  <a:tcPr marL="64008" marR="64008" marT="54864" marB="27432" anchor="t">
+                    <a:lnL w="0">
+                      <a:noFill/>
+                    </a:lnL>
+                    <a:lnR w="0">
+                      <a:noFill/>
+                    </a:lnR>
+                    <a:lnT w="0">
+                      <a:noFill/>
+                    </a:lnT>
+                    <a:lnB w="5080">
+                      <a:solidFill>
+                        <a:srgbClr val="B8B8B8"/>
+                      </a:solidFill>
+                    </a:lnB>
+                    <a:solidFill>
+                      <a:srgbClr val="FFFFFF"/>
+                    </a:solidFill>
+                  </a:tcPr>
+                </a:tc>
+              </a:tr>
+              <a:tr h="457200">
+                <a:tc>
+                  <a:txBody>
+                    <a:bodyPr/>
+                    <a:lstStyle/>
+                    <a:p>
+                      <a:pPr>
+                        <a:spcAft>
+                          <a:spcPts val="100"/>
+                        </a:spcAft>
+                        <a:defRPr sz="1000" b="1">
+                          <a:solidFill>
+                            <a:srgbClr val="0A2373"/>
+                          </a:solidFill>
+                          <a:latin typeface="Lato"/>
+                        </a:defRPr>
+                      </a:pPr>
+                      <a:r>
+                        <a:t>Receipts and dispatch</a:t>
+                      </a:r>
+                    </a:p>
+                  </a:txBody>
+                  <a:tcPr marL="64008" marR="64008" marT="54864" marB="27432" anchor="t">
+                    <a:lnL w="0">
+                      <a:noFill/>
+                    </a:lnL>
+                    <a:lnR w="0">
+                      <a:noFill/>
+                    </a:lnR>
+                    <a:lnT w="0">
+                      <a:noFill/>
+                    </a:lnT>
+                    <a:lnB w="5080">
+                      <a:solidFill>
+                        <a:srgbClr val="B8B8B8"/>
+                      </a:solidFill>
+                    </a:lnB>
+                    <a:solidFill>
+                      <a:srgbClr val="FFFFFF"/>
+                    </a:solidFill>
+                  </a:tcPr>
+                </a:tc>
+                <a:tc>
+                  <a:txBody>
+                    <a:bodyPr/>
+                    <a:lstStyle/>
+                    <a:p>
+                      <a:pPr>
+                        <a:spcAft>
+                          <a:spcPts val="100"/>
+                        </a:spcAft>
+                        <a:defRPr sz="1000" b="0">
+                          <a:solidFill>
+                            <a:srgbClr val="11151A"/>
+                          </a:solidFill>
+                          <a:latin typeface="Lato"/>
+                        </a:defRPr>
+                      </a:pPr>
+                      <a:r>
+                        <a:t>Vessel (five berths), pipeline, rail, truck. No rate published for any mode</a:t>
+                      </a:r>
+                    </a:p>
+                  </a:txBody>
+                  <a:tcPr marL="64008" marR="64008" marT="54864" marB="27432" anchor="t">
+                    <a:lnL w="0">
+                      <a:noFill/>
+                    </a:lnL>
+                    <a:lnR w="0">
+                      <a:noFill/>
+                    </a:lnR>
+                    <a:lnT w="0">
+                      <a:noFill/>
+                    </a:lnT>
+                    <a:lnB w="5080">
+                      <a:solidFill>
+                        <a:srgbClr val="B8B8B8"/>
+                      </a:solidFill>
+                    </a:lnB>
+                    <a:solidFill>
+                      <a:srgbClr val="FFFFFF"/>
+                    </a:solidFill>
+                  </a:tcPr>
+                </a:tc>
+                <a:tc>
+                  <a:txBody>
+                    <a:bodyPr/>
+                    <a:lstStyle/>
+                    <a:p>
+                      <a:pPr>
+                        <a:spcAft>
+                          <a:spcPts val="100"/>
+                        </a:spcAft>
+                        <a:defRPr sz="1000" b="0">
+                          <a:solidFill>
+                            <a:srgbClr val="11151A"/>
+                          </a:solidFill>
+                          <a:latin typeface="Lato"/>
+                        </a:defRPr>
+                      </a:pPr>
+                      <a:r>
+                        <a:t>Evidence; rates not found</a:t>
+                      </a:r>
+                    </a:p>
+                  </a:txBody>
+                  <a:tcPr marL="64008" marR="64008" marT="54864" marB="27432" anchor="t">
+                    <a:lnL w="0">
+                      <a:noFill/>
+                    </a:lnL>
+                    <a:lnR w="0">
+                      <a:noFill/>
+                    </a:lnR>
+                    <a:lnT w="0">
+                      <a:noFill/>
+                    </a:lnT>
+                    <a:lnB w="5080">
+                      <a:solidFill>
+                        <a:srgbClr val="B8B8B8"/>
+                      </a:solidFill>
+                    </a:lnB>
+                    <a:solidFill>
+                      <a:srgbClr val="FFFFFF"/>
+                    </a:solidFill>
+                  </a:tcPr>
+                </a:tc>
+                <a:tc>
+                  <a:txBody>
+                    <a:bodyPr/>
+                    <a:lstStyle/>
+                    <a:p>
+                      <a:pPr>
+                        <a:spcAft>
+                          <a:spcPts val="100"/>
+                        </a:spcAft>
+                        <a:defRPr sz="1000" b="0">
+                          <a:solidFill>
+                            <a:srgbClr val="11151A"/>
+                          </a:solidFill>
+                          <a:latin typeface="Lato"/>
+                        </a:defRPr>
+                      </a:pPr>
+                      <a:r>
+                        <a:t>Vopak terminal page</a:t>
+                      </a:r>
+                    </a:p>
+                  </a:txBody>
+                  <a:tcPr marL="64008" marR="64008" marT="54864" marB="27432" anchor="t">
+                    <a:lnL w="0">
+                      <a:noFill/>
+                    </a:lnL>
+                    <a:lnR w="0">
+                      <a:noFill/>
+                    </a:lnR>
+                    <a:lnT w="0">
+                      <a:noFill/>
+                    </a:lnT>
+                    <a:lnB w="5080">
+                      <a:solidFill>
+                        <a:srgbClr val="B8B8B8"/>
+                      </a:solidFill>
+                    </a:lnB>
+                    <a:solidFill>
+                      <a:srgbClr val="FFFFFF"/>
+                    </a:solidFill>
+                  </a:tcPr>
+                </a:tc>
+              </a:tr>
+              <a:tr h="457200">
+                <a:tc>
+                  <a:txBody>
+                    <a:bodyPr/>
+                    <a:lstStyle/>
+                    <a:p>
+                      <a:pPr>
+                        <a:spcAft>
+                          <a:spcPts val="100"/>
+                        </a:spcAft>
+                        <a:defRPr sz="1000" b="1">
+                          <a:solidFill>
+                            <a:srgbClr val="0A2373"/>
+                          </a:solidFill>
+                          <a:latin typeface="Lato"/>
+                        </a:defRPr>
+                      </a:pPr>
+                      <a:r>
+                        <a:t>Pipeline to Gauteng</a:t>
+                      </a:r>
+                    </a:p>
+                  </a:txBody>
+                  <a:tcPr marL="64008" marR="64008" marT="54864" marB="27432" anchor="t">
+                    <a:lnL w="0">
+                      <a:noFill/>
+                    </a:lnL>
+                    <a:lnR w="0">
+                      <a:noFill/>
+                    </a:lnR>
+                    <a:lnT w="0">
+                      <a:noFill/>
+                    </a:lnT>
+                    <a:lnB w="5080">
+                      <a:solidFill>
+                        <a:srgbClr val="B8B8B8"/>
+                      </a:solidFill>
+                    </a:lnB>
+                    <a:solidFill>
+                      <a:srgbClr val="FFFFFF"/>
+                    </a:solidFill>
+                  </a:tcPr>
+                </a:tc>
+                <a:tc>
+                  <a:txBody>
+                    <a:bodyPr/>
+                    <a:lstStyle/>
+                    <a:p>
+                      <a:pPr>
+                        <a:spcAft>
+                          <a:spcPts val="100"/>
+                        </a:spcAft>
+                        <a:defRPr sz="1000" b="0">
+                          <a:solidFill>
+                            <a:srgbClr val="11151A"/>
+                          </a:solidFill>
+                          <a:latin typeface="Lato"/>
+                        </a:defRPr>
+                      </a:pPr>
+                      <a:r>
+                        <a:t>148,000 m3 a week for all shippers and products</a:t>
+                      </a:r>
+                    </a:p>
+                  </a:txBody>
+                  <a:tcPr marL="64008" marR="64008" marT="54864" marB="27432" anchor="t">
+                    <a:lnL w="0">
+                      <a:noFill/>
+                    </a:lnL>
+                    <a:lnR w="0">
+                      <a:noFill/>
+                    </a:lnR>
+                    <a:lnT w="0">
+                      <a:noFill/>
+                    </a:lnT>
+                    <a:lnB w="5080">
+                      <a:solidFill>
+                        <a:srgbClr val="B8B8B8"/>
+                      </a:solidFill>
+                    </a:lnB>
+                    <a:solidFill>
+                      <a:srgbClr val="FFFFFF"/>
+                    </a:solidFill>
+                  </a:tcPr>
+                </a:tc>
+                <a:tc>
+                  <a:txBody>
+                    <a:bodyPr/>
+                    <a:lstStyle/>
+                    <a:p>
+                      <a:pPr>
+                        <a:spcAft>
+                          <a:spcPts val="100"/>
+                        </a:spcAft>
+                        <a:defRPr sz="1000" b="0">
+                          <a:solidFill>
+                            <a:srgbClr val="11151A"/>
+                          </a:solidFill>
+                          <a:latin typeface="Lato"/>
+                        </a:defRPr>
+                      </a:pPr>
+                      <a:r>
+                        <a:t>Evidence</a:t>
+                      </a:r>
+                    </a:p>
+                  </a:txBody>
+                  <a:tcPr marL="64008" marR="64008" marT="54864" marB="27432" anchor="t">
+                    <a:lnL w="0">
+                      <a:noFill/>
+                    </a:lnL>
+                    <a:lnR w="0">
+                      <a:noFill/>
+                    </a:lnR>
+                    <a:lnT w="0">
+                      <a:noFill/>
+                    </a:lnT>
+                    <a:lnB w="5080">
+                      <a:solidFill>
+                        <a:srgbClr val="B8B8B8"/>
+                      </a:solidFill>
+                    </a:lnB>
+                    <a:solidFill>
+                      <a:srgbClr val="FFFFFF"/>
+                    </a:solidFill>
+                  </a:tcPr>
+                </a:tc>
+                <a:tc>
+                  <a:txBody>
+                    <a:bodyPr/>
+                    <a:lstStyle/>
+                    <a:p>
+                      <a:pPr>
+                        <a:spcAft>
+                          <a:spcPts val="100"/>
+                        </a:spcAft>
+                        <a:defRPr sz="1000" b="0">
+                          <a:solidFill>
+                            <a:srgbClr val="11151A"/>
+                          </a:solidFill>
+                          <a:latin typeface="Lato"/>
+                        </a:defRPr>
+                      </a:pPr>
+                      <a:r>
+                        <a:t>Transnet Pipelines, 24 inch trunk line</a:t>
+                      </a:r>
+                    </a:p>
+                  </a:txBody>
+                  <a:tcPr marL="64008" marR="64008" marT="54864" marB="27432" anchor="t">
+                    <a:lnL w="0">
+                      <a:noFill/>
+                    </a:lnL>
+                    <a:lnR w="0">
+                      <a:noFill/>
+                    </a:lnR>
+                    <a:lnT w="0">
+                      <a:noFill/>
+                    </a:lnT>
+                    <a:lnB w="5080">
+                      <a:solidFill>
+                        <a:srgbClr val="B8B8B8"/>
+                      </a:solidFill>
+                    </a:lnB>
+                    <a:solidFill>
+                      <a:srgbClr val="FFFFFF"/>
+                    </a:solidFill>
+                  </a:tcPr>
+                </a:tc>
+              </a:tr>
+              <a:tr h="457200">
+                <a:tc>
+                  <a:txBody>
+                    <a:bodyPr/>
+                    <a:lstStyle/>
+                    <a:p>
+                      <a:pPr>
+                        <a:spcAft>
+                          <a:spcPts val="100"/>
+                        </a:spcAft>
+                        <a:defRPr sz="1000" b="1">
+                          <a:solidFill>
+                            <a:srgbClr val="0A2373"/>
+                          </a:solidFill>
+                          <a:latin typeface="Lato"/>
+                        </a:defRPr>
+                      </a:pPr>
+                      <a:r>
+                        <a:t>Monthly turns</a:t>
+                      </a:r>
+                    </a:p>
+                  </a:txBody>
+                  <a:tcPr marL="64008" marR="64008" marT="54864" marB="27432" anchor="t">
+                    <a:lnL w="0">
+                      <a:noFill/>
+                    </a:lnL>
+                    <a:lnR w="0">
+                      <a:noFill/>
+                    </a:lnR>
+                    <a:lnT w="0">
+                      <a:noFill/>
+                    </a:lnT>
+                    <a:lnB w="5080">
+                      <a:solidFill>
+                        <a:srgbClr val="B8B8B8"/>
+                      </a:solidFill>
+                    </a:lnB>
+                    <a:solidFill>
+                      <a:srgbClr val="FFFFFF"/>
+                    </a:solidFill>
+                  </a:tcPr>
+                </a:tc>
+                <a:tc>
+                  <a:txBody>
+                    <a:bodyPr/>
+                    <a:lstStyle/>
+                    <a:p>
+                      <a:pPr>
+                        <a:spcAft>
+                          <a:spcPts val="100"/>
+                        </a:spcAft>
+                        <a:defRPr sz="1000" b="0">
+                          <a:solidFill>
+                            <a:srgbClr val="11151A"/>
+                          </a:solidFill>
+                          <a:latin typeface="Lato"/>
+                        </a:defRPr>
+                      </a:pPr>
+                      <a:r>
+                        <a:t>1 / 2 / 3 (low / base / high), on operational fuel capacity</a:t>
+                      </a:r>
+                    </a:p>
+                  </a:txBody>
+                  <a:tcPr marL="64008" marR="64008" marT="54864" marB="27432" anchor="t">
+                    <a:lnL w="0">
+                      <a:noFill/>
+                    </a:lnL>
+                    <a:lnR w="0">
+                      <a:noFill/>
+                    </a:lnR>
+                    <a:lnT w="0">
+                      <a:noFill/>
+                    </a:lnT>
+                    <a:lnB w="5080">
+                      <a:solidFill>
+                        <a:srgbClr val="B8B8B8"/>
+                      </a:solidFill>
+                    </a:lnB>
+                    <a:solidFill>
+                      <a:srgbClr val="FFFFFF"/>
+                    </a:solidFill>
+                  </a:tcPr>
+                </a:tc>
+                <a:tc>
+                  <a:txBody>
+                    <a:bodyPr/>
+                    <a:lstStyle/>
+                    <a:p>
+                      <a:pPr>
+                        <a:spcAft>
+                          <a:spcPts val="100"/>
+                        </a:spcAft>
+                        <a:defRPr sz="1000" b="0">
+                          <a:solidFill>
+                            <a:srgbClr val="11151A"/>
+                          </a:solidFill>
+                          <a:latin typeface="Lato"/>
+                        </a:defRPr>
+                      </a:pPr>
+                      <a:r>
+                        <a:t>Evidence of intent</a:t>
+                      </a:r>
+                    </a:p>
+                  </a:txBody>
+                  <a:tcPr marL="64008" marR="64008" marT="54864" marB="27432" anchor="t">
+                    <a:lnL w="0">
+                      <a:noFill/>
+                    </a:lnL>
+                    <a:lnR w="0">
+                      <a:noFill/>
+                    </a:lnR>
+                    <a:lnT w="0">
+                      <a:noFill/>
+                    </a:lnT>
+                    <a:lnB w="5080">
+                      <a:solidFill>
+                        <a:srgbClr val="B8B8B8"/>
+                      </a:solidFill>
+                    </a:lnB>
+                    <a:solidFill>
+                      <a:srgbClr val="FFFFFF"/>
+                    </a:solidFill>
+                  </a:tcPr>
+                </a:tc>
+                <a:tc>
+                  <a:txBody>
+                    <a:bodyPr/>
+                    <a:lstStyle/>
+                    <a:p>
+                      <a:pPr>
+                        <a:spcAft>
+                          <a:spcPts val="100"/>
+                        </a:spcAft>
+                        <a:defRPr sz="1000" b="0">
+                          <a:solidFill>
+                            <a:srgbClr val="11151A"/>
+                          </a:solidFill>
+                          <a:latin typeface="Lato"/>
+                        </a:defRPr>
+                      </a:pPr>
+                      <a:r>
+                        <a:t>Vopak to NERSA: 'targeting 2-3 throughputs in Durban'</a:t>
+                      </a:r>
+                    </a:p>
+                  </a:txBody>
+                  <a:tcPr marL="64008" marR="64008" marT="54864" marB="27432" anchor="t">
+                    <a:lnL w="0">
+                      <a:noFill/>
+                    </a:lnL>
+                    <a:lnR w="0">
+                      <a:noFill/>
+                    </a:lnR>
+                    <a:lnT w="0">
+                      <a:noFill/>
+                    </a:lnT>
+                    <a:lnB w="5080">
+                      <a:solidFill>
+                        <a:srgbClr val="B8B8B8"/>
+                      </a:solidFill>
+                    </a:lnB>
+                    <a:solidFill>
+                      <a:srgbClr val="FFFFFF"/>
+                    </a:solidFill>
+                  </a:tcPr>
+                </a:tc>
+              </a:tr>
+              <a:tr h="457200">
+                <a:tc>
+                  <a:txBody>
+                    <a:bodyPr/>
+                    <a:lstStyle/>
+                    <a:p>
+                      <a:pPr>
+                        <a:spcAft>
+                          <a:spcPts val="100"/>
+                        </a:spcAft>
+                        <a:defRPr sz="1000" b="1">
+                          <a:solidFill>
+                            <a:srgbClr val="0A2373"/>
+                          </a:solidFill>
+                          <a:latin typeface="Lato"/>
+                        </a:defRPr>
+                      </a:pPr>
+                      <a:r>
+                        <a:t>Annual handling, fuel</a:t>
+                      </a:r>
+                    </a:p>
+                  </a:txBody>
+                  <a:tcPr marL="64008" marR="64008" marT="54864" marB="27432" anchor="t">
+                    <a:lnL w="0">
+                      <a:noFill/>
+                    </a:lnL>
+                    <a:lnR w="0">
+                      <a:noFill/>
+                    </a:lnR>
+                    <a:lnT w="0">
+                      <a:noFill/>
+                    </a:lnT>
+                    <a:lnB w="5080">
+                      <a:solidFill>
+                        <a:srgbClr val="B8B8B8"/>
+                      </a:solidFill>
+                    </a:lnB>
+                    <a:solidFill>
+                      <a:srgbClr val="FFFFFF"/>
+                    </a:solidFill>
+                  </a:tcPr>
+                </a:tc>
+                <a:tc>
+                  <a:txBody>
+                    <a:bodyPr/>
+                    <a:lstStyle/>
+                    <a:p>
+                      <a:pPr>
+                        <a:spcAft>
+                          <a:spcPts val="100"/>
+                        </a:spcAft>
+                        <a:defRPr sz="1000" b="0">
+                          <a:solidFill>
+                            <a:srgbClr val="11151A"/>
+                          </a:solidFill>
+                          <a:latin typeface="Lato"/>
+                        </a:defRPr>
+                      </a:pPr>
+                      <a:r>
+                        <a:t>1.8 / 3.5 / 5.3 million m3</a:t>
+                      </a:r>
+                    </a:p>
+                  </a:txBody>
+                  <a:tcPr marL="64008" marR="64008" marT="54864" marB="27432" anchor="t">
+                    <a:lnL w="0">
+                      <a:noFill/>
+                    </a:lnL>
+                    <a:lnR w="0">
+                      <a:noFill/>
+                    </a:lnR>
+                    <a:lnT w="0">
+                      <a:noFill/>
+                    </a:lnT>
+                    <a:lnB w="5080">
+                      <a:solidFill>
+                        <a:srgbClr val="B8B8B8"/>
+                      </a:solidFill>
+                    </a:lnB>
+                    <a:solidFill>
+                      <a:srgbClr val="FFFFFF"/>
+                    </a:solidFill>
+                  </a:tcPr>
+                </a:tc>
+                <a:tc>
+                  <a:txBody>
+                    <a:bodyPr/>
+                    <a:lstStyle/>
+                    <a:p>
+                      <a:pPr>
+                        <a:spcAft>
+                          <a:spcPts val="100"/>
+                        </a:spcAft>
+                        <a:defRPr sz="1000" b="0">
+                          <a:solidFill>
+                            <a:srgbClr val="11151A"/>
+                          </a:solidFill>
+                          <a:latin typeface="Lato"/>
+                        </a:defRPr>
+                      </a:pPr>
+                      <a:r>
+                        <a:t>Calculated</a:t>
+                      </a:r>
+                    </a:p>
+                  </a:txBody>
+                  <a:tcPr marL="64008" marR="64008" marT="54864" marB="27432" anchor="t">
+                    <a:lnL w="0">
+                      <a:noFill/>
+                    </a:lnL>
+                    <a:lnR w="0">
+                      <a:noFill/>
+                    </a:lnR>
+                    <a:lnT w="0">
+                      <a:noFill/>
+                    </a:lnT>
+                    <a:lnB w="5080">
+                      <a:solidFill>
+                        <a:srgbClr val="B8B8B8"/>
+                      </a:solidFill>
+                    </a:lnB>
+                    <a:solidFill>
+                      <a:srgbClr val="FFFFFF"/>
+                    </a:solidFill>
+                  </a:tcPr>
+                </a:tc>
+                <a:tc>
+                  <a:txBody>
+                    <a:bodyPr/>
+                    <a:lstStyle/>
+                    <a:p>
+                      <a:pPr>
+                        <a:spcAft>
+                          <a:spcPts val="100"/>
+                        </a:spcAft>
+                        <a:defRPr sz="1000" b="0">
+                          <a:solidFill>
+                            <a:srgbClr val="11151A"/>
+                          </a:solidFill>
+                          <a:latin typeface="Lato"/>
+                        </a:defRPr>
+                      </a:pPr>
+                      <a:r>
+                        <a:t>Pack today: 4.3 / 8.6 / 13.0 on gross capacity</a:t>
+                      </a:r>
+                    </a:p>
+                  </a:txBody>
+                  <a:tcPr marL="64008" marR="64008" marT="54864" marB="27432" anchor="t">
+                    <a:lnL w="0">
+                      <a:noFill/>
+                    </a:lnL>
+                    <a:lnR w="0">
+                      <a:noFill/>
+                    </a:lnR>
+                    <a:lnT w="0">
+                      <a:noFill/>
+                    </a:lnT>
+                    <a:lnB w="5080">
+                      <a:solidFill>
+                        <a:srgbClr val="B8B8B8"/>
+                      </a:solidFill>
+                    </a:lnB>
+                    <a:solidFill>
+                      <a:srgbClr val="FFFFFF"/>
+                    </a:solidFill>
+                  </a:tcPr>
+                </a:tc>
+              </a:tr>
+            </a:tbl>
+          </a:graphicData>
+        </a:graphic>
+      </p:graphicFrame>
+      <p:sp>
+        <p:nvSpPr>
+          <p:cNvPr id="8" name="TextBox 7"/>
+          <p:cNvSpPr txBox="1"/>
+          <p:nvPr/>
+        </p:nvSpPr>
+        <p:spPr>
+          <a:xfrm>
+            <a:off x="457200" y="5852160"/>
+            <a:ext cx="10652760" cy="548640"/>
+          </a:xfrm>
+          <a:prstGeom prst="rect">
+            <a:avLst/>
+          </a:prstGeom>
+          <a:noFill/>
+        </p:spPr>
+        <p:txBody>
+          <a:bodyPr wrap="square" lIns="22860" rIns="22860" tIns="0" bIns="0">
+            <a:spAutoFit/>
+          </a:bodyPr>
+          <a:lstStyle/>
+          <a:p>
+            <a:pPr>
+              <a:spcAft>
+                <a:spcPts val="300"/>
+              </a:spcAft>
+              <a:defRPr sz="1100" b="1">
+                <a:solidFill>
+                  <a:srgbClr val="0A2373"/>
+                </a:solidFill>
+                <a:latin typeface="Lato"/>
+              </a:defRPr>
+            </a:pPr>
+            <a:r>
+              <a:t>The high case needs 438,000 m3 a month, 68% of the whole trunk line if it all went inland by pipe. Durban-to-Lesedi volume is handled at both sites and must be counted once.</a:t>
+            </a:r>
+          </a:p>
+        </p:txBody>
+      </p:sp>
+      <p:sp>
+        <p:nvSpPr>
+          <p:cNvPr id="9" name="Chevron 8">
+            <a:hlinkClick action="ppaction://hlinksldjump" r:id="rId2"/>
+          </p:cNvPr>
+          <p:cNvSpPr/>
+          <p:nvPr/>
+        </p:nvSpPr>
+        <p:spPr>
+          <a:xfrm>
+            <a:off x="457200" y="73152"/>
+            <a:ext cx="2075688" cy="384048"/>
+          </a:xfrm>
+          <a:prstGeom prst="chevron">
+            <a:avLst>
+              <a:gd name="adj" fmla="val 12000"/>
+            </a:avLst>
+          </a:prstGeom>
+          <a:solidFill>
+            <a:srgbClr val="EEEEEE"/>
+          </a:solidFill>
+          <a:ln>
+            <a:noFill/>
+          </a:ln>
+        </p:spPr>
+        <p:style>
+          <a:lnRef idx="1">
+            <a:schemeClr val="accent1"/>
+          </a:lnRef>
+          <a:fillRef idx="3">
+            <a:schemeClr val="accent1"/>
+          </a:fillRef>
+          <a:effectRef idx="2">
+            <a:schemeClr val="accent1"/>
+          </a:effectRef>
+          <a:fontRef idx="minor">
+            <a:schemeClr val="lt1"/>
+          </a:fontRef>
+        </p:style>
+        <p:txBody>
+          <a:bodyPr rtlCol="0" anchor="ctr" tIns="0" bIns="0"/>
+          <a:lstStyle/>
+          <a:p>
+            <a:pPr algn="ctr">
+              <a:defRPr sz="1100" b="0">
+                <a:solidFill>
+                  <a:srgbClr val="0A2373"/>
+                </a:solidFill>
+                <a:latin typeface="Lato"/>
+              </a:defRPr>
+            </a:pPr>
+            <a:r>
+              <a:t>1  National balance</a:t>
+            </a:r>
+          </a:p>
+        </p:txBody>
+      </p:sp>
+      <p:sp>
+        <p:nvSpPr>
+          <p:cNvPr id="10" name="Chevron 9">
+            <a:hlinkClick action="ppaction://hlinksldjump" r:id="rId3"/>
+          </p:cNvPr>
+          <p:cNvSpPr/>
+          <p:nvPr/>
+        </p:nvSpPr>
+        <p:spPr>
+          <a:xfrm>
+            <a:off x="2587752" y="73152"/>
+            <a:ext cx="2075688" cy="384048"/>
+          </a:xfrm>
+          <a:prstGeom prst="chevron">
+            <a:avLst>
+              <a:gd name="adj" fmla="val 12000"/>
+            </a:avLst>
+          </a:prstGeom>
+          <a:solidFill>
+            <a:srgbClr val="EEEEEE"/>
+          </a:solidFill>
+          <a:ln>
+            <a:noFill/>
+          </a:ln>
+        </p:spPr>
+        <p:style>
+          <a:lnRef idx="1">
+            <a:schemeClr val="accent1"/>
+          </a:lnRef>
+          <a:fillRef idx="3">
+            <a:schemeClr val="accent1"/>
+          </a:fillRef>
+          <a:effectRef idx="2">
+            <a:schemeClr val="accent1"/>
+          </a:effectRef>
+          <a:fontRef idx="minor">
+            <a:schemeClr val="lt1"/>
+          </a:fontRef>
+        </p:style>
+        <p:txBody>
+          <a:bodyPr rtlCol="0" anchor="ctr" tIns="0" bIns="0"/>
+          <a:lstStyle/>
+          <a:p>
+            <a:pPr algn="ctr">
+              <a:defRPr sz="1100" b="0">
+                <a:solidFill>
+                  <a:srgbClr val="0A2373"/>
+                </a:solidFill>
+                <a:latin typeface="Lato"/>
+              </a:defRPr>
+            </a:pPr>
+            <a:r>
+              <a:t>2  Forecast levers</a:t>
+            </a:r>
+          </a:p>
+        </p:txBody>
+      </p:sp>
+      <p:sp>
+        <p:nvSpPr>
+          <p:cNvPr id="11" name="Chevron 10">
+            <a:hlinkClick action="ppaction://hlinksldjump" r:id="rId4"/>
+          </p:cNvPr>
+          <p:cNvSpPr/>
+          <p:nvPr/>
+        </p:nvSpPr>
+        <p:spPr>
+          <a:xfrm>
+            <a:off x="4718304" y="73152"/>
+            <a:ext cx="2075688" cy="384048"/>
+          </a:xfrm>
+          <a:prstGeom prst="chevron">
+            <a:avLst>
+              <a:gd name="adj" fmla="val 12000"/>
+            </a:avLst>
+          </a:prstGeom>
+          <a:solidFill>
+            <a:srgbClr val="EEEEEE"/>
+          </a:solidFill>
+          <a:ln>
+            <a:noFill/>
+          </a:ln>
+        </p:spPr>
+        <p:style>
+          <a:lnRef idx="1">
+            <a:schemeClr val="accent1"/>
+          </a:lnRef>
+          <a:fillRef idx="3">
+            <a:schemeClr val="accent1"/>
+          </a:fillRef>
+          <a:effectRef idx="2">
+            <a:schemeClr val="accent1"/>
+          </a:effectRef>
+          <a:fontRef idx="minor">
+            <a:schemeClr val="lt1"/>
+          </a:fontRef>
+        </p:style>
+        <p:txBody>
+          <a:bodyPr rtlCol="0" anchor="ctr" tIns="0" bIns="0"/>
+          <a:lstStyle/>
+          <a:p>
+            <a:pPr algn="ctr">
+              <a:defRPr sz="1100" b="0">
+                <a:solidFill>
+                  <a:srgbClr val="0A2373"/>
+                </a:solidFill>
+                <a:latin typeface="Lato"/>
+              </a:defRPr>
+            </a:pPr>
+            <a:r>
+              <a:t>3  Sector baselines</a:t>
+            </a:r>
+          </a:p>
+        </p:txBody>
+      </p:sp>
+      <p:sp>
+        <p:nvSpPr>
+          <p:cNvPr id="12" name="Chevron 11">
+            <a:hlinkClick action="ppaction://hlinksldjump" r:id="rId5"/>
+          </p:cNvPr>
+          <p:cNvSpPr/>
+          <p:nvPr/>
+        </p:nvSpPr>
+        <p:spPr>
+          <a:xfrm>
+            <a:off x="6848856" y="73152"/>
+            <a:ext cx="2075688" cy="384048"/>
+          </a:xfrm>
+          <a:prstGeom prst="chevron">
+            <a:avLst>
+              <a:gd name="adj" fmla="val 12000"/>
+            </a:avLst>
+          </a:prstGeom>
+          <a:solidFill>
+            <a:srgbClr val="0A2373"/>
+          </a:solidFill>
+          <a:ln>
+            <a:noFill/>
+          </a:ln>
+        </p:spPr>
+        <p:style>
+          <a:lnRef idx="1">
+            <a:schemeClr val="accent1"/>
+          </a:lnRef>
+          <a:fillRef idx="3">
+            <a:schemeClr val="accent1"/>
+          </a:fillRef>
+          <a:effectRef idx="2">
+            <a:schemeClr val="accent1"/>
+          </a:effectRef>
+          <a:fontRef idx="minor">
+            <a:schemeClr val="lt1"/>
+          </a:fontRef>
+        </p:style>
+        <p:txBody>
+          <a:bodyPr rtlCol="0" anchor="ctr" tIns="0" bIns="0"/>
+          <a:lstStyle/>
+          <a:p>
+            <a:pPr algn="ctr">
+              <a:defRPr sz="1100" b="1">
+                <a:solidFill>
+                  <a:srgbClr val="FFFFFF"/>
                 </a:solidFill>
                 <a:latin typeface="Lato"/>
               </a:defRPr>
@@ -9959,7 +13697,9 @@
       </p:sp>
       <p:sp>
         <p:nvSpPr>
-          <p:cNvPr id="14" name="Chevron 13"/>
+          <p:cNvPr id="14" name="Chevron 13">
+            <a:hlinkClick action="ppaction://hlinksldjump" r:id="rId5"/>
+          </p:cNvPr>
           <p:cNvSpPr/>
           <p:nvPr/>
         </p:nvSpPr>
@@ -11492,7 +15232,9 @@
       </p:sp>
       <p:sp>
         <p:nvSpPr>
-          <p:cNvPr id="12" name="Chevron 11"/>
+          <p:cNvPr id="12" name="Chevron 11">
+            <a:hlinkClick action="ppaction://hlinksldjump" r:id="rId5"/>
+          </p:cNvPr>
           <p:cNvSpPr/>
           <p:nvPr/>
         </p:nvSpPr>
@@ -12564,7 +16306,9 @@
       </p:sp>
       <p:sp>
         <p:nvSpPr>
-          <p:cNvPr id="14" name="Chevron 13"/>
+          <p:cNvPr id="14" name="Chevron 13">
+            <a:hlinkClick action="ppaction://hlinksldjump" r:id="rId7"/>
+          </p:cNvPr>
           <p:cNvSpPr/>
           <p:nvPr/>
         </p:nvSpPr>
@@ -15039,7 +18783,9 @@
       </p:sp>
       <p:sp>
         <p:nvSpPr>
-          <p:cNvPr id="11" name="Chevron 10"/>
+          <p:cNvPr id="11" name="Chevron 10">
+            <a:hlinkClick action="ppaction://hlinksldjump" r:id="rId5"/>
+          </p:cNvPr>
           <p:cNvSpPr/>
           <p:nvPr/>
         </p:nvSpPr>
@@ -17259,7 +21005,9 @@
       </p:sp>
       <p:sp>
         <p:nvSpPr>
-          <p:cNvPr id="11" name="Chevron 10"/>
+          <p:cNvPr id="11" name="Chevron 10">
+            <a:hlinkClick action="ppaction://hlinksldjump" r:id="rId5"/>
+          </p:cNvPr>
           <p:cNvSpPr/>
           <p:nvPr/>
         </p:nvSpPr>
@@ -19782,7 +23530,9 @@
       </p:sp>
       <p:sp>
         <p:nvSpPr>
-          <p:cNvPr id="11" name="Chevron 10"/>
+          <p:cNvPr id="11" name="Chevron 10">
+            <a:hlinkClick action="ppaction://hlinksldjump" r:id="rId5"/>
+          </p:cNvPr>
           <p:cNvSpPr/>
           <p:nvPr/>
         </p:nvSpPr>
@@ -21438,7 +25188,9 @@
       </p:sp>
       <p:sp>
         <p:nvSpPr>
-          <p:cNvPr id="12" name="Chevron 11"/>
+          <p:cNvPr id="12" name="Chevron 11">
+            <a:hlinkClick action="ppaction://hlinksldjump" r:id="rId5"/>
+          </p:cNvPr>
           <p:cNvSpPr/>
           <p:nvPr/>
         </p:nvSpPr>

--- a/pptx/output/delivered/supporting/Vopak_Manish_Handback_2026_10_07.pptx
+++ b/pptx/output/delivered/supporting/Vopak_Manish_Handback_2026_10_07.pptx
@@ -6472,7 +6472,7 @@
                         </a:defRPr>
                       </a:pPr>
                       <a:r>
-                        <a:t>140,000 m3: petrol 40,000, diesel 80,000, one 20,000 tank for either</a:t>
+                        <a:t>140,000 m3: petrol 40,000, diesel 80,000, one 20,000 tank for either. New tanks in service since October 2025</a:t>
                       </a:r>
                     </a:p>
                   </a:txBody>
@@ -6554,7 +6554,7 @@
                         </a:defRPr>
                       </a:pPr>
                       <a:r>
-                        <a:t>NERSA licence amendment, 6 August 2025</a:t>
+                        <a:t>NERSA licence amendment, 6 August 2025; Vopak Q3 2025 release</a:t>
                       </a:r>
                     </a:p>
                   </a:txBody>
@@ -7613,7 +7613,7 @@
               </a:defRPr>
             </a:pPr>
             <a:r>
-              <a:t>Still needed from Vopak: twelve months of outbound volume by product and mode, the new tanks' operational capacity and loading hours. These replace every estimate above.</a:t>
+              <a:t>Vopak's website publishes none of the operating data. Still needed from Vopak: twelve months of outbound volume by product and mode, the new tanks' operational capacity and loading hours.</a:t>
             </a:r>
           </a:p>
         </p:txBody>

--- a/pptx/output/delivered/supporting/Vopak_Manish_Handback_2026_10_07.pptx
+++ b/pptx/output/delivered/supporting/Vopak_Manish_Handback_2026_10_07.pptx
@@ -6107,7 +6107,7 @@
               </a:defRPr>
             </a:pPr>
             <a:r>
-              <a:t>Vopak Lesedi, Jameson Park | proposed site assumptions | each row marked evidence or estimate</a:t>
+              <a:t>Vopak Lesedi, Jameson Park | proposed site assumptions | estimates are to confirm with the client</a:t>
             </a:r>
           </a:p>
         </p:txBody>
@@ -6679,7 +6679,7 @@
                         </a:defRPr>
                       </a:pPr>
                       <a:r>
-                        <a:t>Evidence; new tanks estimated</a:t>
+                        <a:t>Evidence; new tanks estimated, to confirm with client</a:t>
                       </a:r>
                     </a:p>
                   </a:txBody>
@@ -7177,7 +7177,7 @@
                         </a:defRPr>
                       </a:pPr>
                       <a:r>
-                        <a:t>Estimate</a:t>
+                        <a:t>Estimate, to confirm with client</a:t>
                       </a:r>
                     </a:p>
                   </a:txBody>
@@ -7343,7 +7343,7 @@
                         </a:defRPr>
                       </a:pPr>
                       <a:r>
-                        <a:t>Estimate</a:t>
+                        <a:t>Estimate, to confirm with client</a:t>
                       </a:r>
                     </a:p>
                   </a:txBody>
@@ -7974,7 +7974,7 @@
               </a:defRPr>
             </a:pPr>
             <a:r>
-              <a:t>Vopak Durban, Island View | proposed site assumptions | each row marked evidence or estimate</a:t>
+              <a:t>Vopak Durban, Island View | proposed site assumptions | estimates are to confirm with the client</a:t>
             </a:r>
           </a:p>
         </p:txBody>
@@ -8546,7 +8546,7 @@
                         </a:defRPr>
                       </a:pPr>
                       <a:r>
-                        <a:t>Evidence</a:t>
+                        <a:t>Evidence of a floor, to confirm with client</a:t>
                       </a:r>
                     </a:p>
                   </a:txBody>
@@ -8712,7 +8712,7 @@
                         </a:defRPr>
                       </a:pPr>
                       <a:r>
-                        <a:t>Estimate</a:t>
+                        <a:t>Estimate, to confirm with client</a:t>
                       </a:r>
                     </a:p>
                   </a:txBody>
@@ -9210,7 +9210,7 @@
                         </a:defRPr>
                       </a:pPr>
                       <a:r>
-                        <a:t>Evidence of intent</a:t>
+                        <a:t>Target, not realised; to confirm with client</a:t>
                       </a:r>
                     </a:p>
                   </a:txBody>

--- a/pptx/output/delivered/supporting/Vopak_Manish_Handback_2026_10_07.pptx
+++ b/pptx/output/delivered/supporting/Vopak_Manish_Handback_2026_10_07.pptx
@@ -19,6 +19,7 @@
     <p:sldId id="269" r:id="rId22"/>
     <p:sldId id="270" r:id="rId23"/>
     <p:sldId id="271" r:id="rId24"/>
+    <p:sldId id="272" r:id="rId25"/>
     <p:sldId id="261" r:id="rId18"/>
   </p:sldIdLst>
   <p:sldSz cx="11588750" cy="6858000"/>
@@ -4351,6 +4352,1664 @@
           <a:lstStyle/>
           <a:p>
             <a:r>
+              <a:t>Sourced starting values lower 2024 diesel demand by 0.63 bn litres</a:t>
+            </a:r>
+          </a:p>
+        </p:txBody>
+      </p:sp>
+      <p:sp>
+        <p:nvSpPr>
+          <p:cNvPr id="3" name="TextBox 2"/>
+          <p:cNvSpPr txBox="1"/>
+          <p:nvPr/>
+        </p:nvSpPr>
+        <p:spPr>
+          <a:xfrm>
+            <a:off x="457200" y="1627632"/>
+            <a:ext cx="10652760" cy="274320"/>
+          </a:xfrm>
+          <a:prstGeom prst="rect">
+            <a:avLst/>
+          </a:prstGeom>
+          <a:noFill/>
+        </p:spPr>
+        <p:txBody>
+          <a:bodyPr wrap="square" lIns="22860" rIns="22860" tIns="0" bIns="0">
+            <a:spAutoFit/>
+          </a:bodyPr>
+          <a:lstStyle/>
+          <a:p>
+            <a:pPr>
+              <a:spcAft>
+                <a:spcPts val="300"/>
+              </a:spcAft>
+              <a:defRPr sz="1300" b="1">
+                <a:solidFill>
+                  <a:srgbClr val="11151A"/>
+                </a:solidFill>
+                <a:latin typeface="Lato"/>
+              </a:defRPr>
+            </a:pPr>
+            <a:r>
+              <a:t>Agriculture and industry | diesel, billion litres a year | proposed as provisional starting values</a:t>
+            </a:r>
+          </a:p>
+        </p:txBody>
+      </p:sp>
+      <p:cxnSp>
+        <p:nvCxnSpPr>
+          <p:cNvPr id="4" name="Connector 3"/>
+          <p:cNvCxnSpPr/>
+          <p:nvPr/>
+        </p:nvCxnSpPr>
+        <p:spPr>
+          <a:xfrm>
+            <a:off x="457200" y="1920240"/>
+            <a:ext cx="10652760" cy="0"/>
+          </a:xfrm>
+          <a:prstGeom prst="line">
+            <a:avLst/>
+          </a:prstGeom>
+          <a:ln w="7620">
+            <a:solidFill>
+              <a:srgbClr val="A0A0A0"/>
+            </a:solidFill>
+          </a:ln>
+        </p:spPr>
+        <p:style>
+          <a:lnRef idx="2">
+            <a:schemeClr val="accent1"/>
+          </a:lnRef>
+          <a:fillRef idx="0">
+            <a:schemeClr val="accent1"/>
+          </a:fillRef>
+          <a:effectRef idx="1">
+            <a:schemeClr val="accent1"/>
+          </a:effectRef>
+          <a:fontRef idx="minor">
+            <a:schemeClr val="tx1"/>
+          </a:fontRef>
+        </p:style>
+      </p:cxnSp>
+      <p:sp>
+        <p:nvSpPr>
+          <p:cNvPr id="5" name="TextBox 4"/>
+          <p:cNvSpPr txBox="1"/>
+          <p:nvPr/>
+        </p:nvSpPr>
+        <p:spPr>
+          <a:xfrm>
+            <a:off x="457200" y="6547104"/>
+            <a:ext cx="9692640" cy="182880"/>
+          </a:xfrm>
+          <a:prstGeom prst="rect">
+            <a:avLst/>
+          </a:prstGeom>
+          <a:noFill/>
+        </p:spPr>
+        <p:txBody>
+          <a:bodyPr wrap="square" lIns="22860" rIns="22860" tIns="0" bIns="0">
+            <a:spAutoFit/>
+          </a:bodyPr>
+          <a:lstStyle/>
+          <a:p>
+            <a:pPr>
+              <a:spcAft>
+                <a:spcPts val="300"/>
+              </a:spcAft>
+              <a:defRPr sz="800" b="0">
+                <a:solidFill>
+                  <a:srgbClr val="11151A"/>
+                </a:solidFill>
+                <a:latin typeface="Lato"/>
+              </a:defRPr>
+            </a:pPr>
+            <a:r>
+              <a:t>Source: sector_baselines_2026-10-07.md and .csv on manish-branch; department energy balances 2012-2021. A proposal for Nigel's decision; nothing is accepted.</a:t>
+            </a:r>
+          </a:p>
+        </p:txBody>
+      </p:sp>
+      <p:sp>
+        <p:nvSpPr>
+          <p:cNvPr id="6" name="TextBox 5"/>
+          <p:cNvSpPr txBox="1"/>
+          <p:nvPr/>
+        </p:nvSpPr>
+        <p:spPr>
+          <a:xfrm>
+            <a:off x="457200" y="6711696"/>
+            <a:ext cx="2011680" cy="128016"/>
+          </a:xfrm>
+          <a:prstGeom prst="rect">
+            <a:avLst/>
+          </a:prstGeom>
+          <a:noFill/>
+        </p:spPr>
+        <p:txBody>
+          <a:bodyPr wrap="square" lIns="22860" rIns="22860" tIns="0" bIns="0">
+            <a:spAutoFit/>
+          </a:bodyPr>
+          <a:lstStyle/>
+          <a:p>
+            <a:pPr>
+              <a:spcAft>
+                <a:spcPts val="300"/>
+              </a:spcAft>
+              <a:defRPr sz="700" b="0">
+                <a:solidFill>
+                  <a:srgbClr val="11151A"/>
+                </a:solidFill>
+                <a:latin typeface="Lato"/>
+              </a:defRPr>
+            </a:pPr>
+            <a:r>
+              <a:t>Strictly Confidential</a:t>
+            </a:r>
+          </a:p>
+        </p:txBody>
+      </p:sp>
+      <p:graphicFrame>
+        <p:nvGraphicFramePr>
+          <p:cNvPr id="7" name="Table 6"/>
+          <p:cNvGraphicFramePr>
+            <a:graphicFrameLocks noGrp="1"/>
+          </p:cNvGraphicFramePr>
+          <p:nvPr/>
+        </p:nvGraphicFramePr>
+        <p:xfrm>
+          <a:off x="457200" y="2029968"/>
+          <a:ext cx="10652760" cy="2651760"/>
+        </p:xfrm>
+        <a:graphic>
+          <a:graphicData uri="http://schemas.openxmlformats.org/drawingml/2006/table">
+            <a:tbl>
+              <a:tblPr firstRow="0" bandRow="0"/>
+              <a:tblGrid>
+                <a:gridCol w="1188720"/>
+                <a:gridCol w="1143000"/>
+                <a:gridCol w="2286000"/>
+                <a:gridCol w="2743200"/>
+                <a:gridCol w="1463040"/>
+                <a:gridCol w="1828800"/>
+              </a:tblGrid>
+              <a:tr h="662940">
+                <a:tc>
+                  <a:txBody>
+                    <a:bodyPr/>
+                    <a:lstStyle/>
+                    <a:p>
+                      <a:pPr>
+                        <a:spcAft>
+                          <a:spcPts val="100"/>
+                        </a:spcAft>
+                        <a:defRPr sz="1050" b="1">
+                          <a:solidFill>
+                            <a:srgbClr val="0A2373"/>
+                          </a:solidFill>
+                          <a:latin typeface="Lato"/>
+                        </a:defRPr>
+                      </a:pPr>
+                      <a:r>
+                        <a:t>Sector</a:t>
+                      </a:r>
+                    </a:p>
+                  </a:txBody>
+                  <a:tcPr marL="64008" marR="64008" marT="54864" marB="27432" anchor="t">
+                    <a:lnL w="0">
+                      <a:noFill/>
+                    </a:lnL>
+                    <a:lnR w="0">
+                      <a:noFill/>
+                    </a:lnR>
+                    <a:lnT w="0">
+                      <a:noFill/>
+                    </a:lnT>
+                    <a:lnB w="5080">
+                      <a:solidFill>
+                        <a:srgbClr val="B8B8B8"/>
+                      </a:solidFill>
+                    </a:lnB>
+                    <a:solidFill>
+                      <a:srgbClr val="FFFFFF"/>
+                    </a:solidFill>
+                  </a:tcPr>
+                </a:tc>
+                <a:tc>
+                  <a:txBody>
+                    <a:bodyPr/>
+                    <a:lstStyle/>
+                    <a:p>
+                      <a:pPr>
+                        <a:spcAft>
+                          <a:spcPts val="100"/>
+                        </a:spcAft>
+                        <a:defRPr sz="1050" b="1">
+                          <a:solidFill>
+                            <a:srgbClr val="11151A"/>
+                          </a:solidFill>
+                          <a:latin typeface="Lato"/>
+                        </a:defRPr>
+                      </a:pPr>
+                      <a:r>
+                        <a:t>Earlier</a:t>
+                      </a:r>
+                    </a:p>
+                    <a:p>
+                      <a:pPr>
+                        <a:spcAft>
+                          <a:spcPts val="100"/>
+                        </a:spcAft>
+                        <a:defRPr sz="1050" b="1">
+                          <a:solidFill>
+                            <a:srgbClr val="11151A"/>
+                          </a:solidFill>
+                          <a:latin typeface="Lato"/>
+                        </a:defRPr>
+                      </a:pPr>
+                      <a:r>
+                        <a:t>placeholder</a:t>
+                      </a:r>
+                    </a:p>
+                  </a:txBody>
+                  <a:tcPr marL="64008" marR="64008" marT="54864" marB="27432" anchor="t">
+                    <a:lnL w="0">
+                      <a:noFill/>
+                    </a:lnL>
+                    <a:lnR w="0">
+                      <a:noFill/>
+                    </a:lnR>
+                    <a:lnT w="0">
+                      <a:noFill/>
+                    </a:lnT>
+                    <a:lnB w="5080">
+                      <a:solidFill>
+                        <a:srgbClr val="B8B8B8"/>
+                      </a:solidFill>
+                    </a:lnB>
+                    <a:solidFill>
+                      <a:srgbClr val="FFFFFF"/>
+                    </a:solidFill>
+                  </a:tcPr>
+                </a:tc>
+                <a:tc>
+                  <a:txBody>
+                    <a:bodyPr/>
+                    <a:lstStyle/>
+                    <a:p>
+                      <a:pPr>
+                        <a:spcAft>
+                          <a:spcPts val="100"/>
+                        </a:spcAft>
+                        <a:defRPr sz="1050" b="1">
+                          <a:solidFill>
+                            <a:srgbClr val="11151A"/>
+                          </a:solidFill>
+                          <a:latin typeface="Lato"/>
+                        </a:defRPr>
+                      </a:pPr>
+                      <a:r>
+                        <a:t>On the branch</a:t>
+                      </a:r>
+                    </a:p>
+                  </a:txBody>
+                  <a:tcPr marL="64008" marR="64008" marT="54864" marB="27432" anchor="t">
+                    <a:lnL w="0">
+                      <a:noFill/>
+                    </a:lnL>
+                    <a:lnR w="0">
+                      <a:noFill/>
+                    </a:lnR>
+                    <a:lnT w="0">
+                      <a:noFill/>
+                    </a:lnT>
+                    <a:lnB w="5080">
+                      <a:solidFill>
+                        <a:srgbClr val="B8B8B8"/>
+                      </a:solidFill>
+                    </a:lnB>
+                    <a:solidFill>
+                      <a:srgbClr val="FFFFFF"/>
+                    </a:solidFill>
+                  </a:tcPr>
+                </a:tc>
+                <a:tc>
+                  <a:txBody>
+                    <a:bodyPr/>
+                    <a:lstStyle/>
+                    <a:p>
+                      <a:pPr>
+                        <a:spcAft>
+                          <a:spcPts val="100"/>
+                        </a:spcAft>
+                        <a:defRPr sz="1050" b="1">
+                          <a:solidFill>
+                            <a:srgbClr val="11151A"/>
+                          </a:solidFill>
+                          <a:latin typeface="Lato"/>
+                        </a:defRPr>
+                      </a:pPr>
+                      <a:r>
+                        <a:t>Range in the evidence</a:t>
+                      </a:r>
+                    </a:p>
+                  </a:txBody>
+                  <a:tcPr marL="64008" marR="64008" marT="54864" marB="27432" anchor="t">
+                    <a:lnL w="0">
+                      <a:noFill/>
+                    </a:lnL>
+                    <a:lnR w="0">
+                      <a:noFill/>
+                    </a:lnR>
+                    <a:lnT w="0">
+                      <a:noFill/>
+                    </a:lnT>
+                    <a:lnB w="5080">
+                      <a:solidFill>
+                        <a:srgbClr val="B8B8B8"/>
+                      </a:solidFill>
+                    </a:lnB>
+                    <a:solidFill>
+                      <a:srgbClr val="FFFFFF"/>
+                    </a:solidFill>
+                  </a:tcPr>
+                </a:tc>
+                <a:tc>
+                  <a:txBody>
+                    <a:bodyPr/>
+                    <a:lstStyle/>
+                    <a:p>
+                      <a:pPr>
+                        <a:spcAft>
+                          <a:spcPts val="100"/>
+                        </a:spcAft>
+                        <a:defRPr sz="1050" b="1">
+                          <a:solidFill>
+                            <a:srgbClr val="11151A"/>
+                          </a:solidFill>
+                          <a:latin typeface="Lato"/>
+                        </a:defRPr>
+                      </a:pPr>
+                      <a:r>
+                        <a:t>Proposed</a:t>
+                      </a:r>
+                    </a:p>
+                  </a:txBody>
+                  <a:tcPr marL="64008" marR="64008" marT="54864" marB="27432" anchor="t">
+                    <a:lnL w="0">
+                      <a:noFill/>
+                    </a:lnL>
+                    <a:lnR w="0">
+                      <a:noFill/>
+                    </a:lnR>
+                    <a:lnT w="0">
+                      <a:noFill/>
+                    </a:lnT>
+                    <a:lnB w="5080">
+                      <a:solidFill>
+                        <a:srgbClr val="B8B8B8"/>
+                      </a:solidFill>
+                    </a:lnB>
+                    <a:solidFill>
+                      <a:srgbClr val="FFFFFF"/>
+                    </a:solidFill>
+                  </a:tcPr>
+                </a:tc>
+                <a:tc>
+                  <a:txBody>
+                    <a:bodyPr/>
+                    <a:lstStyle/>
+                    <a:p>
+                      <a:pPr>
+                        <a:spcAft>
+                          <a:spcPts val="100"/>
+                        </a:spcAft>
+                        <a:defRPr sz="1050" b="1">
+                          <a:solidFill>
+                            <a:srgbClr val="11151A"/>
+                          </a:solidFill>
+                          <a:latin typeface="Lato"/>
+                        </a:defRPr>
+                      </a:pPr>
+                      <a:r>
+                        <a:t>Effect in 2024; 2035</a:t>
+                      </a:r>
+                    </a:p>
+                  </a:txBody>
+                  <a:tcPr marL="64008" marR="64008" marT="54864" marB="27432" anchor="t">
+                    <a:lnL w="0">
+                      <a:noFill/>
+                    </a:lnL>
+                    <a:lnR w="0">
+                      <a:noFill/>
+                    </a:lnR>
+                    <a:lnT w="0">
+                      <a:noFill/>
+                    </a:lnT>
+                    <a:lnB w="5080">
+                      <a:solidFill>
+                        <a:srgbClr val="B8B8B8"/>
+                      </a:solidFill>
+                    </a:lnB>
+                    <a:solidFill>
+                      <a:srgbClr val="FFFFFF"/>
+                    </a:solidFill>
+                  </a:tcPr>
+                </a:tc>
+              </a:tr>
+              <a:tr h="662940">
+                <a:tc>
+                  <a:txBody>
+                    <a:bodyPr/>
+                    <a:lstStyle/>
+                    <a:p>
+                      <a:pPr>
+                        <a:spcAft>
+                          <a:spcPts val="100"/>
+                        </a:spcAft>
+                        <a:defRPr sz="1050" b="1">
+                          <a:solidFill>
+                            <a:srgbClr val="0A2373"/>
+                          </a:solidFill>
+                          <a:latin typeface="Lato"/>
+                        </a:defRPr>
+                      </a:pPr>
+                      <a:r>
+                        <a:t>Agriculture</a:t>
+                      </a:r>
+                    </a:p>
+                  </a:txBody>
+                  <a:tcPr marL="64008" marR="64008" marT="54864" marB="27432" anchor="t">
+                    <a:lnL w="0">
+                      <a:noFill/>
+                    </a:lnL>
+                    <a:lnR w="0">
+                      <a:noFill/>
+                    </a:lnR>
+                    <a:lnT w="0">
+                      <a:noFill/>
+                    </a:lnT>
+                    <a:lnB w="5080">
+                      <a:solidFill>
+                        <a:srgbClr val="B8B8B8"/>
+                      </a:solidFill>
+                    </a:lnB>
+                    <a:solidFill>
+                      <a:srgbClr val="FFFFFF"/>
+                    </a:solidFill>
+                  </a:tcPr>
+                </a:tc>
+                <a:tc>
+                  <a:txBody>
+                    <a:bodyPr/>
+                    <a:lstStyle/>
+                    <a:p>
+                      <a:pPr>
+                        <a:spcAft>
+                          <a:spcPts val="100"/>
+                        </a:spcAft>
+                        <a:defRPr sz="1050" b="0">
+                          <a:solidFill>
+                            <a:srgbClr val="11151A"/>
+                          </a:solidFill>
+                          <a:latin typeface="Lato"/>
+                        </a:defRPr>
+                      </a:pPr>
+                      <a:r>
+                        <a:t>0.70</a:t>
+                      </a:r>
+                    </a:p>
+                    <a:p>
+                      <a:pPr>
+                        <a:spcAft>
+                          <a:spcPts val="100"/>
+                        </a:spcAft>
+                        <a:defRPr sz="1050" b="0">
+                          <a:solidFill>
+                            <a:srgbClr val="11151A"/>
+                          </a:solidFill>
+                          <a:latin typeface="Lato"/>
+                        </a:defRPr>
+                      </a:pPr>
+                      <a:r>
+                        <a:t>no source</a:t>
+                      </a:r>
+                    </a:p>
+                  </a:txBody>
+                  <a:tcPr marL="64008" marR="64008" marT="54864" marB="27432" anchor="t">
+                    <a:lnL w="0">
+                      <a:noFill/>
+                    </a:lnL>
+                    <a:lnR w="0">
+                      <a:noFill/>
+                    </a:lnR>
+                    <a:lnT w="0">
+                      <a:noFill/>
+                    </a:lnT>
+                    <a:lnB w="5080">
+                      <a:solidFill>
+                        <a:srgbClr val="B8B8B8"/>
+                      </a:solidFill>
+                    </a:lnB>
+                    <a:solidFill>
+                      <a:srgbClr val="FFFFFF"/>
+                    </a:solidFill>
+                  </a:tcPr>
+                </a:tc>
+                <a:tc>
+                  <a:txBody>
+                    <a:bodyPr/>
+                    <a:lstStyle/>
+                    <a:p>
+                      <a:pPr>
+                        <a:spcAft>
+                          <a:spcPts val="100"/>
+                        </a:spcAft>
+                        <a:defRPr sz="1050" b="0">
+                          <a:solidFill>
+                            <a:srgbClr val="11151A"/>
+                          </a:solidFill>
+                          <a:latin typeface="Lato"/>
+                        </a:defRPr>
+                      </a:pPr>
+                      <a:r>
+                        <a:t>1.06 for 2021</a:t>
+                      </a:r>
+                    </a:p>
+                    <a:p>
+                      <a:pPr>
+                        <a:spcAft>
+                          <a:spcPts val="100"/>
+                        </a:spcAft>
+                        <a:defRPr sz="1050" b="0">
+                          <a:solidFill>
+                            <a:srgbClr val="11151A"/>
+                          </a:solidFill>
+                          <a:latin typeface="Lato"/>
+                        </a:defRPr>
+                      </a:pPr>
+                      <a:r>
+                        <a:t>energy balance, agriculture and forestry</a:t>
+                      </a:r>
+                    </a:p>
+                  </a:txBody>
+                  <a:tcPr marL="64008" marR="64008" marT="54864" marB="27432" anchor="t">
+                    <a:lnL w="0">
+                      <a:noFill/>
+                    </a:lnL>
+                    <a:lnR w="0">
+                      <a:noFill/>
+                    </a:lnR>
+                    <a:lnT w="0">
+                      <a:noFill/>
+                    </a:lnT>
+                    <a:lnB w="5080">
+                      <a:solidFill>
+                        <a:srgbClr val="B8B8B8"/>
+                      </a:solidFill>
+                    </a:lnB>
+                    <a:solidFill>
+                      <a:srgbClr val="FFFFFF"/>
+                    </a:solidFill>
+                  </a:tcPr>
+                </a:tc>
+                <a:tc>
+                  <a:txBody>
+                    <a:bodyPr/>
+                    <a:lstStyle/>
+                    <a:p>
+                      <a:pPr>
+                        <a:spcAft>
+                          <a:spcPts val="100"/>
+                        </a:spcAft>
+                        <a:defRPr sz="1050" b="0">
+                          <a:solidFill>
+                            <a:srgbClr val="11151A"/>
+                          </a:solidFill>
+                          <a:latin typeface="Lato"/>
+                        </a:defRPr>
+                      </a:pPr>
+                      <a:r>
+                        <a:t>0.90-1.09 in eight of ten years, 2012-2021; 1.89 and 1.88 in 2016 and 2017</a:t>
+                      </a:r>
+                    </a:p>
+                  </a:txBody>
+                  <a:tcPr marL="64008" marR="64008" marT="54864" marB="27432" anchor="t">
+                    <a:lnL w="0">
+                      <a:noFill/>
+                    </a:lnL>
+                    <a:lnR w="0">
+                      <a:noFill/>
+                    </a:lnR>
+                    <a:lnT w="0">
+                      <a:noFill/>
+                    </a:lnT>
+                    <a:lnB w="5080">
+                      <a:solidFill>
+                        <a:srgbClr val="B8B8B8"/>
+                      </a:solidFill>
+                    </a:lnB>
+                    <a:solidFill>
+                      <a:srgbClr val="FFFFFF"/>
+                    </a:solidFill>
+                  </a:tcPr>
+                </a:tc>
+                <a:tc>
+                  <a:txBody>
+                    <a:bodyPr/>
+                    <a:lstStyle/>
+                    <a:p>
+                      <a:pPr>
+                        <a:spcAft>
+                          <a:spcPts val="100"/>
+                        </a:spcAft>
+                        <a:defRPr sz="1050" b="0">
+                          <a:solidFill>
+                            <a:srgbClr val="11151A"/>
+                          </a:solidFill>
+                          <a:latin typeface="Lato"/>
+                        </a:defRPr>
+                      </a:pPr>
+                      <a:r>
+                        <a:t>1.06</a:t>
+                      </a:r>
+                    </a:p>
+                    <a:p>
+                      <a:pPr>
+                        <a:spcAft>
+                          <a:spcPts val="100"/>
+                        </a:spcAft>
+                        <a:defRPr sz="1050" b="0">
+                          <a:solidFill>
+                            <a:srgbClr val="11151A"/>
+                          </a:solidFill>
+                          <a:latin typeface="Lato"/>
+                        </a:defRPr>
+                      </a:pPr>
+                      <a:r>
+                        <a:t>provisional, about +/-0.1</a:t>
+                      </a:r>
+                    </a:p>
+                  </a:txBody>
+                  <a:tcPr marL="64008" marR="64008" marT="54864" marB="27432" anchor="t">
+                    <a:lnL w="0">
+                      <a:noFill/>
+                    </a:lnL>
+                    <a:lnR w="0">
+                      <a:noFill/>
+                    </a:lnR>
+                    <a:lnT w="0">
+                      <a:noFill/>
+                    </a:lnT>
+                    <a:lnB w="5080">
+                      <a:solidFill>
+                        <a:srgbClr val="B8B8B8"/>
+                      </a:solidFill>
+                    </a:lnB>
+                    <a:solidFill>
+                      <a:srgbClr val="FFFFFF"/>
+                    </a:solidFill>
+                  </a:tcPr>
+                </a:tc>
+                <a:tc>
+                  <a:txBody>
+                    <a:bodyPr/>
+                    <a:lstStyle/>
+                    <a:p>
+                      <a:pPr>
+                        <a:spcAft>
+                          <a:spcPts val="100"/>
+                        </a:spcAft>
+                        <a:defRPr sz="1050" b="0">
+                          <a:solidFill>
+                            <a:srgbClr val="11151A"/>
+                          </a:solidFill>
+                          <a:latin typeface="Lato"/>
+                        </a:defRPr>
+                      </a:pPr>
+                      <a:r>
+                        <a:t>+0.36; +0.36</a:t>
+                      </a:r>
+                    </a:p>
+                  </a:txBody>
+                  <a:tcPr marL="64008" marR="64008" marT="54864" marB="27432" anchor="t">
+                    <a:lnL w="0">
+                      <a:noFill/>
+                    </a:lnL>
+                    <a:lnR w="0">
+                      <a:noFill/>
+                    </a:lnR>
+                    <a:lnT w="0">
+                      <a:noFill/>
+                    </a:lnT>
+                    <a:lnB w="5080">
+                      <a:solidFill>
+                        <a:srgbClr val="B8B8B8"/>
+                      </a:solidFill>
+                    </a:lnB>
+                    <a:solidFill>
+                      <a:srgbClr val="FFFFFF"/>
+                    </a:solidFill>
+                  </a:tcPr>
+                </a:tc>
+              </a:tr>
+              <a:tr h="662940">
+                <a:tc>
+                  <a:txBody>
+                    <a:bodyPr/>
+                    <a:lstStyle/>
+                    <a:p>
+                      <a:pPr>
+                        <a:spcAft>
+                          <a:spcPts val="100"/>
+                        </a:spcAft>
+                        <a:defRPr sz="1050" b="1">
+                          <a:solidFill>
+                            <a:srgbClr val="0A2373"/>
+                          </a:solidFill>
+                          <a:latin typeface="Lato"/>
+                        </a:defRPr>
+                      </a:pPr>
+                      <a:r>
+                        <a:t>Industry</a:t>
+                      </a:r>
+                    </a:p>
+                  </a:txBody>
+                  <a:tcPr marL="64008" marR="64008" marT="54864" marB="27432" anchor="t">
+                    <a:lnL w="0">
+                      <a:noFill/>
+                    </a:lnL>
+                    <a:lnR w="0">
+                      <a:noFill/>
+                    </a:lnR>
+                    <a:lnT w="0">
+                      <a:noFill/>
+                    </a:lnT>
+                    <a:lnB w="5080">
+                      <a:solidFill>
+                        <a:srgbClr val="B8B8B8"/>
+                      </a:solidFill>
+                    </a:lnB>
+                    <a:solidFill>
+                      <a:srgbClr val="FFFFFF"/>
+                    </a:solidFill>
+                  </a:tcPr>
+                </a:tc>
+                <a:tc>
+                  <a:txBody>
+                    <a:bodyPr/>
+                    <a:lstStyle/>
+                    <a:p>
+                      <a:pPr>
+                        <a:spcAft>
+                          <a:spcPts val="100"/>
+                        </a:spcAft>
+                        <a:defRPr sz="1050" b="0">
+                          <a:solidFill>
+                            <a:srgbClr val="11151A"/>
+                          </a:solidFill>
+                          <a:latin typeface="Lato"/>
+                        </a:defRPr>
+                      </a:pPr>
+                      <a:r>
+                        <a:t>2.50</a:t>
+                      </a:r>
+                    </a:p>
+                    <a:p>
+                      <a:pPr>
+                        <a:spcAft>
+                          <a:spcPts val="100"/>
+                        </a:spcAft>
+                        <a:defRPr sz="1050" b="0">
+                          <a:solidFill>
+                            <a:srgbClr val="11151A"/>
+                          </a:solidFill>
+                          <a:latin typeface="Lato"/>
+                        </a:defRPr>
+                      </a:pPr>
+                      <a:r>
+                        <a:t>no source</a:t>
+                      </a:r>
+                    </a:p>
+                  </a:txBody>
+                  <a:tcPr marL="64008" marR="64008" marT="54864" marB="27432" anchor="t">
+                    <a:lnL w="0">
+                      <a:noFill/>
+                    </a:lnL>
+                    <a:lnR w="0">
+                      <a:noFill/>
+                    </a:lnR>
+                    <a:lnT w="0">
+                      <a:noFill/>
+                    </a:lnT>
+                    <a:lnB w="5080">
+                      <a:solidFill>
+                        <a:srgbClr val="B8B8B8"/>
+                      </a:solidFill>
+                    </a:lnB>
+                    <a:solidFill>
+                      <a:srgbClr val="FFFFFF"/>
+                    </a:solidFill>
+                  </a:tcPr>
+                </a:tc>
+                <a:tc>
+                  <a:txBody>
+                    <a:bodyPr/>
+                    <a:lstStyle/>
+                    <a:p>
+                      <a:pPr>
+                        <a:spcAft>
+                          <a:spcPts val="100"/>
+                        </a:spcAft>
+                        <a:defRPr sz="1050" b="0">
+                          <a:solidFill>
+                            <a:srgbClr val="11151A"/>
+                          </a:solidFill>
+                          <a:latin typeface="Lato"/>
+                        </a:defRPr>
+                      </a:pPr>
+                      <a:r>
+                        <a:t>1.50 for 2021</a:t>
+                      </a:r>
+                    </a:p>
+                    <a:p>
+                      <a:pPr>
+                        <a:spcAft>
+                          <a:spcPts val="100"/>
+                        </a:spcAft>
+                        <a:defRPr sz="1050" b="0">
+                          <a:solidFill>
+                            <a:srgbClr val="11151A"/>
+                          </a:solidFill>
+                          <a:latin typeface="Lato"/>
+                        </a:defRPr>
+                      </a:pPr>
+                      <a:r>
+                        <a:t>energy balance, industry; mining is 1.29 of it</a:t>
+                      </a:r>
+                    </a:p>
+                  </a:txBody>
+                  <a:tcPr marL="64008" marR="64008" marT="54864" marB="27432" anchor="t">
+                    <a:lnL w="0">
+                      <a:noFill/>
+                    </a:lnL>
+                    <a:lnR w="0">
+                      <a:noFill/>
+                    </a:lnR>
+                    <a:lnT w="0">
+                      <a:noFill/>
+                    </a:lnT>
+                    <a:lnB w="5080">
+                      <a:solidFill>
+                        <a:srgbClr val="B8B8B8"/>
+                      </a:solidFill>
+                    </a:lnB>
+                    <a:solidFill>
+                      <a:srgbClr val="FFFFFF"/>
+                    </a:solidFill>
+                  </a:tcPr>
+                </a:tc>
+                <a:tc>
+                  <a:txBody>
+                    <a:bodyPr/>
+                    <a:lstStyle/>
+                    <a:p>
+                      <a:pPr>
+                        <a:spcAft>
+                          <a:spcPts val="100"/>
+                        </a:spcAft>
+                        <a:defRPr sz="1050" b="0">
+                          <a:solidFill>
+                            <a:srgbClr val="11151A"/>
+                          </a:solidFill>
+                          <a:latin typeface="Lato"/>
+                        </a:defRPr>
+                      </a:pPr>
+                      <a:r>
+                        <a:t>1.32-1.93 over 2012-2021. Mining volume is 7% lower in 2024 than 2021, which would give 1.40</a:t>
+                      </a:r>
+                    </a:p>
+                  </a:txBody>
+                  <a:tcPr marL="64008" marR="64008" marT="54864" marB="27432" anchor="t">
+                    <a:lnL w="0">
+                      <a:noFill/>
+                    </a:lnL>
+                    <a:lnR w="0">
+                      <a:noFill/>
+                    </a:lnR>
+                    <a:lnT w="0">
+                      <a:noFill/>
+                    </a:lnT>
+                    <a:lnB w="5080">
+                      <a:solidFill>
+                        <a:srgbClr val="B8B8B8"/>
+                      </a:solidFill>
+                    </a:lnB>
+                    <a:solidFill>
+                      <a:srgbClr val="FFFFFF"/>
+                    </a:solidFill>
+                  </a:tcPr>
+                </a:tc>
+                <a:tc>
+                  <a:txBody>
+                    <a:bodyPr/>
+                    <a:lstStyle/>
+                    <a:p>
+                      <a:pPr>
+                        <a:spcAft>
+                          <a:spcPts val="100"/>
+                        </a:spcAft>
+                        <a:defRPr sz="1050" b="0">
+                          <a:solidFill>
+                            <a:srgbClr val="11151A"/>
+                          </a:solidFill>
+                          <a:latin typeface="Lato"/>
+                        </a:defRPr>
+                      </a:pPr>
+                      <a:r>
+                        <a:t>1.50</a:t>
+                      </a:r>
+                    </a:p>
+                    <a:p>
+                      <a:pPr>
+                        <a:spcAft>
+                          <a:spcPts val="100"/>
+                        </a:spcAft>
+                        <a:defRPr sz="1050" b="0">
+                          <a:solidFill>
+                            <a:srgbClr val="11151A"/>
+                          </a:solidFill>
+                          <a:latin typeface="Lato"/>
+                        </a:defRPr>
+                      </a:pPr>
+                      <a:r>
+                        <a:t>provisional, about +/-0.3</a:t>
+                      </a:r>
+                    </a:p>
+                  </a:txBody>
+                  <a:tcPr marL="64008" marR="64008" marT="54864" marB="27432" anchor="t">
+                    <a:lnL w="0">
+                      <a:noFill/>
+                    </a:lnL>
+                    <a:lnR w="0">
+                      <a:noFill/>
+                    </a:lnR>
+                    <a:lnT w="0">
+                      <a:noFill/>
+                    </a:lnT>
+                    <a:lnB w="5080">
+                      <a:solidFill>
+                        <a:srgbClr val="B8B8B8"/>
+                      </a:solidFill>
+                    </a:lnB>
+                    <a:solidFill>
+                      <a:srgbClr val="FFFFFF"/>
+                    </a:solidFill>
+                  </a:tcPr>
+                </a:tc>
+                <a:tc>
+                  <a:txBody>
+                    <a:bodyPr/>
+                    <a:lstStyle/>
+                    <a:p>
+                      <a:pPr>
+                        <a:spcAft>
+                          <a:spcPts val="100"/>
+                        </a:spcAft>
+                        <a:defRPr sz="1050" b="0">
+                          <a:solidFill>
+                            <a:srgbClr val="11151A"/>
+                          </a:solidFill>
+                          <a:latin typeface="Lato"/>
+                        </a:defRPr>
+                      </a:pPr>
+                      <a:r>
+                        <a:t>-0.99; -1.06 (high), -1.00 (low)</a:t>
+                      </a:r>
+                    </a:p>
+                  </a:txBody>
+                  <a:tcPr marL="64008" marR="64008" marT="54864" marB="27432" anchor="t">
+                    <a:lnL w="0">
+                      <a:noFill/>
+                    </a:lnL>
+                    <a:lnR w="0">
+                      <a:noFill/>
+                    </a:lnR>
+                    <a:lnT w="0">
+                      <a:noFill/>
+                    </a:lnT>
+                    <a:lnB w="5080">
+                      <a:solidFill>
+                        <a:srgbClr val="B8B8B8"/>
+                      </a:solidFill>
+                    </a:lnB>
+                    <a:solidFill>
+                      <a:srgbClr val="FFFFFF"/>
+                    </a:solidFill>
+                  </a:tcPr>
+                </a:tc>
+              </a:tr>
+              <a:tr h="662940">
+                <a:tc>
+                  <a:txBody>
+                    <a:bodyPr/>
+                    <a:lstStyle/>
+                    <a:p>
+                      <a:pPr>
+                        <a:spcAft>
+                          <a:spcPts val="100"/>
+                        </a:spcAft>
+                        <a:defRPr sz="1050" b="1">
+                          <a:solidFill>
+                            <a:srgbClr val="0A2373"/>
+                          </a:solidFill>
+                          <a:latin typeface="Lato"/>
+                        </a:defRPr>
+                      </a:pPr>
+                      <a:r>
+                        <a:t>Both</a:t>
+                      </a:r>
+                    </a:p>
+                  </a:txBody>
+                  <a:tcPr marL="64008" marR="64008" marT="54864" marB="27432" anchor="t">
+                    <a:lnL w="0">
+                      <a:noFill/>
+                    </a:lnL>
+                    <a:lnR w="0">
+                      <a:noFill/>
+                    </a:lnR>
+                    <a:lnT w="0">
+                      <a:noFill/>
+                    </a:lnT>
+                    <a:lnB w="5080">
+                      <a:solidFill>
+                        <a:srgbClr val="B8B8B8"/>
+                      </a:solidFill>
+                    </a:lnB>
+                    <a:solidFill>
+                      <a:srgbClr val="FFFFFF"/>
+                    </a:solidFill>
+                  </a:tcPr>
+                </a:tc>
+                <a:tc>
+                  <a:txBody>
+                    <a:bodyPr/>
+                    <a:lstStyle/>
+                    <a:p>
+                      <a:pPr>
+                        <a:spcAft>
+                          <a:spcPts val="100"/>
+                        </a:spcAft>
+                        <a:defRPr sz="1050" b="0">
+                          <a:solidFill>
+                            <a:srgbClr val="11151A"/>
+                          </a:solidFill>
+                          <a:latin typeface="Lato"/>
+                        </a:defRPr>
+                      </a:pPr>
+                      <a:r>
+                        <a:t>3.20</a:t>
+                      </a:r>
+                    </a:p>
+                  </a:txBody>
+                  <a:tcPr marL="64008" marR="64008" marT="54864" marB="27432" anchor="t">
+                    <a:lnL w="0">
+                      <a:noFill/>
+                    </a:lnL>
+                    <a:lnR w="0">
+                      <a:noFill/>
+                    </a:lnR>
+                    <a:lnT w="0">
+                      <a:noFill/>
+                    </a:lnT>
+                    <a:lnB w="5080">
+                      <a:solidFill>
+                        <a:srgbClr val="B8B8B8"/>
+                      </a:solidFill>
+                    </a:lnB>
+                    <a:solidFill>
+                      <a:srgbClr val="FFFFFF"/>
+                    </a:solidFill>
+                  </a:tcPr>
+                </a:tc>
+                <a:tc>
+                  <a:txBody>
+                    <a:bodyPr/>
+                    <a:lstStyle/>
+                    <a:p>
+                      <a:pPr>
+                        <a:spcAft>
+                          <a:spcPts val="100"/>
+                        </a:spcAft>
+                        <a:defRPr sz="1050" b="0">
+                          <a:solidFill>
+                            <a:srgbClr val="11151A"/>
+                          </a:solidFill>
+                          <a:latin typeface="Lato"/>
+                        </a:defRPr>
+                      </a:pPr>
+                      <a:r>
+                        <a:t>2.56</a:t>
+                      </a:r>
+                    </a:p>
+                  </a:txBody>
+                  <a:tcPr marL="64008" marR="64008" marT="54864" marB="27432" anchor="t">
+                    <a:lnL w="0">
+                      <a:noFill/>
+                    </a:lnL>
+                    <a:lnR w="0">
+                      <a:noFill/>
+                    </a:lnR>
+                    <a:lnT w="0">
+                      <a:noFill/>
+                    </a:lnT>
+                    <a:lnB w="5080">
+                      <a:solidFill>
+                        <a:srgbClr val="B8B8B8"/>
+                      </a:solidFill>
+                    </a:lnB>
+                    <a:solidFill>
+                      <a:srgbClr val="FFFFFF"/>
+                    </a:solidFill>
+                  </a:tcPr>
+                </a:tc>
+                <a:tc>
+                  <a:txBody>
+                    <a:bodyPr/>
+                    <a:lstStyle/>
+                    <a:p>
+                      <a:pPr>
+                        <a:spcAft>
+                          <a:spcPts val="100"/>
+                        </a:spcAft>
+                        <a:defRPr sz="1050" b="0">
+                          <a:solidFill>
+                            <a:srgbClr val="11151A"/>
+                          </a:solidFill>
+                          <a:latin typeface="Lato"/>
+                        </a:defRPr>
+                      </a:pPr>
+                    </a:p>
+                  </a:txBody>
+                  <a:tcPr marL="64008" marR="64008" marT="54864" marB="27432" anchor="t">
+                    <a:lnL w="0">
+                      <a:noFill/>
+                    </a:lnL>
+                    <a:lnR w="0">
+                      <a:noFill/>
+                    </a:lnR>
+                    <a:lnT w="0">
+                      <a:noFill/>
+                    </a:lnT>
+                    <a:lnB w="5080">
+                      <a:solidFill>
+                        <a:srgbClr val="B8B8B8"/>
+                      </a:solidFill>
+                    </a:lnB>
+                    <a:solidFill>
+                      <a:srgbClr val="FFFFFF"/>
+                    </a:solidFill>
+                  </a:tcPr>
+                </a:tc>
+                <a:tc>
+                  <a:txBody>
+                    <a:bodyPr/>
+                    <a:lstStyle/>
+                    <a:p>
+                      <a:pPr>
+                        <a:spcAft>
+                          <a:spcPts val="100"/>
+                        </a:spcAft>
+                        <a:defRPr sz="1050" b="0">
+                          <a:solidFill>
+                            <a:srgbClr val="11151A"/>
+                          </a:solidFill>
+                          <a:latin typeface="Lato"/>
+                        </a:defRPr>
+                      </a:pPr>
+                      <a:r>
+                        <a:t>2.56</a:t>
+                      </a:r>
+                    </a:p>
+                  </a:txBody>
+                  <a:tcPr marL="64008" marR="64008" marT="54864" marB="27432" anchor="t">
+                    <a:lnL w="0">
+                      <a:noFill/>
+                    </a:lnL>
+                    <a:lnR w="0">
+                      <a:noFill/>
+                    </a:lnR>
+                    <a:lnT w="0">
+                      <a:noFill/>
+                    </a:lnT>
+                    <a:lnB w="5080">
+                      <a:solidFill>
+                        <a:srgbClr val="B8B8B8"/>
+                      </a:solidFill>
+                    </a:lnB>
+                    <a:solidFill>
+                      <a:srgbClr val="FFFFFF"/>
+                    </a:solidFill>
+                  </a:tcPr>
+                </a:tc>
+                <a:tc>
+                  <a:txBody>
+                    <a:bodyPr/>
+                    <a:lstStyle/>
+                    <a:p>
+                      <a:pPr>
+                        <a:spcAft>
+                          <a:spcPts val="100"/>
+                        </a:spcAft>
+                        <a:defRPr sz="1050" b="0">
+                          <a:solidFill>
+                            <a:srgbClr val="11151A"/>
+                          </a:solidFill>
+                          <a:latin typeface="Lato"/>
+                        </a:defRPr>
+                      </a:pPr>
+                      <a:r>
+                        <a:t>-0.63; -0.69 (high), -0.64 (low)</a:t>
+                      </a:r>
+                    </a:p>
+                  </a:txBody>
+                  <a:tcPr marL="64008" marR="64008" marT="54864" marB="27432" anchor="t">
+                    <a:lnL w="0">
+                      <a:noFill/>
+                    </a:lnL>
+                    <a:lnR w="0">
+                      <a:noFill/>
+                    </a:lnR>
+                    <a:lnT w="0">
+                      <a:noFill/>
+                    </a:lnT>
+                    <a:lnB w="5080">
+                      <a:solidFill>
+                        <a:srgbClr val="B8B8B8"/>
+                      </a:solidFill>
+                    </a:lnB>
+                    <a:solidFill>
+                      <a:srgbClr val="FFFFFF"/>
+                    </a:solidFill>
+                  </a:tcPr>
+                </a:tc>
+              </a:tr>
+            </a:tbl>
+          </a:graphicData>
+        </a:graphic>
+      </p:graphicFrame>
+      <p:sp>
+        <p:nvSpPr>
+          <p:cNvPr id="8" name="TextBox 7"/>
+          <p:cNvSpPr txBox="1"/>
+          <p:nvPr/>
+        </p:nvSpPr>
+        <p:spPr>
+          <a:xfrm>
+            <a:off x="457200" y="4983480"/>
+            <a:ext cx="10652760" cy="1097280"/>
+          </a:xfrm>
+          <a:prstGeom prst="rect">
+            <a:avLst/>
+          </a:prstGeom>
+          <a:noFill/>
+        </p:spPr>
+        <p:txBody>
+          <a:bodyPr wrap="square" lIns="22860" rIns="22860" tIns="0" bIns="0">
+            <a:spAutoFit/>
+          </a:bodyPr>
+          <a:lstStyle/>
+          <a:p>
+            <a:pPr>
+              <a:spcAft>
+                <a:spcPts val="300"/>
+              </a:spcAft>
+              <a:defRPr sz="1100" b="0">
+                <a:solidFill>
+                  <a:srgbClr val="11151A"/>
+                </a:solidFill>
+                <a:latin typeface="Lato"/>
+              </a:defRPr>
+            </a:pPr>
+            <a:r>
+              <a:t>Why 2021 and not an average: it is the latest balance and one consistent year for both sectors. A 2018-2021 average gives 0.98 and 1.68; the industry average is pulled up by the years before mining output fell.</a:t>
+            </a:r>
+          </a:p>
+          <a:p>
+            <a:pPr>
+              <a:spcAft>
+                <a:spcPts val="300"/>
+              </a:spcAft>
+              <a:defRPr sz="1100" b="0">
+                <a:solidFill>
+                  <a:srgbClr val="11151A"/>
+                </a:solidFill>
+                <a:latin typeface="Lato"/>
+              </a:defRPr>
+            </a:pPr>
+            <a:r>
+              <a:t>Decision for Nigel: accept both as provisional, or take the activity-adjusted 1.40 for industry. Both keep the needs-verification flag.</a:t>
+            </a:r>
+          </a:p>
+        </p:txBody>
+      </p:sp>
+      <p:sp>
+        <p:nvSpPr>
+          <p:cNvPr id="9" name="Chevron 8">
+            <a:hlinkClick action="ppaction://hlinksldjump" r:id="rId2"/>
+          </p:cNvPr>
+          <p:cNvSpPr/>
+          <p:nvPr/>
+        </p:nvSpPr>
+        <p:spPr>
+          <a:xfrm>
+            <a:off x="457200" y="73152"/>
+            <a:ext cx="2075688" cy="384048"/>
+          </a:xfrm>
+          <a:prstGeom prst="chevron">
+            <a:avLst>
+              <a:gd name="adj" fmla="val 12000"/>
+            </a:avLst>
+          </a:prstGeom>
+          <a:solidFill>
+            <a:srgbClr val="EEEEEE"/>
+          </a:solidFill>
+          <a:ln>
+            <a:noFill/>
+          </a:ln>
+        </p:spPr>
+        <p:style>
+          <a:lnRef idx="1">
+            <a:schemeClr val="accent1"/>
+          </a:lnRef>
+          <a:fillRef idx="3">
+            <a:schemeClr val="accent1"/>
+          </a:fillRef>
+          <a:effectRef idx="2">
+            <a:schemeClr val="accent1"/>
+          </a:effectRef>
+          <a:fontRef idx="minor">
+            <a:schemeClr val="lt1"/>
+          </a:fontRef>
+        </p:style>
+        <p:txBody>
+          <a:bodyPr rtlCol="0" anchor="ctr" tIns="0" bIns="0"/>
+          <a:lstStyle/>
+          <a:p>
+            <a:pPr algn="ctr">
+              <a:defRPr sz="1100" b="0">
+                <a:solidFill>
+                  <a:srgbClr val="0A2373"/>
+                </a:solidFill>
+                <a:latin typeface="Lato"/>
+              </a:defRPr>
+            </a:pPr>
+            <a:r>
+              <a:t>1  National balance</a:t>
+            </a:r>
+          </a:p>
+        </p:txBody>
+      </p:sp>
+      <p:sp>
+        <p:nvSpPr>
+          <p:cNvPr id="10" name="Chevron 9">
+            <a:hlinkClick action="ppaction://hlinksldjump" r:id="rId3"/>
+          </p:cNvPr>
+          <p:cNvSpPr/>
+          <p:nvPr/>
+        </p:nvSpPr>
+        <p:spPr>
+          <a:xfrm>
+            <a:off x="2587752" y="73152"/>
+            <a:ext cx="2075688" cy="384048"/>
+          </a:xfrm>
+          <a:prstGeom prst="chevron">
+            <a:avLst>
+              <a:gd name="adj" fmla="val 12000"/>
+            </a:avLst>
+          </a:prstGeom>
+          <a:solidFill>
+            <a:srgbClr val="EEEEEE"/>
+          </a:solidFill>
+          <a:ln>
+            <a:noFill/>
+          </a:ln>
+        </p:spPr>
+        <p:style>
+          <a:lnRef idx="1">
+            <a:schemeClr val="accent1"/>
+          </a:lnRef>
+          <a:fillRef idx="3">
+            <a:schemeClr val="accent1"/>
+          </a:fillRef>
+          <a:effectRef idx="2">
+            <a:schemeClr val="accent1"/>
+          </a:effectRef>
+          <a:fontRef idx="minor">
+            <a:schemeClr val="lt1"/>
+          </a:fontRef>
+        </p:style>
+        <p:txBody>
+          <a:bodyPr rtlCol="0" anchor="ctr" tIns="0" bIns="0"/>
+          <a:lstStyle/>
+          <a:p>
+            <a:pPr algn="ctr">
+              <a:defRPr sz="1100" b="0">
+                <a:solidFill>
+                  <a:srgbClr val="0A2373"/>
+                </a:solidFill>
+                <a:latin typeface="Lato"/>
+              </a:defRPr>
+            </a:pPr>
+            <a:r>
+              <a:t>2  Forecast levers</a:t>
+            </a:r>
+          </a:p>
+        </p:txBody>
+      </p:sp>
+      <p:sp>
+        <p:nvSpPr>
+          <p:cNvPr id="11" name="Chevron 10">
+            <a:hlinkClick action="ppaction://hlinksldjump" r:id="rId4"/>
+          </p:cNvPr>
+          <p:cNvSpPr/>
+          <p:nvPr/>
+        </p:nvSpPr>
+        <p:spPr>
+          <a:xfrm>
+            <a:off x="4718304" y="73152"/>
+            <a:ext cx="2075688" cy="384048"/>
+          </a:xfrm>
+          <a:prstGeom prst="chevron">
+            <a:avLst>
+              <a:gd name="adj" fmla="val 12000"/>
+            </a:avLst>
+          </a:prstGeom>
+          <a:solidFill>
+            <a:srgbClr val="0A2373"/>
+          </a:solidFill>
+          <a:ln>
+            <a:noFill/>
+          </a:ln>
+        </p:spPr>
+        <p:style>
+          <a:lnRef idx="1">
+            <a:schemeClr val="accent1"/>
+          </a:lnRef>
+          <a:fillRef idx="3">
+            <a:schemeClr val="accent1"/>
+          </a:fillRef>
+          <a:effectRef idx="2">
+            <a:schemeClr val="accent1"/>
+          </a:effectRef>
+          <a:fontRef idx="minor">
+            <a:schemeClr val="lt1"/>
+          </a:fontRef>
+        </p:style>
+        <p:txBody>
+          <a:bodyPr rtlCol="0" anchor="ctr" tIns="0" bIns="0"/>
+          <a:lstStyle/>
+          <a:p>
+            <a:pPr algn="ctr">
+              <a:defRPr sz="1100" b="1">
+                <a:solidFill>
+                  <a:srgbClr val="FFFFFF"/>
+                </a:solidFill>
+                <a:latin typeface="Lato"/>
+              </a:defRPr>
+            </a:pPr>
+            <a:r>
+              <a:t>3  Sector baselines</a:t>
+            </a:r>
+          </a:p>
+        </p:txBody>
+      </p:sp>
+      <p:sp>
+        <p:nvSpPr>
+          <p:cNvPr id="12" name="Chevron 11">
+            <a:hlinkClick action="ppaction://hlinksldjump" r:id="rId5"/>
+          </p:cNvPr>
+          <p:cNvSpPr/>
+          <p:nvPr/>
+        </p:nvSpPr>
+        <p:spPr>
+          <a:xfrm>
+            <a:off x="6848856" y="73152"/>
+            <a:ext cx="2075688" cy="384048"/>
+          </a:xfrm>
+          <a:prstGeom prst="chevron">
+            <a:avLst>
+              <a:gd name="adj" fmla="val 12000"/>
+            </a:avLst>
+          </a:prstGeom>
+          <a:solidFill>
+            <a:srgbClr val="EEEEEE"/>
+          </a:solidFill>
+          <a:ln>
+            <a:noFill/>
+          </a:ln>
+        </p:spPr>
+        <p:style>
+          <a:lnRef idx="1">
+            <a:schemeClr val="accent1"/>
+          </a:lnRef>
+          <a:fillRef idx="3">
+            <a:schemeClr val="accent1"/>
+          </a:fillRef>
+          <a:effectRef idx="2">
+            <a:schemeClr val="accent1"/>
+          </a:effectRef>
+          <a:fontRef idx="minor">
+            <a:schemeClr val="lt1"/>
+          </a:fontRef>
+        </p:style>
+        <p:txBody>
+          <a:bodyPr rtlCol="0" anchor="ctr" tIns="0" bIns="0"/>
+          <a:lstStyle/>
+          <a:p>
+            <a:pPr algn="ctr">
+              <a:defRPr sz="1100" b="0">
+                <a:solidFill>
+                  <a:srgbClr val="0A2373"/>
+                </a:solidFill>
+                <a:latin typeface="Lato"/>
+              </a:defRPr>
+            </a:pPr>
+            <a:r>
+              <a:t>4  Tank handling</a:t>
+            </a:r>
+          </a:p>
+        </p:txBody>
+      </p:sp>
+      <p:sp>
+        <p:nvSpPr>
+          <p:cNvPr id="13" name="Chevron 12"/>
+          <p:cNvSpPr/>
+          <p:nvPr/>
+        </p:nvSpPr>
+        <p:spPr>
+          <a:xfrm>
+            <a:off x="8979408" y="73152"/>
+            <a:ext cx="2075688" cy="384048"/>
+          </a:xfrm>
+          <a:prstGeom prst="chevron">
+            <a:avLst>
+              <a:gd name="adj" fmla="val 12000"/>
+            </a:avLst>
+          </a:prstGeom>
+          <a:solidFill>
+            <a:srgbClr val="EEEEEE"/>
+          </a:solidFill>
+          <a:ln>
+            <a:noFill/>
+          </a:ln>
+        </p:spPr>
+        <p:style>
+          <a:lnRef idx="1">
+            <a:schemeClr val="accent1"/>
+          </a:lnRef>
+          <a:fillRef idx="3">
+            <a:schemeClr val="accent1"/>
+          </a:fillRef>
+          <a:effectRef idx="2">
+            <a:schemeClr val="accent1"/>
+          </a:effectRef>
+          <a:fontRef idx="minor">
+            <a:schemeClr val="lt1"/>
+          </a:fontRef>
+        </p:style>
+        <p:txBody>
+          <a:bodyPr rtlCol="0" anchor="ctr" tIns="0" bIns="0"/>
+          <a:lstStyle/>
+          <a:p>
+            <a:pPr algn="ctr">
+              <a:defRPr sz="1100" b="0">
+                <a:solidFill>
+                  <a:srgbClr val="0A2373"/>
+                </a:solidFill>
+                <a:latin typeface="Lato"/>
+              </a:defRPr>
+            </a:pPr>
+            <a:r>
+              <a:t>5  Hand-back</a:t>
+            </a:r>
+          </a:p>
+        </p:txBody>
+      </p:sp>
+    </p:spTree>
+  </p:cSld>
+  <p:clrMapOvr>
+    <a:masterClrMapping/>
+  </p:clrMapOvr>
+</p:sld>
+</file>
+
+<file path=ppt/slides/slide11.xml><?xml version="1.0" encoding="utf-8"?>
+<p:sld xmlns:a="http://schemas.openxmlformats.org/drawingml/2006/main" xmlns:p="http://schemas.openxmlformats.org/presentationml/2006/main" xmlns:r="http://schemas.openxmlformats.org/officeDocument/2006/relationships">
+  <p:cSld>
+    <p:spTree>
+      <p:nvGrpSpPr>
+        <p:cNvPr id="1" name=""/>
+        <p:cNvGrpSpPr/>
+        <p:nvPr/>
+      </p:nvGrpSpPr>
+      <p:grpSpPr/>
+      <p:sp>
+        <p:nvSpPr>
+          <p:cNvPr id="2" name="Title 1"/>
+          <p:cNvSpPr>
+            <a:spLocks noGrp="1"/>
+          </p:cNvSpPr>
+          <p:nvPr>
+            <p:ph type="title"/>
+          </p:nvPr>
+        </p:nvSpPr>
+        <p:spPr/>
+        <p:txBody>
+          <a:bodyPr/>
+          <a:lstStyle/>
+          <a:p>
+            <a:r>
               <a:t>The totals show no double counting from the two sectors; the excess is in power generation</a:t>
             </a:r>
           </a:p>
@@ -6042,7 +7701,7 @@
 </p:sld>
 </file>
 
-<file path=ppt/slides/slide11.xml><?xml version="1.0" encoding="utf-8"?>
+<file path=ppt/slides/slide12.xml><?xml version="1.0" encoding="utf-8"?>
 <p:sld xmlns:a="http://schemas.openxmlformats.org/drawingml/2006/main" xmlns:p="http://schemas.openxmlformats.org/presentationml/2006/main" xmlns:r="http://schemas.openxmlformats.org/officeDocument/2006/relationships">
   <p:cSld>
     <p:spTree>
@@ -7909,7 +9568,7 @@
 </p:sld>
 </file>
 
-<file path=ppt/slides/slide12.xml><?xml version="1.0" encoding="utf-8"?>
+<file path=ppt/slides/slide13.xml><?xml version="1.0" encoding="utf-8"?>
 <p:sld xmlns:a="http://schemas.openxmlformats.org/drawingml/2006/main" xmlns:p="http://schemas.openxmlformats.org/presentationml/2006/main" xmlns:r="http://schemas.openxmlformats.org/officeDocument/2006/relationships">
   <p:cSld>
     <p:spTree>
@@ -23674,7 +25333,7 @@
           <a:lstStyle/>
           <a:p>
             <a:r>
-              <a:t>Sourced starting values lower 2024 diesel demand by 0.63 bn litres</a:t>
+              <a:t>Seven levers added: price, backup generation, hybrids, rail passengers and neighbours</a:t>
             </a:r>
           </a:p>
         </p:txBody>
@@ -23713,7 +25372,7 @@
               </a:defRPr>
             </a:pPr>
             <a:r>
-              <a:t>Agriculture and industry | diesel, billion litres a year | proposed as provisional starting values</a:t>
+              <a:t>Added by the analyst; not in Nigel's file | low / medium / high for 2030 and 2035 | proposals for review</a:t>
             </a:r>
           </a:p>
         </p:txBody>
@@ -23787,7 +25446,7 @@
               </a:defRPr>
             </a:pPr>
             <a:r>
-              <a:t>Source: sector_baselines_2026-10-07.md and .csv on manish-branch; department energy balances 2012-2021. A proposal for Nigel's decision; nothing is accepted.</a:t>
+              <a:t>Source: fuel_lever_response_2026-10-07.md on manish-branch; Nigel's proposed inputs of 7 October are not edited. Replacements are the analyst's proposals, pending review.</a:t>
             </a:r>
           </a:p>
         </p:txBody>
@@ -23840,32 +25499,31 @@
           <p:nvPr/>
         </p:nvGraphicFramePr>
         <p:xfrm>
-          <a:off x="457200" y="2029968"/>
-          <a:ext cx="10652760" cy="2651760"/>
+          <a:off x="457200" y="2011680"/>
+          <a:ext cx="10652760" cy="4206240"/>
         </p:xfrm>
         <a:graphic>
           <a:graphicData uri="http://schemas.openxmlformats.org/drawingml/2006/table">
             <a:tbl>
               <a:tblPr firstRow="0" bandRow="0"/>
               <a:tblGrid>
-                <a:gridCol w="1188720"/>
-                <a:gridCol w="1143000"/>
-                <a:gridCol w="2286000"/>
-                <a:gridCol w="2743200"/>
+                <a:gridCol w="2148840"/>
                 <a:gridCol w="1463040"/>
-                <a:gridCol w="1828800"/>
+                <a:gridCol w="1600200"/>
+                <a:gridCol w="1600200"/>
+                <a:gridCol w="3840480"/>
               </a:tblGrid>
-              <a:tr h="662940">
-                <a:tc>
-                  <a:txBody>
-                    <a:bodyPr/>
-                    <a:lstStyle/>
-                    <a:p>
-                      <a:pPr>
-                        <a:spcAft>
-                          <a:spcPts val="100"/>
-                        </a:spcAft>
-                        <a:defRPr sz="1050" b="1">
+              <a:tr h="525780">
+                <a:tc>
+                  <a:txBody>
+                    <a:bodyPr/>
+                    <a:lstStyle/>
+                    <a:p>
+                      <a:pPr>
+                        <a:spcAft>
+                          <a:spcPts val="100"/>
+                        </a:spcAft>
+                        <a:defRPr sz="950" b="1">
                           <a:solidFill>
                             <a:srgbClr val="0A2373"/>
                           </a:solidFill>
@@ -23873,228 +25531,203 @@
                         </a:defRPr>
                       </a:pPr>
                       <a:r>
-                        <a:t>Sector</a:t>
-                      </a:r>
-                    </a:p>
-                  </a:txBody>
-                  <a:tcPr marL="64008" marR="64008" marT="54864" marB="27432" anchor="t">
-                    <a:lnL w="0">
-                      <a:noFill/>
-                    </a:lnL>
-                    <a:lnR w="0">
-                      <a:noFill/>
-                    </a:lnR>
-                    <a:lnT w="0">
-                      <a:noFill/>
-                    </a:lnT>
-                    <a:lnB w="5080">
-                      <a:solidFill>
-                        <a:srgbClr val="B8B8B8"/>
-                      </a:solidFill>
-                    </a:lnB>
-                    <a:solidFill>
-                      <a:srgbClr val="FFFFFF"/>
-                    </a:solidFill>
-                  </a:tcPr>
-                </a:tc>
-                <a:tc>
-                  <a:txBody>
-                    <a:bodyPr/>
-                    <a:lstStyle/>
-                    <a:p>
-                      <a:pPr>
-                        <a:spcAft>
-                          <a:spcPts val="100"/>
-                        </a:spcAft>
-                        <a:defRPr sz="1050" b="1">
-                          <a:solidFill>
-                            <a:srgbClr val="11151A"/>
-                          </a:solidFill>
-                          <a:latin typeface="Lato"/>
-                        </a:defRPr>
-                      </a:pPr>
-                      <a:r>
-                        <a:t>Earlier</a:t>
-                      </a:r>
-                    </a:p>
-                    <a:p>
-                      <a:pPr>
-                        <a:spcAft>
-                          <a:spcPts val="100"/>
-                        </a:spcAft>
-                        <a:defRPr sz="1050" b="1">
-                          <a:solidFill>
-                            <a:srgbClr val="11151A"/>
-                          </a:solidFill>
-                          <a:latin typeface="Lato"/>
-                        </a:defRPr>
-                      </a:pPr>
-                      <a:r>
-                        <a:t>placeholder</a:t>
-                      </a:r>
-                    </a:p>
-                  </a:txBody>
-                  <a:tcPr marL="64008" marR="64008" marT="54864" marB="27432" anchor="t">
-                    <a:lnL w="0">
-                      <a:noFill/>
-                    </a:lnL>
-                    <a:lnR w="0">
-                      <a:noFill/>
-                    </a:lnR>
-                    <a:lnT w="0">
-                      <a:noFill/>
-                    </a:lnT>
-                    <a:lnB w="5080">
-                      <a:solidFill>
-                        <a:srgbClr val="B8B8B8"/>
-                      </a:solidFill>
-                    </a:lnB>
-                    <a:solidFill>
-                      <a:srgbClr val="FFFFFF"/>
-                    </a:solidFill>
-                  </a:tcPr>
-                </a:tc>
-                <a:tc>
-                  <a:txBody>
-                    <a:bodyPr/>
-                    <a:lstStyle/>
-                    <a:p>
-                      <a:pPr>
-                        <a:spcAft>
-                          <a:spcPts val="100"/>
-                        </a:spcAft>
-                        <a:defRPr sz="1050" b="1">
-                          <a:solidFill>
-                            <a:srgbClr val="11151A"/>
-                          </a:solidFill>
-                          <a:latin typeface="Lato"/>
-                        </a:defRPr>
-                      </a:pPr>
-                      <a:r>
-                        <a:t>On the branch</a:t>
-                      </a:r>
-                    </a:p>
-                  </a:txBody>
-                  <a:tcPr marL="64008" marR="64008" marT="54864" marB="27432" anchor="t">
-                    <a:lnL w="0">
-                      <a:noFill/>
-                    </a:lnL>
-                    <a:lnR w="0">
-                      <a:noFill/>
-                    </a:lnR>
-                    <a:lnT w="0">
-                      <a:noFill/>
-                    </a:lnT>
-                    <a:lnB w="5080">
-                      <a:solidFill>
-                        <a:srgbClr val="B8B8B8"/>
-                      </a:solidFill>
-                    </a:lnB>
-                    <a:solidFill>
-                      <a:srgbClr val="FFFFFF"/>
-                    </a:solidFill>
-                  </a:tcPr>
-                </a:tc>
-                <a:tc>
-                  <a:txBody>
-                    <a:bodyPr/>
-                    <a:lstStyle/>
-                    <a:p>
-                      <a:pPr>
-                        <a:spcAft>
-                          <a:spcPts val="100"/>
-                        </a:spcAft>
-                        <a:defRPr sz="1050" b="1">
-                          <a:solidFill>
-                            <a:srgbClr val="11151A"/>
-                          </a:solidFill>
-                          <a:latin typeface="Lato"/>
-                        </a:defRPr>
-                      </a:pPr>
-                      <a:r>
-                        <a:t>Range in the evidence</a:t>
-                      </a:r>
-                    </a:p>
-                  </a:txBody>
-                  <a:tcPr marL="64008" marR="64008" marT="54864" marB="27432" anchor="t">
-                    <a:lnL w="0">
-                      <a:noFill/>
-                    </a:lnL>
-                    <a:lnR w="0">
-                      <a:noFill/>
-                    </a:lnR>
-                    <a:lnT w="0">
-                      <a:noFill/>
-                    </a:lnT>
-                    <a:lnB w="5080">
-                      <a:solidFill>
-                        <a:srgbClr val="B8B8B8"/>
-                      </a:solidFill>
-                    </a:lnB>
-                    <a:solidFill>
-                      <a:srgbClr val="FFFFFF"/>
-                    </a:solidFill>
-                  </a:tcPr>
-                </a:tc>
-                <a:tc>
-                  <a:txBody>
-                    <a:bodyPr/>
-                    <a:lstStyle/>
-                    <a:p>
-                      <a:pPr>
-                        <a:spcAft>
-                          <a:spcPts val="100"/>
-                        </a:spcAft>
-                        <a:defRPr sz="1050" b="1">
-                          <a:solidFill>
-                            <a:srgbClr val="11151A"/>
-                          </a:solidFill>
-                          <a:latin typeface="Lato"/>
-                        </a:defRPr>
-                      </a:pPr>
-                      <a:r>
-                        <a:t>Proposed</a:t>
-                      </a:r>
-                    </a:p>
-                  </a:txBody>
-                  <a:tcPr marL="64008" marR="64008" marT="54864" marB="27432" anchor="t">
-                    <a:lnL w="0">
-                      <a:noFill/>
-                    </a:lnL>
-                    <a:lnR w="0">
-                      <a:noFill/>
-                    </a:lnR>
-                    <a:lnT w="0">
-                      <a:noFill/>
-                    </a:lnT>
-                    <a:lnB w="5080">
-                      <a:solidFill>
-                        <a:srgbClr val="B8B8B8"/>
-                      </a:solidFill>
-                    </a:lnB>
-                    <a:solidFill>
-                      <a:srgbClr val="FFFFFF"/>
-                    </a:solidFill>
-                  </a:tcPr>
-                </a:tc>
-                <a:tc>
-                  <a:txBody>
-                    <a:bodyPr/>
-                    <a:lstStyle/>
-                    <a:p>
-                      <a:pPr>
-                        <a:spcAft>
-                          <a:spcPts val="100"/>
-                        </a:spcAft>
-                        <a:defRPr sz="1050" b="1">
-                          <a:solidFill>
-                            <a:srgbClr val="11151A"/>
-                          </a:solidFill>
-                          <a:latin typeface="Lato"/>
-                        </a:defRPr>
-                      </a:pPr>
-                      <a:r>
-                        <a:t>Effect in 2024; 2035</a:t>
+                        <a:t>Lever and unit</a:t>
+                      </a:r>
+                    </a:p>
+                  </a:txBody>
+                  <a:tcPr marL="64008" marR="64008" marT="54864" marB="27432" anchor="t">
+                    <a:lnL w="0">
+                      <a:noFill/>
+                    </a:lnL>
+                    <a:lnR w="0">
+                      <a:noFill/>
+                    </a:lnR>
+                    <a:lnT w="0">
+                      <a:noFill/>
+                    </a:lnT>
+                    <a:lnB w="5080">
+                      <a:solidFill>
+                        <a:srgbClr val="B8B8B8"/>
+                      </a:solidFill>
+                    </a:lnB>
+                    <a:solidFill>
+                      <a:srgbClr val="FFFFFF"/>
+                    </a:solidFill>
+                  </a:tcPr>
+                </a:tc>
+                <a:tc>
+                  <a:txBody>
+                    <a:bodyPr/>
+                    <a:lstStyle/>
+                    <a:p>
+                      <a:pPr>
+                        <a:spcAft>
+                          <a:spcPts val="100"/>
+                        </a:spcAft>
+                        <a:defRPr sz="950" b="1">
+                          <a:solidFill>
+                            <a:srgbClr val="11151A"/>
+                          </a:solidFill>
+                          <a:latin typeface="Lato"/>
+                        </a:defRPr>
+                      </a:pPr>
+                      <a:r>
+                        <a:t>Baseline</a:t>
+                      </a:r>
+                    </a:p>
+                  </a:txBody>
+                  <a:tcPr marL="64008" marR="64008" marT="54864" marB="27432" anchor="t">
+                    <a:lnL w="0">
+                      <a:noFill/>
+                    </a:lnL>
+                    <a:lnR w="0">
+                      <a:noFill/>
+                    </a:lnR>
+                    <a:lnT w="0">
+                      <a:noFill/>
+                    </a:lnT>
+                    <a:lnB w="5080">
+                      <a:solidFill>
+                        <a:srgbClr val="B8B8B8"/>
+                      </a:solidFill>
+                    </a:lnB>
+                    <a:solidFill>
+                      <a:srgbClr val="FFFFFF"/>
+                    </a:solidFill>
+                  </a:tcPr>
+                </a:tc>
+                <a:tc>
+                  <a:txBody>
+                    <a:bodyPr/>
+                    <a:lstStyle/>
+                    <a:p>
+                      <a:pPr>
+                        <a:spcAft>
+                          <a:spcPts val="100"/>
+                        </a:spcAft>
+                        <a:defRPr sz="950" b="1">
+                          <a:solidFill>
+                            <a:srgbClr val="11151A"/>
+                          </a:solidFill>
+                          <a:latin typeface="Lato"/>
+                        </a:defRPr>
+                      </a:pPr>
+                      <a:r>
+                        <a:t>2030</a:t>
+                      </a:r>
+                    </a:p>
+                    <a:p>
+                      <a:pPr>
+                        <a:spcAft>
+                          <a:spcPts val="100"/>
+                        </a:spcAft>
+                        <a:defRPr sz="950" b="1">
+                          <a:solidFill>
+                            <a:srgbClr val="11151A"/>
+                          </a:solidFill>
+                          <a:latin typeface="Lato"/>
+                        </a:defRPr>
+                      </a:pPr>
+                      <a:r>
+                        <a:t>low / medium / high</a:t>
+                      </a:r>
+                    </a:p>
+                  </a:txBody>
+                  <a:tcPr marL="64008" marR="64008" marT="54864" marB="27432" anchor="t">
+                    <a:lnL w="0">
+                      <a:noFill/>
+                    </a:lnL>
+                    <a:lnR w="0">
+                      <a:noFill/>
+                    </a:lnR>
+                    <a:lnT w="0">
+                      <a:noFill/>
+                    </a:lnT>
+                    <a:lnB w="5080">
+                      <a:solidFill>
+                        <a:srgbClr val="B8B8B8"/>
+                      </a:solidFill>
+                    </a:lnB>
+                    <a:solidFill>
+                      <a:srgbClr val="FFFFFF"/>
+                    </a:solidFill>
+                  </a:tcPr>
+                </a:tc>
+                <a:tc>
+                  <a:txBody>
+                    <a:bodyPr/>
+                    <a:lstStyle/>
+                    <a:p>
+                      <a:pPr>
+                        <a:spcAft>
+                          <a:spcPts val="100"/>
+                        </a:spcAft>
+                        <a:defRPr sz="950" b="1">
+                          <a:solidFill>
+                            <a:srgbClr val="11151A"/>
+                          </a:solidFill>
+                          <a:latin typeface="Lato"/>
+                        </a:defRPr>
+                      </a:pPr>
+                      <a:r>
+                        <a:t>2035</a:t>
+                      </a:r>
+                    </a:p>
+                    <a:p>
+                      <a:pPr>
+                        <a:spcAft>
+                          <a:spcPts val="100"/>
+                        </a:spcAft>
+                        <a:defRPr sz="950" b="1">
+                          <a:solidFill>
+                            <a:srgbClr val="11151A"/>
+                          </a:solidFill>
+                          <a:latin typeface="Lato"/>
+                        </a:defRPr>
+                      </a:pPr>
+                      <a:r>
+                        <a:t>low / medium / high</a:t>
+                      </a:r>
+                    </a:p>
+                  </a:txBody>
+                  <a:tcPr marL="64008" marR="64008" marT="54864" marB="27432" anchor="t">
+                    <a:lnL w="0">
+                      <a:noFill/>
+                    </a:lnL>
+                    <a:lnR w="0">
+                      <a:noFill/>
+                    </a:lnR>
+                    <a:lnT w="0">
+                      <a:noFill/>
+                    </a:lnT>
+                    <a:lnB w="5080">
+                      <a:solidFill>
+                        <a:srgbClr val="B8B8B8"/>
+                      </a:solidFill>
+                    </a:lnB>
+                    <a:solidFill>
+                      <a:srgbClr val="FFFFFF"/>
+                    </a:solidFill>
+                  </a:tcPr>
+                </a:tc>
+                <a:tc>
+                  <a:txBody>
+                    <a:bodyPr/>
+                    <a:lstStyle/>
+                    <a:p>
+                      <a:pPr>
+                        <a:spcAft>
+                          <a:spcPts val="100"/>
+                        </a:spcAft>
+                        <a:defRPr sz="950" b="1">
+                          <a:solidFill>
+                            <a:srgbClr val="11151A"/>
+                          </a:solidFill>
+                          <a:latin typeface="Lato"/>
+                        </a:defRPr>
+                      </a:pPr>
+                      <a:r>
+                        <a:t>Rationale and source</a:t>
                       </a:r>
                     </a:p>
                   </a:txBody>
@@ -24119,17 +25752,17 @@
                   </a:tcPr>
                 </a:tc>
               </a:tr>
-              <a:tr h="662940">
-                <a:tc>
-                  <a:txBody>
-                    <a:bodyPr/>
-                    <a:lstStyle/>
-                    <a:p>
-                      <a:pPr>
-                        <a:spcAft>
-                          <a:spcPts val="100"/>
-                        </a:spcAft>
-                        <a:defRPr sz="1050" b="1">
+              <a:tr h="525780">
+                <a:tc>
+                  <a:txBody>
+                    <a:bodyPr/>
+                    <a:lstStyle/>
+                    <a:p>
+                      <a:pPr>
+                        <a:spcAft>
+                          <a:spcPts val="100"/>
+                        </a:spcAft>
+                        <a:defRPr sz="950" b="1">
                           <a:solidFill>
                             <a:srgbClr val="0A2373"/>
                           </a:solidFill>
@@ -24137,260 +25770,203 @@
                         </a:defRPr>
                       </a:pPr>
                       <a:r>
-                        <a:t>Agriculture</a:t>
-                      </a:r>
-                    </a:p>
-                  </a:txBody>
-                  <a:tcPr marL="64008" marR="64008" marT="54864" marB="27432" anchor="t">
-                    <a:lnL w="0">
-                      <a:noFill/>
-                    </a:lnL>
-                    <a:lnR w="0">
-                      <a:noFill/>
-                    </a:lnR>
-                    <a:lnT w="0">
-                      <a:noFill/>
-                    </a:lnT>
-                    <a:lnB w="5080">
-                      <a:solidFill>
-                        <a:srgbClr val="B8B8B8"/>
-                      </a:solidFill>
-                    </a:lnB>
-                    <a:solidFill>
-                      <a:srgbClr val="FFFFFF"/>
-                    </a:solidFill>
-                  </a:tcPr>
-                </a:tc>
-                <a:tc>
-                  <a:txBody>
-                    <a:bodyPr/>
-                    <a:lstStyle/>
-                    <a:p>
-                      <a:pPr>
-                        <a:spcAft>
-                          <a:spcPts val="100"/>
-                        </a:spcAft>
-                        <a:defRPr sz="1050" b="0">
-                          <a:solidFill>
-                            <a:srgbClr val="11151A"/>
-                          </a:solidFill>
-                          <a:latin typeface="Lato"/>
-                        </a:defRPr>
-                      </a:pPr>
-                      <a:r>
-                        <a:t>0.70</a:t>
-                      </a:r>
-                    </a:p>
-                    <a:p>
-                      <a:pPr>
-                        <a:spcAft>
-                          <a:spcPts val="100"/>
-                        </a:spcAft>
-                        <a:defRPr sz="1050" b="0">
-                          <a:solidFill>
-                            <a:srgbClr val="11151A"/>
-                          </a:solidFill>
-                          <a:latin typeface="Lato"/>
-                        </a:defRPr>
-                      </a:pPr>
-                      <a:r>
-                        <a:t>no source</a:t>
-                      </a:r>
-                    </a:p>
-                  </a:txBody>
-                  <a:tcPr marL="64008" marR="64008" marT="54864" marB="27432" anchor="t">
-                    <a:lnL w="0">
-                      <a:noFill/>
-                    </a:lnL>
-                    <a:lnR w="0">
-                      <a:noFill/>
-                    </a:lnR>
-                    <a:lnT w="0">
-                      <a:noFill/>
-                    </a:lnT>
-                    <a:lnB w="5080">
-                      <a:solidFill>
-                        <a:srgbClr val="B8B8B8"/>
-                      </a:solidFill>
-                    </a:lnB>
-                    <a:solidFill>
-                      <a:srgbClr val="FFFFFF"/>
-                    </a:solidFill>
-                  </a:tcPr>
-                </a:tc>
-                <a:tc>
-                  <a:txBody>
-                    <a:bodyPr/>
-                    <a:lstStyle/>
-                    <a:p>
-                      <a:pPr>
-                        <a:spcAft>
-                          <a:spcPts val="100"/>
-                        </a:spcAft>
-                        <a:defRPr sz="1050" b="0">
-                          <a:solidFill>
-                            <a:srgbClr val="11151A"/>
-                          </a:solidFill>
-                          <a:latin typeface="Lato"/>
-                        </a:defRPr>
-                      </a:pPr>
-                      <a:r>
-                        <a:t>1.06 for 2021</a:t>
-                      </a:r>
-                    </a:p>
-                    <a:p>
-                      <a:pPr>
-                        <a:spcAft>
-                          <a:spcPts val="100"/>
-                        </a:spcAft>
-                        <a:defRPr sz="1050" b="0">
-                          <a:solidFill>
-                            <a:srgbClr val="11151A"/>
-                          </a:solidFill>
-                          <a:latin typeface="Lato"/>
-                        </a:defRPr>
-                      </a:pPr>
-                      <a:r>
-                        <a:t>energy balance, agriculture and forestry</a:t>
-                      </a:r>
-                    </a:p>
-                  </a:txBody>
-                  <a:tcPr marL="64008" marR="64008" marT="54864" marB="27432" anchor="t">
-                    <a:lnL w="0">
-                      <a:noFill/>
-                    </a:lnL>
-                    <a:lnR w="0">
-                      <a:noFill/>
-                    </a:lnR>
-                    <a:lnT w="0">
-                      <a:noFill/>
-                    </a:lnT>
-                    <a:lnB w="5080">
-                      <a:solidFill>
-                        <a:srgbClr val="B8B8B8"/>
-                      </a:solidFill>
-                    </a:lnB>
-                    <a:solidFill>
-                      <a:srgbClr val="FFFFFF"/>
-                    </a:solidFill>
-                  </a:tcPr>
-                </a:tc>
-                <a:tc>
-                  <a:txBody>
-                    <a:bodyPr/>
-                    <a:lstStyle/>
-                    <a:p>
-                      <a:pPr>
-                        <a:spcAft>
-                          <a:spcPts val="100"/>
-                        </a:spcAft>
-                        <a:defRPr sz="1050" b="0">
-                          <a:solidFill>
-                            <a:srgbClr val="11151A"/>
-                          </a:solidFill>
-                          <a:latin typeface="Lato"/>
-                        </a:defRPr>
-                      </a:pPr>
-                      <a:r>
-                        <a:t>0.90-1.09 in eight of ten years, 2012-2021; 1.89 and 1.88 in 2016 and 2017</a:t>
-                      </a:r>
-                    </a:p>
-                  </a:txBody>
-                  <a:tcPr marL="64008" marR="64008" marT="54864" marB="27432" anchor="t">
-                    <a:lnL w="0">
-                      <a:noFill/>
-                    </a:lnL>
-                    <a:lnR w="0">
-                      <a:noFill/>
-                    </a:lnR>
-                    <a:lnT w="0">
-                      <a:noFill/>
-                    </a:lnT>
-                    <a:lnB w="5080">
-                      <a:solidFill>
-                        <a:srgbClr val="B8B8B8"/>
-                      </a:solidFill>
-                    </a:lnB>
-                    <a:solidFill>
-                      <a:srgbClr val="FFFFFF"/>
-                    </a:solidFill>
-                  </a:tcPr>
-                </a:tc>
-                <a:tc>
-                  <a:txBody>
-                    <a:bodyPr/>
-                    <a:lstStyle/>
-                    <a:p>
-                      <a:pPr>
-                        <a:spcAft>
-                          <a:spcPts val="100"/>
-                        </a:spcAft>
-                        <a:defRPr sz="1050" b="0">
-                          <a:solidFill>
-                            <a:srgbClr val="11151A"/>
-                          </a:solidFill>
-                          <a:latin typeface="Lato"/>
-                        </a:defRPr>
-                      </a:pPr>
-                      <a:r>
-                        <a:t>1.06</a:t>
-                      </a:r>
-                    </a:p>
-                    <a:p>
-                      <a:pPr>
-                        <a:spcAft>
-                          <a:spcPts val="100"/>
-                        </a:spcAft>
-                        <a:defRPr sz="1050" b="0">
-                          <a:solidFill>
-                            <a:srgbClr val="11151A"/>
-                          </a:solidFill>
-                          <a:latin typeface="Lato"/>
-                        </a:defRPr>
-                      </a:pPr>
-                      <a:r>
-                        <a:t>provisional, about +/-0.1</a:t>
-                      </a:r>
-                    </a:p>
-                  </a:txBody>
-                  <a:tcPr marL="64008" marR="64008" marT="54864" marB="27432" anchor="t">
-                    <a:lnL w="0">
-                      <a:noFill/>
-                    </a:lnL>
-                    <a:lnR w="0">
-                      <a:noFill/>
-                    </a:lnR>
-                    <a:lnT w="0">
-                      <a:noFill/>
-                    </a:lnT>
-                    <a:lnB w="5080">
-                      <a:solidFill>
-                        <a:srgbClr val="B8B8B8"/>
-                      </a:solidFill>
-                    </a:lnB>
-                    <a:solidFill>
-                      <a:srgbClr val="FFFFFF"/>
-                    </a:solidFill>
-                  </a:tcPr>
-                </a:tc>
-                <a:tc>
-                  <a:txBody>
-                    <a:bodyPr/>
-                    <a:lstStyle/>
-                    <a:p>
-                      <a:pPr>
-                        <a:spcAft>
-                          <a:spcPts val="100"/>
-                        </a:spcAft>
-                        <a:defRPr sz="1050" b="0">
-                          <a:solidFill>
-                            <a:srgbClr val="11151A"/>
-                          </a:solidFill>
-                          <a:latin typeface="Lato"/>
-                        </a:defRPr>
-                      </a:pPr>
-                      <a:r>
-                        <a:t>+0.36; +0.36</a:t>
+                        <a:t>Real diesel price</a:t>
+                      </a:r>
+                    </a:p>
+                    <a:p>
+                      <a:pPr>
+                        <a:spcAft>
+                          <a:spcPts val="100"/>
+                        </a:spcAft>
+                        <a:defRPr sz="950" b="1">
+                          <a:solidFill>
+                            <a:srgbClr val="0A2373"/>
+                          </a:solidFill>
+                          <a:latin typeface="Lato"/>
+                        </a:defRPr>
+                      </a:pPr>
+                      <a:r>
+                        <a:t>2024 = 100</a:t>
+                      </a:r>
+                    </a:p>
+                  </a:txBody>
+                  <a:tcPr marL="64008" marR="64008" marT="54864" marB="27432" anchor="t">
+                    <a:lnL w="0">
+                      <a:noFill/>
+                    </a:lnL>
+                    <a:lnR w="0">
+                      <a:noFill/>
+                    </a:lnR>
+                    <a:lnT w="0">
+                      <a:noFill/>
+                    </a:lnT>
+                    <a:lnB w="5080">
+                      <a:solidFill>
+                        <a:srgbClr val="B8B8B8"/>
+                      </a:solidFill>
+                    </a:lnB>
+                    <a:solidFill>
+                      <a:srgbClr val="FFFFFF"/>
+                    </a:solidFill>
+                  </a:tcPr>
+                </a:tc>
+                <a:tc>
+                  <a:txBody>
+                    <a:bodyPr/>
+                    <a:lstStyle/>
+                    <a:p>
+                      <a:pPr>
+                        <a:spcAft>
+                          <a:spcPts val="100"/>
+                        </a:spcAft>
+                        <a:defRPr sz="950" b="0">
+                          <a:solidFill>
+                            <a:srgbClr val="11151A"/>
+                          </a:solidFill>
+                          <a:latin typeface="Lato"/>
+                        </a:defRPr>
+                      </a:pPr>
+                      <a:r>
+                        <a:t>100</a:t>
+                      </a:r>
+                    </a:p>
+                    <a:p>
+                      <a:pPr>
+                        <a:spcAft>
+                          <a:spcPts val="100"/>
+                        </a:spcAft>
+                        <a:defRPr sz="950" b="0">
+                          <a:solidFill>
+                            <a:srgbClr val="11151A"/>
+                          </a:solidFill>
+                          <a:latin typeface="Lato"/>
+                        </a:defRPr>
+                      </a:pPr>
+                      <a:r>
+                        <a:t>wholesale, inland</a:t>
+                      </a:r>
+                    </a:p>
+                  </a:txBody>
+                  <a:tcPr marL="64008" marR="64008" marT="54864" marB="27432" anchor="t">
+                    <a:lnL w="0">
+                      <a:noFill/>
+                    </a:lnL>
+                    <a:lnR w="0">
+                      <a:noFill/>
+                    </a:lnR>
+                    <a:lnT w="0">
+                      <a:noFill/>
+                    </a:lnT>
+                    <a:lnB w="5080">
+                      <a:solidFill>
+                        <a:srgbClr val="B8B8B8"/>
+                      </a:solidFill>
+                    </a:lnB>
+                    <a:solidFill>
+                      <a:srgbClr val="FFFFFF"/>
+                    </a:solidFill>
+                  </a:tcPr>
+                </a:tc>
+                <a:tc>
+                  <a:txBody>
+                    <a:bodyPr/>
+                    <a:lstStyle/>
+                    <a:p>
+                      <a:pPr>
+                        <a:spcAft>
+                          <a:spcPts val="100"/>
+                        </a:spcAft>
+                        <a:defRPr sz="950" b="0">
+                          <a:solidFill>
+                            <a:srgbClr val="11151A"/>
+                          </a:solidFill>
+                          <a:latin typeface="Lato"/>
+                        </a:defRPr>
+                      </a:pPr>
+                      <a:r>
+                        <a:t>80 / 100 / 140</a:t>
+                      </a:r>
+                    </a:p>
+                  </a:txBody>
+                  <a:tcPr marL="64008" marR="64008" marT="54864" marB="27432" anchor="t">
+                    <a:lnL w="0">
+                      <a:noFill/>
+                    </a:lnL>
+                    <a:lnR w="0">
+                      <a:noFill/>
+                    </a:lnR>
+                    <a:lnT w="0">
+                      <a:noFill/>
+                    </a:lnT>
+                    <a:lnB w="5080">
+                      <a:solidFill>
+                        <a:srgbClr val="B8B8B8"/>
+                      </a:solidFill>
+                    </a:lnB>
+                    <a:solidFill>
+                      <a:srgbClr val="FFFFFF"/>
+                    </a:solidFill>
+                  </a:tcPr>
+                </a:tc>
+                <a:tc>
+                  <a:txBody>
+                    <a:bodyPr/>
+                    <a:lstStyle/>
+                    <a:p>
+                      <a:pPr>
+                        <a:spcAft>
+                          <a:spcPts val="100"/>
+                        </a:spcAft>
+                        <a:defRPr sz="950" b="0">
+                          <a:solidFill>
+                            <a:srgbClr val="11151A"/>
+                          </a:solidFill>
+                          <a:latin typeface="Lato"/>
+                        </a:defRPr>
+                      </a:pPr>
+                      <a:r>
+                        <a:t>80 / 100 / 140</a:t>
+                      </a:r>
+                    </a:p>
+                  </a:txBody>
+                  <a:tcPr marL="64008" marR="64008" marT="54864" marB="27432" anchor="t">
+                    <a:lnL w="0">
+                      <a:noFill/>
+                    </a:lnL>
+                    <a:lnR w="0">
+                      <a:noFill/>
+                    </a:lnR>
+                    <a:lnT w="0">
+                      <a:noFill/>
+                    </a:lnT>
+                    <a:lnB w="5080">
+                      <a:solidFill>
+                        <a:srgbClr val="B8B8B8"/>
+                      </a:solidFill>
+                    </a:lnB>
+                    <a:solidFill>
+                      <a:srgbClr val="FFFFFF"/>
+                    </a:solidFill>
+                  </a:tcPr>
+                </a:tc>
+                <a:tc>
+                  <a:txBody>
+                    <a:bodyPr/>
+                    <a:lstStyle/>
+                    <a:p>
+                      <a:pPr>
+                        <a:spcAft>
+                          <a:spcPts val="100"/>
+                        </a:spcAft>
+                        <a:defRPr sz="950" b="0">
+                          <a:solidFill>
+                            <a:srgbClr val="11151A"/>
+                          </a:solidFill>
+                          <a:latin typeface="Lato"/>
+                        </a:defRPr>
+                      </a:pPr>
+                      <a:r>
+                        <a:t>Department and CEF prices over CPI: 76-120 in 2011-2025, 143 in October 2026. Boshoff (2012): response -0.13.</a:t>
                       </a:r>
                     </a:p>
                   </a:txBody>
@@ -24415,17 +25991,17 @@
                   </a:tcPr>
                 </a:tc>
               </a:tr>
-              <a:tr h="662940">
-                <a:tc>
-                  <a:txBody>
-                    <a:bodyPr/>
-                    <a:lstStyle/>
-                    <a:p>
-                      <a:pPr>
-                        <a:spcAft>
-                          <a:spcPts val="100"/>
-                        </a:spcAft>
-                        <a:defRPr sz="1050" b="1">
+              <a:tr h="525780">
+                <a:tc>
+                  <a:txBody>
+                    <a:bodyPr/>
+                    <a:lstStyle/>
+                    <a:p>
+                      <a:pPr>
+                        <a:spcAft>
+                          <a:spcPts val="100"/>
+                        </a:spcAft>
+                        <a:defRPr sz="950" b="1">
                           <a:solidFill>
                             <a:srgbClr val="0A2373"/>
                           </a:solidFill>
@@ -24433,260 +26009,187 @@
                         </a:defRPr>
                       </a:pPr>
                       <a:r>
-                        <a:t>Industry</a:t>
-                      </a:r>
-                    </a:p>
-                  </a:txBody>
-                  <a:tcPr marL="64008" marR="64008" marT="54864" marB="27432" anchor="t">
-                    <a:lnL w="0">
-                      <a:noFill/>
-                    </a:lnL>
-                    <a:lnR w="0">
-                      <a:noFill/>
-                    </a:lnR>
-                    <a:lnT w="0">
-                      <a:noFill/>
-                    </a:lnT>
-                    <a:lnB w="5080">
-                      <a:solidFill>
-                        <a:srgbClr val="B8B8B8"/>
-                      </a:solidFill>
-                    </a:lnB>
-                    <a:solidFill>
-                      <a:srgbClr val="FFFFFF"/>
-                    </a:solidFill>
-                  </a:tcPr>
-                </a:tc>
-                <a:tc>
-                  <a:txBody>
-                    <a:bodyPr/>
-                    <a:lstStyle/>
-                    <a:p>
-                      <a:pPr>
-                        <a:spcAft>
-                          <a:spcPts val="100"/>
-                        </a:spcAft>
-                        <a:defRPr sz="1050" b="0">
-                          <a:solidFill>
-                            <a:srgbClr val="11151A"/>
-                          </a:solidFill>
-                          <a:latin typeface="Lato"/>
-                        </a:defRPr>
-                      </a:pPr>
-                      <a:r>
-                        <a:t>2.50</a:t>
-                      </a:r>
-                    </a:p>
-                    <a:p>
-                      <a:pPr>
-                        <a:spcAft>
-                          <a:spcPts val="100"/>
-                        </a:spcAft>
-                        <a:defRPr sz="1050" b="0">
-                          <a:solidFill>
-                            <a:srgbClr val="11151A"/>
-                          </a:solidFill>
-                          <a:latin typeface="Lato"/>
-                        </a:defRPr>
-                      </a:pPr>
-                      <a:r>
-                        <a:t>no source</a:t>
-                      </a:r>
-                    </a:p>
-                  </a:txBody>
-                  <a:tcPr marL="64008" marR="64008" marT="54864" marB="27432" anchor="t">
-                    <a:lnL w="0">
-                      <a:noFill/>
-                    </a:lnL>
-                    <a:lnR w="0">
-                      <a:noFill/>
-                    </a:lnR>
-                    <a:lnT w="0">
-                      <a:noFill/>
-                    </a:lnT>
-                    <a:lnB w="5080">
-                      <a:solidFill>
-                        <a:srgbClr val="B8B8B8"/>
-                      </a:solidFill>
-                    </a:lnB>
-                    <a:solidFill>
-                      <a:srgbClr val="FFFFFF"/>
-                    </a:solidFill>
-                  </a:tcPr>
-                </a:tc>
-                <a:tc>
-                  <a:txBody>
-                    <a:bodyPr/>
-                    <a:lstStyle/>
-                    <a:p>
-                      <a:pPr>
-                        <a:spcAft>
-                          <a:spcPts val="100"/>
-                        </a:spcAft>
-                        <a:defRPr sz="1050" b="0">
-                          <a:solidFill>
-                            <a:srgbClr val="11151A"/>
-                          </a:solidFill>
-                          <a:latin typeface="Lato"/>
-                        </a:defRPr>
-                      </a:pPr>
-                      <a:r>
-                        <a:t>1.50 for 2021</a:t>
-                      </a:r>
-                    </a:p>
-                    <a:p>
-                      <a:pPr>
-                        <a:spcAft>
-                          <a:spcPts val="100"/>
-                        </a:spcAft>
-                        <a:defRPr sz="1050" b="0">
-                          <a:solidFill>
-                            <a:srgbClr val="11151A"/>
-                          </a:solidFill>
-                          <a:latin typeface="Lato"/>
-                        </a:defRPr>
-                      </a:pPr>
-                      <a:r>
-                        <a:t>energy balance, industry; mining is 1.29 of it</a:t>
-                      </a:r>
-                    </a:p>
-                  </a:txBody>
-                  <a:tcPr marL="64008" marR="64008" marT="54864" marB="27432" anchor="t">
-                    <a:lnL w="0">
-                      <a:noFill/>
-                    </a:lnL>
-                    <a:lnR w="0">
-                      <a:noFill/>
-                    </a:lnR>
-                    <a:lnT w="0">
-                      <a:noFill/>
-                    </a:lnT>
-                    <a:lnB w="5080">
-                      <a:solidFill>
-                        <a:srgbClr val="B8B8B8"/>
-                      </a:solidFill>
-                    </a:lnB>
-                    <a:solidFill>
-                      <a:srgbClr val="FFFFFF"/>
-                    </a:solidFill>
-                  </a:tcPr>
-                </a:tc>
-                <a:tc>
-                  <a:txBody>
-                    <a:bodyPr/>
-                    <a:lstStyle/>
-                    <a:p>
-                      <a:pPr>
-                        <a:spcAft>
-                          <a:spcPts val="100"/>
-                        </a:spcAft>
-                        <a:defRPr sz="1050" b="0">
-                          <a:solidFill>
-                            <a:srgbClr val="11151A"/>
-                          </a:solidFill>
-                          <a:latin typeface="Lato"/>
-                        </a:defRPr>
-                      </a:pPr>
-                      <a:r>
-                        <a:t>1.32-1.93 over 2012-2021. Mining volume is 7% lower in 2024 than 2021, which would give 1.40</a:t>
-                      </a:r>
-                    </a:p>
-                  </a:txBody>
-                  <a:tcPr marL="64008" marR="64008" marT="54864" marB="27432" anchor="t">
-                    <a:lnL w="0">
-                      <a:noFill/>
-                    </a:lnL>
-                    <a:lnR w="0">
-                      <a:noFill/>
-                    </a:lnR>
-                    <a:lnT w="0">
-                      <a:noFill/>
-                    </a:lnT>
-                    <a:lnB w="5080">
-                      <a:solidFill>
-                        <a:srgbClr val="B8B8B8"/>
-                      </a:solidFill>
-                    </a:lnB>
-                    <a:solidFill>
-                      <a:srgbClr val="FFFFFF"/>
-                    </a:solidFill>
-                  </a:tcPr>
-                </a:tc>
-                <a:tc>
-                  <a:txBody>
-                    <a:bodyPr/>
-                    <a:lstStyle/>
-                    <a:p>
-                      <a:pPr>
-                        <a:spcAft>
-                          <a:spcPts val="100"/>
-                        </a:spcAft>
-                        <a:defRPr sz="1050" b="0">
-                          <a:solidFill>
-                            <a:srgbClr val="11151A"/>
-                          </a:solidFill>
-                          <a:latin typeface="Lato"/>
-                        </a:defRPr>
-                      </a:pPr>
-                      <a:r>
-                        <a:t>1.50</a:t>
-                      </a:r>
-                    </a:p>
-                    <a:p>
-                      <a:pPr>
-                        <a:spcAft>
-                          <a:spcPts val="100"/>
-                        </a:spcAft>
-                        <a:defRPr sz="1050" b="0">
-                          <a:solidFill>
-                            <a:srgbClr val="11151A"/>
-                          </a:solidFill>
-                          <a:latin typeface="Lato"/>
-                        </a:defRPr>
-                      </a:pPr>
-                      <a:r>
-                        <a:t>provisional, about +/-0.3</a:t>
-                      </a:r>
-                    </a:p>
-                  </a:txBody>
-                  <a:tcPr marL="64008" marR="64008" marT="54864" marB="27432" anchor="t">
-                    <a:lnL w="0">
-                      <a:noFill/>
-                    </a:lnL>
-                    <a:lnR w="0">
-                      <a:noFill/>
-                    </a:lnR>
-                    <a:lnT w="0">
-                      <a:noFill/>
-                    </a:lnT>
-                    <a:lnB w="5080">
-                      <a:solidFill>
-                        <a:srgbClr val="B8B8B8"/>
-                      </a:solidFill>
-                    </a:lnB>
-                    <a:solidFill>
-                      <a:srgbClr val="FFFFFF"/>
-                    </a:solidFill>
-                  </a:tcPr>
-                </a:tc>
-                <a:tc>
-                  <a:txBody>
-                    <a:bodyPr/>
-                    <a:lstStyle/>
-                    <a:p>
-                      <a:pPr>
-                        <a:spcAft>
-                          <a:spcPts val="100"/>
-                        </a:spcAft>
-                        <a:defRPr sz="1050" b="0">
-                          <a:solidFill>
-                            <a:srgbClr val="11151A"/>
-                          </a:solidFill>
-                          <a:latin typeface="Lato"/>
-                        </a:defRPr>
-                      </a:pPr>
-                      <a:r>
-                        <a:t>-0.99; -1.06 (high), -1.00 (low)</a:t>
+                        <a:t>Private backup generation</a:t>
+                      </a:r>
+                    </a:p>
+                    <a:p>
+                      <a:pPr>
+                        <a:spcAft>
+                          <a:spcPts val="100"/>
+                        </a:spcAft>
+                        <a:defRPr sz="950" b="1">
+                          <a:solidFill>
+                            <a:srgbClr val="0A2373"/>
+                          </a:solidFill>
+                          <a:latin typeface="Lato"/>
+                        </a:defRPr>
+                      </a:pPr>
+                      <a:r>
+                        <a:t>bn litres a year</a:t>
+                      </a:r>
+                    </a:p>
+                  </a:txBody>
+                  <a:tcPr marL="64008" marR="64008" marT="54864" marB="27432" anchor="t">
+                    <a:lnL w="0">
+                      <a:noFill/>
+                    </a:lnL>
+                    <a:lnR w="0">
+                      <a:noFill/>
+                    </a:lnR>
+                    <a:lnT w="0">
+                      <a:noFill/>
+                    </a:lnT>
+                    <a:lnB w="5080">
+                      <a:solidFill>
+                        <a:srgbClr val="B8B8B8"/>
+                      </a:solidFill>
+                    </a:lnB>
+                    <a:solidFill>
+                      <a:srgbClr val="FFFFFF"/>
+                    </a:solidFill>
+                  </a:tcPr>
+                </a:tc>
+                <a:tc>
+                  <a:txBody>
+                    <a:bodyPr/>
+                    <a:lstStyle/>
+                    <a:p>
+                      <a:pPr>
+                        <a:spcAft>
+                          <a:spcPts val="100"/>
+                        </a:spcAft>
+                        <a:defRPr sz="950" b="0">
+                          <a:solidFill>
+                            <a:srgbClr val="11151A"/>
+                          </a:solidFill>
+                          <a:latin typeface="Lato"/>
+                        </a:defRPr>
+                      </a:pPr>
+                      <a:r>
+                        <a:t>Not measured</a:t>
+                      </a:r>
+                    </a:p>
+                  </a:txBody>
+                  <a:tcPr marL="64008" marR="64008" marT="54864" marB="27432" anchor="t">
+                    <a:lnL w="0">
+                      <a:noFill/>
+                    </a:lnL>
+                    <a:lnR w="0">
+                      <a:noFill/>
+                    </a:lnR>
+                    <a:lnT w="0">
+                      <a:noFill/>
+                    </a:lnT>
+                    <a:lnB w="5080">
+                      <a:solidFill>
+                        <a:srgbClr val="B8B8B8"/>
+                      </a:solidFill>
+                    </a:lnB>
+                    <a:solidFill>
+                      <a:srgbClr val="FFFFFF"/>
+                    </a:solidFill>
+                  </a:tcPr>
+                </a:tc>
+                <a:tc>
+                  <a:txBody>
+                    <a:bodyPr/>
+                    <a:lstStyle/>
+                    <a:p>
+                      <a:pPr>
+                        <a:spcAft>
+                          <a:spcPts val="100"/>
+                        </a:spcAft>
+                        <a:defRPr sz="950" b="0">
+                          <a:solidFill>
+                            <a:srgbClr val="11151A"/>
+                          </a:solidFill>
+                          <a:latin typeface="Lato"/>
+                        </a:defRPr>
+                      </a:pPr>
+                      <a:r>
+                        <a:t>0 / 0 / 0.5</a:t>
+                      </a:r>
+                    </a:p>
+                  </a:txBody>
+                  <a:tcPr marL="64008" marR="64008" marT="54864" marB="27432" anchor="t">
+                    <a:lnL w="0">
+                      <a:noFill/>
+                    </a:lnL>
+                    <a:lnR w="0">
+                      <a:noFill/>
+                    </a:lnR>
+                    <a:lnT w="0">
+                      <a:noFill/>
+                    </a:lnT>
+                    <a:lnB w="5080">
+                      <a:solidFill>
+                        <a:srgbClr val="B8B8B8"/>
+                      </a:solidFill>
+                    </a:lnB>
+                    <a:solidFill>
+                      <a:srgbClr val="FFFFFF"/>
+                    </a:solidFill>
+                  </a:tcPr>
+                </a:tc>
+                <a:tc>
+                  <a:txBody>
+                    <a:bodyPr/>
+                    <a:lstStyle/>
+                    <a:p>
+                      <a:pPr>
+                        <a:spcAft>
+                          <a:spcPts val="100"/>
+                        </a:spcAft>
+                        <a:defRPr sz="950" b="0">
+                          <a:solidFill>
+                            <a:srgbClr val="11151A"/>
+                          </a:solidFill>
+                          <a:latin typeface="Lato"/>
+                        </a:defRPr>
+                      </a:pPr>
+                      <a:r>
+                        <a:t>0 / 0 / 0.5</a:t>
+                      </a:r>
+                    </a:p>
+                  </a:txBody>
+                  <a:tcPr marL="64008" marR="64008" marT="54864" marB="27432" anchor="t">
+                    <a:lnL w="0">
+                      <a:noFill/>
+                    </a:lnL>
+                    <a:lnR w="0">
+                      <a:noFill/>
+                    </a:lnR>
+                    <a:lnT w="0">
+                      <a:noFill/>
+                    </a:lnT>
+                    <a:lnB w="5080">
+                      <a:solidFill>
+                        <a:srgbClr val="B8B8B8"/>
+                      </a:solidFill>
+                    </a:lnB>
+                    <a:solidFill>
+                      <a:srgbClr val="FFFFFF"/>
+                    </a:solidFill>
+                  </a:tcPr>
+                </a:tc>
+                <a:tc>
+                  <a:txBody>
+                    <a:bodyPr/>
+                    <a:lstStyle/>
+                    <a:p>
+                      <a:pPr>
+                        <a:spcAft>
+                          <a:spcPts val="100"/>
+                        </a:spcAft>
+                        <a:defRPr sz="950" b="0">
+                          <a:solidFill>
+                            <a:srgbClr val="11151A"/>
+                          </a:solidFill>
+                          <a:latin typeface="Lato"/>
+                        </a:defRPr>
+                      </a:pPr>
+                      <a:r>
+                        <a:t>Diesel sales fell 1.2 bn litres in 2024 as load-shedding ended; grid turbines explain about 0.7. Indicative.</a:t>
                       </a:r>
                     </a:p>
                   </a:txBody>
@@ -24711,17 +26214,17 @@
                   </a:tcPr>
                 </a:tc>
               </a:tr>
-              <a:tr h="662940">
-                <a:tc>
-                  <a:txBody>
-                    <a:bodyPr/>
-                    <a:lstStyle/>
-                    <a:p>
-                      <a:pPr>
-                        <a:spcAft>
-                          <a:spcPts val="100"/>
-                        </a:spcAft>
-                        <a:defRPr sz="1050" b="1">
+              <a:tr h="525780">
+                <a:tc>
+                  <a:txBody>
+                    <a:bodyPr/>
+                    <a:lstStyle/>
+                    <a:p>
+                      <a:pPr>
+                        <a:spcAft>
+                          <a:spcPts val="100"/>
+                        </a:spcAft>
+                        <a:defRPr sz="950" b="1">
                           <a:solidFill>
                             <a:srgbClr val="0A2373"/>
                           </a:solidFill>
@@ -24729,209 +26232,1159 @@
                         </a:defRPr>
                       </a:pPr>
                       <a:r>
-                        <a:t>Both</a:t>
-                      </a:r>
-                    </a:p>
-                  </a:txBody>
-                  <a:tcPr marL="64008" marR="64008" marT="54864" marB="27432" anchor="t">
-                    <a:lnL w="0">
-                      <a:noFill/>
-                    </a:lnL>
-                    <a:lnR w="0">
-                      <a:noFill/>
-                    </a:lnR>
-                    <a:lnT w="0">
-                      <a:noFill/>
-                    </a:lnT>
-                    <a:lnB w="5080">
-                      <a:solidFill>
-                        <a:srgbClr val="B8B8B8"/>
-                      </a:solidFill>
-                    </a:lnB>
-                    <a:solidFill>
-                      <a:srgbClr val="FFFFFF"/>
-                    </a:solidFill>
-                  </a:tcPr>
-                </a:tc>
-                <a:tc>
-                  <a:txBody>
-                    <a:bodyPr/>
-                    <a:lstStyle/>
-                    <a:p>
-                      <a:pPr>
-                        <a:spcAft>
-                          <a:spcPts val="100"/>
-                        </a:spcAft>
-                        <a:defRPr sz="1050" b="0">
-                          <a:solidFill>
-                            <a:srgbClr val="11151A"/>
-                          </a:solidFill>
-                          <a:latin typeface="Lato"/>
-                        </a:defRPr>
-                      </a:pPr>
-                      <a:r>
-                        <a:t>3.20</a:t>
-                      </a:r>
-                    </a:p>
-                  </a:txBody>
-                  <a:tcPr marL="64008" marR="64008" marT="54864" marB="27432" anchor="t">
-                    <a:lnL w="0">
-                      <a:noFill/>
-                    </a:lnL>
-                    <a:lnR w="0">
-                      <a:noFill/>
-                    </a:lnR>
-                    <a:lnT w="0">
-                      <a:noFill/>
-                    </a:lnT>
-                    <a:lnB w="5080">
-                      <a:solidFill>
-                        <a:srgbClr val="B8B8B8"/>
-                      </a:solidFill>
-                    </a:lnB>
-                    <a:solidFill>
-                      <a:srgbClr val="FFFFFF"/>
-                    </a:solidFill>
-                  </a:tcPr>
-                </a:tc>
-                <a:tc>
-                  <a:txBody>
-                    <a:bodyPr/>
-                    <a:lstStyle/>
-                    <a:p>
-                      <a:pPr>
-                        <a:spcAft>
-                          <a:spcPts val="100"/>
-                        </a:spcAft>
-                        <a:defRPr sz="1050" b="0">
-                          <a:solidFill>
-                            <a:srgbClr val="11151A"/>
-                          </a:solidFill>
-                          <a:latin typeface="Lato"/>
-                        </a:defRPr>
-                      </a:pPr>
-                      <a:r>
-                        <a:t>2.56</a:t>
-                      </a:r>
-                    </a:p>
-                  </a:txBody>
-                  <a:tcPr marL="64008" marR="64008" marT="54864" marB="27432" anchor="t">
-                    <a:lnL w="0">
-                      <a:noFill/>
-                    </a:lnL>
-                    <a:lnR w="0">
-                      <a:noFill/>
-                    </a:lnR>
-                    <a:lnT w="0">
-                      <a:noFill/>
-                    </a:lnT>
-                    <a:lnB w="5080">
-                      <a:solidFill>
-                        <a:srgbClr val="B8B8B8"/>
-                      </a:solidFill>
-                    </a:lnB>
-                    <a:solidFill>
-                      <a:srgbClr val="FFFFFF"/>
-                    </a:solidFill>
-                  </a:tcPr>
-                </a:tc>
-                <a:tc>
-                  <a:txBody>
-                    <a:bodyPr/>
-                    <a:lstStyle/>
-                    <a:p>
-                      <a:pPr>
-                        <a:spcAft>
-                          <a:spcPts val="100"/>
-                        </a:spcAft>
-                        <a:defRPr sz="1050" b="0">
-                          <a:solidFill>
-                            <a:srgbClr val="11151A"/>
-                          </a:solidFill>
-                          <a:latin typeface="Lato"/>
-                        </a:defRPr>
-                      </a:pPr>
-                    </a:p>
-                  </a:txBody>
-                  <a:tcPr marL="64008" marR="64008" marT="54864" marB="27432" anchor="t">
-                    <a:lnL w="0">
-                      <a:noFill/>
-                    </a:lnL>
-                    <a:lnR w="0">
-                      <a:noFill/>
-                    </a:lnR>
-                    <a:lnT w="0">
-                      <a:noFill/>
-                    </a:lnT>
-                    <a:lnB w="5080">
-                      <a:solidFill>
-                        <a:srgbClr val="B8B8B8"/>
-                      </a:solidFill>
-                    </a:lnB>
-                    <a:solidFill>
-                      <a:srgbClr val="FFFFFF"/>
-                    </a:solidFill>
-                  </a:tcPr>
-                </a:tc>
-                <a:tc>
-                  <a:txBody>
-                    <a:bodyPr/>
-                    <a:lstStyle/>
-                    <a:p>
-                      <a:pPr>
-                        <a:spcAft>
-                          <a:spcPts val="100"/>
-                        </a:spcAft>
-                        <a:defRPr sz="1050" b="0">
-                          <a:solidFill>
-                            <a:srgbClr val="11151A"/>
-                          </a:solidFill>
-                          <a:latin typeface="Lato"/>
-                        </a:defRPr>
-                      </a:pPr>
-                      <a:r>
-                        <a:t>2.56</a:t>
-                      </a:r>
-                    </a:p>
-                  </a:txBody>
-                  <a:tcPr marL="64008" marR="64008" marT="54864" marB="27432" anchor="t">
-                    <a:lnL w="0">
-                      <a:noFill/>
-                    </a:lnL>
-                    <a:lnR w="0">
-                      <a:noFill/>
-                    </a:lnR>
-                    <a:lnT w="0">
-                      <a:noFill/>
-                    </a:lnT>
-                    <a:lnB w="5080">
-                      <a:solidFill>
-                        <a:srgbClr val="B8B8B8"/>
-                      </a:solidFill>
-                    </a:lnB>
-                    <a:solidFill>
-                      <a:srgbClr val="FFFFFF"/>
-                    </a:solidFill>
-                  </a:tcPr>
-                </a:tc>
-                <a:tc>
-                  <a:txBody>
-                    <a:bodyPr/>
-                    <a:lstStyle/>
-                    <a:p>
-                      <a:pPr>
-                        <a:spcAft>
-                          <a:spcPts val="100"/>
-                        </a:spcAft>
-                        <a:defRPr sz="1050" b="0">
-                          <a:solidFill>
-                            <a:srgbClr val="11151A"/>
-                          </a:solidFill>
-                          <a:latin typeface="Lato"/>
-                        </a:defRPr>
-                      </a:pPr>
-                      <a:r>
-                        <a:t>-0.63; -0.69 (high), -0.64 (low)</a:t>
+                        <a:t>Real petrol price</a:t>
+                      </a:r>
+                    </a:p>
+                    <a:p>
+                      <a:pPr>
+                        <a:spcAft>
+                          <a:spcPts val="100"/>
+                        </a:spcAft>
+                        <a:defRPr sz="950" b="1">
+                          <a:solidFill>
+                            <a:srgbClr val="0A2373"/>
+                          </a:solidFill>
+                          <a:latin typeface="Lato"/>
+                        </a:defRPr>
+                      </a:pPr>
+                      <a:r>
+                        <a:t>2024 = 100</a:t>
+                      </a:r>
+                    </a:p>
+                  </a:txBody>
+                  <a:tcPr marL="64008" marR="64008" marT="54864" marB="27432" anchor="t">
+                    <a:lnL w="0">
+                      <a:noFill/>
+                    </a:lnL>
+                    <a:lnR w="0">
+                      <a:noFill/>
+                    </a:lnR>
+                    <a:lnT w="0">
+                      <a:noFill/>
+                    </a:lnT>
+                    <a:lnB w="5080">
+                      <a:solidFill>
+                        <a:srgbClr val="B8B8B8"/>
+                      </a:solidFill>
+                    </a:lnB>
+                    <a:solidFill>
+                      <a:srgbClr val="FFFFFF"/>
+                    </a:solidFill>
+                  </a:tcPr>
+                </a:tc>
+                <a:tc>
+                  <a:txBody>
+                    <a:bodyPr/>
+                    <a:lstStyle/>
+                    <a:p>
+                      <a:pPr>
+                        <a:spcAft>
+                          <a:spcPts val="100"/>
+                        </a:spcAft>
+                        <a:defRPr sz="950" b="0">
+                          <a:solidFill>
+                            <a:srgbClr val="11151A"/>
+                          </a:solidFill>
+                          <a:latin typeface="Lato"/>
+                        </a:defRPr>
+                      </a:pPr>
+                      <a:r>
+                        <a:t>100</a:t>
+                      </a:r>
+                    </a:p>
+                    <a:p>
+                      <a:pPr>
+                        <a:spcAft>
+                          <a:spcPts val="100"/>
+                        </a:spcAft>
+                        <a:defRPr sz="950" b="0">
+                          <a:solidFill>
+                            <a:srgbClr val="11151A"/>
+                          </a:solidFill>
+                          <a:latin typeface="Lato"/>
+                        </a:defRPr>
+                      </a:pPr>
+                      <a:r>
+                        <a:t>retail, inland</a:t>
+                      </a:r>
+                    </a:p>
+                  </a:txBody>
+                  <a:tcPr marL="64008" marR="64008" marT="54864" marB="27432" anchor="t">
+                    <a:lnL w="0">
+                      <a:noFill/>
+                    </a:lnL>
+                    <a:lnR w="0">
+                      <a:noFill/>
+                    </a:lnR>
+                    <a:lnT w="0">
+                      <a:noFill/>
+                    </a:lnT>
+                    <a:lnB w="5080">
+                      <a:solidFill>
+                        <a:srgbClr val="B8B8B8"/>
+                      </a:solidFill>
+                    </a:lnB>
+                    <a:solidFill>
+                      <a:srgbClr val="FFFFFF"/>
+                    </a:solidFill>
+                  </a:tcPr>
+                </a:tc>
+                <a:tc>
+                  <a:txBody>
+                    <a:bodyPr/>
+                    <a:lstStyle/>
+                    <a:p>
+                      <a:pPr>
+                        <a:spcAft>
+                          <a:spcPts val="100"/>
+                        </a:spcAft>
+                        <a:defRPr sz="950" b="0">
+                          <a:solidFill>
+                            <a:srgbClr val="11151A"/>
+                          </a:solidFill>
+                          <a:latin typeface="Lato"/>
+                        </a:defRPr>
+                      </a:pPr>
+                      <a:r>
+                        <a:t>80 / 100 / 120</a:t>
+                      </a:r>
+                    </a:p>
+                  </a:txBody>
+                  <a:tcPr marL="64008" marR="64008" marT="54864" marB="27432" anchor="t">
+                    <a:lnL w="0">
+                      <a:noFill/>
+                    </a:lnL>
+                    <a:lnR w="0">
+                      <a:noFill/>
+                    </a:lnR>
+                    <a:lnT w="0">
+                      <a:noFill/>
+                    </a:lnT>
+                    <a:lnB w="5080">
+                      <a:solidFill>
+                        <a:srgbClr val="B8B8B8"/>
+                      </a:solidFill>
+                    </a:lnB>
+                    <a:solidFill>
+                      <a:srgbClr val="FFFFFF"/>
+                    </a:solidFill>
+                  </a:tcPr>
+                </a:tc>
+                <a:tc>
+                  <a:txBody>
+                    <a:bodyPr/>
+                    <a:lstStyle/>
+                    <a:p>
+                      <a:pPr>
+                        <a:spcAft>
+                          <a:spcPts val="100"/>
+                        </a:spcAft>
+                        <a:defRPr sz="950" b="0">
+                          <a:solidFill>
+                            <a:srgbClr val="11151A"/>
+                          </a:solidFill>
+                          <a:latin typeface="Lato"/>
+                        </a:defRPr>
+                      </a:pPr>
+                      <a:r>
+                        <a:t>80 / 100 / 120</a:t>
+                      </a:r>
+                    </a:p>
+                  </a:txBody>
+                  <a:tcPr marL="64008" marR="64008" marT="54864" marB="27432" anchor="t">
+                    <a:lnL w="0">
+                      <a:noFill/>
+                    </a:lnL>
+                    <a:lnR w="0">
+                      <a:noFill/>
+                    </a:lnR>
+                    <a:lnT w="0">
+                      <a:noFill/>
+                    </a:lnT>
+                    <a:lnB w="5080">
+                      <a:solidFill>
+                        <a:srgbClr val="B8B8B8"/>
+                      </a:solidFill>
+                    </a:lnB>
+                    <a:solidFill>
+                      <a:srgbClr val="FFFFFF"/>
+                    </a:solidFill>
+                  </a:tcPr>
+                </a:tc>
+                <a:tc>
+                  <a:txBody>
+                    <a:bodyPr/>
+                    <a:lstStyle/>
+                    <a:p>
+                      <a:pPr>
+                        <a:spcAft>
+                          <a:spcPts val="100"/>
+                        </a:spcAft>
+                        <a:defRPr sz="950" b="0">
+                          <a:solidFill>
+                            <a:srgbClr val="11151A"/>
+                          </a:solidFill>
+                          <a:latin typeface="Lato"/>
+                        </a:defRPr>
+                      </a:pPr>
+                      <a:r>
+                        <a:t>79-109 in 2011-2025, 121 in October 2026. Boshoff (2012): response -0.5, so the high case is about -10%.</a:t>
+                      </a:r>
+                    </a:p>
+                  </a:txBody>
+                  <a:tcPr marL="64008" marR="64008" marT="54864" marB="27432" anchor="t">
+                    <a:lnL w="0">
+                      <a:noFill/>
+                    </a:lnL>
+                    <a:lnR w="0">
+                      <a:noFill/>
+                    </a:lnR>
+                    <a:lnT w="0">
+                      <a:noFill/>
+                    </a:lnT>
+                    <a:lnB w="5080">
+                      <a:solidFill>
+                        <a:srgbClr val="B8B8B8"/>
+                      </a:solidFill>
+                    </a:lnB>
+                    <a:solidFill>
+                      <a:srgbClr val="FFFFFF"/>
+                    </a:solidFill>
+                  </a:tcPr>
+                </a:tc>
+              </a:tr>
+              <a:tr h="525780">
+                <a:tc>
+                  <a:txBody>
+                    <a:bodyPr/>
+                    <a:lstStyle/>
+                    <a:p>
+                      <a:pPr>
+                        <a:spcAft>
+                          <a:spcPts val="100"/>
+                        </a:spcAft>
+                        <a:defRPr sz="950" b="1">
+                          <a:solidFill>
+                            <a:srgbClr val="0A2373"/>
+                          </a:solidFill>
+                          <a:latin typeface="Lato"/>
+                        </a:defRPr>
+                      </a:pPr>
+                      <a:r>
+                        <a:t>Plug-in hybrid share</a:t>
+                      </a:r>
+                    </a:p>
+                    <a:p>
+                      <a:pPr>
+                        <a:spcAft>
+                          <a:spcPts val="100"/>
+                        </a:spcAft>
+                        <a:defRPr sz="950" b="1">
+                          <a:solidFill>
+                            <a:srgbClr val="0A2373"/>
+                          </a:solidFill>
+                          <a:latin typeface="Lato"/>
+                        </a:defRPr>
+                      </a:pPr>
+                      <a:r>
+                        <a:t>% of new sales</a:t>
+                      </a:r>
+                    </a:p>
+                  </a:txBody>
+                  <a:tcPr marL="64008" marR="64008" marT="54864" marB="27432" anchor="t">
+                    <a:lnL w="0">
+                      <a:noFill/>
+                    </a:lnL>
+                    <a:lnR w="0">
+                      <a:noFill/>
+                    </a:lnR>
+                    <a:lnT w="0">
+                      <a:noFill/>
+                    </a:lnT>
+                    <a:lnB w="5080">
+                      <a:solidFill>
+                        <a:srgbClr val="B8B8B8"/>
+                      </a:solidFill>
+                    </a:lnB>
+                    <a:solidFill>
+                      <a:srgbClr val="FFFFFF"/>
+                    </a:solidFill>
+                  </a:tcPr>
+                </a:tc>
+                <a:tc>
+                  <a:txBody>
+                    <a:bodyPr/>
+                    <a:lstStyle/>
+                    <a:p>
+                      <a:pPr>
+                        <a:spcAft>
+                          <a:spcPts val="100"/>
+                        </a:spcAft>
+                        <a:defRPr sz="950" b="0">
+                          <a:solidFill>
+                            <a:srgbClr val="11151A"/>
+                          </a:solidFill>
+                          <a:latin typeface="Lato"/>
+                        </a:defRPr>
+                      </a:pPr>
+                      <a:r>
+                        <a:t>0.5</a:t>
+                      </a:r>
+                    </a:p>
+                    <a:p>
+                      <a:pPr>
+                        <a:spcAft>
+                          <a:spcPts val="100"/>
+                        </a:spcAft>
+                        <a:defRPr sz="950" b="0">
+                          <a:solidFill>
+                            <a:srgbClr val="11151A"/>
+                          </a:solidFill>
+                          <a:latin typeface="Lato"/>
+                        </a:defRPr>
+                      </a:pPr>
+                      <a:r>
+                        <a:t>2,810 sold, 2025</a:t>
+                      </a:r>
+                    </a:p>
+                  </a:txBody>
+                  <a:tcPr marL="64008" marR="64008" marT="54864" marB="27432" anchor="t">
+                    <a:lnL w="0">
+                      <a:noFill/>
+                    </a:lnL>
+                    <a:lnR w="0">
+                      <a:noFill/>
+                    </a:lnR>
+                    <a:lnT w="0">
+                      <a:noFill/>
+                    </a:lnT>
+                    <a:lnB w="5080">
+                      <a:solidFill>
+                        <a:srgbClr val="B8B8B8"/>
+                      </a:solidFill>
+                    </a:lnB>
+                    <a:solidFill>
+                      <a:srgbClr val="FFFFFF"/>
+                    </a:solidFill>
+                  </a:tcPr>
+                </a:tc>
+                <a:tc>
+                  <a:txBody>
+                    <a:bodyPr/>
+                    <a:lstStyle/>
+                    <a:p>
+                      <a:pPr>
+                        <a:spcAft>
+                          <a:spcPts val="100"/>
+                        </a:spcAft>
+                        <a:defRPr sz="950" b="0">
+                          <a:solidFill>
+                            <a:srgbClr val="11151A"/>
+                          </a:solidFill>
+                          <a:latin typeface="Lato"/>
+                        </a:defRPr>
+                      </a:pPr>
+                      <a:r>
+                        <a:t>0.5 / 1.2 / 2.1</a:t>
+                      </a:r>
+                    </a:p>
+                  </a:txBody>
+                  <a:tcPr marL="64008" marR="64008" marT="54864" marB="27432" anchor="t">
+                    <a:lnL w="0">
+                      <a:noFill/>
+                    </a:lnL>
+                    <a:lnR w="0">
+                      <a:noFill/>
+                    </a:lnR>
+                    <a:lnT w="0">
+                      <a:noFill/>
+                    </a:lnT>
+                    <a:lnB w="5080">
+                      <a:solidFill>
+                        <a:srgbClr val="B8B8B8"/>
+                      </a:solidFill>
+                    </a:lnB>
+                    <a:solidFill>
+                      <a:srgbClr val="FFFFFF"/>
+                    </a:solidFill>
+                  </a:tcPr>
+                </a:tc>
+                <a:tc>
+                  <a:txBody>
+                    <a:bodyPr/>
+                    <a:lstStyle/>
+                    <a:p>
+                      <a:pPr>
+                        <a:spcAft>
+                          <a:spcPts val="100"/>
+                        </a:spcAft>
+                        <a:defRPr sz="950" b="0">
+                          <a:solidFill>
+                            <a:srgbClr val="11151A"/>
+                          </a:solidFill>
+                          <a:latin typeface="Lato"/>
+                        </a:defRPr>
+                      </a:pPr>
+                      <a:r>
+                        <a:t>0.5 / 2 / 3.7</a:t>
+                      </a:r>
+                    </a:p>
+                  </a:txBody>
+                  <a:tcPr marL="64008" marR="64008" marT="54864" marB="27432" anchor="t">
+                    <a:lnL w="0">
+                      <a:noFill/>
+                    </a:lnL>
+                    <a:lnR w="0">
+                      <a:noFill/>
+                    </a:lnR>
+                    <a:lnT w="0">
+                      <a:noFill/>
+                    </a:lnT>
+                    <a:lnB w="5080">
+                      <a:solidFill>
+                        <a:srgbClr val="B8B8B8"/>
+                      </a:solidFill>
+                    </a:lnB>
+                    <a:solidFill>
+                      <a:srgbClr val="FFFFFF"/>
+                    </a:solidFill>
+                  </a:tcPr>
+                </a:tc>
+                <a:tc>
+                  <a:txBody>
+                    <a:bodyPr/>
+                    <a:lstStyle/>
+                    <a:p>
+                      <a:pPr>
+                        <a:spcAft>
+                          <a:spcPts val="100"/>
+                        </a:spcAft>
+                        <a:defRPr sz="950" b="0">
+                          <a:solidFill>
+                            <a:srgbClr val="11151A"/>
+                          </a:solidFill>
+                          <a:latin typeface="Lato"/>
+                        </a:defRPr>
+                      </a:pPr>
+                      <a:r>
+                        <a:t>naamsa: 0.02% in 2022 to 0.47% in 2025. Extrapolates South Africa's own sales; not a forecast.</a:t>
+                      </a:r>
+                    </a:p>
+                  </a:txBody>
+                  <a:tcPr marL="64008" marR="64008" marT="54864" marB="27432" anchor="t">
+                    <a:lnL w="0">
+                      <a:noFill/>
+                    </a:lnL>
+                    <a:lnR w="0">
+                      <a:noFill/>
+                    </a:lnR>
+                    <a:lnT w="0">
+                      <a:noFill/>
+                    </a:lnT>
+                    <a:lnB w="5080">
+                      <a:solidFill>
+                        <a:srgbClr val="B8B8B8"/>
+                      </a:solidFill>
+                    </a:lnB>
+                    <a:solidFill>
+                      <a:srgbClr val="FFFFFF"/>
+                    </a:solidFill>
+                  </a:tcPr>
+                </a:tc>
+              </a:tr>
+              <a:tr h="525780">
+                <a:tc>
+                  <a:txBody>
+                    <a:bodyPr/>
+                    <a:lstStyle/>
+                    <a:p>
+                      <a:pPr>
+                        <a:spcAft>
+                          <a:spcPts val="100"/>
+                        </a:spcAft>
+                        <a:defRPr sz="950" b="1">
+                          <a:solidFill>
+                            <a:srgbClr val="0A2373"/>
+                          </a:solidFill>
+                          <a:latin typeface="Lato"/>
+                        </a:defRPr>
+                      </a:pPr>
+                      <a:r>
+                        <a:t>Conventional hybrid share</a:t>
+                      </a:r>
+                    </a:p>
+                    <a:p>
+                      <a:pPr>
+                        <a:spcAft>
+                          <a:spcPts val="100"/>
+                        </a:spcAft>
+                        <a:defRPr sz="950" b="1">
+                          <a:solidFill>
+                            <a:srgbClr val="0A2373"/>
+                          </a:solidFill>
+                          <a:latin typeface="Lato"/>
+                        </a:defRPr>
+                      </a:pPr>
+                      <a:r>
+                        <a:t>% of new sales</a:t>
+                      </a:r>
+                    </a:p>
+                  </a:txBody>
+                  <a:tcPr marL="64008" marR="64008" marT="54864" marB="27432" anchor="t">
+                    <a:lnL w="0">
+                      <a:noFill/>
+                    </a:lnL>
+                    <a:lnR w="0">
+                      <a:noFill/>
+                    </a:lnR>
+                    <a:lnT w="0">
+                      <a:noFill/>
+                    </a:lnT>
+                    <a:lnB w="5080">
+                      <a:solidFill>
+                        <a:srgbClr val="B8B8B8"/>
+                      </a:solidFill>
+                    </a:lnB>
+                    <a:solidFill>
+                      <a:srgbClr val="FFFFFF"/>
+                    </a:solidFill>
+                  </a:tcPr>
+                </a:tc>
+                <a:tc>
+                  <a:txBody>
+                    <a:bodyPr/>
+                    <a:lstStyle/>
+                    <a:p>
+                      <a:pPr>
+                        <a:spcAft>
+                          <a:spcPts val="100"/>
+                        </a:spcAft>
+                        <a:defRPr sz="950" b="0">
+                          <a:solidFill>
+                            <a:srgbClr val="11151A"/>
+                          </a:solidFill>
+                          <a:latin typeface="Lato"/>
+                        </a:defRPr>
+                      </a:pPr>
+                      <a:r>
+                        <a:t>2.1</a:t>
+                      </a:r>
+                    </a:p>
+                    <a:p>
+                      <a:pPr>
+                        <a:spcAft>
+                          <a:spcPts val="100"/>
+                        </a:spcAft>
+                        <a:defRPr sz="950" b="0">
+                          <a:solidFill>
+                            <a:srgbClr val="11151A"/>
+                          </a:solidFill>
+                          <a:latin typeface="Lato"/>
+                        </a:defRPr>
+                      </a:pPr>
+                      <a:r>
+                        <a:t>12,818 sold, 2025</a:t>
+                      </a:r>
+                    </a:p>
+                  </a:txBody>
+                  <a:tcPr marL="64008" marR="64008" marT="54864" marB="27432" anchor="t">
+                    <a:lnL w="0">
+                      <a:noFill/>
+                    </a:lnL>
+                    <a:lnR w="0">
+                      <a:noFill/>
+                    </a:lnR>
+                    <a:lnT w="0">
+                      <a:noFill/>
+                    </a:lnT>
+                    <a:lnB w="5080">
+                      <a:solidFill>
+                        <a:srgbClr val="B8B8B8"/>
+                      </a:solidFill>
+                    </a:lnB>
+                    <a:solidFill>
+                      <a:srgbClr val="FFFFFF"/>
+                    </a:solidFill>
+                  </a:tcPr>
+                </a:tc>
+                <a:tc>
+                  <a:txBody>
+                    <a:bodyPr/>
+                    <a:lstStyle/>
+                    <a:p>
+                      <a:pPr>
+                        <a:spcAft>
+                          <a:spcPts val="100"/>
+                        </a:spcAft>
+                        <a:defRPr sz="950" b="0">
+                          <a:solidFill>
+                            <a:srgbClr val="11151A"/>
+                          </a:solidFill>
+                          <a:latin typeface="Lato"/>
+                        </a:defRPr>
+                      </a:pPr>
+                      <a:r>
+                        <a:t>2.1 / 4.4 / 6.7</a:t>
+                      </a:r>
+                    </a:p>
+                  </a:txBody>
+                  <a:tcPr marL="64008" marR="64008" marT="54864" marB="27432" anchor="t">
+                    <a:lnL w="0">
+                      <a:noFill/>
+                    </a:lnL>
+                    <a:lnR w="0">
+                      <a:noFill/>
+                    </a:lnR>
+                    <a:lnT w="0">
+                      <a:noFill/>
+                    </a:lnT>
+                    <a:lnB w="5080">
+                      <a:solidFill>
+                        <a:srgbClr val="B8B8B8"/>
+                      </a:solidFill>
+                    </a:lnB>
+                    <a:solidFill>
+                      <a:srgbClr val="FFFFFF"/>
+                    </a:solidFill>
+                  </a:tcPr>
+                </a:tc>
+                <a:tc>
+                  <a:txBody>
+                    <a:bodyPr/>
+                    <a:lstStyle/>
+                    <a:p>
+                      <a:pPr>
+                        <a:spcAft>
+                          <a:spcPts val="100"/>
+                        </a:spcAft>
+                        <a:defRPr sz="950" b="0">
+                          <a:solidFill>
+                            <a:srgbClr val="11151A"/>
+                          </a:solidFill>
+                          <a:latin typeface="Lato"/>
+                        </a:defRPr>
+                      </a:pPr>
+                      <a:r>
+                        <a:t>2.1 / 6.7 / 11.3</a:t>
+                      </a:r>
+                    </a:p>
+                  </a:txBody>
+                  <a:tcPr marL="64008" marR="64008" marT="54864" marB="27432" anchor="t">
+                    <a:lnL w="0">
+                      <a:noFill/>
+                    </a:lnL>
+                    <a:lnR w="0">
+                      <a:noFill/>
+                    </a:lnR>
+                    <a:lnT w="0">
+                      <a:noFill/>
+                    </a:lnT>
+                    <a:lnB w="5080">
+                      <a:solidFill>
+                        <a:srgbClr val="B8B8B8"/>
+                      </a:solidFill>
+                    </a:lnB>
+                    <a:solidFill>
+                      <a:srgbClr val="FFFFFF"/>
+                    </a:solidFill>
+                  </a:tcPr>
+                </a:tc>
+                <a:tc>
+                  <a:txBody>
+                    <a:bodyPr/>
+                    <a:lstStyle/>
+                    <a:p>
+                      <a:pPr>
+                        <a:spcAft>
+                          <a:spcPts val="100"/>
+                        </a:spcAft>
+                        <a:defRPr sz="950" b="0">
+                          <a:solidFill>
+                            <a:srgbClr val="11151A"/>
+                          </a:solidFill>
+                          <a:latin typeface="Lato"/>
+                        </a:defRPr>
+                      </a:pPr>
+                      <a:r>
+                        <a:t>naamsa: 0.77% in 2022 to 2.15% in 2025. Extrapolates South Africa's own sales; not a forecast.</a:t>
+                      </a:r>
+                    </a:p>
+                  </a:txBody>
+                  <a:tcPr marL="64008" marR="64008" marT="54864" marB="27432" anchor="t">
+                    <a:lnL w="0">
+                      <a:noFill/>
+                    </a:lnL>
+                    <a:lnR w="0">
+                      <a:noFill/>
+                    </a:lnR>
+                    <a:lnT w="0">
+                      <a:noFill/>
+                    </a:lnT>
+                    <a:lnB w="5080">
+                      <a:solidFill>
+                        <a:srgbClr val="B8B8B8"/>
+                      </a:solidFill>
+                    </a:lnB>
+                    <a:solidFill>
+                      <a:srgbClr val="FFFFFF"/>
+                    </a:solidFill>
+                  </a:tcPr>
+                </a:tc>
+              </a:tr>
+              <a:tr h="525780">
+                <a:tc>
+                  <a:txBody>
+                    <a:bodyPr/>
+                    <a:lstStyle/>
+                    <a:p>
+                      <a:pPr>
+                        <a:spcAft>
+                          <a:spcPts val="100"/>
+                        </a:spcAft>
+                        <a:defRPr sz="950" b="1">
+                          <a:solidFill>
+                            <a:srgbClr val="0A2373"/>
+                          </a:solidFill>
+                          <a:latin typeface="Lato"/>
+                        </a:defRPr>
+                      </a:pPr>
+                      <a:r>
+                        <a:t>Rail passenger journeys</a:t>
+                      </a:r>
+                    </a:p>
+                    <a:p>
+                      <a:pPr>
+                        <a:spcAft>
+                          <a:spcPts val="100"/>
+                        </a:spcAft>
+                        <a:defRPr sz="950" b="1">
+                          <a:solidFill>
+                            <a:srgbClr val="0A2373"/>
+                          </a:solidFill>
+                          <a:latin typeface="Lato"/>
+                        </a:defRPr>
+                      </a:pPr>
+                      <a:r>
+                        <a:t>million a year</a:t>
+                      </a:r>
+                    </a:p>
+                  </a:txBody>
+                  <a:tcPr marL="64008" marR="64008" marT="54864" marB="27432" anchor="t">
+                    <a:lnL w="0">
+                      <a:noFill/>
+                    </a:lnL>
+                    <a:lnR w="0">
+                      <a:noFill/>
+                    </a:lnR>
+                    <a:lnT w="0">
+                      <a:noFill/>
+                    </a:lnT>
+                    <a:lnB w="5080">
+                      <a:solidFill>
+                        <a:srgbClr val="B8B8B8"/>
+                      </a:solidFill>
+                    </a:lnB>
+                    <a:solidFill>
+                      <a:srgbClr val="FFFFFF"/>
+                    </a:solidFill>
+                  </a:tcPr>
+                </a:tc>
+                <a:tc>
+                  <a:txBody>
+                    <a:bodyPr/>
+                    <a:lstStyle/>
+                    <a:p>
+                      <a:pPr>
+                        <a:spcAft>
+                          <a:spcPts val="100"/>
+                        </a:spcAft>
+                        <a:defRPr sz="950" b="0">
+                          <a:solidFill>
+                            <a:srgbClr val="11151A"/>
+                          </a:solidFill>
+                          <a:latin typeface="Lato"/>
+                        </a:defRPr>
+                      </a:pPr>
+                      <a:r>
+                        <a:t>74</a:t>
+                      </a:r>
+                    </a:p>
+                    <a:p>
+                      <a:pPr>
+                        <a:spcAft>
+                          <a:spcPts val="100"/>
+                        </a:spcAft>
+                        <a:defRPr sz="950" b="0">
+                          <a:solidFill>
+                            <a:srgbClr val="11151A"/>
+                          </a:solidFill>
+                          <a:latin typeface="Lato"/>
+                        </a:defRPr>
+                      </a:pPr>
+                      <a:r>
+                        <a:t>2024</a:t>
+                      </a:r>
+                    </a:p>
+                  </a:txBody>
+                  <a:tcPr marL="64008" marR="64008" marT="54864" marB="27432" anchor="t">
+                    <a:lnL w="0">
+                      <a:noFill/>
+                    </a:lnL>
+                    <a:lnR w="0">
+                      <a:noFill/>
+                    </a:lnR>
+                    <a:lnT w="0">
+                      <a:noFill/>
+                    </a:lnT>
+                    <a:lnB w="5080">
+                      <a:solidFill>
+                        <a:srgbClr val="B8B8B8"/>
+                      </a:solidFill>
+                    </a:lnB>
+                    <a:solidFill>
+                      <a:srgbClr val="FFFFFF"/>
+                    </a:solidFill>
+                  </a:tcPr>
+                </a:tc>
+                <a:tc>
+                  <a:txBody>
+                    <a:bodyPr/>
+                    <a:lstStyle/>
+                    <a:p>
+                      <a:pPr>
+                        <a:spcAft>
+                          <a:spcPts val="100"/>
+                        </a:spcAft>
+                        <a:defRPr sz="950" b="0">
+                          <a:solidFill>
+                            <a:srgbClr val="11151A"/>
+                          </a:solidFill>
+                          <a:latin typeface="Lato"/>
+                        </a:defRPr>
+                      </a:pPr>
+                      <a:r>
+                        <a:t>100 / 180 / 320</a:t>
+                      </a:r>
+                    </a:p>
+                  </a:txBody>
+                  <a:tcPr marL="64008" marR="64008" marT="54864" marB="27432" anchor="t">
+                    <a:lnL w="0">
+                      <a:noFill/>
+                    </a:lnL>
+                    <a:lnR w="0">
+                      <a:noFill/>
+                    </a:lnR>
+                    <a:lnT w="0">
+                      <a:noFill/>
+                    </a:lnT>
+                    <a:lnB w="5080">
+                      <a:solidFill>
+                        <a:srgbClr val="B8B8B8"/>
+                      </a:solidFill>
+                    </a:lnB>
+                    <a:solidFill>
+                      <a:srgbClr val="FFFFFF"/>
+                    </a:solidFill>
+                  </a:tcPr>
+                </a:tc>
+                <a:tc>
+                  <a:txBody>
+                    <a:bodyPr/>
+                    <a:lstStyle/>
+                    <a:p>
+                      <a:pPr>
+                        <a:spcAft>
+                          <a:spcPts val="100"/>
+                        </a:spcAft>
+                        <a:defRPr sz="950" b="0">
+                          <a:solidFill>
+                            <a:srgbClr val="11151A"/>
+                          </a:solidFill>
+                          <a:latin typeface="Lato"/>
+                        </a:defRPr>
+                      </a:pPr>
+                      <a:r>
+                        <a:t>100 / 250 / 320</a:t>
+                      </a:r>
+                    </a:p>
+                  </a:txBody>
+                  <a:tcPr marL="64008" marR="64008" marT="54864" marB="27432" anchor="t">
+                    <a:lnL w="0">
+                      <a:noFill/>
+                    </a:lnL>
+                    <a:lnR w="0">
+                      <a:noFill/>
+                    </a:lnR>
+                    <a:lnT w="0">
+                      <a:noFill/>
+                    </a:lnT>
+                    <a:lnB w="5080">
+                      <a:solidFill>
+                        <a:srgbClr val="B8B8B8"/>
+                      </a:solidFill>
+                    </a:lnB>
+                    <a:solidFill>
+                      <a:srgbClr val="FFFFFF"/>
+                    </a:solidFill>
+                  </a:tcPr>
+                </a:tc>
+                <a:tc>
+                  <a:txBody>
+                    <a:bodyPr/>
+                    <a:lstStyle/>
+                    <a:p>
+                      <a:pPr>
+                        <a:spcAft>
+                          <a:spcPts val="100"/>
+                        </a:spcAft>
+                        <a:defRPr sz="950" b="0">
+                          <a:solidFill>
+                            <a:srgbClr val="11151A"/>
+                          </a:solidFill>
+                          <a:latin typeface="Lato"/>
+                        </a:defRPr>
+                      </a:pPr>
+                      <a:r>
+                        <a:t>Stats SA: 317 in 2017, 175 in 2019, 19 in 2022, 103 in 2025. Effect in litres cannot yet be stated.</a:t>
+                      </a:r>
+                    </a:p>
+                  </a:txBody>
+                  <a:tcPr marL="64008" marR="64008" marT="54864" marB="27432" anchor="t">
+                    <a:lnL w="0">
+                      <a:noFill/>
+                    </a:lnL>
+                    <a:lnR w="0">
+                      <a:noFill/>
+                    </a:lnR>
+                    <a:lnT w="0">
+                      <a:noFill/>
+                    </a:lnT>
+                    <a:lnB w="5080">
+                      <a:solidFill>
+                        <a:srgbClr val="B8B8B8"/>
+                      </a:solidFill>
+                    </a:lnB>
+                    <a:solidFill>
+                      <a:srgbClr val="FFFFFF"/>
+                    </a:solidFill>
+                  </a:tcPr>
+                </a:tc>
+              </a:tr>
+              <a:tr h="525780">
+                <a:tc>
+                  <a:txBody>
+                    <a:bodyPr/>
+                    <a:lstStyle/>
+                    <a:p>
+                      <a:pPr>
+                        <a:spcAft>
+                          <a:spcPts val="100"/>
+                        </a:spcAft>
+                        <a:defRPr sz="950" b="1">
+                          <a:solidFill>
+                            <a:srgbClr val="0A2373"/>
+                          </a:solidFill>
+                          <a:latin typeface="Lato"/>
+                        </a:defRPr>
+                      </a:pPr>
+                      <a:r>
+                        <a:t>Exports to nine neighbours</a:t>
+                      </a:r>
+                    </a:p>
+                    <a:p>
+                      <a:pPr>
+                        <a:spcAft>
+                          <a:spcPts val="100"/>
+                        </a:spcAft>
+                        <a:defRPr sz="950" b="1">
+                          <a:solidFill>
+                            <a:srgbClr val="0A2373"/>
+                          </a:solidFill>
+                          <a:latin typeface="Lato"/>
+                        </a:defRPr>
+                      </a:pPr>
+                      <a:r>
+                        <a:t>bn litres a year, petrol and diesel</a:t>
+                      </a:r>
+                    </a:p>
+                  </a:txBody>
+                  <a:tcPr marL="64008" marR="64008" marT="54864" marB="27432" anchor="t">
+                    <a:lnL w="0">
+                      <a:noFill/>
+                    </a:lnL>
+                    <a:lnR w="0">
+                      <a:noFill/>
+                    </a:lnR>
+                    <a:lnT w="0">
+                      <a:noFill/>
+                    </a:lnT>
+                    <a:lnB w="5080">
+                      <a:solidFill>
+                        <a:srgbClr val="B8B8B8"/>
+                      </a:solidFill>
+                    </a:lnB>
+                    <a:solidFill>
+                      <a:srgbClr val="FFFFFF"/>
+                    </a:solidFill>
+                  </a:tcPr>
+                </a:tc>
+                <a:tc>
+                  <a:txBody>
+                    <a:bodyPr/>
+                    <a:lstStyle/>
+                    <a:p>
+                      <a:pPr>
+                        <a:spcAft>
+                          <a:spcPts val="100"/>
+                        </a:spcAft>
+                        <a:defRPr sz="950" b="0">
+                          <a:solidFill>
+                            <a:srgbClr val="11151A"/>
+                          </a:solidFill>
+                          <a:latin typeface="Lato"/>
+                        </a:defRPr>
+                      </a:pPr>
+                      <a:r>
+                        <a:t>1.48</a:t>
+                      </a:r>
+                    </a:p>
+                    <a:p>
+                      <a:pPr>
+                        <a:spcAft>
+                          <a:spcPts val="100"/>
+                        </a:spcAft>
+                        <a:defRPr sz="950" b="0">
+                          <a:solidFill>
+                            <a:srgbClr val="11151A"/>
+                          </a:solidFill>
+                          <a:latin typeface="Lato"/>
+                        </a:defRPr>
+                      </a:pPr>
+                      <a:r>
+                        <a:t>2024</a:t>
+                      </a:r>
+                    </a:p>
+                  </a:txBody>
+                  <a:tcPr marL="64008" marR="64008" marT="54864" marB="27432" anchor="t">
+                    <a:lnL w="0">
+                      <a:noFill/>
+                    </a:lnL>
+                    <a:lnR w="0">
+                      <a:noFill/>
+                    </a:lnR>
+                    <a:lnT w="0">
+                      <a:noFill/>
+                    </a:lnT>
+                    <a:lnB w="5080">
+                      <a:solidFill>
+                        <a:srgbClr val="B8B8B8"/>
+                      </a:solidFill>
+                    </a:lnB>
+                    <a:solidFill>
+                      <a:srgbClr val="FFFFFF"/>
+                    </a:solidFill>
+                  </a:tcPr>
+                </a:tc>
+                <a:tc>
+                  <a:txBody>
+                    <a:bodyPr/>
+                    <a:lstStyle/>
+                    <a:p>
+                      <a:pPr>
+                        <a:spcAft>
+                          <a:spcPts val="100"/>
+                        </a:spcAft>
+                        <a:defRPr sz="950" b="0">
+                          <a:solidFill>
+                            <a:srgbClr val="11151A"/>
+                          </a:solidFill>
+                          <a:latin typeface="Lato"/>
+                        </a:defRPr>
+                      </a:pPr>
+                      <a:r>
+                        <a:t>0.7 / 1.4 / 1.7</a:t>
+                      </a:r>
+                    </a:p>
+                  </a:txBody>
+                  <a:tcPr marL="64008" marR="64008" marT="54864" marB="27432" anchor="t">
+                    <a:lnL w="0">
+                      <a:noFill/>
+                    </a:lnL>
+                    <a:lnR w="0">
+                      <a:noFill/>
+                    </a:lnR>
+                    <a:lnT w="0">
+                      <a:noFill/>
+                    </a:lnT>
+                    <a:lnB w="5080">
+                      <a:solidFill>
+                        <a:srgbClr val="B8B8B8"/>
+                      </a:solidFill>
+                    </a:lnB>
+                    <a:solidFill>
+                      <a:srgbClr val="FFFFFF"/>
+                    </a:solidFill>
+                  </a:tcPr>
+                </a:tc>
+                <a:tc>
+                  <a:txBody>
+                    <a:bodyPr/>
+                    <a:lstStyle/>
+                    <a:p>
+                      <a:pPr>
+                        <a:spcAft>
+                          <a:spcPts val="100"/>
+                        </a:spcAft>
+                        <a:defRPr sz="950" b="0">
+                          <a:solidFill>
+                            <a:srgbClr val="11151A"/>
+                          </a:solidFill>
+                          <a:latin typeface="Lato"/>
+                        </a:defRPr>
+                      </a:pPr>
+                      <a:r>
+                        <a:t>0.7 / 1.4 / 1.7</a:t>
+                      </a:r>
+                    </a:p>
+                  </a:txBody>
+                  <a:tcPr marL="64008" marR="64008" marT="54864" marB="27432" anchor="t">
+                    <a:lnL w="0">
+                      <a:noFill/>
+                    </a:lnL>
+                    <a:lnR w="0">
+                      <a:noFill/>
+                    </a:lnR>
+                    <a:lnT w="0">
+                      <a:noFill/>
+                    </a:lnT>
+                    <a:lnB w="5080">
+                      <a:solidFill>
+                        <a:srgbClr val="B8B8B8"/>
+                      </a:solidFill>
+                    </a:lnB>
+                    <a:solidFill>
+                      <a:srgbClr val="FFFFFF"/>
+                    </a:solidFill>
+                  </a:tcPr>
+                </a:tc>
+                <a:tc>
+                  <a:txBody>
+                    <a:bodyPr/>
+                    <a:lstStyle/>
+                    <a:p>
+                      <a:pPr>
+                        <a:spcAft>
+                          <a:spcPts val="100"/>
+                        </a:spcAft>
+                        <a:defRPr sz="950" b="0">
+                          <a:solidFill>
+                            <a:srgbClr val="11151A"/>
+                          </a:solidFill>
+                          <a:latin typeface="Lato"/>
+                        </a:defRPr>
+                      </a:pPr>
+                      <a:r>
+                        <a:t>SARS: 2.66 in 2019, 1.37 in 2025; Botswana 1.05 to 0.68. Terminal throughput, not South African demand.</a:t>
                       </a:r>
                     </a:p>
                   </a:txBody>
@@ -24962,62 +27415,7 @@
       </p:graphicFrame>
       <p:sp>
         <p:nvSpPr>
-          <p:cNvPr id="8" name="TextBox 7"/>
-          <p:cNvSpPr txBox="1"/>
-          <p:nvPr/>
-        </p:nvSpPr>
-        <p:spPr>
-          <a:xfrm>
-            <a:off x="457200" y="4983480"/>
-            <a:ext cx="10652760" cy="1097280"/>
-          </a:xfrm>
-          <a:prstGeom prst="rect">
-            <a:avLst/>
-          </a:prstGeom>
-          <a:noFill/>
-        </p:spPr>
-        <p:txBody>
-          <a:bodyPr wrap="square" lIns="22860" rIns="22860" tIns="0" bIns="0">
-            <a:spAutoFit/>
-          </a:bodyPr>
-          <a:lstStyle/>
-          <a:p>
-            <a:pPr>
-              <a:spcAft>
-                <a:spcPts val="300"/>
-              </a:spcAft>
-              <a:defRPr sz="1100" b="0">
-                <a:solidFill>
-                  <a:srgbClr val="11151A"/>
-                </a:solidFill>
-                <a:latin typeface="Lato"/>
-              </a:defRPr>
-            </a:pPr>
-            <a:r>
-              <a:t>Why 2021 and not an average: it is the latest balance and one consistent year for both sectors. A 2018-2021 average gives 0.98 and 1.68; the industry average is pulled up by the years before mining output fell.</a:t>
-            </a:r>
-          </a:p>
-          <a:p>
-            <a:pPr>
-              <a:spcAft>
-                <a:spcPts val="300"/>
-              </a:spcAft>
-              <a:defRPr sz="1100" b="0">
-                <a:solidFill>
-                  <a:srgbClr val="11151A"/>
-                </a:solidFill>
-                <a:latin typeface="Lato"/>
-              </a:defRPr>
-            </a:pPr>
-            <a:r>
-              <a:t>Decision for Nigel: accept both as provisional, or take the activity-adjusted 1.40 for industry. Both keep the needs-verification flag.</a:t>
-            </a:r>
-          </a:p>
-        </p:txBody>
-      </p:sp>
-      <p:sp>
-        <p:nvSpPr>
-          <p:cNvPr id="9" name="Chevron 8">
+          <p:cNvPr id="8" name="Chevron 7">
             <a:hlinkClick action="ppaction://hlinksldjump" r:id="rId2"/>
           </p:cNvPr>
           <p:cNvSpPr/>
@@ -25074,7 +27472,7 @@
       </p:sp>
       <p:sp>
         <p:nvSpPr>
-          <p:cNvPr id="10" name="Chevron 9">
+          <p:cNvPr id="9" name="Chevron 8">
             <a:hlinkClick action="ppaction://hlinksldjump" r:id="rId3"/>
           </p:cNvPr>
           <p:cNvSpPr/>
@@ -25083,6 +27481,63 @@
         <p:spPr>
           <a:xfrm>
             <a:off x="2587752" y="73152"/>
+            <a:ext cx="2075688" cy="384048"/>
+          </a:xfrm>
+          <a:prstGeom prst="chevron">
+            <a:avLst>
+              <a:gd name="adj" fmla="val 12000"/>
+            </a:avLst>
+          </a:prstGeom>
+          <a:solidFill>
+            <a:srgbClr val="0A2373"/>
+          </a:solidFill>
+          <a:ln>
+            <a:noFill/>
+          </a:ln>
+        </p:spPr>
+        <p:style>
+          <a:lnRef idx="1">
+            <a:schemeClr val="accent1"/>
+          </a:lnRef>
+          <a:fillRef idx="3">
+            <a:schemeClr val="accent1"/>
+          </a:fillRef>
+          <a:effectRef idx="2">
+            <a:schemeClr val="accent1"/>
+          </a:effectRef>
+          <a:fontRef idx="minor">
+            <a:schemeClr val="lt1"/>
+          </a:fontRef>
+        </p:style>
+        <p:txBody>
+          <a:bodyPr rtlCol="0" anchor="ctr" tIns="0" bIns="0"/>
+          <a:lstStyle/>
+          <a:p>
+            <a:pPr algn="ctr">
+              <a:defRPr sz="1100" b="1">
+                <a:solidFill>
+                  <a:srgbClr val="FFFFFF"/>
+                </a:solidFill>
+                <a:latin typeface="Lato"/>
+              </a:defRPr>
+            </a:pPr>
+            <a:r>
+              <a:t>2  Forecast levers</a:t>
+            </a:r>
+          </a:p>
+        </p:txBody>
+      </p:sp>
+      <p:sp>
+        <p:nvSpPr>
+          <p:cNvPr id="10" name="Chevron 9">
+            <a:hlinkClick action="ppaction://hlinksldjump" r:id="rId4"/>
+          </p:cNvPr>
+          <p:cNvSpPr/>
+          <p:nvPr/>
+        </p:nvSpPr>
+        <p:spPr>
+          <a:xfrm>
+            <a:off x="4718304" y="73152"/>
             <a:ext cx="2075688" cy="384048"/>
           </a:xfrm>
           <a:prstGeom prst="chevron">
@@ -25124,7 +27579,7 @@
               </a:defRPr>
             </a:pPr>
             <a:r>
-              <a:t>2  Forecast levers</a:t>
+              <a:t>3  Sector baselines</a:t>
             </a:r>
           </a:p>
         </p:txBody>
@@ -25132,63 +27587,6 @@
       <p:sp>
         <p:nvSpPr>
           <p:cNvPr id="11" name="Chevron 10">
-            <a:hlinkClick action="ppaction://hlinksldjump" r:id="rId4"/>
-          </p:cNvPr>
-          <p:cNvSpPr/>
-          <p:nvPr/>
-        </p:nvSpPr>
-        <p:spPr>
-          <a:xfrm>
-            <a:off x="4718304" y="73152"/>
-            <a:ext cx="2075688" cy="384048"/>
-          </a:xfrm>
-          <a:prstGeom prst="chevron">
-            <a:avLst>
-              <a:gd name="adj" fmla="val 12000"/>
-            </a:avLst>
-          </a:prstGeom>
-          <a:solidFill>
-            <a:srgbClr val="0A2373"/>
-          </a:solidFill>
-          <a:ln>
-            <a:noFill/>
-          </a:ln>
-        </p:spPr>
-        <p:style>
-          <a:lnRef idx="1">
-            <a:schemeClr val="accent1"/>
-          </a:lnRef>
-          <a:fillRef idx="3">
-            <a:schemeClr val="accent1"/>
-          </a:fillRef>
-          <a:effectRef idx="2">
-            <a:schemeClr val="accent1"/>
-          </a:effectRef>
-          <a:fontRef idx="minor">
-            <a:schemeClr val="lt1"/>
-          </a:fontRef>
-        </p:style>
-        <p:txBody>
-          <a:bodyPr rtlCol="0" anchor="ctr" tIns="0" bIns="0"/>
-          <a:lstStyle/>
-          <a:p>
-            <a:pPr algn="ctr">
-              <a:defRPr sz="1100" b="1">
-                <a:solidFill>
-                  <a:srgbClr val="FFFFFF"/>
-                </a:solidFill>
-                <a:latin typeface="Lato"/>
-              </a:defRPr>
-            </a:pPr>
-            <a:r>
-              <a:t>3  Sector baselines</a:t>
-            </a:r>
-          </a:p>
-        </p:txBody>
-      </p:sp>
-      <p:sp>
-        <p:nvSpPr>
-          <p:cNvPr id="12" name="Chevron 11">
             <a:hlinkClick action="ppaction://hlinksldjump" r:id="rId5"/>
           </p:cNvPr>
           <p:cNvSpPr/>
@@ -25245,7 +27643,7 @@
       </p:sp>
       <p:sp>
         <p:nvSpPr>
-          <p:cNvPr id="13" name="Chevron 12"/>
+          <p:cNvPr id="12" name="Chevron 11"/>
           <p:cNvSpPr/>
           <p:nvPr/>
         </p:nvSpPr>

--- a/pptx/output/delivered/supporting/Vopak_Manish_Handback_2026_10_07.pptx
+++ b/pptx/output/delivered/supporting/Vopak_Manish_Handback_2026_10_07.pptx
@@ -15904,7 +15904,7 @@
                         </a:defRPr>
                       </a:pPr>
                       <a:r>
-                        <a:t>FIASA 2025 edition, p.47: petrol 9.03, diesel 11.73. FIASA 2024 edition, p.32: 8.76 and 11.81. JODI: 10.14 and 10.04 (lowest reliability code). Department: not published.</a:t>
+                        <a:t>FIASA 2025 edition, p.47: petrol 9.03, diesel 11.73. FIASA 2024 edition, p.32: 8.76 and 11.81. JODI: 10.14 and 10.04 (lowest reliability code). Department: not published. Road Accident Fund levy: 24.4 bn litres for both fuels in the year to March 2025, up 0.7%, against 20.76 here.</a:t>
                       </a:r>
                     </a:p>
                   </a:txBody>

--- a/pptx/output/delivered/supporting/Vopak_Manish_Handback_2026_10_07.pptx
+++ b/pptx/output/delivered/supporting/Vopak_Manish_Handback_2026_10_07.pptx
@@ -11472,7 +11472,7 @@
           <a:lstStyle/>
           <a:p>
             <a:r>
-              <a:t>Four priorities have outputs to review; the fifth is partly done</a:t>
+              <a:t>All five priorities have outputs to review; the vehicle block is still to do</a:t>
             </a:r>
           </a:p>
         </p:txBody>
@@ -12540,7 +12540,7 @@
                         </a:defRPr>
                       </a:pPr>
                       <a:r>
-                        <a:t>Partial</a:t>
+                        <a:t>Ready</a:t>
                       </a:r>
                     </a:p>
                   </a:txBody>
@@ -12581,7 +12581,7 @@
                         </a:defRPr>
                       </a:pPr>
                       <a:r>
-                        <a:t>This deck, the hand-back note, a 21-item decision log, and the workshop workbook with history from 2012</a:t>
+                        <a:t>This deck, the hand-back note, a 21-item decision log, the workshop workbook with history from 2012, and 224 pack figures on pages 4-10 checked with none differing</a:t>
                       </a:r>
                     </a:p>
                   </a:txBody>
@@ -12622,7 +12622,7 @@
                         </a:defRPr>
                       </a:pPr>
                       <a:r>
-                        <a:t>Pack figures not yet checked against originals; vehicle block not done</a:t>
+                        <a:t>Pack pages 12-31 not checked; vehicle block not done</a:t>
                       </a:r>
                     </a:p>
                   </a:txBody>

--- a/pptx/output/delivered/supporting/Vopak_Manish_Handback_2026_10_07.pptx
+++ b/pptx/output/delivered/supporting/Vopak_Manish_Handback_2026_10_07.pptx
@@ -11472,7 +11472,7 @@
           <a:lstStyle/>
           <a:p>
             <a:r>
-              <a:t>All five priorities have outputs to review; the vehicle block is still to do</a:t>
+              <a:t>All five priorities have outputs to review</a:t>
             </a:r>
           </a:p>
         </p:txBody>
@@ -12581,7 +12581,7 @@
                         </a:defRPr>
                       </a:pPr>
                       <a:r>
-                        <a:t>This deck, the hand-back note, a 21-item decision log, the workshop workbook with history from 2012, and 224 pack figures on pages 4-10 checked with none differing</a:t>
+                        <a:t>This deck, the hand-back note, a 21-item decision log, the workshop workbook with history from 2012, and 288 figures in the current pack checked with none differing</a:t>
                       </a:r>
                     </a:p>
                   </a:txBody>
@@ -12622,7 +12622,7 @@
                         </a:defRPr>
                       </a:pPr>
                       <a:r>
-                        <a:t>Pack pages 12-31 not checked; vehicle block not done</a:t>
+                        <a:t>Vehicle stock by age and by fuel within class is in no source held</a:t>
                       </a:r>
                     </a:p>
                   </a:txBody>
@@ -14927,7 +14927,7 @@
         </p:nvGraphicFramePr>
         <p:xfrm>
           <a:off x="457200" y="2029968"/>
-          <a:ext cx="10652760" cy="3566160"/>
+          <a:ext cx="10652760" cy="3657600"/>
         </p:xfrm>
         <a:graphic>
           <a:graphicData uri="http://schemas.openxmlformats.org/drawingml/2006/table">
@@ -14938,17 +14938,17 @@
                 <a:gridCol w="4663440"/>
                 <a:gridCol w="4160520"/>
               </a:tblGrid>
-              <a:tr h="594360">
-                <a:tc>
-                  <a:txBody>
-                    <a:bodyPr/>
-                    <a:lstStyle/>
-                    <a:p>
-                      <a:pPr>
-                        <a:spcAft>
-                          <a:spcPts val="100"/>
-                        </a:spcAft>
-                        <a:defRPr sz="1000" b="1">
+              <a:tr h="522514">
+                <a:tc>
+                  <a:txBody>
+                    <a:bodyPr/>
+                    <a:lstStyle/>
+                    <a:p>
+                      <a:pPr>
+                        <a:spcAft>
+                          <a:spcPts val="100"/>
+                        </a:spcAft>
+                        <a:defRPr sz="950" b="1">
                           <a:solidFill>
                             <a:srgbClr val="0A2373"/>
                           </a:solidFill>
@@ -14989,7 +14989,7 @@
                         <a:spcAft>
                           <a:spcPts val="100"/>
                         </a:spcAft>
-                        <a:defRPr sz="1000" b="1">
+                        <a:defRPr sz="950" b="1">
                           <a:solidFill>
                             <a:srgbClr val="11151A"/>
                           </a:solidFill>
@@ -15030,7 +15030,7 @@
                         <a:spcAft>
                           <a:spcPts val="100"/>
                         </a:spcAft>
-                        <a:defRPr sz="1000" b="1">
+                        <a:defRPr sz="950" b="1">
                           <a:solidFill>
                             <a:srgbClr val="11151A"/>
                           </a:solidFill>
@@ -15063,17 +15063,17 @@
                   </a:tcPr>
                 </a:tc>
               </a:tr>
-              <a:tr h="594360">
-                <a:tc>
-                  <a:txBody>
-                    <a:bodyPr/>
-                    <a:lstStyle/>
-                    <a:p>
-                      <a:pPr>
-                        <a:spcAft>
-                          <a:spcPts val="100"/>
-                        </a:spcAft>
-                        <a:defRPr sz="1000" b="1">
+              <a:tr h="522514">
+                <a:tc>
+                  <a:txBody>
+                    <a:bodyPr/>
+                    <a:lstStyle/>
+                    <a:p>
+                      <a:pPr>
+                        <a:spcAft>
+                          <a:spcPts val="100"/>
+                        </a:spcAft>
+                        <a:defRPr sz="950" b="1">
                           <a:solidFill>
                             <a:srgbClr val="0A2373"/>
                           </a:solidFill>
@@ -15114,7 +15114,7 @@
                         <a:spcAft>
                           <a:spcPts val="100"/>
                         </a:spcAft>
-                        <a:defRPr sz="1000" b="0">
+                        <a:defRPr sz="950" b="0">
                           <a:solidFill>
                             <a:srgbClr val="11151A"/>
                           </a:solidFill>
@@ -15155,7 +15155,7 @@
                         <a:spcAft>
                           <a:spcPts val="100"/>
                         </a:spcAft>
-                        <a:defRPr sz="1000" b="0">
+                        <a:defRPr sz="950" b="0">
                           <a:solidFill>
                             <a:srgbClr val="11151A"/>
                           </a:solidFill>
@@ -15188,17 +15188,17 @@
                   </a:tcPr>
                 </a:tc>
               </a:tr>
-              <a:tr h="594360">
-                <a:tc>
-                  <a:txBody>
-                    <a:bodyPr/>
-                    <a:lstStyle/>
-                    <a:p>
-                      <a:pPr>
-                        <a:spcAft>
-                          <a:spcPts val="100"/>
-                        </a:spcAft>
-                        <a:defRPr sz="1000" b="1">
+              <a:tr h="522514">
+                <a:tc>
+                  <a:txBody>
+                    <a:bodyPr/>
+                    <a:lstStyle/>
+                    <a:p>
+                      <a:pPr>
+                        <a:spcAft>
+                          <a:spcPts val="100"/>
+                        </a:spcAft>
+                        <a:defRPr sz="950" b="1">
                           <a:solidFill>
                             <a:srgbClr val="0A2373"/>
                           </a:solidFill>
@@ -15239,7 +15239,7 @@
                         <a:spcAft>
                           <a:spcPts val="100"/>
                         </a:spcAft>
-                        <a:defRPr sz="1000" b="0">
+                        <a:defRPr sz="950" b="0">
                           <a:solidFill>
                             <a:srgbClr val="11151A"/>
                           </a:solidFill>
@@ -15280,7 +15280,7 @@
                         <a:spcAft>
                           <a:spcPts val="100"/>
                         </a:spcAft>
-                        <a:defRPr sz="1000" b="0">
+                        <a:defRPr sz="950" b="0">
                           <a:solidFill>
                             <a:srgbClr val="11151A"/>
                           </a:solidFill>
@@ -15313,17 +15313,17 @@
                   </a:tcPr>
                 </a:tc>
               </a:tr>
-              <a:tr h="594360">
-                <a:tc>
-                  <a:txBody>
-                    <a:bodyPr/>
-                    <a:lstStyle/>
-                    <a:p>
-                      <a:pPr>
-                        <a:spcAft>
-                          <a:spcPts val="100"/>
-                        </a:spcAft>
-                        <a:defRPr sz="1000" b="1">
+              <a:tr h="522514">
+                <a:tc>
+                  <a:txBody>
+                    <a:bodyPr/>
+                    <a:lstStyle/>
+                    <a:p>
+                      <a:pPr>
+                        <a:spcAft>
+                          <a:spcPts val="100"/>
+                        </a:spcAft>
+                        <a:defRPr sz="950" b="1">
                           <a:solidFill>
                             <a:srgbClr val="0A2373"/>
                           </a:solidFill>
@@ -15364,7 +15364,7 @@
                         <a:spcAft>
                           <a:spcPts val="100"/>
                         </a:spcAft>
-                        <a:defRPr sz="1000" b="0">
+                        <a:defRPr sz="950" b="0">
                           <a:solidFill>
                             <a:srgbClr val="11151A"/>
                           </a:solidFill>
@@ -15405,7 +15405,7 @@
                         <a:spcAft>
                           <a:spcPts val="100"/>
                         </a:spcAft>
-                        <a:defRPr sz="1000" b="0">
+                        <a:defRPr sz="950" b="0">
                           <a:solidFill>
                             <a:srgbClr val="11151A"/>
                           </a:solidFill>
@@ -15438,17 +15438,17 @@
                   </a:tcPr>
                 </a:tc>
               </a:tr>
-              <a:tr h="594360">
-                <a:tc>
-                  <a:txBody>
-                    <a:bodyPr/>
-                    <a:lstStyle/>
-                    <a:p>
-                      <a:pPr>
-                        <a:spcAft>
-                          <a:spcPts val="100"/>
-                        </a:spcAft>
-                        <a:defRPr sz="1000" b="1">
+              <a:tr h="522514">
+                <a:tc>
+                  <a:txBody>
+                    <a:bodyPr/>
+                    <a:lstStyle/>
+                    <a:p>
+                      <a:pPr>
+                        <a:spcAft>
+                          <a:spcPts val="100"/>
+                        </a:spcAft>
+                        <a:defRPr sz="950" b="1">
                           <a:solidFill>
                             <a:srgbClr val="0A2373"/>
                           </a:solidFill>
@@ -15456,6 +15456,131 @@
                         </a:defRPr>
                       </a:pPr>
                       <a:r>
+                        <a:t>Vehicle history</a:t>
+                      </a:r>
+                    </a:p>
+                  </a:txBody>
+                  <a:tcPr marL="64008" marR="64008" marT="54864" marB="27432" anchor="t">
+                    <a:lnL w="0">
+                      <a:noFill/>
+                    </a:lnL>
+                    <a:lnR w="0">
+                      <a:noFill/>
+                    </a:lnR>
+                    <a:lnT w="0">
+                      <a:noFill/>
+                    </a:lnT>
+                    <a:lnB w="5080">
+                      <a:solidFill>
+                        <a:srgbClr val="B8B8B8"/>
+                      </a:solidFill>
+                    </a:lnB>
+                    <a:solidFill>
+                      <a:srgbClr val="FFFFFF"/>
+                    </a:solidFill>
+                  </a:tcPr>
+                </a:tc>
+                <a:tc>
+                  <a:txBody>
+                    <a:bodyPr/>
+                    <a:lstStyle/>
+                    <a:p>
+                      <a:pPr>
+                        <a:spcAft>
+                          <a:spcPts val="100"/>
+                        </a:spcAft>
+                        <a:defRPr sz="950" b="0">
+                          <a:solidFill>
+                            <a:srgbClr val="11151A"/>
+                          </a:solidFill>
+                          <a:latin typeface="Lato"/>
+                        </a:defRPr>
+                      </a:pPr>
+                      <a:r>
+                        <a:t>Registered vehicles, new sales, retirements, drivetrain and fuel split beside the model's settings</a:t>
+                      </a:r>
+                    </a:p>
+                  </a:txBody>
+                  <a:tcPr marL="64008" marR="64008" marT="54864" marB="27432" anchor="t">
+                    <a:lnL w="0">
+                      <a:noFill/>
+                    </a:lnL>
+                    <a:lnR w="0">
+                      <a:noFill/>
+                    </a:lnR>
+                    <a:lnT w="0">
+                      <a:noFill/>
+                    </a:lnT>
+                    <a:lnB w="5080">
+                      <a:solidFill>
+                        <a:srgbClr val="B8B8B8"/>
+                      </a:solidFill>
+                    </a:lnB>
+                    <a:solidFill>
+                      <a:srgbClr val="FFFFFF"/>
+                    </a:solidFill>
+                  </a:tcPr>
+                </a:tc>
+                <a:tc>
+                  <a:txBody>
+                    <a:bodyPr/>
+                    <a:lstStyle/>
+                    <a:p>
+                      <a:pPr>
+                        <a:spcAft>
+                          <a:spcPts val="100"/>
+                        </a:spcAft>
+                        <a:defRPr sz="950" b="0">
+                          <a:solidFill>
+                            <a:srgbClr val="11151A"/>
+                          </a:solidFill>
+                          <a:latin typeface="Lato"/>
+                        </a:defRPr>
+                      </a:pPr>
+                      <a:r>
+                        <a:t>Cars are 65-71% of new sales against 78% in the model; petrol per vehicle is 1,056 litres against 1,615 implied</a:t>
+                      </a:r>
+                    </a:p>
+                  </a:txBody>
+                  <a:tcPr marL="64008" marR="64008" marT="54864" marB="27432" anchor="t">
+                    <a:lnL w="0">
+                      <a:noFill/>
+                    </a:lnL>
+                    <a:lnR w="0">
+                      <a:noFill/>
+                    </a:lnR>
+                    <a:lnT w="0">
+                      <a:noFill/>
+                    </a:lnT>
+                    <a:lnB w="5080">
+                      <a:solidFill>
+                        <a:srgbClr val="B8B8B8"/>
+                      </a:solidFill>
+                    </a:lnB>
+                    <a:solidFill>
+                      <a:srgbClr val="FFFFFF"/>
+                    </a:solidFill>
+                  </a:tcPr>
+                </a:tc>
+              </a:tr>
+              <a:tr h="522514">
+                <a:tc>
+                  <a:txBody>
+                    <a:bodyPr/>
+                    <a:lstStyle/>
+                    <a:p>
+                      <a:pPr>
+                        <a:spcAft>
+                          <a:spcPts val="100"/>
+                        </a:spcAft>
+                        <a:defRPr sz="950" b="1">
+                          <a:solidFill>
+                            <a:srgbClr val="0A2373"/>
+                          </a:solidFill>
+                          <a:latin typeface="Lato"/>
+                        </a:defRPr>
+                      </a:pPr>
+                      <a:r>
                         <a:t>Checks</a:t>
                       </a:r>
                     </a:p>
@@ -15489,7 +15614,7 @@
                         <a:spcAft>
                           <a:spcPts val="100"/>
                         </a:spcAft>
-                        <a:defRPr sz="1000" b="0">
+                        <a:defRPr sz="950" b="0">
                           <a:solidFill>
                             <a:srgbClr val="11151A"/>
                           </a:solidFill>
@@ -15530,7 +15655,7 @@
                         <a:spcAft>
                           <a:spcPts val="100"/>
                         </a:spcAft>
-                        <a:defRPr sz="1000" b="0">
+                        <a:defRPr sz="950" b="0">
                           <a:solidFill>
                             <a:srgbClr val="11151A"/>
                           </a:solidFill>
@@ -15563,17 +15688,17 @@
                   </a:tcPr>
                 </a:tc>
               </a:tr>
-              <a:tr h="594360">
-                <a:tc>
-                  <a:txBody>
-                    <a:bodyPr/>
-                    <a:lstStyle/>
-                    <a:p>
-                      <a:pPr>
-                        <a:spcAft>
-                          <a:spcPts val="100"/>
-                        </a:spcAft>
-                        <a:defRPr sz="1000" b="1">
+              <a:tr h="522516">
+                <a:tc>
+                  <a:txBody>
+                    <a:bodyPr/>
+                    <a:lstStyle/>
+                    <a:p>
+                      <a:pPr>
+                        <a:spcAft>
+                          <a:spcPts val="100"/>
+                        </a:spcAft>
+                        <a:defRPr sz="950" b="1">
                           <a:solidFill>
                             <a:srgbClr val="0A2373"/>
                           </a:solidFill>
@@ -15614,7 +15739,7 @@
                         <a:spcAft>
                           <a:spcPts val="100"/>
                         </a:spcAft>
-                        <a:defRPr sz="1000" b="0">
+                        <a:defRPr sz="950" b="0">
                           <a:solidFill>
                             <a:srgbClr val="11151A"/>
                           </a:solidFill>
@@ -15655,7 +15780,7 @@
                         <a:spcAft>
                           <a:spcPts val="100"/>
                         </a:spcAft>
-                        <a:defRPr sz="1000" b="0">
+                        <a:defRPr sz="950" b="0">
                           <a:solidFill>
                             <a:srgbClr val="11151A"/>
                           </a:solidFill>

--- a/pptx/output/delivered/supporting/Vopak_Manish_Handback_2026_10_07.pptx
+++ b/pptx/output/delivered/supporting/Vopak_Manish_Handback_2026_10_07.pptx
@@ -12083,7 +12083,7 @@
                         </a:defRPr>
                       </a:pPr>
                       <a:r>
-                        <a:t>20 levers with baseline, rationale and source; 39 of 120 values with a replacement; seven levers added</a:t>
+                        <a:t>20 levers with baseline, rationale and source; 39 of 120 values with a replacement; nine levers added</a:t>
                       </a:r>
                     </a:p>
                   </a:txBody>
@@ -29655,7 +29655,7 @@
           <a:lstStyle/>
           <a:p>
             <a:r>
-              <a:t>Seven levers added: price, backup generation, hybrids, rail passengers and neighbours</a:t>
+              <a:t>Nine levers added: price, backup generation, freight electrification, hybrids, rail and neighbours</a:t>
             </a:r>
           </a:p>
         </p:txBody>
@@ -29822,30 +29822,30 @@
         </p:nvGraphicFramePr>
         <p:xfrm>
           <a:off x="457200" y="2011680"/>
-          <a:ext cx="10652760" cy="4206240"/>
+          <a:ext cx="10652760" cy="4297680"/>
         </p:xfrm>
         <a:graphic>
           <a:graphicData uri="http://schemas.openxmlformats.org/drawingml/2006/table">
             <a:tbl>
               <a:tblPr firstRow="0" bandRow="0"/>
               <a:tblGrid>
-                <a:gridCol w="2148840"/>
+                <a:gridCol w="2377440"/>
+                <a:gridCol w="1188720"/>
                 <a:gridCol w="1463040"/>
-                <a:gridCol w="1600200"/>
-                <a:gridCol w="1600200"/>
-                <a:gridCol w="3840480"/>
+                <a:gridCol w="1463040"/>
+                <a:gridCol w="4160520"/>
               </a:tblGrid>
-              <a:tr h="525780">
-                <a:tc>
-                  <a:txBody>
-                    <a:bodyPr/>
-                    <a:lstStyle/>
-                    <a:p>
-                      <a:pPr>
-                        <a:spcAft>
-                          <a:spcPts val="100"/>
-                        </a:spcAft>
-                        <a:defRPr sz="950" b="1">
+              <a:tr h="429768">
+                <a:tc>
+                  <a:txBody>
+                    <a:bodyPr/>
+                    <a:lstStyle/>
+                    <a:p>
+                      <a:pPr>
+                        <a:spcAft>
+                          <a:spcPts val="100"/>
+                        </a:spcAft>
+                        <a:defRPr sz="850" b="1">
                           <a:solidFill>
                             <a:srgbClr val="0A2373"/>
                           </a:solidFill>
@@ -29886,7 +29886,7 @@
                         <a:spcAft>
                           <a:spcPts val="100"/>
                         </a:spcAft>
-                        <a:defRPr sz="950" b="1">
+                        <a:defRPr sz="850" b="1">
                           <a:solidFill>
                             <a:srgbClr val="11151A"/>
                           </a:solidFill>
@@ -29927,7 +29927,7 @@
                         <a:spcAft>
                           <a:spcPts val="100"/>
                         </a:spcAft>
-                        <a:defRPr sz="950" b="1">
+                        <a:defRPr sz="850" b="1">
                           <a:solidFill>
                             <a:srgbClr val="11151A"/>
                           </a:solidFill>
@@ -29943,7 +29943,7 @@
                         <a:spcAft>
                           <a:spcPts val="100"/>
                         </a:spcAft>
-                        <a:defRPr sz="950" b="1">
+                        <a:defRPr sz="850" b="1">
                           <a:solidFill>
                             <a:srgbClr val="11151A"/>
                           </a:solidFill>
@@ -29984,7 +29984,7 @@
                         <a:spcAft>
                           <a:spcPts val="100"/>
                         </a:spcAft>
-                        <a:defRPr sz="950" b="1">
+                        <a:defRPr sz="850" b="1">
                           <a:solidFill>
                             <a:srgbClr val="11151A"/>
                           </a:solidFill>
@@ -30000,7 +30000,7 @@
                         <a:spcAft>
                           <a:spcPts val="100"/>
                         </a:spcAft>
-                        <a:defRPr sz="950" b="1">
+                        <a:defRPr sz="850" b="1">
                           <a:solidFill>
                             <a:srgbClr val="11151A"/>
                           </a:solidFill>
@@ -30041,7 +30041,7 @@
                         <a:spcAft>
                           <a:spcPts val="100"/>
                         </a:spcAft>
-                        <a:defRPr sz="950" b="1">
+                        <a:defRPr sz="850" b="1">
                           <a:solidFill>
                             <a:srgbClr val="11151A"/>
                           </a:solidFill>
@@ -30074,17 +30074,17 @@
                   </a:tcPr>
                 </a:tc>
               </a:tr>
-              <a:tr h="525780">
-                <a:tc>
-                  <a:txBody>
-                    <a:bodyPr/>
-                    <a:lstStyle/>
-                    <a:p>
-                      <a:pPr>
-                        <a:spcAft>
-                          <a:spcPts val="100"/>
-                        </a:spcAft>
-                        <a:defRPr sz="950" b="1">
+              <a:tr h="429768">
+                <a:tc>
+                  <a:txBody>
+                    <a:bodyPr/>
+                    <a:lstStyle/>
+                    <a:p>
+                      <a:pPr>
+                        <a:spcAft>
+                          <a:spcPts val="100"/>
+                        </a:spcAft>
+                        <a:defRPr sz="850" b="1">
                           <a:solidFill>
                             <a:srgbClr val="0A2373"/>
                           </a:solidFill>
@@ -30100,7 +30100,7 @@
                         <a:spcAft>
                           <a:spcPts val="100"/>
                         </a:spcAft>
-                        <a:defRPr sz="950" b="1">
+                        <a:defRPr sz="850" b="1">
                           <a:solidFill>
                             <a:srgbClr val="0A2373"/>
                           </a:solidFill>
@@ -30141,7 +30141,7 @@
                         <a:spcAft>
                           <a:spcPts val="100"/>
                         </a:spcAft>
-                        <a:defRPr sz="950" b="0">
+                        <a:defRPr sz="850" b="0">
                           <a:solidFill>
                             <a:srgbClr val="11151A"/>
                           </a:solidFill>
@@ -30157,7 +30157,7 @@
                         <a:spcAft>
                           <a:spcPts val="100"/>
                         </a:spcAft>
-                        <a:defRPr sz="950" b="0">
+                        <a:defRPr sz="850" b="0">
                           <a:solidFill>
                             <a:srgbClr val="11151A"/>
                           </a:solidFill>
@@ -30198,7 +30198,7 @@
                         <a:spcAft>
                           <a:spcPts val="100"/>
                         </a:spcAft>
-                        <a:defRPr sz="950" b="0">
+                        <a:defRPr sz="850" b="0">
                           <a:solidFill>
                             <a:srgbClr val="11151A"/>
                           </a:solidFill>
@@ -30239,7 +30239,7 @@
                         <a:spcAft>
                           <a:spcPts val="100"/>
                         </a:spcAft>
-                        <a:defRPr sz="950" b="0">
+                        <a:defRPr sz="850" b="0">
                           <a:solidFill>
                             <a:srgbClr val="11151A"/>
                           </a:solidFill>
@@ -30280,7 +30280,7 @@
                         <a:spcAft>
                           <a:spcPts val="100"/>
                         </a:spcAft>
-                        <a:defRPr sz="950" b="0">
+                        <a:defRPr sz="850" b="0">
                           <a:solidFill>
                             <a:srgbClr val="11151A"/>
                           </a:solidFill>
@@ -30313,17 +30313,17 @@
                   </a:tcPr>
                 </a:tc>
               </a:tr>
-              <a:tr h="525780">
-                <a:tc>
-                  <a:txBody>
-                    <a:bodyPr/>
-                    <a:lstStyle/>
-                    <a:p>
-                      <a:pPr>
-                        <a:spcAft>
-                          <a:spcPts val="100"/>
-                        </a:spcAft>
-                        <a:defRPr sz="950" b="1">
+              <a:tr h="429768">
+                <a:tc>
+                  <a:txBody>
+                    <a:bodyPr/>
+                    <a:lstStyle/>
+                    <a:p>
+                      <a:pPr>
+                        <a:spcAft>
+                          <a:spcPts val="100"/>
+                        </a:spcAft>
+                        <a:defRPr sz="850" b="1">
                           <a:solidFill>
                             <a:srgbClr val="0A2373"/>
                           </a:solidFill>
@@ -30339,7 +30339,7 @@
                         <a:spcAft>
                           <a:spcPts val="100"/>
                         </a:spcAft>
-                        <a:defRPr sz="950" b="1">
+                        <a:defRPr sz="850" b="1">
                           <a:solidFill>
                             <a:srgbClr val="0A2373"/>
                           </a:solidFill>
@@ -30380,7 +30380,7 @@
                         <a:spcAft>
                           <a:spcPts val="100"/>
                         </a:spcAft>
-                        <a:defRPr sz="950" b="0">
+                        <a:defRPr sz="850" b="0">
                           <a:solidFill>
                             <a:srgbClr val="11151A"/>
                           </a:solidFill>
@@ -30421,7 +30421,7 @@
                         <a:spcAft>
                           <a:spcPts val="100"/>
                         </a:spcAft>
-                        <a:defRPr sz="950" b="0">
+                        <a:defRPr sz="850" b="0">
                           <a:solidFill>
                             <a:srgbClr val="11151A"/>
                           </a:solidFill>
@@ -30462,7 +30462,7 @@
                         <a:spcAft>
                           <a:spcPts val="100"/>
                         </a:spcAft>
-                        <a:defRPr sz="950" b="0">
+                        <a:defRPr sz="850" b="0">
                           <a:solidFill>
                             <a:srgbClr val="11151A"/>
                           </a:solidFill>
@@ -30503,7 +30503,7 @@
                         <a:spcAft>
                           <a:spcPts val="100"/>
                         </a:spcAft>
-                        <a:defRPr sz="950" b="0">
+                        <a:defRPr sz="850" b="0">
                           <a:solidFill>
                             <a:srgbClr val="11151A"/>
                           </a:solidFill>
@@ -30536,17 +30536,17 @@
                   </a:tcPr>
                 </a:tc>
               </a:tr>
-              <a:tr h="525780">
-                <a:tc>
-                  <a:txBody>
-                    <a:bodyPr/>
-                    <a:lstStyle/>
-                    <a:p>
-                      <a:pPr>
-                        <a:spcAft>
-                          <a:spcPts val="100"/>
-                        </a:spcAft>
-                        <a:defRPr sz="950" b="1">
+              <a:tr h="429768">
+                <a:tc>
+                  <a:txBody>
+                    <a:bodyPr/>
+                    <a:lstStyle/>
+                    <a:p>
+                      <a:pPr>
+                        <a:spcAft>
+                          <a:spcPts val="100"/>
+                        </a:spcAft>
+                        <a:defRPr sz="850" b="1">
                           <a:solidFill>
                             <a:srgbClr val="0A2373"/>
                           </a:solidFill>
@@ -30554,6 +30554,452 @@
                         </a:defRPr>
                       </a:pPr>
                       <a:r>
+                        <a:t>Electric share of new trucks</a:t>
+                      </a:r>
+                    </a:p>
+                    <a:p>
+                      <a:pPr>
+                        <a:spcAft>
+                          <a:spcPts val="100"/>
+                        </a:spcAft>
+                        <a:defRPr sz="850" b="1">
+                          <a:solidFill>
+                            <a:srgbClr val="0A2373"/>
+                          </a:solidFill>
+                          <a:latin typeface="Lato"/>
+                        </a:defRPr>
+                      </a:pPr>
+                      <a:r>
+                        <a:t>% of new truck sales</a:t>
+                      </a:r>
+                    </a:p>
+                  </a:txBody>
+                  <a:tcPr marL="64008" marR="64008" marT="54864" marB="27432" anchor="t">
+                    <a:lnL w="0">
+                      <a:noFill/>
+                    </a:lnL>
+                    <a:lnR w="0">
+                      <a:noFill/>
+                    </a:lnR>
+                    <a:lnT w="0">
+                      <a:noFill/>
+                    </a:lnT>
+                    <a:lnB w="5080">
+                      <a:solidFill>
+                        <a:srgbClr val="B8B8B8"/>
+                      </a:solidFill>
+                    </a:lnB>
+                    <a:solidFill>
+                      <a:srgbClr val="FFFFFF"/>
+                    </a:solidFill>
+                  </a:tcPr>
+                </a:tc>
+                <a:tc>
+                  <a:txBody>
+                    <a:bodyPr/>
+                    <a:lstStyle/>
+                    <a:p>
+                      <a:pPr>
+                        <a:spcAft>
+                          <a:spcPts val="100"/>
+                        </a:spcAft>
+                        <a:defRPr sz="850" b="0">
+                          <a:solidFill>
+                            <a:srgbClr val="11151A"/>
+                          </a:solidFill>
+                          <a:latin typeface="Lato"/>
+                        </a:defRPr>
+                      </a:pPr>
+                      <a:r>
+                        <a:t>Not reported</a:t>
+                      </a:r>
+                    </a:p>
+                  </a:txBody>
+                  <a:tcPr marL="64008" marR="64008" marT="54864" marB="27432" anchor="t">
+                    <a:lnL w="0">
+                      <a:noFill/>
+                    </a:lnL>
+                    <a:lnR w="0">
+                      <a:noFill/>
+                    </a:lnR>
+                    <a:lnT w="0">
+                      <a:noFill/>
+                    </a:lnT>
+                    <a:lnB w="5080">
+                      <a:solidFill>
+                        <a:srgbClr val="B8B8B8"/>
+                      </a:solidFill>
+                    </a:lnB>
+                    <a:solidFill>
+                      <a:srgbClr val="FFFFFF"/>
+                    </a:solidFill>
+                  </a:tcPr>
+                </a:tc>
+                <a:tc>
+                  <a:txBody>
+                    <a:bodyPr/>
+                    <a:lstStyle/>
+                    <a:p>
+                      <a:pPr>
+                        <a:spcAft>
+                          <a:spcPts val="100"/>
+                        </a:spcAft>
+                        <a:defRPr sz="850" b="0">
+                          <a:solidFill>
+                            <a:srgbClr val="11151A"/>
+                          </a:solidFill>
+                          <a:latin typeface="Lato"/>
+                        </a:defRPr>
+                      </a:pPr>
+                      <a:r>
+                        <a:t>0 / 0.4 / 3</a:t>
+                      </a:r>
+                    </a:p>
+                  </a:txBody>
+                  <a:tcPr marL="64008" marR="64008" marT="54864" marB="27432" anchor="t">
+                    <a:lnL w="0">
+                      <a:noFill/>
+                    </a:lnL>
+                    <a:lnR w="0">
+                      <a:noFill/>
+                    </a:lnR>
+                    <a:lnT w="0">
+                      <a:noFill/>
+                    </a:lnT>
+                    <a:lnB w="5080">
+                      <a:solidFill>
+                        <a:srgbClr val="B8B8B8"/>
+                      </a:solidFill>
+                    </a:lnB>
+                    <a:solidFill>
+                      <a:srgbClr val="FFFFFF"/>
+                    </a:solidFill>
+                  </a:tcPr>
+                </a:tc>
+                <a:tc>
+                  <a:txBody>
+                    <a:bodyPr/>
+                    <a:lstStyle/>
+                    <a:p>
+                      <a:pPr>
+                        <a:spcAft>
+                          <a:spcPts val="100"/>
+                        </a:spcAft>
+                        <a:defRPr sz="850" b="0">
+                          <a:solidFill>
+                            <a:srgbClr val="11151A"/>
+                          </a:solidFill>
+                          <a:latin typeface="Lato"/>
+                        </a:defRPr>
+                      </a:pPr>
+                      <a:r>
+                        <a:t>0 / 3 / 9</a:t>
+                      </a:r>
+                    </a:p>
+                  </a:txBody>
+                  <a:tcPr marL="64008" marR="64008" marT="54864" marB="27432" anchor="t">
+                    <a:lnL w="0">
+                      <a:noFill/>
+                    </a:lnL>
+                    <a:lnR w="0">
+                      <a:noFill/>
+                    </a:lnR>
+                    <a:lnT w="0">
+                      <a:noFill/>
+                    </a:lnT>
+                    <a:lnB w="5080">
+                      <a:solidFill>
+                        <a:srgbClr val="B8B8B8"/>
+                      </a:solidFill>
+                    </a:lnB>
+                    <a:solidFill>
+                      <a:srgbClr val="FFFFFF"/>
+                    </a:solidFill>
+                  </a:tcPr>
+                </a:tc>
+                <a:tc>
+                  <a:txBody>
+                    <a:bodyPr/>
+                    <a:lstStyle/>
+                    <a:p>
+                      <a:pPr>
+                        <a:spcAft>
+                          <a:spcPts val="100"/>
+                        </a:spcAft>
+                        <a:defRPr sz="850" b="0">
+                          <a:solidFill>
+                            <a:srgbClr val="11151A"/>
+                          </a:solidFill>
+                          <a:latin typeface="Lato"/>
+                        </a:defRPr>
+                      </a:pPr>
+                      <a:r>
+                        <a:t>No South African data. 2025 benchmarks: Brazil 0.4%, Europe 3%, world 9%, China 25% (IEA; ICCT). High case is about 2.5% of the fleet by 2035.</a:t>
+                      </a:r>
+                    </a:p>
+                  </a:txBody>
+                  <a:tcPr marL="64008" marR="64008" marT="54864" marB="27432" anchor="t">
+                    <a:lnL w="0">
+                      <a:noFill/>
+                    </a:lnL>
+                    <a:lnR w="0">
+                      <a:noFill/>
+                    </a:lnR>
+                    <a:lnT w="0">
+                      <a:noFill/>
+                    </a:lnT>
+                    <a:lnB w="5080">
+                      <a:solidFill>
+                        <a:srgbClr val="B8B8B8"/>
+                      </a:solidFill>
+                    </a:lnB>
+                    <a:solidFill>
+                      <a:srgbClr val="FFFFFF"/>
+                    </a:solidFill>
+                  </a:tcPr>
+                </a:tc>
+              </a:tr>
+              <a:tr h="429768">
+                <a:tc>
+                  <a:txBody>
+                    <a:bodyPr/>
+                    <a:lstStyle/>
+                    <a:p>
+                      <a:pPr>
+                        <a:spcAft>
+                          <a:spcPts val="100"/>
+                        </a:spcAft>
+                        <a:defRPr sz="850" b="1">
+                          <a:solidFill>
+                            <a:srgbClr val="0A2373"/>
+                          </a:solidFill>
+                          <a:latin typeface="Lato"/>
+                        </a:defRPr>
+                      </a:pPr>
+                      <a:r>
+                        <a:t>Electric share of new light commercial</a:t>
+                      </a:r>
+                    </a:p>
+                    <a:p>
+                      <a:pPr>
+                        <a:spcAft>
+                          <a:spcPts val="100"/>
+                        </a:spcAft>
+                        <a:defRPr sz="850" b="1">
+                          <a:solidFill>
+                            <a:srgbClr val="0A2373"/>
+                          </a:solidFill>
+                          <a:latin typeface="Lato"/>
+                        </a:defRPr>
+                      </a:pPr>
+                      <a:r>
+                        <a:t>% of new sales</a:t>
+                      </a:r>
+                    </a:p>
+                  </a:txBody>
+                  <a:tcPr marL="64008" marR="64008" marT="54864" marB="27432" anchor="t">
+                    <a:lnL w="0">
+                      <a:noFill/>
+                    </a:lnL>
+                    <a:lnR w="0">
+                      <a:noFill/>
+                    </a:lnR>
+                    <a:lnT w="0">
+                      <a:noFill/>
+                    </a:lnT>
+                    <a:lnB w="5080">
+                      <a:solidFill>
+                        <a:srgbClr val="B8B8B8"/>
+                      </a:solidFill>
+                    </a:lnB>
+                    <a:solidFill>
+                      <a:srgbClr val="FFFFFF"/>
+                    </a:solidFill>
+                  </a:tcPr>
+                </a:tc>
+                <a:tc>
+                  <a:txBody>
+                    <a:bodyPr/>
+                    <a:lstStyle/>
+                    <a:p>
+                      <a:pPr>
+                        <a:spcAft>
+                          <a:spcPts val="100"/>
+                        </a:spcAft>
+                        <a:defRPr sz="850" b="0">
+                          <a:solidFill>
+                            <a:srgbClr val="11151A"/>
+                          </a:solidFill>
+                          <a:latin typeface="Lato"/>
+                        </a:defRPr>
+                      </a:pPr>
+                      <a:r>
+                        <a:t>Not reported</a:t>
+                      </a:r>
+                    </a:p>
+                  </a:txBody>
+                  <a:tcPr marL="64008" marR="64008" marT="54864" marB="27432" anchor="t">
+                    <a:lnL w="0">
+                      <a:noFill/>
+                    </a:lnL>
+                    <a:lnR w="0">
+                      <a:noFill/>
+                    </a:lnR>
+                    <a:lnT w="0">
+                      <a:noFill/>
+                    </a:lnT>
+                    <a:lnB w="5080">
+                      <a:solidFill>
+                        <a:srgbClr val="B8B8B8"/>
+                      </a:solidFill>
+                    </a:lnB>
+                    <a:solidFill>
+                      <a:srgbClr val="FFFFFF"/>
+                    </a:solidFill>
+                  </a:tcPr>
+                </a:tc>
+                <a:tc>
+                  <a:txBody>
+                    <a:bodyPr/>
+                    <a:lstStyle/>
+                    <a:p>
+                      <a:pPr>
+                        <a:spcAft>
+                          <a:spcPts val="100"/>
+                        </a:spcAft>
+                        <a:defRPr sz="850" b="0">
+                          <a:solidFill>
+                            <a:srgbClr val="11151A"/>
+                          </a:solidFill>
+                          <a:latin typeface="Lato"/>
+                        </a:defRPr>
+                      </a:pPr>
+                      <a:r>
+                        <a:t>0 / 1 / 5</a:t>
+                      </a:r>
+                    </a:p>
+                  </a:txBody>
+                  <a:tcPr marL="64008" marR="64008" marT="54864" marB="27432" anchor="t">
+                    <a:lnL w="0">
+                      <a:noFill/>
+                    </a:lnL>
+                    <a:lnR w="0">
+                      <a:noFill/>
+                    </a:lnR>
+                    <a:lnT w="0">
+                      <a:noFill/>
+                    </a:lnT>
+                    <a:lnB w="5080">
+                      <a:solidFill>
+                        <a:srgbClr val="B8B8B8"/>
+                      </a:solidFill>
+                    </a:lnB>
+                    <a:solidFill>
+                      <a:srgbClr val="FFFFFF"/>
+                    </a:solidFill>
+                  </a:tcPr>
+                </a:tc>
+                <a:tc>
+                  <a:txBody>
+                    <a:bodyPr/>
+                    <a:lstStyle/>
+                    <a:p>
+                      <a:pPr>
+                        <a:spcAft>
+                          <a:spcPts val="100"/>
+                        </a:spcAft>
+                        <a:defRPr sz="850" b="0">
+                          <a:solidFill>
+                            <a:srgbClr val="11151A"/>
+                          </a:solidFill>
+                          <a:latin typeface="Lato"/>
+                        </a:defRPr>
+                      </a:pPr>
+                      <a:r>
+                        <a:t>0 / 5 / 10</a:t>
+                      </a:r>
+                    </a:p>
+                  </a:txBody>
+                  <a:tcPr marL="64008" marR="64008" marT="54864" marB="27432" anchor="t">
+                    <a:lnL w="0">
+                      <a:noFill/>
+                    </a:lnL>
+                    <a:lnR w="0">
+                      <a:noFill/>
+                    </a:lnR>
+                    <a:lnT w="0">
+                      <a:noFill/>
+                    </a:lnT>
+                    <a:lnB w="5080">
+                      <a:solidFill>
+                        <a:srgbClr val="B8B8B8"/>
+                      </a:solidFill>
+                    </a:lnB>
+                    <a:solidFill>
+                      <a:srgbClr val="FFFFFF"/>
+                    </a:solidFill>
+                  </a:tcPr>
+                </a:tc>
+                <a:tc>
+                  <a:txBody>
+                    <a:bodyPr/>
+                    <a:lstStyle/>
+                    <a:p>
+                      <a:pPr>
+                        <a:spcAft>
+                          <a:spcPts val="100"/>
+                        </a:spcAft>
+                        <a:defRPr sz="850" b="0">
+                          <a:solidFill>
+                            <a:srgbClr val="11151A"/>
+                          </a:solidFill>
+                          <a:latin typeface="Lato"/>
+                        </a:defRPr>
+                      </a:pPr>
+                      <a:r>
+                        <a:t>2025 benchmarks: India 1%, Europe 10%, China 14% (IEA). Bakkies differ from vans, so loose comparators.</a:t>
+                      </a:r>
+                    </a:p>
+                  </a:txBody>
+                  <a:tcPr marL="64008" marR="64008" marT="54864" marB="27432" anchor="t">
+                    <a:lnL w="0">
+                      <a:noFill/>
+                    </a:lnL>
+                    <a:lnR w="0">
+                      <a:noFill/>
+                    </a:lnR>
+                    <a:lnT w="0">
+                      <a:noFill/>
+                    </a:lnT>
+                    <a:lnB w="5080">
+                      <a:solidFill>
+                        <a:srgbClr val="B8B8B8"/>
+                      </a:solidFill>
+                    </a:lnB>
+                    <a:solidFill>
+                      <a:srgbClr val="FFFFFF"/>
+                    </a:solidFill>
+                  </a:tcPr>
+                </a:tc>
+              </a:tr>
+              <a:tr h="429768">
+                <a:tc>
+                  <a:txBody>
+                    <a:bodyPr/>
+                    <a:lstStyle/>
+                    <a:p>
+                      <a:pPr>
+                        <a:spcAft>
+                          <a:spcPts val="100"/>
+                        </a:spcAft>
+                        <a:defRPr sz="850" b="1">
+                          <a:solidFill>
+                            <a:srgbClr val="0A2373"/>
+                          </a:solidFill>
+                          <a:latin typeface="Lato"/>
+                        </a:defRPr>
+                      </a:pPr>
+                      <a:r>
                         <a:t>Real petrol price</a:t>
                       </a:r>
                     </a:p>
@@ -30562,7 +31008,7 @@
                         <a:spcAft>
                           <a:spcPts val="100"/>
                         </a:spcAft>
-                        <a:defRPr sz="950" b="1">
+                        <a:defRPr sz="850" b="1">
                           <a:solidFill>
                             <a:srgbClr val="0A2373"/>
                           </a:solidFill>
@@ -30603,7 +31049,7 @@
                         <a:spcAft>
                           <a:spcPts val="100"/>
                         </a:spcAft>
-                        <a:defRPr sz="950" b="0">
+                        <a:defRPr sz="850" b="0">
                           <a:solidFill>
                             <a:srgbClr val="11151A"/>
                           </a:solidFill>
@@ -30619,7 +31065,7 @@
                         <a:spcAft>
                           <a:spcPts val="100"/>
                         </a:spcAft>
-                        <a:defRPr sz="950" b="0">
+                        <a:defRPr sz="850" b="0">
                           <a:solidFill>
                             <a:srgbClr val="11151A"/>
                           </a:solidFill>
@@ -30660,7 +31106,7 @@
                         <a:spcAft>
                           <a:spcPts val="100"/>
                         </a:spcAft>
-                        <a:defRPr sz="950" b="0">
+                        <a:defRPr sz="850" b="0">
                           <a:solidFill>
                             <a:srgbClr val="11151A"/>
                           </a:solidFill>
@@ -30701,7 +31147,7 @@
                         <a:spcAft>
                           <a:spcPts val="100"/>
                         </a:spcAft>
-                        <a:defRPr sz="950" b="0">
+                        <a:defRPr sz="850" b="0">
                           <a:solidFill>
                             <a:srgbClr val="11151A"/>
                           </a:solidFill>
@@ -30742,7 +31188,7 @@
                         <a:spcAft>
                           <a:spcPts val="100"/>
                         </a:spcAft>
-                        <a:defRPr sz="950" b="0">
+                        <a:defRPr sz="850" b="0">
                           <a:solidFill>
                             <a:srgbClr val="11151A"/>
                           </a:solidFill>
@@ -30775,17 +31221,17 @@
                   </a:tcPr>
                 </a:tc>
               </a:tr>
-              <a:tr h="525780">
-                <a:tc>
-                  <a:txBody>
-                    <a:bodyPr/>
-                    <a:lstStyle/>
-                    <a:p>
-                      <a:pPr>
-                        <a:spcAft>
-                          <a:spcPts val="100"/>
-                        </a:spcAft>
-                        <a:defRPr sz="950" b="1">
+              <a:tr h="429768">
+                <a:tc>
+                  <a:txBody>
+                    <a:bodyPr/>
+                    <a:lstStyle/>
+                    <a:p>
+                      <a:pPr>
+                        <a:spcAft>
+                          <a:spcPts val="100"/>
+                        </a:spcAft>
+                        <a:defRPr sz="850" b="1">
                           <a:solidFill>
                             <a:srgbClr val="0A2373"/>
                           </a:solidFill>
@@ -30801,7 +31247,7 @@
                         <a:spcAft>
                           <a:spcPts val="100"/>
                         </a:spcAft>
-                        <a:defRPr sz="950" b="1">
+                        <a:defRPr sz="850" b="1">
                           <a:solidFill>
                             <a:srgbClr val="0A2373"/>
                           </a:solidFill>
@@ -30842,7 +31288,7 @@
                         <a:spcAft>
                           <a:spcPts val="100"/>
                         </a:spcAft>
-                        <a:defRPr sz="950" b="0">
+                        <a:defRPr sz="850" b="0">
                           <a:solidFill>
                             <a:srgbClr val="11151A"/>
                           </a:solidFill>
@@ -30858,7 +31304,7 @@
                         <a:spcAft>
                           <a:spcPts val="100"/>
                         </a:spcAft>
-                        <a:defRPr sz="950" b="0">
+                        <a:defRPr sz="850" b="0">
                           <a:solidFill>
                             <a:srgbClr val="11151A"/>
                           </a:solidFill>
@@ -30899,7 +31345,7 @@
                         <a:spcAft>
                           <a:spcPts val="100"/>
                         </a:spcAft>
-                        <a:defRPr sz="950" b="0">
+                        <a:defRPr sz="850" b="0">
                           <a:solidFill>
                             <a:srgbClr val="11151A"/>
                           </a:solidFill>
@@ -30940,7 +31386,7 @@
                         <a:spcAft>
                           <a:spcPts val="100"/>
                         </a:spcAft>
-                        <a:defRPr sz="950" b="0">
+                        <a:defRPr sz="850" b="0">
                           <a:solidFill>
                             <a:srgbClr val="11151A"/>
                           </a:solidFill>
@@ -30981,7 +31427,7 @@
                         <a:spcAft>
                           <a:spcPts val="100"/>
                         </a:spcAft>
-                        <a:defRPr sz="950" b="0">
+                        <a:defRPr sz="850" b="0">
                           <a:solidFill>
                             <a:srgbClr val="11151A"/>
                           </a:solidFill>
@@ -31014,17 +31460,17 @@
                   </a:tcPr>
                 </a:tc>
               </a:tr>
-              <a:tr h="525780">
-                <a:tc>
-                  <a:txBody>
-                    <a:bodyPr/>
-                    <a:lstStyle/>
-                    <a:p>
-                      <a:pPr>
-                        <a:spcAft>
-                          <a:spcPts val="100"/>
-                        </a:spcAft>
-                        <a:defRPr sz="950" b="1">
+              <a:tr h="429768">
+                <a:tc>
+                  <a:txBody>
+                    <a:bodyPr/>
+                    <a:lstStyle/>
+                    <a:p>
+                      <a:pPr>
+                        <a:spcAft>
+                          <a:spcPts val="100"/>
+                        </a:spcAft>
+                        <a:defRPr sz="850" b="1">
                           <a:solidFill>
                             <a:srgbClr val="0A2373"/>
                           </a:solidFill>
@@ -31040,7 +31486,7 @@
                         <a:spcAft>
                           <a:spcPts val="100"/>
                         </a:spcAft>
-                        <a:defRPr sz="950" b="1">
+                        <a:defRPr sz="850" b="1">
                           <a:solidFill>
                             <a:srgbClr val="0A2373"/>
                           </a:solidFill>
@@ -31081,7 +31527,7 @@
                         <a:spcAft>
                           <a:spcPts val="100"/>
                         </a:spcAft>
-                        <a:defRPr sz="950" b="0">
+                        <a:defRPr sz="850" b="0">
                           <a:solidFill>
                             <a:srgbClr val="11151A"/>
                           </a:solidFill>
@@ -31097,7 +31543,7 @@
                         <a:spcAft>
                           <a:spcPts val="100"/>
                         </a:spcAft>
-                        <a:defRPr sz="950" b="0">
+                        <a:defRPr sz="850" b="0">
                           <a:solidFill>
                             <a:srgbClr val="11151A"/>
                           </a:solidFill>
@@ -31138,7 +31584,7 @@
                         <a:spcAft>
                           <a:spcPts val="100"/>
                         </a:spcAft>
-                        <a:defRPr sz="950" b="0">
+                        <a:defRPr sz="850" b="0">
                           <a:solidFill>
                             <a:srgbClr val="11151A"/>
                           </a:solidFill>
@@ -31179,7 +31625,7 @@
                         <a:spcAft>
                           <a:spcPts val="100"/>
                         </a:spcAft>
-                        <a:defRPr sz="950" b="0">
+                        <a:defRPr sz="850" b="0">
                           <a:solidFill>
                             <a:srgbClr val="11151A"/>
                           </a:solidFill>
@@ -31220,7 +31666,7 @@
                         <a:spcAft>
                           <a:spcPts val="100"/>
                         </a:spcAft>
-                        <a:defRPr sz="950" b="0">
+                        <a:defRPr sz="850" b="0">
                           <a:solidFill>
                             <a:srgbClr val="11151A"/>
                           </a:solidFill>
@@ -31253,17 +31699,17 @@
                   </a:tcPr>
                 </a:tc>
               </a:tr>
-              <a:tr h="525780">
-                <a:tc>
-                  <a:txBody>
-                    <a:bodyPr/>
-                    <a:lstStyle/>
-                    <a:p>
-                      <a:pPr>
-                        <a:spcAft>
-                          <a:spcPts val="100"/>
-                        </a:spcAft>
-                        <a:defRPr sz="950" b="1">
+              <a:tr h="429768">
+                <a:tc>
+                  <a:txBody>
+                    <a:bodyPr/>
+                    <a:lstStyle/>
+                    <a:p>
+                      <a:pPr>
+                        <a:spcAft>
+                          <a:spcPts val="100"/>
+                        </a:spcAft>
+                        <a:defRPr sz="850" b="1">
                           <a:solidFill>
                             <a:srgbClr val="0A2373"/>
                           </a:solidFill>
@@ -31279,7 +31725,7 @@
                         <a:spcAft>
                           <a:spcPts val="100"/>
                         </a:spcAft>
-                        <a:defRPr sz="950" b="1">
+                        <a:defRPr sz="850" b="1">
                           <a:solidFill>
                             <a:srgbClr val="0A2373"/>
                           </a:solidFill>
@@ -31320,7 +31766,7 @@
                         <a:spcAft>
                           <a:spcPts val="100"/>
                         </a:spcAft>
-                        <a:defRPr sz="950" b="0">
+                        <a:defRPr sz="850" b="0">
                           <a:solidFill>
                             <a:srgbClr val="11151A"/>
                           </a:solidFill>
@@ -31336,7 +31782,7 @@
                         <a:spcAft>
                           <a:spcPts val="100"/>
                         </a:spcAft>
-                        <a:defRPr sz="950" b="0">
+                        <a:defRPr sz="850" b="0">
                           <a:solidFill>
                             <a:srgbClr val="11151A"/>
                           </a:solidFill>
@@ -31377,7 +31823,7 @@
                         <a:spcAft>
                           <a:spcPts val="100"/>
                         </a:spcAft>
-                        <a:defRPr sz="950" b="0">
+                        <a:defRPr sz="850" b="0">
                           <a:solidFill>
                             <a:srgbClr val="11151A"/>
                           </a:solidFill>
@@ -31418,7 +31864,7 @@
                         <a:spcAft>
                           <a:spcPts val="100"/>
                         </a:spcAft>
-                        <a:defRPr sz="950" b="0">
+                        <a:defRPr sz="850" b="0">
                           <a:solidFill>
                             <a:srgbClr val="11151A"/>
                           </a:solidFill>
@@ -31459,7 +31905,7 @@
                         <a:spcAft>
                           <a:spcPts val="100"/>
                         </a:spcAft>
-                        <a:defRPr sz="950" b="0">
+                        <a:defRPr sz="850" b="0">
                           <a:solidFill>
                             <a:srgbClr val="11151A"/>
                           </a:solidFill>
@@ -31492,17 +31938,17 @@
                   </a:tcPr>
                 </a:tc>
               </a:tr>
-              <a:tr h="525780">
-                <a:tc>
-                  <a:txBody>
-                    <a:bodyPr/>
-                    <a:lstStyle/>
-                    <a:p>
-                      <a:pPr>
-                        <a:spcAft>
-                          <a:spcPts val="100"/>
-                        </a:spcAft>
-                        <a:defRPr sz="950" b="1">
+              <a:tr h="429768">
+                <a:tc>
+                  <a:txBody>
+                    <a:bodyPr/>
+                    <a:lstStyle/>
+                    <a:p>
+                      <a:pPr>
+                        <a:spcAft>
+                          <a:spcPts val="100"/>
+                        </a:spcAft>
+                        <a:defRPr sz="850" b="1">
                           <a:solidFill>
                             <a:srgbClr val="0A2373"/>
                           </a:solidFill>
@@ -31518,7 +31964,7 @@
                         <a:spcAft>
                           <a:spcPts val="100"/>
                         </a:spcAft>
-                        <a:defRPr sz="950" b="1">
+                        <a:defRPr sz="850" b="1">
                           <a:solidFill>
                             <a:srgbClr val="0A2373"/>
                           </a:solidFill>
@@ -31559,7 +32005,7 @@
                         <a:spcAft>
                           <a:spcPts val="100"/>
                         </a:spcAft>
-                        <a:defRPr sz="950" b="0">
+                        <a:defRPr sz="850" b="0">
                           <a:solidFill>
                             <a:srgbClr val="11151A"/>
                           </a:solidFill>
@@ -31575,7 +32021,7 @@
                         <a:spcAft>
                           <a:spcPts val="100"/>
                         </a:spcAft>
-                        <a:defRPr sz="950" b="0">
+                        <a:defRPr sz="850" b="0">
                           <a:solidFill>
                             <a:srgbClr val="11151A"/>
                           </a:solidFill>
@@ -31616,7 +32062,7 @@
                         <a:spcAft>
                           <a:spcPts val="100"/>
                         </a:spcAft>
-                        <a:defRPr sz="950" b="0">
+                        <a:defRPr sz="850" b="0">
                           <a:solidFill>
                             <a:srgbClr val="11151A"/>
                           </a:solidFill>
@@ -31657,7 +32103,7 @@
                         <a:spcAft>
                           <a:spcPts val="100"/>
                         </a:spcAft>
-                        <a:defRPr sz="950" b="0">
+                        <a:defRPr sz="850" b="0">
                           <a:solidFill>
                             <a:srgbClr val="11151A"/>
                           </a:solidFill>
@@ -31698,7 +32144,7 @@
                         <a:spcAft>
                           <a:spcPts val="100"/>
                         </a:spcAft>
-                        <a:defRPr sz="950" b="0">
+                        <a:defRPr sz="850" b="0">
                           <a:solidFill>
                             <a:srgbClr val="11151A"/>
                           </a:solidFill>

--- a/pptx/output/delivered/supporting/Vopak_Manish_Handback_2026_10_07.pptx
+++ b/pptx/output/delivered/supporting/Vopak_Manish_Handback_2026_10_07.pptx
@@ -12581,7 +12581,7 @@
                         </a:defRPr>
                       </a:pPr>
                       <a:r>
-                        <a:t>This deck, the hand-back note, a 21-item decision log, the workshop workbook with history from 2012, and 288 figures in the current pack checked with none differing</a:t>
+                        <a:t>This deck, the hand-back note, a 22-item decision log, the workshop workbook with history from 2012, and 288 figures in the current pack checked with none differing</a:t>
                       </a:r>
                     </a:p>
                   </a:txBody>
@@ -13009,7 +13009,7 @@
           <a:lstStyle/>
           <a:p>
             <a:r>
-              <a:t>Decision log: 3 ready, 9 proposed, 9 unresolved</a:t>
+              <a:t>Decision log: 3 ready, 9 proposed, 10 unresolved</a:t>
             </a:r>
           </a:p>
         </p:txBody>
@@ -13048,7 +13048,7 @@
               </a:defRPr>
             </a:pPr>
             <a:r>
-              <a:t>Decisions for Nigel | the nine that are unresolved, with the analyst's proposal | full log in the csv</a:t>
+              <a:t>Decisions for Nigel | the 10 that are unresolved, with the analyst's proposal | full log in the csv</a:t>
             </a:r>
           </a:p>
         </p:txBody>
@@ -13187,17 +13187,17 @@
                 <a:gridCol w="5257800"/>
                 <a:gridCol w="2560320"/>
               </a:tblGrid>
-              <a:tr h="429768">
-                <a:tc>
-                  <a:txBody>
-                    <a:bodyPr/>
-                    <a:lstStyle/>
-                    <a:p>
-                      <a:pPr>
-                        <a:spcAft>
-                          <a:spcPts val="100"/>
-                        </a:spcAft>
-                        <a:defRPr sz="850" b="1">
+              <a:tr h="390698">
+                <a:tc>
+                  <a:txBody>
+                    <a:bodyPr/>
+                    <a:lstStyle/>
+                    <a:p>
+                      <a:pPr>
+                        <a:spcAft>
+                          <a:spcPts val="100"/>
+                        </a:spcAft>
+                        <a:defRPr sz="800" b="1">
                           <a:solidFill>
                             <a:srgbClr val="0A2373"/>
                           </a:solidFill>
@@ -13238,7 +13238,7 @@
                         <a:spcAft>
                           <a:spcPts val="100"/>
                         </a:spcAft>
-                        <a:defRPr sz="850" b="1">
+                        <a:defRPr sz="800" b="1">
                           <a:solidFill>
                             <a:srgbClr val="11151A"/>
                           </a:solidFill>
@@ -13279,7 +13279,7 @@
                         <a:spcAft>
                           <a:spcPts val="100"/>
                         </a:spcAft>
-                        <a:defRPr sz="850" b="1">
+                        <a:defRPr sz="800" b="1">
                           <a:solidFill>
                             <a:srgbClr val="11151A"/>
                           </a:solidFill>
@@ -13312,17 +13312,17 @@
                   </a:tcPr>
                 </a:tc>
               </a:tr>
-              <a:tr h="429768">
-                <a:tc>
-                  <a:txBody>
-                    <a:bodyPr/>
-                    <a:lstStyle/>
-                    <a:p>
-                      <a:pPr>
-                        <a:spcAft>
-                          <a:spcPts val="100"/>
-                        </a:spcAft>
-                        <a:defRPr sz="850" b="1">
+              <a:tr h="390698">
+                <a:tc>
+                  <a:txBody>
+                    <a:bodyPr/>
+                    <a:lstStyle/>
+                    <a:p>
+                      <a:pPr>
+                        <a:spcAft>
+                          <a:spcPts val="100"/>
+                        </a:spcAft>
+                        <a:defRPr sz="800" b="1">
                           <a:solidFill>
                             <a:srgbClr val="0A2373"/>
                           </a:solidFill>
@@ -13363,7 +13363,7 @@
                         <a:spcAft>
                           <a:spcPts val="100"/>
                         </a:spcAft>
-                        <a:defRPr sz="850" b="0">
+                        <a:defRPr sz="800" b="0">
                           <a:solidFill>
                             <a:srgbClr val="11151A"/>
                           </a:solidFill>
@@ -13404,7 +13404,7 @@
                         <a:spcAft>
                           <a:spcPts val="100"/>
                         </a:spcAft>
-                        <a:defRPr sz="850" b="0">
+                        <a:defRPr sz="800" b="0">
                           <a:solidFill>
                             <a:srgbClr val="11151A"/>
                           </a:solidFill>
@@ -13437,17 +13437,17 @@
                   </a:tcPr>
                 </a:tc>
               </a:tr>
-              <a:tr h="429768">
-                <a:tc>
-                  <a:txBody>
-                    <a:bodyPr/>
-                    <a:lstStyle/>
-                    <a:p>
-                      <a:pPr>
-                        <a:spcAft>
-                          <a:spcPts val="100"/>
-                        </a:spcAft>
-                        <a:defRPr sz="850" b="1">
+              <a:tr h="390698">
+                <a:tc>
+                  <a:txBody>
+                    <a:bodyPr/>
+                    <a:lstStyle/>
+                    <a:p>
+                      <a:pPr>
+                        <a:spcAft>
+                          <a:spcPts val="100"/>
+                        </a:spcAft>
+                        <a:defRPr sz="800" b="1">
                           <a:solidFill>
                             <a:srgbClr val="0A2373"/>
                           </a:solidFill>
@@ -13488,7 +13488,7 @@
                         <a:spcAft>
                           <a:spcPts val="100"/>
                         </a:spcAft>
-                        <a:defRPr sz="850" b="0">
+                        <a:defRPr sz="800" b="0">
                           <a:solidFill>
                             <a:srgbClr val="11151A"/>
                           </a:solidFill>
@@ -13529,7 +13529,7 @@
                         <a:spcAft>
                           <a:spcPts val="100"/>
                         </a:spcAft>
-                        <a:defRPr sz="850" b="0">
+                        <a:defRPr sz="800" b="0">
                           <a:solidFill>
                             <a:srgbClr val="11151A"/>
                           </a:solidFill>
@@ -13562,17 +13562,17 @@
                   </a:tcPr>
                 </a:tc>
               </a:tr>
-              <a:tr h="429768">
-                <a:tc>
-                  <a:txBody>
-                    <a:bodyPr/>
-                    <a:lstStyle/>
-                    <a:p>
-                      <a:pPr>
-                        <a:spcAft>
-                          <a:spcPts val="100"/>
-                        </a:spcAft>
-                        <a:defRPr sz="850" b="1">
+              <a:tr h="390698">
+                <a:tc>
+                  <a:txBody>
+                    <a:bodyPr/>
+                    <a:lstStyle/>
+                    <a:p>
+                      <a:pPr>
+                        <a:spcAft>
+                          <a:spcPts val="100"/>
+                        </a:spcAft>
+                        <a:defRPr sz="800" b="1">
                           <a:solidFill>
                             <a:srgbClr val="0A2373"/>
                           </a:solidFill>
@@ -13613,7 +13613,7 @@
                         <a:spcAft>
                           <a:spcPts val="100"/>
                         </a:spcAft>
-                        <a:defRPr sz="850" b="0">
+                        <a:defRPr sz="800" b="0">
                           <a:solidFill>
                             <a:srgbClr val="11151A"/>
                           </a:solidFill>
@@ -13654,7 +13654,7 @@
                         <a:spcAft>
                           <a:spcPts val="100"/>
                         </a:spcAft>
-                        <a:defRPr sz="850" b="0">
+                        <a:defRPr sz="800" b="0">
                           <a:solidFill>
                             <a:srgbClr val="11151A"/>
                           </a:solidFill>
@@ -13687,17 +13687,17 @@
                   </a:tcPr>
                 </a:tc>
               </a:tr>
-              <a:tr h="429768">
-                <a:tc>
-                  <a:txBody>
-                    <a:bodyPr/>
-                    <a:lstStyle/>
-                    <a:p>
-                      <a:pPr>
-                        <a:spcAft>
-                          <a:spcPts val="100"/>
-                        </a:spcAft>
-                        <a:defRPr sz="850" b="1">
+              <a:tr h="390698">
+                <a:tc>
+                  <a:txBody>
+                    <a:bodyPr/>
+                    <a:lstStyle/>
+                    <a:p>
+                      <a:pPr>
+                        <a:spcAft>
+                          <a:spcPts val="100"/>
+                        </a:spcAft>
+                        <a:defRPr sz="800" b="1">
                           <a:solidFill>
                             <a:srgbClr val="0A2373"/>
                           </a:solidFill>
@@ -13738,7 +13738,7 @@
                         <a:spcAft>
                           <a:spcPts val="100"/>
                         </a:spcAft>
-                        <a:defRPr sz="850" b="0">
+                        <a:defRPr sz="800" b="0">
                           <a:solidFill>
                             <a:srgbClr val="11151A"/>
                           </a:solidFill>
@@ -13779,7 +13779,7 @@
                         <a:spcAft>
                           <a:spcPts val="100"/>
                         </a:spcAft>
-                        <a:defRPr sz="850" b="0">
+                        <a:defRPr sz="800" b="0">
                           <a:solidFill>
                             <a:srgbClr val="11151A"/>
                           </a:solidFill>
@@ -13812,17 +13812,17 @@
                   </a:tcPr>
                 </a:tc>
               </a:tr>
-              <a:tr h="429768">
-                <a:tc>
-                  <a:txBody>
-                    <a:bodyPr/>
-                    <a:lstStyle/>
-                    <a:p>
-                      <a:pPr>
-                        <a:spcAft>
-                          <a:spcPts val="100"/>
-                        </a:spcAft>
-                        <a:defRPr sz="850" b="1">
+              <a:tr h="390698">
+                <a:tc>
+                  <a:txBody>
+                    <a:bodyPr/>
+                    <a:lstStyle/>
+                    <a:p>
+                      <a:pPr>
+                        <a:spcAft>
+                          <a:spcPts val="100"/>
+                        </a:spcAft>
+                        <a:defRPr sz="800" b="1">
                           <a:solidFill>
                             <a:srgbClr val="0A2373"/>
                           </a:solidFill>
@@ -13863,7 +13863,7 @@
                         <a:spcAft>
                           <a:spcPts val="100"/>
                         </a:spcAft>
-                        <a:defRPr sz="850" b="0">
+                        <a:defRPr sz="800" b="0">
                           <a:solidFill>
                             <a:srgbClr val="11151A"/>
                           </a:solidFill>
@@ -13904,7 +13904,7 @@
                         <a:spcAft>
                           <a:spcPts val="100"/>
                         </a:spcAft>
-                        <a:defRPr sz="850" b="0">
+                        <a:defRPr sz="800" b="0">
                           <a:solidFill>
                             <a:srgbClr val="11151A"/>
                           </a:solidFill>
@@ -13937,17 +13937,17 @@
                   </a:tcPr>
                 </a:tc>
               </a:tr>
-              <a:tr h="429768">
-                <a:tc>
-                  <a:txBody>
-                    <a:bodyPr/>
-                    <a:lstStyle/>
-                    <a:p>
-                      <a:pPr>
-                        <a:spcAft>
-                          <a:spcPts val="100"/>
-                        </a:spcAft>
-                        <a:defRPr sz="850" b="1">
+              <a:tr h="390698">
+                <a:tc>
+                  <a:txBody>
+                    <a:bodyPr/>
+                    <a:lstStyle/>
+                    <a:p>
+                      <a:pPr>
+                        <a:spcAft>
+                          <a:spcPts val="100"/>
+                        </a:spcAft>
+                        <a:defRPr sz="800" b="1">
                           <a:solidFill>
                             <a:srgbClr val="0A2373"/>
                           </a:solidFill>
@@ -13988,7 +13988,7 @@
                         <a:spcAft>
                           <a:spcPts val="100"/>
                         </a:spcAft>
-                        <a:defRPr sz="850" b="0">
+                        <a:defRPr sz="800" b="0">
                           <a:solidFill>
                             <a:srgbClr val="11151A"/>
                           </a:solidFill>
@@ -14029,7 +14029,7 @@
                         <a:spcAft>
                           <a:spcPts val="100"/>
                         </a:spcAft>
-                        <a:defRPr sz="850" b="0">
+                        <a:defRPr sz="800" b="0">
                           <a:solidFill>
                             <a:srgbClr val="11151A"/>
                           </a:solidFill>
@@ -14062,17 +14062,17 @@
                   </a:tcPr>
                 </a:tc>
               </a:tr>
-              <a:tr h="429768">
-                <a:tc>
-                  <a:txBody>
-                    <a:bodyPr/>
-                    <a:lstStyle/>
-                    <a:p>
-                      <a:pPr>
-                        <a:spcAft>
-                          <a:spcPts val="100"/>
-                        </a:spcAft>
-                        <a:defRPr sz="850" b="1">
+              <a:tr h="390698">
+                <a:tc>
+                  <a:txBody>
+                    <a:bodyPr/>
+                    <a:lstStyle/>
+                    <a:p>
+                      <a:pPr>
+                        <a:spcAft>
+                          <a:spcPts val="100"/>
+                        </a:spcAft>
+                        <a:defRPr sz="800" b="1">
                           <a:solidFill>
                             <a:srgbClr val="0A2373"/>
                           </a:solidFill>
@@ -14113,7 +14113,7 @@
                         <a:spcAft>
                           <a:spcPts val="100"/>
                         </a:spcAft>
-                        <a:defRPr sz="850" b="0">
+                        <a:defRPr sz="800" b="0">
                           <a:solidFill>
                             <a:srgbClr val="11151A"/>
                           </a:solidFill>
@@ -14154,7 +14154,7 @@
                         <a:spcAft>
                           <a:spcPts val="100"/>
                         </a:spcAft>
-                        <a:defRPr sz="850" b="0">
+                        <a:defRPr sz="800" b="0">
                           <a:solidFill>
                             <a:srgbClr val="11151A"/>
                           </a:solidFill>
@@ -14187,17 +14187,17 @@
                   </a:tcPr>
                 </a:tc>
               </a:tr>
-              <a:tr h="429768">
-                <a:tc>
-                  <a:txBody>
-                    <a:bodyPr/>
-                    <a:lstStyle/>
-                    <a:p>
-                      <a:pPr>
-                        <a:spcAft>
-                          <a:spcPts val="100"/>
-                        </a:spcAft>
-                        <a:defRPr sz="850" b="1">
+              <a:tr h="390698">
+                <a:tc>
+                  <a:txBody>
+                    <a:bodyPr/>
+                    <a:lstStyle/>
+                    <a:p>
+                      <a:pPr>
+                        <a:spcAft>
+                          <a:spcPts val="100"/>
+                        </a:spcAft>
+                        <a:defRPr sz="800" b="1">
                           <a:solidFill>
                             <a:srgbClr val="0A2373"/>
                           </a:solidFill>
@@ -14238,7 +14238,7 @@
                         <a:spcAft>
                           <a:spcPts val="100"/>
                         </a:spcAft>
-                        <a:defRPr sz="850" b="0">
+                        <a:defRPr sz="800" b="0">
                           <a:solidFill>
                             <a:srgbClr val="11151A"/>
                           </a:solidFill>
@@ -14279,7 +14279,7 @@
                         <a:spcAft>
                           <a:spcPts val="100"/>
                         </a:spcAft>
-                        <a:defRPr sz="850" b="0">
+                        <a:defRPr sz="800" b="0">
                           <a:solidFill>
                             <a:srgbClr val="11151A"/>
                           </a:solidFill>
@@ -14312,17 +14312,17 @@
                   </a:tcPr>
                 </a:tc>
               </a:tr>
-              <a:tr h="429768">
-                <a:tc>
-                  <a:txBody>
-                    <a:bodyPr/>
-                    <a:lstStyle/>
-                    <a:p>
-                      <a:pPr>
-                        <a:spcAft>
-                          <a:spcPts val="100"/>
-                        </a:spcAft>
-                        <a:defRPr sz="850" b="1">
+              <a:tr h="390698">
+                <a:tc>
+                  <a:txBody>
+                    <a:bodyPr/>
+                    <a:lstStyle/>
+                    <a:p>
+                      <a:pPr>
+                        <a:spcAft>
+                          <a:spcPts val="100"/>
+                        </a:spcAft>
+                        <a:defRPr sz="800" b="1">
                           <a:solidFill>
                             <a:srgbClr val="0A2373"/>
                           </a:solidFill>
@@ -14363,7 +14363,7 @@
                         <a:spcAft>
                           <a:spcPts val="100"/>
                         </a:spcAft>
-                        <a:defRPr sz="850" b="0">
+                        <a:defRPr sz="800" b="0">
                           <a:solidFill>
                             <a:srgbClr val="11151A"/>
                           </a:solidFill>
@@ -14404,7 +14404,7 @@
                         <a:spcAft>
                           <a:spcPts val="100"/>
                         </a:spcAft>
-                        <a:defRPr sz="850" b="0">
+                        <a:defRPr sz="800" b="0">
                           <a:solidFill>
                             <a:srgbClr val="11151A"/>
                           </a:solidFill>
@@ -14413,6 +14413,131 @@
                       </a:pPr>
                       <a:r>
                         <a:t>Unchanged</a:t>
+                      </a:r>
+                    </a:p>
+                  </a:txBody>
+                  <a:tcPr marL="64008" marR="64008" marT="54864" marB="27432" anchor="t">
+                    <a:lnL w="0">
+                      <a:noFill/>
+                    </a:lnL>
+                    <a:lnR w="0">
+                      <a:noFill/>
+                    </a:lnR>
+                    <a:lnT w="0">
+                      <a:noFill/>
+                    </a:lnT>
+                    <a:lnB w="5080">
+                      <a:solidFill>
+                        <a:srgbClr val="B8B8B8"/>
+                      </a:solidFill>
+                    </a:lnB>
+                    <a:solidFill>
+                      <a:srgbClr val="FFFFFF"/>
+                    </a:solidFill>
+                  </a:tcPr>
+                </a:tc>
+              </a:tr>
+              <a:tr h="390700">
+                <a:tc>
+                  <a:txBody>
+                    <a:bodyPr/>
+                    <a:lstStyle/>
+                    <a:p>
+                      <a:pPr>
+                        <a:spcAft>
+                          <a:spcPts val="100"/>
+                        </a:spcAft>
+                        <a:defRPr sz="800" b="1">
+                          <a:solidFill>
+                            <a:srgbClr val="0A2373"/>
+                          </a:solidFill>
+                          <a:latin typeface="Lato"/>
+                        </a:defRPr>
+                      </a:pPr>
+                      <a:r>
+                        <a:t>D22  Power fleet: the three cases and the assumptions behind them</a:t>
+                      </a:r>
+                    </a:p>
+                  </a:txBody>
+                  <a:tcPr marL="64008" marR="64008" marT="54864" marB="27432" anchor="t">
+                    <a:lnL w="0">
+                      <a:noFill/>
+                    </a:lnL>
+                    <a:lnR w="0">
+                      <a:noFill/>
+                    </a:lnR>
+                    <a:lnT w="0">
+                      <a:noFill/>
+                    </a:lnT>
+                    <a:lnB w="5080">
+                      <a:solidFill>
+                        <a:srgbClr val="B8B8B8"/>
+                      </a:solidFill>
+                    </a:lnB>
+                    <a:solidFill>
+                      <a:srgbClr val="FFFFFF"/>
+                    </a:solidFill>
+                  </a:tcPr>
+                </a:tc>
+                <a:tc>
+                  <a:txBody>
+                    <a:bodyPr/>
+                    <a:lstStyle/>
+                    <a:p>
+                      <a:pPr>
+                        <a:spcAft>
+                          <a:spcPts val="100"/>
+                        </a:spcAft>
+                        <a:defRPr sz="800" b="0">
+                          <a:solidFill>
+                            <a:srgbClr val="11151A"/>
+                          </a:solidFill>
+                          <a:latin typeface="Lato"/>
+                        </a:defRPr>
+                      </a:pPr>
+                      <a:r>
+                        <a:t>Fleet defined: Ankerlig Gourikwa Avon Dedisa (3,089 MW). Low / medium / high give 20 / 637 / 4,224 million litres from 2031. Unsourced: 10% of output on diesel when gas is available; 40% load factor on gas; 0.31 litres per kWh; Avon and Dedisa continuing after 2030-2031; 6 GW of gas turbines sited at Camden Grootvlei Hendrina Arnot and Kriel; no gas reaching them in the high case</a:t>
+                      </a:r>
+                    </a:p>
+                  </a:txBody>
+                  <a:tcPr marL="64008" marR="64008" marT="54864" marB="27432" anchor="t">
+                    <a:lnL w="0">
+                      <a:noFill/>
+                    </a:lnL>
+                    <a:lnR w="0">
+                      <a:noFill/>
+                    </a:lnR>
+                    <a:lnT w="0">
+                      <a:noFill/>
+                    </a:lnT>
+                    <a:lnB w="5080">
+                      <a:solidFill>
+                        <a:srgbClr val="B8B8B8"/>
+                      </a:solidFill>
+                    </a:lnB>
+                    <a:solidFill>
+                      <a:srgbClr val="FFFFFF"/>
+                    </a:solidFill>
+                  </a:tcPr>
+                </a:tc>
+                <a:tc>
+                  <a:txBody>
+                    <a:bodyPr/>
+                    <a:lstStyle/>
+                    <a:p>
+                      <a:pPr>
+                        <a:spcAft>
+                          <a:spcPts val="100"/>
+                        </a:spcAft>
+                        <a:defRPr sz="800" b="0">
+                          <a:solidFill>
+                            <a:srgbClr val="11151A"/>
+                          </a:solidFill>
+                          <a:latin typeface="Lato"/>
+                        </a:defRPr>
+                      </a:pPr>
+                      <a:r>
+                        <a:t>Accept the fleet; confirm or change each case setting; replaces the two placeholder stations in the model</a:t>
                       </a:r>
                     </a:p>
                   </a:txBody>

--- a/pptx/output/delivered/supporting/Vopak_Manish_Handback_2026_10_07.pptx
+++ b/pptx/output/delivered/supporting/Vopak_Manish_Handback_2026_10_07.pptx
@@ -23,6 +23,8 @@
     <p:sldId id="273" r:id="rId26"/>
     <p:sldId id="274" r:id="rId27"/>
     <p:sldId id="275" r:id="rId28"/>
+    <p:sldId id="276" r:id="rId29"/>
+    <p:sldId id="277" r:id="rId30"/>
     <p:sldId id="261" r:id="rId18"/>
   </p:sldIdLst>
   <p:sldSz cx="11588750" cy="6858000"/>
@@ -887,6 +889,538 @@
         <c:crossAx val="2118791784"/>
         <c:crosses val="autoZero"/>
         <c:majorUnit val="3.0"/>
+      </c:valAx>
+    </c:plotArea>
+    <c:legend>
+      <c:legendPos val="t"/>
+      <c:layout/>
+      <c:overlay val="0"/>
+    </c:legend>
+    <c:plotVisOnly val="1"/>
+    <c:dispBlanksAs val="gap"/>
+    <c:showDLblsOverMax val="0"/>
+  </c:chart>
+  <c:txPr>
+    <a:bodyPr/>
+    <a:lstStyle/>
+    <a:p>
+      <a:pPr>
+        <a:defRPr sz="1000">
+          <a:solidFill>
+            <a:srgbClr val="11151A"/>
+          </a:solidFill>
+          <a:latin typeface="Lato"/>
+        </a:defRPr>
+      </a:pPr>
+      <a:endParaRPr lang="en-US"/>
+    </a:p>
+  </c:txPr>
+  <c:externalData r:id="rId1">
+    <c:autoUpdate val="0"/>
+  </c:externalData>
+</c:chartSpace>
+</file>
+
+<file path=ppt/charts/chart3.xml><?xml version="1.0" encoding="utf-8"?>
+<c:chartSpace xmlns:c="http://schemas.openxmlformats.org/drawingml/2006/chart" xmlns:a="http://schemas.openxmlformats.org/drawingml/2006/main" xmlns:r="http://schemas.openxmlformats.org/officeDocument/2006/relationships">
+  <c:date1904 val="0"/>
+  <c:chart>
+    <c:title>
+      <c:tx>
+        <c:rich>
+          <a:bodyPr/>
+          <a:lstStyle/>
+          <a:p>
+            <a:r>
+              <a:rPr sz="1100" b="1">
+                <a:latin typeface="Lato"/>
+              </a:rPr>
+              <a:t>Diesel for power, million litres a year</a:t>
+            </a:r>
+          </a:p>
+        </c:rich>
+      </c:tx>
+      <c:layout/>
+      <c:overlay val="0"/>
+    </c:title>
+    <c:autoTitleDeleted val="0"/>
+    <c:plotArea>
+      <c:lineChart>
+        <c:grouping val="standard"/>
+        <c:varyColors val="0"/>
+        <c:ser>
+          <c:idx val="0"/>
+          <c:order val="0"/>
+          <c:tx>
+            <c:strRef>
+              <c:f>Sheet1!$B$1</c:f>
+              <c:strCache>
+                <c:ptCount val="1"/>
+                <c:pt idx="0">
+                  <c:v>Low</c:v>
+                </c:pt>
+              </c:strCache>
+            </c:strRef>
+          </c:tx>
+          <c:spPr>
+            <a:ln w="25400">
+              <a:solidFill>
+                <a:srgbClr val="7A828C"/>
+              </a:solidFill>
+              <a:prstDash val="dash"/>
+            </a:ln>
+          </c:spPr>
+          <c:marker>
+            <c:symbol val="circle"/>
+            <c:size val="6"/>
+            <c:spPr>
+              <a:solidFill>
+                <a:srgbClr val="7A828C"/>
+              </a:solidFill>
+              <a:ln>
+                <a:solidFill>
+                  <a:srgbClr val="FFFFFF"/>
+                </a:solidFill>
+              </a:ln>
+            </c:spPr>
+          </c:marker>
+          <c:cat>
+            <c:strRef>
+              <c:f>Sheet1!$A$2:$A$15</c:f>
+              <c:strCache>
+                <c:ptCount val="14"/>
+                <c:pt idx="0">
+                  <c:v>2022</c:v>
+                </c:pt>
+                <c:pt idx="1">
+                  <c:v>2023</c:v>
+                </c:pt>
+                <c:pt idx="2">
+                  <c:v>2024</c:v>
+                </c:pt>
+                <c:pt idx="3">
+                  <c:v>2025</c:v>
+                </c:pt>
+                <c:pt idx="4">
+                  <c:v>2026</c:v>
+                </c:pt>
+                <c:pt idx="5">
+                  <c:v>2027</c:v>
+                </c:pt>
+                <c:pt idx="6">
+                  <c:v>2028</c:v>
+                </c:pt>
+                <c:pt idx="7">
+                  <c:v>2029</c:v>
+                </c:pt>
+                <c:pt idx="8">
+                  <c:v>2030</c:v>
+                </c:pt>
+                <c:pt idx="9">
+                  <c:v>2031</c:v>
+                </c:pt>
+                <c:pt idx="10">
+                  <c:v>2032</c:v>
+                </c:pt>
+                <c:pt idx="11">
+                  <c:v>2033</c:v>
+                </c:pt>
+                <c:pt idx="12">
+                  <c:v>2034</c:v>
+                </c:pt>
+                <c:pt idx="13">
+                  <c:v>2035</c:v>
+                </c:pt>
+              </c:strCache>
+            </c:strRef>
+          </c:cat>
+          <c:val>
+            <c:numRef>
+              <c:f>Sheet1!$B$2:$B$15</c:f>
+              <c:numCache>
+                <c:formatCode>General</c:formatCode>
+                <c:ptCount val="14"/>
+                <c:pt idx="0">
+                  <c:v>301.1482395802973</c:v>
+                </c:pt>
+                <c:pt idx="1">
+                  <c:v>301.1482395802973</c:v>
+                </c:pt>
+                <c:pt idx="2">
+                  <c:v>301.1482395802973</c:v>
+                </c:pt>
+                <c:pt idx="3">
+                  <c:v>301.1482395802973</c:v>
+                </c:pt>
+                <c:pt idx="4">
+                  <c:v>301.1482395802973</c:v>
+                </c:pt>
+                <c:pt idx="5">
+                  <c:v>301.1482395802973</c:v>
+                </c:pt>
+                <c:pt idx="6">
+                  <c:v>118.29500612066454</c:v>
+                </c:pt>
+                <c:pt idx="7">
+                  <c:v>118.29500612066454</c:v>
+                </c:pt>
+                <c:pt idx="8">
+                  <c:v>85.63567939376274</c:v>
+                </c:pt>
+                <c:pt idx="9">
+                  <c:v>20.317025939959194</c:v>
+                </c:pt>
+                <c:pt idx="10">
+                  <c:v>20.317025939959194</c:v>
+                </c:pt>
+                <c:pt idx="11">
+                  <c:v>20.317025939959194</c:v>
+                </c:pt>
+                <c:pt idx="12">
+                  <c:v>20.317025939959194</c:v>
+                </c:pt>
+                <c:pt idx="13">
+                  <c:v>20.317025939959194</c:v>
+                </c:pt>
+              </c:numCache>
+            </c:numRef>
+          </c:val>
+          <c:smooth val="0"/>
+        </c:ser>
+        <c:ser>
+          <c:idx val="1"/>
+          <c:order val="1"/>
+          <c:tx>
+            <c:strRef>
+              <c:f>Sheet1!$C$1</c:f>
+              <c:strCache>
+                <c:ptCount val="1"/>
+                <c:pt idx="0">
+                  <c:v>Medium</c:v>
+                </c:pt>
+              </c:strCache>
+            </c:strRef>
+          </c:tx>
+          <c:spPr>
+            <a:ln w="25400">
+              <a:solidFill>
+                <a:srgbClr val="546CA2"/>
+              </a:solidFill>
+            </a:ln>
+          </c:spPr>
+          <c:marker>
+            <c:symbol val="circle"/>
+            <c:size val="6"/>
+            <c:spPr>
+              <a:solidFill>
+                <a:srgbClr val="546CA2"/>
+              </a:solidFill>
+              <a:ln>
+                <a:solidFill>
+                  <a:srgbClr val="FFFFFF"/>
+                </a:solidFill>
+              </a:ln>
+            </c:spPr>
+          </c:marker>
+          <c:cat>
+            <c:strRef>
+              <c:f>Sheet1!$A$2:$A$15</c:f>
+              <c:strCache>
+                <c:ptCount val="14"/>
+                <c:pt idx="0">
+                  <c:v>2022</c:v>
+                </c:pt>
+                <c:pt idx="1">
+                  <c:v>2023</c:v>
+                </c:pt>
+                <c:pt idx="2">
+                  <c:v>2024</c:v>
+                </c:pt>
+                <c:pt idx="3">
+                  <c:v>2025</c:v>
+                </c:pt>
+                <c:pt idx="4">
+                  <c:v>2026</c:v>
+                </c:pt>
+                <c:pt idx="5">
+                  <c:v>2027</c:v>
+                </c:pt>
+                <c:pt idx="6">
+                  <c:v>2028</c:v>
+                </c:pt>
+                <c:pt idx="7">
+                  <c:v>2029</c:v>
+                </c:pt>
+                <c:pt idx="8">
+                  <c:v>2030</c:v>
+                </c:pt>
+                <c:pt idx="9">
+                  <c:v>2031</c:v>
+                </c:pt>
+                <c:pt idx="10">
+                  <c:v>2032</c:v>
+                </c:pt>
+                <c:pt idx="11">
+                  <c:v>2033</c:v>
+                </c:pt>
+                <c:pt idx="12">
+                  <c:v>2034</c:v>
+                </c:pt>
+                <c:pt idx="13">
+                  <c:v>2035</c:v>
+                </c:pt>
+              </c:strCache>
+            </c:strRef>
+          </c:cat>
+          <c:val>
+            <c:numRef>
+              <c:f>Sheet1!$C$2:$C$15</c:f>
+              <c:numCache>
+                <c:formatCode>General</c:formatCode>
+                <c:ptCount val="14"/>
+                <c:pt idx="0">
+                  <c:v>792.0840629554066</c:v>
+                </c:pt>
+                <c:pt idx="1">
+                  <c:v>792.0840629554066</c:v>
+                </c:pt>
+                <c:pt idx="2">
+                  <c:v>792.0840629554066</c:v>
+                </c:pt>
+                <c:pt idx="3">
+                  <c:v>792.0840629554066</c:v>
+                </c:pt>
+                <c:pt idx="4">
+                  <c:v>792.0840629554066</c:v>
+                </c:pt>
+                <c:pt idx="5">
+                  <c:v>792.0840629554066</c:v>
+                </c:pt>
+                <c:pt idx="6">
+                  <c:v>311.1410819003206</c:v>
+                </c:pt>
+                <c:pt idx="7">
+                  <c:v>311.1410819003206</c:v>
+                </c:pt>
+                <c:pt idx="8">
+                  <c:v>637.0130819003207</c:v>
+                </c:pt>
+                <c:pt idx="9">
+                  <c:v>637.0130819003207</c:v>
+                </c:pt>
+                <c:pt idx="10">
+                  <c:v>637.0130819003207</c:v>
+                </c:pt>
+                <c:pt idx="11">
+                  <c:v>637.0130819003207</c:v>
+                </c:pt>
+                <c:pt idx="12">
+                  <c:v>637.0130819003207</c:v>
+                </c:pt>
+                <c:pt idx="13">
+                  <c:v>637.0130819003207</c:v>
+                </c:pt>
+              </c:numCache>
+            </c:numRef>
+          </c:val>
+          <c:smooth val="0"/>
+        </c:ser>
+        <c:ser>
+          <c:idx val="2"/>
+          <c:order val="2"/>
+          <c:tx>
+            <c:strRef>
+              <c:f>Sheet1!$D$1</c:f>
+              <c:strCache>
+                <c:ptCount val="1"/>
+                <c:pt idx="0">
+                  <c:v>High</c:v>
+                </c:pt>
+              </c:strCache>
+            </c:strRef>
+          </c:tx>
+          <c:spPr>
+            <a:ln w="25400">
+              <a:solidFill>
+                <a:srgbClr val="0A2373"/>
+              </a:solidFill>
+            </a:ln>
+          </c:spPr>
+          <c:marker>
+            <c:symbol val="circle"/>
+            <c:size val="6"/>
+            <c:spPr>
+              <a:solidFill>
+                <a:srgbClr val="0A2373"/>
+              </a:solidFill>
+              <a:ln>
+                <a:solidFill>
+                  <a:srgbClr val="FFFFFF"/>
+                </a:solidFill>
+              </a:ln>
+            </c:spPr>
+          </c:marker>
+          <c:cat>
+            <c:strRef>
+              <c:f>Sheet1!$A$2:$A$15</c:f>
+              <c:strCache>
+                <c:ptCount val="14"/>
+                <c:pt idx="0">
+                  <c:v>2022</c:v>
+                </c:pt>
+                <c:pt idx="1">
+                  <c:v>2023</c:v>
+                </c:pt>
+                <c:pt idx="2">
+                  <c:v>2024</c:v>
+                </c:pt>
+                <c:pt idx="3">
+                  <c:v>2025</c:v>
+                </c:pt>
+                <c:pt idx="4">
+                  <c:v>2026</c:v>
+                </c:pt>
+                <c:pt idx="5">
+                  <c:v>2027</c:v>
+                </c:pt>
+                <c:pt idx="6">
+                  <c:v>2028</c:v>
+                </c:pt>
+                <c:pt idx="7">
+                  <c:v>2029</c:v>
+                </c:pt>
+                <c:pt idx="8">
+                  <c:v>2030</c:v>
+                </c:pt>
+                <c:pt idx="9">
+                  <c:v>2031</c:v>
+                </c:pt>
+                <c:pt idx="10">
+                  <c:v>2032</c:v>
+                </c:pt>
+                <c:pt idx="11">
+                  <c:v>2033</c:v>
+                </c:pt>
+                <c:pt idx="12">
+                  <c:v>2034</c:v>
+                </c:pt>
+                <c:pt idx="13">
+                  <c:v>2035</c:v>
+                </c:pt>
+              </c:strCache>
+            </c:strRef>
+          </c:cat>
+          <c:val>
+            <c:numRef>
+              <c:f>Sheet1!$D$2:$D$15</c:f>
+              <c:numCache>
+                <c:formatCode>General</c:formatCode>
+                <c:ptCount val="14"/>
+                <c:pt idx="0">
+                  <c:v>1435.4081521422324</c:v>
+                </c:pt>
+                <c:pt idx="1">
+                  <c:v>1435.4081521422324</c:v>
+                </c:pt>
+                <c:pt idx="2">
+                  <c:v>1435.4081521422324</c:v>
+                </c:pt>
+                <c:pt idx="3">
+                  <c:v>1435.4081521422324</c:v>
+                </c:pt>
+                <c:pt idx="4">
+                  <c:v>1435.4081521422324</c:v>
+                </c:pt>
+                <c:pt idx="5">
+                  <c:v>1435.4081521422324</c:v>
+                </c:pt>
+                <c:pt idx="6">
+                  <c:v>1435.4081521422324</c:v>
+                </c:pt>
+                <c:pt idx="7">
+                  <c:v>1435.4081521422324</c:v>
+                </c:pt>
+                <c:pt idx="8">
+                  <c:v>4223.510746138152</c:v>
+                </c:pt>
+                <c:pt idx="9">
+                  <c:v>4223.510746138152</c:v>
+                </c:pt>
+                <c:pt idx="10">
+                  <c:v>4223.510746138152</c:v>
+                </c:pt>
+                <c:pt idx="11">
+                  <c:v>4223.510746138152</c:v>
+                </c:pt>
+                <c:pt idx="12">
+                  <c:v>4223.510746138152</c:v>
+                </c:pt>
+                <c:pt idx="13">
+                  <c:v>4223.510746138152</c:v>
+                </c:pt>
+              </c:numCache>
+            </c:numRef>
+          </c:val>
+          <c:smooth val="0"/>
+        </c:ser>
+        <c:marker val="1"/>
+        <c:smooth val="0"/>
+        <c:axId val="2118791784"/>
+        <c:axId val="2140495176"/>
+      </c:lineChart>
+      <c:catAx>
+        <c:axId val="2118791784"/>
+        <c:scaling>
+          <c:orientation val="minMax"/>
+        </c:scaling>
+        <c:delete val="0"/>
+        <c:axPos val="b"/>
+        <c:majorTickMark val="out"/>
+        <c:minorTickMark val="none"/>
+        <c:tickLblPos val="nextTo"/>
+        <c:spPr>
+          <a:ln>
+            <a:solidFill>
+              <a:srgbClr val="A0A0A0"/>
+            </a:solidFill>
+          </a:ln>
+        </c:spPr>
+        <c:crossAx val="2140495176"/>
+        <c:crosses val="autoZero"/>
+        <c:auto val="1"/>
+        <c:lblAlgn val="ctr"/>
+        <c:lblOffset val="100"/>
+        <c:noMultiLvlLbl val="0"/>
+      </c:catAx>
+      <c:valAx>
+        <c:axId val="2140495176"/>
+        <c:scaling>
+          <c:max val="5000.0"/>
+          <c:min val="0.0"/>
+        </c:scaling>
+        <c:delete val="0"/>
+        <c:axPos val="l"/>
+        <c:majorGridlines>
+          <c:spPr>
+            <a:ln>
+              <a:solidFill>
+                <a:srgbClr val="EEEEEE"/>
+              </a:solidFill>
+            </a:ln>
+          </c:spPr>
+        </c:majorGridlines>
+        <c:numFmt formatCode="#,##0" sourceLinked="0"/>
+        <c:majorTickMark val="out"/>
+        <c:minorTickMark val="none"/>
+        <c:tickLblPos val="nextTo"/>
+        <c:spPr>
+          <a:ln>
+            <a:noFill/>
+          </a:ln>
+        </c:spPr>
+        <c:crossAx val="2118791784"/>
+        <c:crosses val="autoZero"/>
+        <c:majorUnit val="1000.0"/>
       </c:valAx>
     </c:plotArea>
     <c:legend>
@@ -7734,6 +8268,4196 @@
           <a:lstStyle/>
           <a:p>
             <a:r>
+              <a:t>Four stations, 3,089 MW, burn diesel for power; eight coal stations stop by 2034</a:t>
+            </a:r>
+          </a:p>
+        </p:txBody>
+      </p:sp>
+      <p:sp>
+        <p:nvSpPr>
+          <p:cNvPr id="3" name="TextBox 2"/>
+          <p:cNvSpPr txBox="1"/>
+          <p:nvPr/>
+        </p:nvSpPr>
+        <p:spPr>
+          <a:xfrm>
+            <a:off x="457200" y="1627632"/>
+            <a:ext cx="10652760" cy="274320"/>
+          </a:xfrm>
+          <a:prstGeom prst="rect">
+            <a:avLst/>
+          </a:prstGeom>
+          <a:noFill/>
+        </p:spPr>
+        <p:txBody>
+          <a:bodyPr wrap="square" lIns="22860" rIns="22860" tIns="0" bIns="0">
+            <a:spAutoFit/>
+          </a:bodyPr>
+          <a:lstStyle/>
+          <a:p>
+            <a:pPr>
+              <a:spcAft>
+                <a:spcPts val="300"/>
+              </a:spcAft>
+              <a:defRPr sz="1300" b="1">
+                <a:solidFill>
+                  <a:srgbClr val="11151A"/>
+                </a:solidFill>
+                <a:latin typeface="Lato"/>
+              </a:defRPr>
+            </a:pPr>
+            <a:r>
+              <a:t>Power generation fleet | installed capacity | diesel stations today and coal stations being retired</a:t>
+            </a:r>
+          </a:p>
+        </p:txBody>
+      </p:sp>
+      <p:cxnSp>
+        <p:nvCxnSpPr>
+          <p:cNvPr id="4" name="Connector 3"/>
+          <p:cNvCxnSpPr/>
+          <p:nvPr/>
+        </p:nvCxnSpPr>
+        <p:spPr>
+          <a:xfrm>
+            <a:off x="457200" y="1920240"/>
+            <a:ext cx="10652760" cy="0"/>
+          </a:xfrm>
+          <a:prstGeom prst="line">
+            <a:avLst/>
+          </a:prstGeom>
+          <a:ln w="7620">
+            <a:solidFill>
+              <a:srgbClr val="A0A0A0"/>
+            </a:solidFill>
+          </a:ln>
+        </p:spPr>
+        <p:style>
+          <a:lnRef idx="2">
+            <a:schemeClr val="accent1"/>
+          </a:lnRef>
+          <a:fillRef idx="0">
+            <a:schemeClr val="accent1"/>
+          </a:fillRef>
+          <a:effectRef idx="1">
+            <a:schemeClr val="accent1"/>
+          </a:effectRef>
+          <a:fontRef idx="minor">
+            <a:schemeClr val="tx1"/>
+          </a:fontRef>
+        </p:style>
+      </p:cxnSp>
+      <p:sp>
+        <p:nvSpPr>
+          <p:cNvPr id="5" name="TextBox 4"/>
+          <p:cNvSpPr txBox="1"/>
+          <p:nvPr/>
+        </p:nvSpPr>
+        <p:spPr>
+          <a:xfrm>
+            <a:off x="457200" y="6547104"/>
+            <a:ext cx="9692640" cy="182880"/>
+          </a:xfrm>
+          <a:prstGeom prst="rect">
+            <a:avLst/>
+          </a:prstGeom>
+          <a:noFill/>
+        </p:spPr>
+        <p:txBody>
+          <a:bodyPr wrap="square" lIns="22860" rIns="22860" tIns="0" bIns="0">
+            <a:spAutoFit/>
+          </a:bodyPr>
+          <a:lstStyle/>
+          <a:p>
+            <a:pPr>
+              <a:spcAft>
+                <a:spcPts val="300"/>
+              </a:spcAft>
+              <a:defRPr sz="800" b="0">
+                <a:solidFill>
+                  <a:srgbClr val="11151A"/>
+                </a:solidFill>
+                <a:latin typeface="Lato"/>
+              </a:defRPr>
+            </a:pPr>
+            <a:r>
+              <a:t>Source: power_fleet_diesel.csv and the Power fleet sheet of the workshop workbook, manish-branch; Eskom fact sheet GX 0001 (July 2024) and the sources named in the file.</a:t>
+            </a:r>
+          </a:p>
+        </p:txBody>
+      </p:sp>
+      <p:sp>
+        <p:nvSpPr>
+          <p:cNvPr id="6" name="TextBox 5"/>
+          <p:cNvSpPr txBox="1"/>
+          <p:nvPr/>
+        </p:nvSpPr>
+        <p:spPr>
+          <a:xfrm>
+            <a:off x="457200" y="6711696"/>
+            <a:ext cx="2011680" cy="128016"/>
+          </a:xfrm>
+          <a:prstGeom prst="rect">
+            <a:avLst/>
+          </a:prstGeom>
+          <a:noFill/>
+        </p:spPr>
+        <p:txBody>
+          <a:bodyPr wrap="square" lIns="22860" rIns="22860" tIns="0" bIns="0">
+            <a:spAutoFit/>
+          </a:bodyPr>
+          <a:lstStyle/>
+          <a:p>
+            <a:pPr>
+              <a:spcAft>
+                <a:spcPts val="300"/>
+              </a:spcAft>
+              <a:defRPr sz="700" b="0">
+                <a:solidFill>
+                  <a:srgbClr val="11151A"/>
+                </a:solidFill>
+                <a:latin typeface="Lato"/>
+              </a:defRPr>
+            </a:pPr>
+            <a:r>
+              <a:t>Strictly Confidential</a:t>
+            </a:r>
+          </a:p>
+        </p:txBody>
+      </p:sp>
+      <p:sp>
+        <p:nvSpPr>
+          <p:cNvPr id="7" name="TextBox 6"/>
+          <p:cNvSpPr txBox="1"/>
+          <p:nvPr/>
+        </p:nvSpPr>
+        <p:spPr>
+          <a:xfrm>
+            <a:off x="457200" y="2011680"/>
+            <a:ext cx="4937760" cy="228600"/>
+          </a:xfrm>
+          <a:prstGeom prst="rect">
+            <a:avLst/>
+          </a:prstGeom>
+          <a:noFill/>
+        </p:spPr>
+        <p:txBody>
+          <a:bodyPr wrap="square" lIns="22860" rIns="22860" tIns="0" bIns="0">
+            <a:spAutoFit/>
+          </a:bodyPr>
+          <a:lstStyle/>
+          <a:p>
+            <a:pPr>
+              <a:spcAft>
+                <a:spcPts val="300"/>
+              </a:spcAft>
+              <a:defRPr sz="1150" b="1">
+                <a:solidFill>
+                  <a:srgbClr val="0A2373"/>
+                </a:solidFill>
+                <a:latin typeface="Lato"/>
+              </a:defRPr>
+            </a:pPr>
+            <a:r>
+              <a:t>Diesel stations today</a:t>
+            </a:r>
+          </a:p>
+        </p:txBody>
+      </p:sp>
+      <p:graphicFrame>
+        <p:nvGraphicFramePr>
+          <p:cNvPr id="8" name="Table 7"/>
+          <p:cNvGraphicFramePr>
+            <a:graphicFrameLocks noGrp="1"/>
+          </p:cNvGraphicFramePr>
+          <p:nvPr/>
+        </p:nvGraphicFramePr>
+        <p:xfrm>
+          <a:off x="457200" y="2267712"/>
+          <a:ext cx="5074920" cy="2011680"/>
+        </p:xfrm>
+        <a:graphic>
+          <a:graphicData uri="http://schemas.openxmlformats.org/drawingml/2006/table">
+            <a:tbl>
+              <a:tblPr firstRow="0" bandRow="0"/>
+              <a:tblGrid>
+                <a:gridCol w="1051560"/>
+                <a:gridCol w="1463040"/>
+                <a:gridCol w="548640"/>
+                <a:gridCol w="2011680"/>
+              </a:tblGrid>
+              <a:tr h="402336">
+                <a:tc>
+                  <a:txBody>
+                    <a:bodyPr/>
+                    <a:lstStyle/>
+                    <a:p>
+                      <a:pPr>
+                        <a:spcAft>
+                          <a:spcPts val="100"/>
+                        </a:spcAft>
+                        <a:defRPr sz="1000" b="1">
+                          <a:solidFill>
+                            <a:srgbClr val="0A2373"/>
+                          </a:solidFill>
+                          <a:latin typeface="Lato"/>
+                        </a:defRPr>
+                      </a:pPr>
+                      <a:r>
+                        <a:t>Station</a:t>
+                      </a:r>
+                    </a:p>
+                  </a:txBody>
+                  <a:tcPr marL="64008" marR="64008" marT="54864" marB="27432" anchor="t">
+                    <a:lnL w="0">
+                      <a:noFill/>
+                    </a:lnL>
+                    <a:lnR w="0">
+                      <a:noFill/>
+                    </a:lnR>
+                    <a:lnT w="0">
+                      <a:noFill/>
+                    </a:lnT>
+                    <a:lnB w="5080">
+                      <a:solidFill>
+                        <a:srgbClr val="B8B8B8"/>
+                      </a:solidFill>
+                    </a:lnB>
+                    <a:solidFill>
+                      <a:srgbClr val="FFFFFF"/>
+                    </a:solidFill>
+                  </a:tcPr>
+                </a:tc>
+                <a:tc>
+                  <a:txBody>
+                    <a:bodyPr/>
+                    <a:lstStyle/>
+                    <a:p>
+                      <a:pPr>
+                        <a:spcAft>
+                          <a:spcPts val="100"/>
+                        </a:spcAft>
+                        <a:defRPr sz="1000" b="1">
+                          <a:solidFill>
+                            <a:srgbClr val="11151A"/>
+                          </a:solidFill>
+                          <a:latin typeface="Lato"/>
+                        </a:defRPr>
+                      </a:pPr>
+                      <a:r>
+                        <a:t>Owner</a:t>
+                      </a:r>
+                    </a:p>
+                  </a:txBody>
+                  <a:tcPr marL="64008" marR="64008" marT="54864" marB="27432" anchor="t">
+                    <a:lnL w="0">
+                      <a:noFill/>
+                    </a:lnL>
+                    <a:lnR w="0">
+                      <a:noFill/>
+                    </a:lnR>
+                    <a:lnT w="0">
+                      <a:noFill/>
+                    </a:lnT>
+                    <a:lnB w="5080">
+                      <a:solidFill>
+                        <a:srgbClr val="B8B8B8"/>
+                      </a:solidFill>
+                    </a:lnB>
+                    <a:solidFill>
+                      <a:srgbClr val="FFFFFF"/>
+                    </a:solidFill>
+                  </a:tcPr>
+                </a:tc>
+                <a:tc>
+                  <a:txBody>
+                    <a:bodyPr/>
+                    <a:lstStyle/>
+                    <a:p>
+                      <a:pPr>
+                        <a:spcAft>
+                          <a:spcPts val="100"/>
+                        </a:spcAft>
+                        <a:defRPr sz="1000" b="1">
+                          <a:solidFill>
+                            <a:srgbClr val="11151A"/>
+                          </a:solidFill>
+                          <a:latin typeface="Lato"/>
+                        </a:defRPr>
+                      </a:pPr>
+                      <a:r>
+                        <a:t>MW</a:t>
+                      </a:r>
+                    </a:p>
+                  </a:txBody>
+                  <a:tcPr marL="64008" marR="64008" marT="54864" marB="27432" anchor="t">
+                    <a:lnL w="0">
+                      <a:noFill/>
+                    </a:lnL>
+                    <a:lnR w="0">
+                      <a:noFill/>
+                    </a:lnR>
+                    <a:lnT w="0">
+                      <a:noFill/>
+                    </a:lnT>
+                    <a:lnB w="5080">
+                      <a:solidFill>
+                        <a:srgbClr val="B8B8B8"/>
+                      </a:solidFill>
+                    </a:lnB>
+                    <a:solidFill>
+                      <a:srgbClr val="FFFFFF"/>
+                    </a:solidFill>
+                  </a:tcPr>
+                </a:tc>
+                <a:tc>
+                  <a:txBody>
+                    <a:bodyPr/>
+                    <a:lstStyle/>
+                    <a:p>
+                      <a:pPr>
+                        <a:spcAft>
+                          <a:spcPts val="100"/>
+                        </a:spcAft>
+                        <a:defRPr sz="1000" b="1">
+                          <a:solidFill>
+                            <a:srgbClr val="11151A"/>
+                          </a:solidFill>
+                          <a:latin typeface="Lato"/>
+                        </a:defRPr>
+                      </a:pPr>
+                      <a:r>
+                        <a:t>What changes</a:t>
+                      </a:r>
+                    </a:p>
+                  </a:txBody>
+                  <a:tcPr marL="64008" marR="64008" marT="54864" marB="27432" anchor="t">
+                    <a:lnL w="0">
+                      <a:noFill/>
+                    </a:lnL>
+                    <a:lnR w="0">
+                      <a:noFill/>
+                    </a:lnR>
+                    <a:lnT w="0">
+                      <a:noFill/>
+                    </a:lnT>
+                    <a:lnB w="5080">
+                      <a:solidFill>
+                        <a:srgbClr val="B8B8B8"/>
+                      </a:solidFill>
+                    </a:lnB>
+                    <a:solidFill>
+                      <a:srgbClr val="FFFFFF"/>
+                    </a:solidFill>
+                  </a:tcPr>
+                </a:tc>
+              </a:tr>
+              <a:tr h="402336">
+                <a:tc>
+                  <a:txBody>
+                    <a:bodyPr/>
+                    <a:lstStyle/>
+                    <a:p>
+                      <a:pPr>
+                        <a:spcAft>
+                          <a:spcPts val="100"/>
+                        </a:spcAft>
+                        <a:defRPr sz="1000" b="1">
+                          <a:solidFill>
+                            <a:srgbClr val="0A2373"/>
+                          </a:solidFill>
+                          <a:latin typeface="Lato"/>
+                        </a:defRPr>
+                      </a:pPr>
+                      <a:r>
+                        <a:t>Ankerlig</a:t>
+                      </a:r>
+                    </a:p>
+                  </a:txBody>
+                  <a:tcPr marL="64008" marR="64008" marT="54864" marB="27432" anchor="t">
+                    <a:lnL w="0">
+                      <a:noFill/>
+                    </a:lnL>
+                    <a:lnR w="0">
+                      <a:noFill/>
+                    </a:lnR>
+                    <a:lnT w="0">
+                      <a:noFill/>
+                    </a:lnT>
+                    <a:lnB w="5080">
+                      <a:solidFill>
+                        <a:srgbClr val="B8B8B8"/>
+                      </a:solidFill>
+                    </a:lnB>
+                    <a:solidFill>
+                      <a:srgbClr val="FFFFFF"/>
+                    </a:solidFill>
+                  </a:tcPr>
+                </a:tc>
+                <a:tc>
+                  <a:txBody>
+                    <a:bodyPr/>
+                    <a:lstStyle/>
+                    <a:p>
+                      <a:pPr>
+                        <a:spcAft>
+                          <a:spcPts val="100"/>
+                        </a:spcAft>
+                        <a:defRPr sz="1000" b="0">
+                          <a:solidFill>
+                            <a:srgbClr val="11151A"/>
+                          </a:solidFill>
+                          <a:latin typeface="Lato"/>
+                        </a:defRPr>
+                      </a:pPr>
+                      <a:r>
+                        <a:t>Eskom</a:t>
+                      </a:r>
+                    </a:p>
+                  </a:txBody>
+                  <a:tcPr marL="64008" marR="64008" marT="54864" marB="27432" anchor="t">
+                    <a:lnL w="0">
+                      <a:noFill/>
+                    </a:lnL>
+                    <a:lnR w="0">
+                      <a:noFill/>
+                    </a:lnR>
+                    <a:lnT w="0">
+                      <a:noFill/>
+                    </a:lnT>
+                    <a:lnB w="5080">
+                      <a:solidFill>
+                        <a:srgbClr val="B8B8B8"/>
+                      </a:solidFill>
+                    </a:lnB>
+                    <a:solidFill>
+                      <a:srgbClr val="FFFFFF"/>
+                    </a:solidFill>
+                  </a:tcPr>
+                </a:tc>
+                <a:tc>
+                  <a:txBody>
+                    <a:bodyPr/>
+                    <a:lstStyle/>
+                    <a:p>
+                      <a:pPr>
+                        <a:spcAft>
+                          <a:spcPts val="100"/>
+                        </a:spcAft>
+                        <a:defRPr sz="1000" b="0">
+                          <a:solidFill>
+                            <a:srgbClr val="11151A"/>
+                          </a:solidFill>
+                          <a:latin typeface="Lato"/>
+                        </a:defRPr>
+                      </a:pPr>
+                      <a:r>
+                        <a:t>1,338</a:t>
+                      </a:r>
+                    </a:p>
+                  </a:txBody>
+                  <a:tcPr marL="64008" marR="64008" marT="54864" marB="27432" anchor="t">
+                    <a:lnL w="0">
+                      <a:noFill/>
+                    </a:lnL>
+                    <a:lnR w="0">
+                      <a:noFill/>
+                    </a:lnR>
+                    <a:lnT w="0">
+                      <a:noFill/>
+                    </a:lnT>
+                    <a:lnB w="5080">
+                      <a:solidFill>
+                        <a:srgbClr val="B8B8B8"/>
+                      </a:solidFill>
+                    </a:lnB>
+                    <a:solidFill>
+                      <a:srgbClr val="FFFFFF"/>
+                    </a:solidFill>
+                  </a:tcPr>
+                </a:tc>
+                <a:tc>
+                  <a:txBody>
+                    <a:bodyPr/>
+                    <a:lstStyle/>
+                    <a:p>
+                      <a:pPr>
+                        <a:spcAft>
+                          <a:spcPts val="100"/>
+                        </a:spcAft>
+                        <a:defRPr sz="1000" b="0">
+                          <a:solidFill>
+                            <a:srgbClr val="11151A"/>
+                          </a:solidFill>
+                          <a:latin typeface="Lato"/>
+                        </a:defRPr>
+                      </a:pPr>
+                      <a:r>
+                        <a:t>Gas supply sought; switch targeted December 2027</a:t>
+                      </a:r>
+                    </a:p>
+                  </a:txBody>
+                  <a:tcPr marL="64008" marR="64008" marT="54864" marB="27432" anchor="t">
+                    <a:lnL w="0">
+                      <a:noFill/>
+                    </a:lnL>
+                    <a:lnR w="0">
+                      <a:noFill/>
+                    </a:lnR>
+                    <a:lnT w="0">
+                      <a:noFill/>
+                    </a:lnT>
+                    <a:lnB w="5080">
+                      <a:solidFill>
+                        <a:srgbClr val="B8B8B8"/>
+                      </a:solidFill>
+                    </a:lnB>
+                    <a:solidFill>
+                      <a:srgbClr val="FFFFFF"/>
+                    </a:solidFill>
+                  </a:tcPr>
+                </a:tc>
+              </a:tr>
+              <a:tr h="402336">
+                <a:tc>
+                  <a:txBody>
+                    <a:bodyPr/>
+                    <a:lstStyle/>
+                    <a:p>
+                      <a:pPr>
+                        <a:spcAft>
+                          <a:spcPts val="100"/>
+                        </a:spcAft>
+                        <a:defRPr sz="1000" b="1">
+                          <a:solidFill>
+                            <a:srgbClr val="0A2373"/>
+                          </a:solidFill>
+                          <a:latin typeface="Lato"/>
+                        </a:defRPr>
+                      </a:pPr>
+                      <a:r>
+                        <a:t>Gourikwa</a:t>
+                      </a:r>
+                    </a:p>
+                  </a:txBody>
+                  <a:tcPr marL="64008" marR="64008" marT="54864" marB="27432" anchor="t">
+                    <a:lnL w="0">
+                      <a:noFill/>
+                    </a:lnL>
+                    <a:lnR w="0">
+                      <a:noFill/>
+                    </a:lnR>
+                    <a:lnT w="0">
+                      <a:noFill/>
+                    </a:lnT>
+                    <a:lnB w="5080">
+                      <a:solidFill>
+                        <a:srgbClr val="B8B8B8"/>
+                      </a:solidFill>
+                    </a:lnB>
+                    <a:solidFill>
+                      <a:srgbClr val="FFFFFF"/>
+                    </a:solidFill>
+                  </a:tcPr>
+                </a:tc>
+                <a:tc>
+                  <a:txBody>
+                    <a:bodyPr/>
+                    <a:lstStyle/>
+                    <a:p>
+                      <a:pPr>
+                        <a:spcAft>
+                          <a:spcPts val="100"/>
+                        </a:spcAft>
+                        <a:defRPr sz="1000" b="0">
+                          <a:solidFill>
+                            <a:srgbClr val="11151A"/>
+                          </a:solidFill>
+                          <a:latin typeface="Lato"/>
+                        </a:defRPr>
+                      </a:pPr>
+                      <a:r>
+                        <a:t>Eskom</a:t>
+                      </a:r>
+                    </a:p>
+                  </a:txBody>
+                  <a:tcPr marL="64008" marR="64008" marT="54864" marB="27432" anchor="t">
+                    <a:lnL w="0">
+                      <a:noFill/>
+                    </a:lnL>
+                    <a:lnR w="0">
+                      <a:noFill/>
+                    </a:lnR>
+                    <a:lnT w="0">
+                      <a:noFill/>
+                    </a:lnT>
+                    <a:lnB w="5080">
+                      <a:solidFill>
+                        <a:srgbClr val="B8B8B8"/>
+                      </a:solidFill>
+                    </a:lnB>
+                    <a:solidFill>
+                      <a:srgbClr val="FFFFFF"/>
+                    </a:solidFill>
+                  </a:tcPr>
+                </a:tc>
+                <a:tc>
+                  <a:txBody>
+                    <a:bodyPr/>
+                    <a:lstStyle/>
+                    <a:p>
+                      <a:pPr>
+                        <a:spcAft>
+                          <a:spcPts val="100"/>
+                        </a:spcAft>
+                        <a:defRPr sz="1000" b="0">
+                          <a:solidFill>
+                            <a:srgbClr val="11151A"/>
+                          </a:solidFill>
+                          <a:latin typeface="Lato"/>
+                        </a:defRPr>
+                      </a:pPr>
+                      <a:r>
+                        <a:t>746</a:t>
+                      </a:r>
+                    </a:p>
+                  </a:txBody>
+                  <a:tcPr marL="64008" marR="64008" marT="54864" marB="27432" anchor="t">
+                    <a:lnL w="0">
+                      <a:noFill/>
+                    </a:lnL>
+                    <a:lnR w="0">
+                      <a:noFill/>
+                    </a:lnR>
+                    <a:lnT w="0">
+                      <a:noFill/>
+                    </a:lnT>
+                    <a:lnB w="5080">
+                      <a:solidFill>
+                        <a:srgbClr val="B8B8B8"/>
+                      </a:solidFill>
+                    </a:lnB>
+                    <a:solidFill>
+                      <a:srgbClr val="FFFFFF"/>
+                    </a:solidFill>
+                  </a:tcPr>
+                </a:tc>
+                <a:tc>
+                  <a:txBody>
+                    <a:bodyPr/>
+                    <a:lstStyle/>
+                    <a:p>
+                      <a:pPr>
+                        <a:spcAft>
+                          <a:spcPts val="100"/>
+                        </a:spcAft>
+                        <a:defRPr sz="1000" b="0">
+                          <a:solidFill>
+                            <a:srgbClr val="11151A"/>
+                          </a:solidFill>
+                          <a:latin typeface="Lato"/>
+                        </a:defRPr>
+                      </a:pPr>
+                      <a:r>
+                        <a:t>Same gas tender</a:t>
+                      </a:r>
+                    </a:p>
+                  </a:txBody>
+                  <a:tcPr marL="64008" marR="64008" marT="54864" marB="27432" anchor="t">
+                    <a:lnL w="0">
+                      <a:noFill/>
+                    </a:lnL>
+                    <a:lnR w="0">
+                      <a:noFill/>
+                    </a:lnR>
+                    <a:lnT w="0">
+                      <a:noFill/>
+                    </a:lnT>
+                    <a:lnB w="5080">
+                      <a:solidFill>
+                        <a:srgbClr val="B8B8B8"/>
+                      </a:solidFill>
+                    </a:lnB>
+                    <a:solidFill>
+                      <a:srgbClr val="FFFFFF"/>
+                    </a:solidFill>
+                  </a:tcPr>
+                </a:tc>
+              </a:tr>
+              <a:tr h="402336">
+                <a:tc>
+                  <a:txBody>
+                    <a:bodyPr/>
+                    <a:lstStyle/>
+                    <a:p>
+                      <a:pPr>
+                        <a:spcAft>
+                          <a:spcPts val="100"/>
+                        </a:spcAft>
+                        <a:defRPr sz="1000" b="1">
+                          <a:solidFill>
+                            <a:srgbClr val="0A2373"/>
+                          </a:solidFill>
+                          <a:latin typeface="Lato"/>
+                        </a:defRPr>
+                      </a:pPr>
+                      <a:r>
+                        <a:t>Avon</a:t>
+                      </a:r>
+                    </a:p>
+                  </a:txBody>
+                  <a:tcPr marL="64008" marR="64008" marT="54864" marB="27432" anchor="t">
+                    <a:lnL w="0">
+                      <a:noFill/>
+                    </a:lnL>
+                    <a:lnR w="0">
+                      <a:noFill/>
+                    </a:lnR>
+                    <a:lnT w="0">
+                      <a:noFill/>
+                    </a:lnT>
+                    <a:lnB w="5080">
+                      <a:solidFill>
+                        <a:srgbClr val="B8B8B8"/>
+                      </a:solidFill>
+                    </a:lnB>
+                    <a:solidFill>
+                      <a:srgbClr val="FFFFFF"/>
+                    </a:solidFill>
+                  </a:tcPr>
+                </a:tc>
+                <a:tc>
+                  <a:txBody>
+                    <a:bodyPr/>
+                    <a:lstStyle/>
+                    <a:p>
+                      <a:pPr>
+                        <a:spcAft>
+                          <a:spcPts val="100"/>
+                        </a:spcAft>
+                        <a:defRPr sz="1000" b="0">
+                          <a:solidFill>
+                            <a:srgbClr val="11151A"/>
+                          </a:solidFill>
+                          <a:latin typeface="Lato"/>
+                        </a:defRPr>
+                      </a:pPr>
+                      <a:r>
+                        <a:t>Independent producer</a:t>
+                      </a:r>
+                    </a:p>
+                  </a:txBody>
+                  <a:tcPr marL="64008" marR="64008" marT="54864" marB="27432" anchor="t">
+                    <a:lnL w="0">
+                      <a:noFill/>
+                    </a:lnL>
+                    <a:lnR w="0">
+                      <a:noFill/>
+                    </a:lnR>
+                    <a:lnT w="0">
+                      <a:noFill/>
+                    </a:lnT>
+                    <a:lnB w="5080">
+                      <a:solidFill>
+                        <a:srgbClr val="B8B8B8"/>
+                      </a:solidFill>
+                    </a:lnB>
+                    <a:solidFill>
+                      <a:srgbClr val="FFFFFF"/>
+                    </a:solidFill>
+                  </a:tcPr>
+                </a:tc>
+                <a:tc>
+                  <a:txBody>
+                    <a:bodyPr/>
+                    <a:lstStyle/>
+                    <a:p>
+                      <a:pPr>
+                        <a:spcAft>
+                          <a:spcPts val="100"/>
+                        </a:spcAft>
+                        <a:defRPr sz="1000" b="0">
+                          <a:solidFill>
+                            <a:srgbClr val="11151A"/>
+                          </a:solidFill>
+                          <a:latin typeface="Lato"/>
+                        </a:defRPr>
+                      </a:pPr>
+                      <a:r>
+                        <a:t>670</a:t>
+                      </a:r>
+                    </a:p>
+                  </a:txBody>
+                  <a:tcPr marL="64008" marR="64008" marT="54864" marB="27432" anchor="t">
+                    <a:lnL w="0">
+                      <a:noFill/>
+                    </a:lnL>
+                    <a:lnR w="0">
+                      <a:noFill/>
+                    </a:lnR>
+                    <a:lnT w="0">
+                      <a:noFill/>
+                    </a:lnT>
+                    <a:lnB w="5080">
+                      <a:solidFill>
+                        <a:srgbClr val="B8B8B8"/>
+                      </a:solidFill>
+                    </a:lnB>
+                    <a:solidFill>
+                      <a:srgbClr val="FFFFFF"/>
+                    </a:solidFill>
+                  </a:tcPr>
+                </a:tc>
+                <a:tc>
+                  <a:txBody>
+                    <a:bodyPr/>
+                    <a:lstStyle/>
+                    <a:p>
+                      <a:pPr>
+                        <a:spcAft>
+                          <a:spcPts val="100"/>
+                        </a:spcAft>
+                        <a:defRPr sz="1000" b="0">
+                          <a:solidFill>
+                            <a:srgbClr val="11151A"/>
+                          </a:solidFill>
+                          <a:latin typeface="Lato"/>
+                        </a:defRPr>
+                      </a:pPr>
+                      <a:r>
+                        <a:t>Agreement with Eskom ends July 2031</a:t>
+                      </a:r>
+                    </a:p>
+                  </a:txBody>
+                  <a:tcPr marL="64008" marR="64008" marT="54864" marB="27432" anchor="t">
+                    <a:lnL w="0">
+                      <a:noFill/>
+                    </a:lnL>
+                    <a:lnR w="0">
+                      <a:noFill/>
+                    </a:lnR>
+                    <a:lnT w="0">
+                      <a:noFill/>
+                    </a:lnT>
+                    <a:lnB w="5080">
+                      <a:solidFill>
+                        <a:srgbClr val="B8B8B8"/>
+                      </a:solidFill>
+                    </a:lnB>
+                    <a:solidFill>
+                      <a:srgbClr val="FFFFFF"/>
+                    </a:solidFill>
+                  </a:tcPr>
+                </a:tc>
+              </a:tr>
+              <a:tr h="402336">
+                <a:tc>
+                  <a:txBody>
+                    <a:bodyPr/>
+                    <a:lstStyle/>
+                    <a:p>
+                      <a:pPr>
+                        <a:spcAft>
+                          <a:spcPts val="100"/>
+                        </a:spcAft>
+                        <a:defRPr sz="1000" b="1">
+                          <a:solidFill>
+                            <a:srgbClr val="0A2373"/>
+                          </a:solidFill>
+                          <a:latin typeface="Lato"/>
+                        </a:defRPr>
+                      </a:pPr>
+                      <a:r>
+                        <a:t>Dedisa</a:t>
+                      </a:r>
+                    </a:p>
+                  </a:txBody>
+                  <a:tcPr marL="64008" marR="64008" marT="54864" marB="27432" anchor="t">
+                    <a:lnL w="0">
+                      <a:noFill/>
+                    </a:lnL>
+                    <a:lnR w="0">
+                      <a:noFill/>
+                    </a:lnR>
+                    <a:lnT w="0">
+                      <a:noFill/>
+                    </a:lnT>
+                    <a:lnB w="5080">
+                      <a:solidFill>
+                        <a:srgbClr val="B8B8B8"/>
+                      </a:solidFill>
+                    </a:lnB>
+                    <a:solidFill>
+                      <a:srgbClr val="FFFFFF"/>
+                    </a:solidFill>
+                  </a:tcPr>
+                </a:tc>
+                <a:tc>
+                  <a:txBody>
+                    <a:bodyPr/>
+                    <a:lstStyle/>
+                    <a:p>
+                      <a:pPr>
+                        <a:spcAft>
+                          <a:spcPts val="100"/>
+                        </a:spcAft>
+                        <a:defRPr sz="1000" b="0">
+                          <a:solidFill>
+                            <a:srgbClr val="11151A"/>
+                          </a:solidFill>
+                          <a:latin typeface="Lato"/>
+                        </a:defRPr>
+                      </a:pPr>
+                      <a:r>
+                        <a:t>Independent producer</a:t>
+                      </a:r>
+                    </a:p>
+                  </a:txBody>
+                  <a:tcPr marL="64008" marR="64008" marT="54864" marB="27432" anchor="t">
+                    <a:lnL w="0">
+                      <a:noFill/>
+                    </a:lnL>
+                    <a:lnR w="0">
+                      <a:noFill/>
+                    </a:lnR>
+                    <a:lnT w="0">
+                      <a:noFill/>
+                    </a:lnT>
+                    <a:lnB w="5080">
+                      <a:solidFill>
+                        <a:srgbClr val="B8B8B8"/>
+                      </a:solidFill>
+                    </a:lnB>
+                    <a:solidFill>
+                      <a:srgbClr val="FFFFFF"/>
+                    </a:solidFill>
+                  </a:tcPr>
+                </a:tc>
+                <a:tc>
+                  <a:txBody>
+                    <a:bodyPr/>
+                    <a:lstStyle/>
+                    <a:p>
+                      <a:pPr>
+                        <a:spcAft>
+                          <a:spcPts val="100"/>
+                        </a:spcAft>
+                        <a:defRPr sz="1000" b="0">
+                          <a:solidFill>
+                            <a:srgbClr val="11151A"/>
+                          </a:solidFill>
+                          <a:latin typeface="Lato"/>
+                        </a:defRPr>
+                      </a:pPr>
+                      <a:r>
+                        <a:t>335</a:t>
+                      </a:r>
+                    </a:p>
+                  </a:txBody>
+                  <a:tcPr marL="64008" marR="64008" marT="54864" marB="27432" anchor="t">
+                    <a:lnL w="0">
+                      <a:noFill/>
+                    </a:lnL>
+                    <a:lnR w="0">
+                      <a:noFill/>
+                    </a:lnR>
+                    <a:lnT w="0">
+                      <a:noFill/>
+                    </a:lnT>
+                    <a:lnB w="5080">
+                      <a:solidFill>
+                        <a:srgbClr val="B8B8B8"/>
+                      </a:solidFill>
+                    </a:lnB>
+                    <a:solidFill>
+                      <a:srgbClr val="FFFFFF"/>
+                    </a:solidFill>
+                  </a:tcPr>
+                </a:tc>
+                <a:tc>
+                  <a:txBody>
+                    <a:bodyPr/>
+                    <a:lstStyle/>
+                    <a:p>
+                      <a:pPr>
+                        <a:spcAft>
+                          <a:spcPts val="100"/>
+                        </a:spcAft>
+                        <a:defRPr sz="1000" b="0">
+                          <a:solidFill>
+                            <a:srgbClr val="11151A"/>
+                          </a:solidFill>
+                          <a:latin typeface="Lato"/>
+                        </a:defRPr>
+                      </a:pPr>
+                      <a:r>
+                        <a:t>Agreement with Eskom ends October 2030</a:t>
+                      </a:r>
+                    </a:p>
+                  </a:txBody>
+                  <a:tcPr marL="64008" marR="64008" marT="54864" marB="27432" anchor="t">
+                    <a:lnL w="0">
+                      <a:noFill/>
+                    </a:lnL>
+                    <a:lnR w="0">
+                      <a:noFill/>
+                    </a:lnR>
+                    <a:lnT w="0">
+                      <a:noFill/>
+                    </a:lnT>
+                    <a:lnB w="5080">
+                      <a:solidFill>
+                        <a:srgbClr val="B8B8B8"/>
+                      </a:solidFill>
+                    </a:lnB>
+                    <a:solidFill>
+                      <a:srgbClr val="FFFFFF"/>
+                    </a:solidFill>
+                  </a:tcPr>
+                </a:tc>
+              </a:tr>
+            </a:tbl>
+          </a:graphicData>
+        </a:graphic>
+      </p:graphicFrame>
+      <p:sp>
+        <p:nvSpPr>
+          <p:cNvPr id="9" name="TextBox 8"/>
+          <p:cNvSpPr txBox="1"/>
+          <p:nvPr/>
+        </p:nvSpPr>
+        <p:spPr>
+          <a:xfrm>
+            <a:off x="457200" y="4434840"/>
+            <a:ext cx="5029200" cy="731520"/>
+          </a:xfrm>
+          <a:prstGeom prst="rect">
+            <a:avLst/>
+          </a:prstGeom>
+          <a:noFill/>
+        </p:spPr>
+        <p:txBody>
+          <a:bodyPr wrap="square" lIns="22860" rIns="22860" tIns="0" bIns="0">
+            <a:spAutoFit/>
+          </a:bodyPr>
+          <a:lstStyle/>
+          <a:p>
+            <a:pPr>
+              <a:spcAft>
+                <a:spcPts val="300"/>
+              </a:spcAft>
+              <a:defRPr sz="1000" b="0">
+                <a:solidFill>
+                  <a:srgbClr val="11151A"/>
+                </a:solidFill>
+                <a:latin typeface="Lato"/>
+              </a:defRPr>
+            </a:pPr>
+            <a:r>
+              <a:t>Acacia and Port Rex (171 MW each) burn kerosene and are not counted. The model also carries two placeholder stations of 1,000 and 2,000 MW with no source.</a:t>
+            </a:r>
+          </a:p>
+        </p:txBody>
+      </p:sp>
+      <p:sp>
+        <p:nvSpPr>
+          <p:cNvPr id="10" name="TextBox 9"/>
+          <p:cNvSpPr txBox="1"/>
+          <p:nvPr/>
+        </p:nvSpPr>
+        <p:spPr>
+          <a:xfrm>
+            <a:off x="5897880" y="2011680"/>
+            <a:ext cx="4937760" cy="228600"/>
+          </a:xfrm>
+          <a:prstGeom prst="rect">
+            <a:avLst/>
+          </a:prstGeom>
+          <a:noFill/>
+        </p:spPr>
+        <p:txBody>
+          <a:bodyPr wrap="square" lIns="22860" rIns="22860" tIns="0" bIns="0">
+            <a:spAutoFit/>
+          </a:bodyPr>
+          <a:lstStyle/>
+          <a:p>
+            <a:pPr>
+              <a:spcAft>
+                <a:spcPts val="300"/>
+              </a:spcAft>
+              <a:defRPr sz="1150" b="1">
+                <a:solidFill>
+                  <a:srgbClr val="0A2373"/>
+                </a:solidFill>
+                <a:latin typeface="Lato"/>
+              </a:defRPr>
+            </a:pPr>
+            <a:r>
+              <a:t>Coal stations being retired</a:t>
+            </a:r>
+          </a:p>
+        </p:txBody>
+      </p:sp>
+      <p:graphicFrame>
+        <p:nvGraphicFramePr>
+          <p:cNvPr id="11" name="Table 10"/>
+          <p:cNvGraphicFramePr>
+            <a:graphicFrameLocks noGrp="1"/>
+          </p:cNvGraphicFramePr>
+          <p:nvPr/>
+        </p:nvGraphicFramePr>
+        <p:xfrm>
+          <a:off x="5897880" y="2267712"/>
+          <a:ext cx="5212080" cy="3017520"/>
+        </p:xfrm>
+        <a:graphic>
+          <a:graphicData uri="http://schemas.openxmlformats.org/drawingml/2006/table">
+            <a:tbl>
+              <a:tblPr firstRow="0" bandRow="0"/>
+              <a:tblGrid>
+                <a:gridCol w="1188720"/>
+                <a:gridCol w="731520"/>
+                <a:gridCol w="3291840"/>
+              </a:tblGrid>
+              <a:tr h="335280">
+                <a:tc>
+                  <a:txBody>
+                    <a:bodyPr/>
+                    <a:lstStyle/>
+                    <a:p>
+                      <a:pPr>
+                        <a:spcAft>
+                          <a:spcPts val="100"/>
+                        </a:spcAft>
+                        <a:defRPr sz="1000" b="1">
+                          <a:solidFill>
+                            <a:srgbClr val="0A2373"/>
+                          </a:solidFill>
+                          <a:latin typeface="Lato"/>
+                        </a:defRPr>
+                      </a:pPr>
+                      <a:r>
+                        <a:t>Station</a:t>
+                      </a:r>
+                    </a:p>
+                  </a:txBody>
+                  <a:tcPr marL="64008" marR="64008" marT="54864" marB="27432" anchor="t">
+                    <a:lnL w="0">
+                      <a:noFill/>
+                    </a:lnL>
+                    <a:lnR w="0">
+                      <a:noFill/>
+                    </a:lnR>
+                    <a:lnT w="0">
+                      <a:noFill/>
+                    </a:lnT>
+                    <a:lnB w="5080">
+                      <a:solidFill>
+                        <a:srgbClr val="B8B8B8"/>
+                      </a:solidFill>
+                    </a:lnB>
+                    <a:solidFill>
+                      <a:srgbClr val="FFFFFF"/>
+                    </a:solidFill>
+                  </a:tcPr>
+                </a:tc>
+                <a:tc>
+                  <a:txBody>
+                    <a:bodyPr/>
+                    <a:lstStyle/>
+                    <a:p>
+                      <a:pPr>
+                        <a:spcAft>
+                          <a:spcPts val="100"/>
+                        </a:spcAft>
+                        <a:defRPr sz="1000" b="1">
+                          <a:solidFill>
+                            <a:srgbClr val="11151A"/>
+                          </a:solidFill>
+                          <a:latin typeface="Lato"/>
+                        </a:defRPr>
+                      </a:pPr>
+                      <a:r>
+                        <a:t>MW</a:t>
+                      </a:r>
+                    </a:p>
+                  </a:txBody>
+                  <a:tcPr marL="64008" marR="64008" marT="54864" marB="27432" anchor="t">
+                    <a:lnL w="0">
+                      <a:noFill/>
+                    </a:lnL>
+                    <a:lnR w="0">
+                      <a:noFill/>
+                    </a:lnR>
+                    <a:lnT w="0">
+                      <a:noFill/>
+                    </a:lnT>
+                    <a:lnB w="5080">
+                      <a:solidFill>
+                        <a:srgbClr val="B8B8B8"/>
+                      </a:solidFill>
+                    </a:lnB>
+                    <a:solidFill>
+                      <a:srgbClr val="FFFFFF"/>
+                    </a:solidFill>
+                  </a:tcPr>
+                </a:tc>
+                <a:tc>
+                  <a:txBody>
+                    <a:bodyPr/>
+                    <a:lstStyle/>
+                    <a:p>
+                      <a:pPr>
+                        <a:spcAft>
+                          <a:spcPts val="100"/>
+                        </a:spcAft>
+                        <a:defRPr sz="1000" b="1">
+                          <a:solidFill>
+                            <a:srgbClr val="11151A"/>
+                          </a:solidFill>
+                          <a:latin typeface="Lato"/>
+                        </a:defRPr>
+                      </a:pPr>
+                      <a:r>
+                        <a:t>Stops</a:t>
+                      </a:r>
+                    </a:p>
+                  </a:txBody>
+                  <a:tcPr marL="64008" marR="64008" marT="54864" marB="27432" anchor="t">
+                    <a:lnL w="0">
+                      <a:noFill/>
+                    </a:lnL>
+                    <a:lnR w="0">
+                      <a:noFill/>
+                    </a:lnR>
+                    <a:lnT w="0">
+                      <a:noFill/>
+                    </a:lnT>
+                    <a:lnB w="5080">
+                      <a:solidFill>
+                        <a:srgbClr val="B8B8B8"/>
+                      </a:solidFill>
+                    </a:lnB>
+                    <a:solidFill>
+                      <a:srgbClr val="FFFFFF"/>
+                    </a:solidFill>
+                  </a:tcPr>
+                </a:tc>
+              </a:tr>
+              <a:tr h="335280">
+                <a:tc>
+                  <a:txBody>
+                    <a:bodyPr/>
+                    <a:lstStyle/>
+                    <a:p>
+                      <a:pPr>
+                        <a:spcAft>
+                          <a:spcPts val="100"/>
+                        </a:spcAft>
+                        <a:defRPr sz="1000" b="1">
+                          <a:solidFill>
+                            <a:srgbClr val="0A2373"/>
+                          </a:solidFill>
+                          <a:latin typeface="Lato"/>
+                        </a:defRPr>
+                      </a:pPr>
+                      <a:r>
+                        <a:t>Komati</a:t>
+                      </a:r>
+                    </a:p>
+                  </a:txBody>
+                  <a:tcPr marL="64008" marR="64008" marT="54864" marB="27432" anchor="t">
+                    <a:lnL w="0">
+                      <a:noFill/>
+                    </a:lnL>
+                    <a:lnR w="0">
+                      <a:noFill/>
+                    </a:lnR>
+                    <a:lnT w="0">
+                      <a:noFill/>
+                    </a:lnT>
+                    <a:lnB w="5080">
+                      <a:solidFill>
+                        <a:srgbClr val="B8B8B8"/>
+                      </a:solidFill>
+                    </a:lnB>
+                    <a:solidFill>
+                      <a:srgbClr val="FFFFFF"/>
+                    </a:solidFill>
+                  </a:tcPr>
+                </a:tc>
+                <a:tc>
+                  <a:txBody>
+                    <a:bodyPr/>
+                    <a:lstStyle/>
+                    <a:p>
+                      <a:pPr>
+                        <a:spcAft>
+                          <a:spcPts val="100"/>
+                        </a:spcAft>
+                        <a:defRPr sz="1000" b="0">
+                          <a:solidFill>
+                            <a:srgbClr val="11151A"/>
+                          </a:solidFill>
+                          <a:latin typeface="Lato"/>
+                        </a:defRPr>
+                      </a:pPr>
+                      <a:r>
+                        <a:t>990</a:t>
+                      </a:r>
+                    </a:p>
+                  </a:txBody>
+                  <a:tcPr marL="64008" marR="64008" marT="54864" marB="27432" anchor="t">
+                    <a:lnL w="0">
+                      <a:noFill/>
+                    </a:lnL>
+                    <a:lnR w="0">
+                      <a:noFill/>
+                    </a:lnR>
+                    <a:lnT w="0">
+                      <a:noFill/>
+                    </a:lnT>
+                    <a:lnB w="5080">
+                      <a:solidFill>
+                        <a:srgbClr val="B8B8B8"/>
+                      </a:solidFill>
+                    </a:lnB>
+                    <a:solidFill>
+                      <a:srgbClr val="FFFFFF"/>
+                    </a:solidFill>
+                  </a:tcPr>
+                </a:tc>
+                <a:tc>
+                  <a:txBody>
+                    <a:bodyPr/>
+                    <a:lstStyle/>
+                    <a:p>
+                      <a:pPr>
+                        <a:spcAft>
+                          <a:spcPts val="100"/>
+                        </a:spcAft>
+                        <a:defRPr sz="1000" b="0">
+                          <a:solidFill>
+                            <a:srgbClr val="11151A"/>
+                          </a:solidFill>
+                          <a:latin typeface="Lato"/>
+                        </a:defRPr>
+                      </a:pPr>
+                      <a:r>
+                        <a:t>Shut 31 October 2022</a:t>
+                      </a:r>
+                    </a:p>
+                  </a:txBody>
+                  <a:tcPr marL="64008" marR="64008" marT="54864" marB="27432" anchor="t">
+                    <a:lnL w="0">
+                      <a:noFill/>
+                    </a:lnL>
+                    <a:lnR w="0">
+                      <a:noFill/>
+                    </a:lnR>
+                    <a:lnT w="0">
+                      <a:noFill/>
+                    </a:lnT>
+                    <a:lnB w="5080">
+                      <a:solidFill>
+                        <a:srgbClr val="B8B8B8"/>
+                      </a:solidFill>
+                    </a:lnB>
+                    <a:solidFill>
+                      <a:srgbClr val="FFFFFF"/>
+                    </a:solidFill>
+                  </a:tcPr>
+                </a:tc>
+              </a:tr>
+              <a:tr h="335280">
+                <a:tc>
+                  <a:txBody>
+                    <a:bodyPr/>
+                    <a:lstStyle/>
+                    <a:p>
+                      <a:pPr>
+                        <a:spcAft>
+                          <a:spcPts val="100"/>
+                        </a:spcAft>
+                        <a:defRPr sz="1000" b="1">
+                          <a:solidFill>
+                            <a:srgbClr val="0A2373"/>
+                          </a:solidFill>
+                          <a:latin typeface="Lato"/>
+                        </a:defRPr>
+                      </a:pPr>
+                      <a:r>
+                        <a:t>Camden</a:t>
+                      </a:r>
+                    </a:p>
+                  </a:txBody>
+                  <a:tcPr marL="64008" marR="64008" marT="54864" marB="27432" anchor="t">
+                    <a:lnL w="0">
+                      <a:noFill/>
+                    </a:lnL>
+                    <a:lnR w="0">
+                      <a:noFill/>
+                    </a:lnR>
+                    <a:lnT w="0">
+                      <a:noFill/>
+                    </a:lnT>
+                    <a:lnB w="5080">
+                      <a:solidFill>
+                        <a:srgbClr val="B8B8B8"/>
+                      </a:solidFill>
+                    </a:lnB>
+                    <a:solidFill>
+                      <a:srgbClr val="FFFFFF"/>
+                    </a:solidFill>
+                  </a:tcPr>
+                </a:tc>
+                <a:tc>
+                  <a:txBody>
+                    <a:bodyPr/>
+                    <a:lstStyle/>
+                    <a:p>
+                      <a:pPr>
+                        <a:spcAft>
+                          <a:spcPts val="100"/>
+                        </a:spcAft>
+                        <a:defRPr sz="1000" b="0">
+                          <a:solidFill>
+                            <a:srgbClr val="11151A"/>
+                          </a:solidFill>
+                          <a:latin typeface="Lato"/>
+                        </a:defRPr>
+                      </a:pPr>
+                      <a:r>
+                        <a:t>1,561</a:t>
+                      </a:r>
+                    </a:p>
+                  </a:txBody>
+                  <a:tcPr marL="64008" marR="64008" marT="54864" marB="27432" anchor="t">
+                    <a:lnL w="0">
+                      <a:noFill/>
+                    </a:lnL>
+                    <a:lnR w="0">
+                      <a:noFill/>
+                    </a:lnR>
+                    <a:lnT w="0">
+                      <a:noFill/>
+                    </a:lnT>
+                    <a:lnB w="5080">
+                      <a:solidFill>
+                        <a:srgbClr val="B8B8B8"/>
+                      </a:solidFill>
+                    </a:lnB>
+                    <a:solidFill>
+                      <a:srgbClr val="FFFFFF"/>
+                    </a:solidFill>
+                  </a:tcPr>
+                </a:tc>
+                <a:tc>
+                  <a:txBody>
+                    <a:bodyPr/>
+                    <a:lstStyle/>
+                    <a:p>
+                      <a:pPr>
+                        <a:spcAft>
+                          <a:spcPts val="100"/>
+                        </a:spcAft>
+                        <a:defRPr sz="1000" b="0">
+                          <a:solidFill>
+                            <a:srgbClr val="11151A"/>
+                          </a:solidFill>
+                          <a:latin typeface="Lato"/>
+                        </a:defRPr>
+                      </a:pPr>
+                      <a:r>
+                        <a:t>31 March 2030 (exemption ends)</a:t>
+                      </a:r>
+                    </a:p>
+                  </a:txBody>
+                  <a:tcPr marL="64008" marR="64008" marT="54864" marB="27432" anchor="t">
+                    <a:lnL w="0">
+                      <a:noFill/>
+                    </a:lnL>
+                    <a:lnR w="0">
+                      <a:noFill/>
+                    </a:lnR>
+                    <a:lnT w="0">
+                      <a:noFill/>
+                    </a:lnT>
+                    <a:lnB w="5080">
+                      <a:solidFill>
+                        <a:srgbClr val="B8B8B8"/>
+                      </a:solidFill>
+                    </a:lnB>
+                    <a:solidFill>
+                      <a:srgbClr val="FFFFFF"/>
+                    </a:solidFill>
+                  </a:tcPr>
+                </a:tc>
+              </a:tr>
+              <a:tr h="335280">
+                <a:tc>
+                  <a:txBody>
+                    <a:bodyPr/>
+                    <a:lstStyle/>
+                    <a:p>
+                      <a:pPr>
+                        <a:spcAft>
+                          <a:spcPts val="100"/>
+                        </a:spcAft>
+                        <a:defRPr sz="1000" b="1">
+                          <a:solidFill>
+                            <a:srgbClr val="0A2373"/>
+                          </a:solidFill>
+                          <a:latin typeface="Lato"/>
+                        </a:defRPr>
+                      </a:pPr>
+                      <a:r>
+                        <a:t>Grootvlei</a:t>
+                      </a:r>
+                    </a:p>
+                  </a:txBody>
+                  <a:tcPr marL="64008" marR="64008" marT="54864" marB="27432" anchor="t">
+                    <a:lnL w="0">
+                      <a:noFill/>
+                    </a:lnL>
+                    <a:lnR w="0">
+                      <a:noFill/>
+                    </a:lnR>
+                    <a:lnT w="0">
+                      <a:noFill/>
+                    </a:lnT>
+                    <a:lnB w="5080">
+                      <a:solidFill>
+                        <a:srgbClr val="B8B8B8"/>
+                      </a:solidFill>
+                    </a:lnB>
+                    <a:solidFill>
+                      <a:srgbClr val="FFFFFF"/>
+                    </a:solidFill>
+                  </a:tcPr>
+                </a:tc>
+                <a:tc>
+                  <a:txBody>
+                    <a:bodyPr/>
+                    <a:lstStyle/>
+                    <a:p>
+                      <a:pPr>
+                        <a:spcAft>
+                          <a:spcPts val="100"/>
+                        </a:spcAft>
+                        <a:defRPr sz="1000" b="0">
+                          <a:solidFill>
+                            <a:srgbClr val="11151A"/>
+                          </a:solidFill>
+                          <a:latin typeface="Lato"/>
+                        </a:defRPr>
+                      </a:pPr>
+                      <a:r>
+                        <a:t>1,180</a:t>
+                      </a:r>
+                    </a:p>
+                  </a:txBody>
+                  <a:tcPr marL="64008" marR="64008" marT="54864" marB="27432" anchor="t">
+                    <a:lnL w="0">
+                      <a:noFill/>
+                    </a:lnL>
+                    <a:lnR w="0">
+                      <a:noFill/>
+                    </a:lnR>
+                    <a:lnT w="0">
+                      <a:noFill/>
+                    </a:lnT>
+                    <a:lnB w="5080">
+                      <a:solidFill>
+                        <a:srgbClr val="B8B8B8"/>
+                      </a:solidFill>
+                    </a:lnB>
+                    <a:solidFill>
+                      <a:srgbClr val="FFFFFF"/>
+                    </a:solidFill>
+                  </a:tcPr>
+                </a:tc>
+                <a:tc>
+                  <a:txBody>
+                    <a:bodyPr/>
+                    <a:lstStyle/>
+                    <a:p>
+                      <a:pPr>
+                        <a:spcAft>
+                          <a:spcPts val="100"/>
+                        </a:spcAft>
+                        <a:defRPr sz="1000" b="0">
+                          <a:solidFill>
+                            <a:srgbClr val="11151A"/>
+                          </a:solidFill>
+                          <a:latin typeface="Lato"/>
+                        </a:defRPr>
+                      </a:pPr>
+                      <a:r>
+                        <a:t>31 March 2030 (exemption ends)</a:t>
+                      </a:r>
+                    </a:p>
+                  </a:txBody>
+                  <a:tcPr marL="64008" marR="64008" marT="54864" marB="27432" anchor="t">
+                    <a:lnL w="0">
+                      <a:noFill/>
+                    </a:lnL>
+                    <a:lnR w="0">
+                      <a:noFill/>
+                    </a:lnR>
+                    <a:lnT w="0">
+                      <a:noFill/>
+                    </a:lnT>
+                    <a:lnB w="5080">
+                      <a:solidFill>
+                        <a:srgbClr val="B8B8B8"/>
+                      </a:solidFill>
+                    </a:lnB>
+                    <a:solidFill>
+                      <a:srgbClr val="FFFFFF"/>
+                    </a:solidFill>
+                  </a:tcPr>
+                </a:tc>
+              </a:tr>
+              <a:tr h="335280">
+                <a:tc>
+                  <a:txBody>
+                    <a:bodyPr/>
+                    <a:lstStyle/>
+                    <a:p>
+                      <a:pPr>
+                        <a:spcAft>
+                          <a:spcPts val="100"/>
+                        </a:spcAft>
+                        <a:defRPr sz="1000" b="1">
+                          <a:solidFill>
+                            <a:srgbClr val="0A2373"/>
+                          </a:solidFill>
+                          <a:latin typeface="Lato"/>
+                        </a:defRPr>
+                      </a:pPr>
+                      <a:r>
+                        <a:t>Hendrina</a:t>
+                      </a:r>
+                    </a:p>
+                  </a:txBody>
+                  <a:tcPr marL="64008" marR="64008" marT="54864" marB="27432" anchor="t">
+                    <a:lnL w="0">
+                      <a:noFill/>
+                    </a:lnL>
+                    <a:lnR w="0">
+                      <a:noFill/>
+                    </a:lnR>
+                    <a:lnT w="0">
+                      <a:noFill/>
+                    </a:lnT>
+                    <a:lnB w="5080">
+                      <a:solidFill>
+                        <a:srgbClr val="B8B8B8"/>
+                      </a:solidFill>
+                    </a:lnB>
+                    <a:solidFill>
+                      <a:srgbClr val="FFFFFF"/>
+                    </a:solidFill>
+                  </a:tcPr>
+                </a:tc>
+                <a:tc>
+                  <a:txBody>
+                    <a:bodyPr/>
+                    <a:lstStyle/>
+                    <a:p>
+                      <a:pPr>
+                        <a:spcAft>
+                          <a:spcPts val="100"/>
+                        </a:spcAft>
+                        <a:defRPr sz="1000" b="0">
+                          <a:solidFill>
+                            <a:srgbClr val="11151A"/>
+                          </a:solidFill>
+                          <a:latin typeface="Lato"/>
+                        </a:defRPr>
+                      </a:pPr>
+                      <a:r>
+                        <a:t>1,723</a:t>
+                      </a:r>
+                    </a:p>
+                  </a:txBody>
+                  <a:tcPr marL="64008" marR="64008" marT="54864" marB="27432" anchor="t">
+                    <a:lnL w="0">
+                      <a:noFill/>
+                    </a:lnL>
+                    <a:lnR w="0">
+                      <a:noFill/>
+                    </a:lnR>
+                    <a:lnT w="0">
+                      <a:noFill/>
+                    </a:lnT>
+                    <a:lnB w="5080">
+                      <a:solidFill>
+                        <a:srgbClr val="B8B8B8"/>
+                      </a:solidFill>
+                    </a:lnB>
+                    <a:solidFill>
+                      <a:srgbClr val="FFFFFF"/>
+                    </a:solidFill>
+                  </a:tcPr>
+                </a:tc>
+                <a:tc>
+                  <a:txBody>
+                    <a:bodyPr/>
+                    <a:lstStyle/>
+                    <a:p>
+                      <a:pPr>
+                        <a:spcAft>
+                          <a:spcPts val="100"/>
+                        </a:spcAft>
+                        <a:defRPr sz="1000" b="0">
+                          <a:solidFill>
+                            <a:srgbClr val="11151A"/>
+                          </a:solidFill>
+                          <a:latin typeface="Lato"/>
+                        </a:defRPr>
+                      </a:pPr>
+                      <a:r>
+                        <a:t>31 March 2030 (exemption ends)</a:t>
+                      </a:r>
+                    </a:p>
+                  </a:txBody>
+                  <a:tcPr marL="64008" marR="64008" marT="54864" marB="27432" anchor="t">
+                    <a:lnL w="0">
+                      <a:noFill/>
+                    </a:lnL>
+                    <a:lnR w="0">
+                      <a:noFill/>
+                    </a:lnR>
+                    <a:lnT w="0">
+                      <a:noFill/>
+                    </a:lnT>
+                    <a:lnB w="5080">
+                      <a:solidFill>
+                        <a:srgbClr val="B8B8B8"/>
+                      </a:solidFill>
+                    </a:lnB>
+                    <a:solidFill>
+                      <a:srgbClr val="FFFFFF"/>
+                    </a:solidFill>
+                  </a:tcPr>
+                </a:tc>
+              </a:tr>
+              <a:tr h="335280">
+                <a:tc>
+                  <a:txBody>
+                    <a:bodyPr/>
+                    <a:lstStyle/>
+                    <a:p>
+                      <a:pPr>
+                        <a:spcAft>
+                          <a:spcPts val="100"/>
+                        </a:spcAft>
+                        <a:defRPr sz="1000" b="1">
+                          <a:solidFill>
+                            <a:srgbClr val="0A2373"/>
+                          </a:solidFill>
+                          <a:latin typeface="Lato"/>
+                        </a:defRPr>
+                      </a:pPr>
+                      <a:r>
+                        <a:t>Arnot</a:t>
+                      </a:r>
+                    </a:p>
+                  </a:txBody>
+                  <a:tcPr marL="64008" marR="64008" marT="54864" marB="27432" anchor="t">
+                    <a:lnL w="0">
+                      <a:noFill/>
+                    </a:lnL>
+                    <a:lnR w="0">
+                      <a:noFill/>
+                    </a:lnR>
+                    <a:lnT w="0">
+                      <a:noFill/>
+                    </a:lnT>
+                    <a:lnB w="5080">
+                      <a:solidFill>
+                        <a:srgbClr val="B8B8B8"/>
+                      </a:solidFill>
+                    </a:lnB>
+                    <a:solidFill>
+                      <a:srgbClr val="FFFFFF"/>
+                    </a:solidFill>
+                  </a:tcPr>
+                </a:tc>
+                <a:tc>
+                  <a:txBody>
+                    <a:bodyPr/>
+                    <a:lstStyle/>
+                    <a:p>
+                      <a:pPr>
+                        <a:spcAft>
+                          <a:spcPts val="100"/>
+                        </a:spcAft>
+                        <a:defRPr sz="1000" b="0">
+                          <a:solidFill>
+                            <a:srgbClr val="11151A"/>
+                          </a:solidFill>
+                          <a:latin typeface="Lato"/>
+                        </a:defRPr>
+                      </a:pPr>
+                      <a:r>
+                        <a:t>2,220</a:t>
+                      </a:r>
+                    </a:p>
+                  </a:txBody>
+                  <a:tcPr marL="64008" marR="64008" marT="54864" marB="27432" anchor="t">
+                    <a:lnL w="0">
+                      <a:noFill/>
+                    </a:lnL>
+                    <a:lnR w="0">
+                      <a:noFill/>
+                    </a:lnR>
+                    <a:lnT w="0">
+                      <a:noFill/>
+                    </a:lnT>
+                    <a:lnB w="5080">
+                      <a:solidFill>
+                        <a:srgbClr val="B8B8B8"/>
+                      </a:solidFill>
+                    </a:lnB>
+                    <a:solidFill>
+                      <a:srgbClr val="FFFFFF"/>
+                    </a:solidFill>
+                  </a:tcPr>
+                </a:tc>
+                <a:tc>
+                  <a:txBody>
+                    <a:bodyPr/>
+                    <a:lstStyle/>
+                    <a:p>
+                      <a:pPr>
+                        <a:spcAft>
+                          <a:spcPts val="100"/>
+                        </a:spcAft>
+                        <a:defRPr sz="1000" b="0">
+                          <a:solidFill>
+                            <a:srgbClr val="11151A"/>
+                          </a:solidFill>
+                          <a:latin typeface="Lato"/>
+                        </a:defRPr>
+                      </a:pPr>
+                      <a:r>
+                        <a:t>31 March 2030 (exemption ends)</a:t>
+                      </a:r>
+                    </a:p>
+                  </a:txBody>
+                  <a:tcPr marL="64008" marR="64008" marT="54864" marB="27432" anchor="t">
+                    <a:lnL w="0">
+                      <a:noFill/>
+                    </a:lnL>
+                    <a:lnR w="0">
+                      <a:noFill/>
+                    </a:lnR>
+                    <a:lnT w="0">
+                      <a:noFill/>
+                    </a:lnT>
+                    <a:lnB w="5080">
+                      <a:solidFill>
+                        <a:srgbClr val="B8B8B8"/>
+                      </a:solidFill>
+                    </a:lnB>
+                    <a:solidFill>
+                      <a:srgbClr val="FFFFFF"/>
+                    </a:solidFill>
+                  </a:tcPr>
+                </a:tc>
+              </a:tr>
+              <a:tr h="335280">
+                <a:tc>
+                  <a:txBody>
+                    <a:bodyPr/>
+                    <a:lstStyle/>
+                    <a:p>
+                      <a:pPr>
+                        <a:spcAft>
+                          <a:spcPts val="100"/>
+                        </a:spcAft>
+                        <a:defRPr sz="1000" b="1">
+                          <a:solidFill>
+                            <a:srgbClr val="0A2373"/>
+                          </a:solidFill>
+                          <a:latin typeface="Lato"/>
+                        </a:defRPr>
+                      </a:pPr>
+                      <a:r>
+                        <a:t>Kriel</a:t>
+                      </a:r>
+                    </a:p>
+                  </a:txBody>
+                  <a:tcPr marL="64008" marR="64008" marT="54864" marB="27432" anchor="t">
+                    <a:lnL w="0">
+                      <a:noFill/>
+                    </a:lnL>
+                    <a:lnR w="0">
+                      <a:noFill/>
+                    </a:lnR>
+                    <a:lnT w="0">
+                      <a:noFill/>
+                    </a:lnT>
+                    <a:lnB w="5080">
+                      <a:solidFill>
+                        <a:srgbClr val="B8B8B8"/>
+                      </a:solidFill>
+                    </a:lnB>
+                    <a:solidFill>
+                      <a:srgbClr val="FFFFFF"/>
+                    </a:solidFill>
+                  </a:tcPr>
+                </a:tc>
+                <a:tc>
+                  <a:txBody>
+                    <a:bodyPr/>
+                    <a:lstStyle/>
+                    <a:p>
+                      <a:pPr>
+                        <a:spcAft>
+                          <a:spcPts val="100"/>
+                        </a:spcAft>
+                        <a:defRPr sz="1000" b="0">
+                          <a:solidFill>
+                            <a:srgbClr val="11151A"/>
+                          </a:solidFill>
+                          <a:latin typeface="Lato"/>
+                        </a:defRPr>
+                      </a:pPr>
+                      <a:r>
+                        <a:t>2,790</a:t>
+                      </a:r>
+                    </a:p>
+                  </a:txBody>
+                  <a:tcPr marL="64008" marR="64008" marT="54864" marB="27432" anchor="t">
+                    <a:lnL w="0">
+                      <a:noFill/>
+                    </a:lnL>
+                    <a:lnR w="0">
+                      <a:noFill/>
+                    </a:lnR>
+                    <a:lnT w="0">
+                      <a:noFill/>
+                    </a:lnT>
+                    <a:lnB w="5080">
+                      <a:solidFill>
+                        <a:srgbClr val="B8B8B8"/>
+                      </a:solidFill>
+                    </a:lnB>
+                    <a:solidFill>
+                      <a:srgbClr val="FFFFFF"/>
+                    </a:solidFill>
+                  </a:tcPr>
+                </a:tc>
+                <a:tc>
+                  <a:txBody>
+                    <a:bodyPr/>
+                    <a:lstStyle/>
+                    <a:p>
+                      <a:pPr>
+                        <a:spcAft>
+                          <a:spcPts val="100"/>
+                        </a:spcAft>
+                        <a:defRPr sz="1000" b="0">
+                          <a:solidFill>
+                            <a:srgbClr val="11151A"/>
+                          </a:solidFill>
+                          <a:latin typeface="Lato"/>
+                        </a:defRPr>
+                      </a:pPr>
+                      <a:r>
+                        <a:t>31 March 2030 (exemption ends)</a:t>
+                      </a:r>
+                    </a:p>
+                  </a:txBody>
+                  <a:tcPr marL="64008" marR="64008" marT="54864" marB="27432" anchor="t">
+                    <a:lnL w="0">
+                      <a:noFill/>
+                    </a:lnL>
+                    <a:lnR w="0">
+                      <a:noFill/>
+                    </a:lnR>
+                    <a:lnT w="0">
+                      <a:noFill/>
+                    </a:lnT>
+                    <a:lnB w="5080">
+                      <a:solidFill>
+                        <a:srgbClr val="B8B8B8"/>
+                      </a:solidFill>
+                    </a:lnB>
+                    <a:solidFill>
+                      <a:srgbClr val="FFFFFF"/>
+                    </a:solidFill>
+                  </a:tcPr>
+                </a:tc>
+              </a:tr>
+              <a:tr h="335280">
+                <a:tc>
+                  <a:txBody>
+                    <a:bodyPr/>
+                    <a:lstStyle/>
+                    <a:p>
+                      <a:pPr>
+                        <a:spcAft>
+                          <a:spcPts val="100"/>
+                        </a:spcAft>
+                        <a:defRPr sz="1000" b="1">
+                          <a:solidFill>
+                            <a:srgbClr val="0A2373"/>
+                          </a:solidFill>
+                          <a:latin typeface="Lato"/>
+                        </a:defRPr>
+                      </a:pPr>
+                      <a:r>
+                        <a:t>Duvha</a:t>
+                      </a:r>
+                    </a:p>
+                  </a:txBody>
+                  <a:tcPr marL="64008" marR="64008" marT="54864" marB="27432" anchor="t">
+                    <a:lnL w="0">
+                      <a:noFill/>
+                    </a:lnL>
+                    <a:lnR w="0">
+                      <a:noFill/>
+                    </a:lnR>
+                    <a:lnT w="0">
+                      <a:noFill/>
+                    </a:lnT>
+                    <a:lnB w="5080">
+                      <a:solidFill>
+                        <a:srgbClr val="B8B8B8"/>
+                      </a:solidFill>
+                    </a:lnB>
+                    <a:solidFill>
+                      <a:srgbClr val="FFFFFF"/>
+                    </a:solidFill>
+                  </a:tcPr>
+                </a:tc>
+                <a:tc>
+                  <a:txBody>
+                    <a:bodyPr/>
+                    <a:lstStyle/>
+                    <a:p>
+                      <a:pPr>
+                        <a:spcAft>
+                          <a:spcPts val="100"/>
+                        </a:spcAft>
+                        <a:defRPr sz="1000" b="0">
+                          <a:solidFill>
+                            <a:srgbClr val="11151A"/>
+                          </a:solidFill>
+                          <a:latin typeface="Lato"/>
+                        </a:defRPr>
+                      </a:pPr>
+                      <a:r>
+                        <a:t>3,000</a:t>
+                      </a:r>
+                    </a:p>
+                  </a:txBody>
+                  <a:tcPr marL="64008" marR="64008" marT="54864" marB="27432" anchor="t">
+                    <a:lnL w="0">
+                      <a:noFill/>
+                    </a:lnL>
+                    <a:lnR w="0">
+                      <a:noFill/>
+                    </a:lnR>
+                    <a:lnT w="0">
+                      <a:noFill/>
+                    </a:lnT>
+                    <a:lnB w="5080">
+                      <a:solidFill>
+                        <a:srgbClr val="B8B8B8"/>
+                      </a:solidFill>
+                    </a:lnB>
+                    <a:solidFill>
+                      <a:srgbClr val="FFFFFF"/>
+                    </a:solidFill>
+                  </a:tcPr>
+                </a:tc>
+                <a:tc>
+                  <a:txBody>
+                    <a:bodyPr/>
+                    <a:lstStyle/>
+                    <a:p>
+                      <a:pPr>
+                        <a:spcAft>
+                          <a:spcPts val="100"/>
+                        </a:spcAft>
+                        <a:defRPr sz="1000" b="0">
+                          <a:solidFill>
+                            <a:srgbClr val="11151A"/>
+                          </a:solidFill>
+                          <a:latin typeface="Lato"/>
+                        </a:defRPr>
+                      </a:pPr>
+                      <a:r>
+                        <a:t>21 February 2034</a:t>
+                      </a:r>
+                    </a:p>
+                  </a:txBody>
+                  <a:tcPr marL="64008" marR="64008" marT="54864" marB="27432" anchor="t">
+                    <a:lnL w="0">
+                      <a:noFill/>
+                    </a:lnL>
+                    <a:lnR w="0">
+                      <a:noFill/>
+                    </a:lnR>
+                    <a:lnT w="0">
+                      <a:noFill/>
+                    </a:lnT>
+                    <a:lnB w="5080">
+                      <a:solidFill>
+                        <a:srgbClr val="B8B8B8"/>
+                      </a:solidFill>
+                    </a:lnB>
+                    <a:solidFill>
+                      <a:srgbClr val="FFFFFF"/>
+                    </a:solidFill>
+                  </a:tcPr>
+                </a:tc>
+              </a:tr>
+              <a:tr h="335280">
+                <a:tc>
+                  <a:txBody>
+                    <a:bodyPr/>
+                    <a:lstStyle/>
+                    <a:p>
+                      <a:pPr>
+                        <a:spcAft>
+                          <a:spcPts val="100"/>
+                        </a:spcAft>
+                        <a:defRPr sz="1000" b="1">
+                          <a:solidFill>
+                            <a:srgbClr val="0A2373"/>
+                          </a:solidFill>
+                          <a:latin typeface="Lato"/>
+                        </a:defRPr>
+                      </a:pPr>
+                      <a:r>
+                        <a:t>Matla</a:t>
+                      </a:r>
+                    </a:p>
+                  </a:txBody>
+                  <a:tcPr marL="64008" marR="64008" marT="54864" marB="27432" anchor="t">
+                    <a:lnL w="0">
+                      <a:noFill/>
+                    </a:lnL>
+                    <a:lnR w="0">
+                      <a:noFill/>
+                    </a:lnR>
+                    <a:lnT w="0">
+                      <a:noFill/>
+                    </a:lnT>
+                    <a:lnB w="5080">
+                      <a:solidFill>
+                        <a:srgbClr val="B8B8B8"/>
+                      </a:solidFill>
+                    </a:lnB>
+                    <a:solidFill>
+                      <a:srgbClr val="FFFFFF"/>
+                    </a:solidFill>
+                  </a:tcPr>
+                </a:tc>
+                <a:tc>
+                  <a:txBody>
+                    <a:bodyPr/>
+                    <a:lstStyle/>
+                    <a:p>
+                      <a:pPr>
+                        <a:spcAft>
+                          <a:spcPts val="100"/>
+                        </a:spcAft>
+                        <a:defRPr sz="1000" b="0">
+                          <a:solidFill>
+                            <a:srgbClr val="11151A"/>
+                          </a:solidFill>
+                          <a:latin typeface="Lato"/>
+                        </a:defRPr>
+                      </a:pPr>
+                      <a:r>
+                        <a:t>3,600</a:t>
+                      </a:r>
+                    </a:p>
+                  </a:txBody>
+                  <a:tcPr marL="64008" marR="64008" marT="54864" marB="27432" anchor="t">
+                    <a:lnL w="0">
+                      <a:noFill/>
+                    </a:lnL>
+                    <a:lnR w="0">
+                      <a:noFill/>
+                    </a:lnR>
+                    <a:lnT w="0">
+                      <a:noFill/>
+                    </a:lnT>
+                    <a:lnB w="5080">
+                      <a:solidFill>
+                        <a:srgbClr val="B8B8B8"/>
+                      </a:solidFill>
+                    </a:lnB>
+                    <a:solidFill>
+                      <a:srgbClr val="FFFFFF"/>
+                    </a:solidFill>
+                  </a:tcPr>
+                </a:tc>
+                <a:tc>
+                  <a:txBody>
+                    <a:bodyPr/>
+                    <a:lstStyle/>
+                    <a:p>
+                      <a:pPr>
+                        <a:spcAft>
+                          <a:spcPts val="100"/>
+                        </a:spcAft>
+                        <a:defRPr sz="1000" b="0">
+                          <a:solidFill>
+                            <a:srgbClr val="11151A"/>
+                          </a:solidFill>
+                          <a:latin typeface="Lato"/>
+                        </a:defRPr>
+                      </a:pPr>
+                      <a:r>
+                        <a:t>20 July 2034</a:t>
+                      </a:r>
+                    </a:p>
+                  </a:txBody>
+                  <a:tcPr marL="64008" marR="64008" marT="54864" marB="27432" anchor="t">
+                    <a:lnL w="0">
+                      <a:noFill/>
+                    </a:lnL>
+                    <a:lnR w="0">
+                      <a:noFill/>
+                    </a:lnR>
+                    <a:lnT w="0">
+                      <a:noFill/>
+                    </a:lnT>
+                    <a:lnB w="5080">
+                      <a:solidFill>
+                        <a:srgbClr val="B8B8B8"/>
+                      </a:solidFill>
+                    </a:lnB>
+                    <a:solidFill>
+                      <a:srgbClr val="FFFFFF"/>
+                    </a:solidFill>
+                  </a:tcPr>
+                </a:tc>
+              </a:tr>
+            </a:tbl>
+          </a:graphicData>
+        </a:graphic>
+      </p:graphicFrame>
+      <p:sp>
+        <p:nvSpPr>
+          <p:cNvPr id="12" name="TextBox 11"/>
+          <p:cNvSpPr txBox="1"/>
+          <p:nvPr/>
+        </p:nvSpPr>
+        <p:spPr>
+          <a:xfrm>
+            <a:off x="457200" y="5669280"/>
+            <a:ext cx="10652760" cy="548640"/>
+          </a:xfrm>
+          <a:prstGeom prst="rect">
+            <a:avLst/>
+          </a:prstGeom>
+          <a:noFill/>
+        </p:spPr>
+        <p:txBody>
+          <a:bodyPr wrap="square" lIns="22860" rIns="22860" tIns="0" bIns="0">
+            <a:spAutoFit/>
+          </a:bodyPr>
+          <a:lstStyle/>
+          <a:p>
+            <a:pPr>
+              <a:spcAft>
+                <a:spcPts val="300"/>
+              </a:spcAft>
+              <a:defRPr sz="1100" b="1">
+                <a:solidFill>
+                  <a:srgbClr val="0A2373"/>
+                </a:solidFill>
+                <a:latin typeface="Lato"/>
+              </a:defRPr>
+            </a:pPr>
+            <a:r>
+              <a:t>Eskom was to decide by end September 2026 whether Camden, Grootvlei, Hendrina, Arnot and Kriel shut, are repowered or run on. No decision had been announced by 8 October.</a:t>
+            </a:r>
+          </a:p>
+        </p:txBody>
+      </p:sp>
+      <p:sp>
+        <p:nvSpPr>
+          <p:cNvPr id="13" name="Chevron 12">
+            <a:hlinkClick action="ppaction://hlinksldjump" r:id="rId2"/>
+          </p:cNvPr>
+          <p:cNvSpPr/>
+          <p:nvPr/>
+        </p:nvSpPr>
+        <p:spPr>
+          <a:xfrm>
+            <a:off x="457200" y="73152"/>
+            <a:ext cx="2075688" cy="384048"/>
+          </a:xfrm>
+          <a:prstGeom prst="chevron">
+            <a:avLst>
+              <a:gd name="adj" fmla="val 12000"/>
+            </a:avLst>
+          </a:prstGeom>
+          <a:solidFill>
+            <a:srgbClr val="EEEEEE"/>
+          </a:solidFill>
+          <a:ln>
+            <a:noFill/>
+          </a:ln>
+        </p:spPr>
+        <p:style>
+          <a:lnRef idx="1">
+            <a:schemeClr val="accent1"/>
+          </a:lnRef>
+          <a:fillRef idx="3">
+            <a:schemeClr val="accent1"/>
+          </a:fillRef>
+          <a:effectRef idx="2">
+            <a:schemeClr val="accent1"/>
+          </a:effectRef>
+          <a:fontRef idx="minor">
+            <a:schemeClr val="lt1"/>
+          </a:fontRef>
+        </p:style>
+        <p:txBody>
+          <a:bodyPr rtlCol="0" anchor="ctr" tIns="0" bIns="0"/>
+          <a:lstStyle/>
+          <a:p>
+            <a:pPr algn="ctr">
+              <a:defRPr sz="1100" b="0">
+                <a:solidFill>
+                  <a:srgbClr val="0A2373"/>
+                </a:solidFill>
+                <a:latin typeface="Lato"/>
+              </a:defRPr>
+            </a:pPr>
+            <a:r>
+              <a:t>1  National balance</a:t>
+            </a:r>
+          </a:p>
+        </p:txBody>
+      </p:sp>
+      <p:sp>
+        <p:nvSpPr>
+          <p:cNvPr id="14" name="Chevron 13">
+            <a:hlinkClick action="ppaction://hlinksldjump" r:id="rId3"/>
+          </p:cNvPr>
+          <p:cNvSpPr/>
+          <p:nvPr/>
+        </p:nvSpPr>
+        <p:spPr>
+          <a:xfrm>
+            <a:off x="2587752" y="73152"/>
+            <a:ext cx="2075688" cy="384048"/>
+          </a:xfrm>
+          <a:prstGeom prst="chevron">
+            <a:avLst>
+              <a:gd name="adj" fmla="val 12000"/>
+            </a:avLst>
+          </a:prstGeom>
+          <a:solidFill>
+            <a:srgbClr val="EEEEEE"/>
+          </a:solidFill>
+          <a:ln>
+            <a:noFill/>
+          </a:ln>
+        </p:spPr>
+        <p:style>
+          <a:lnRef idx="1">
+            <a:schemeClr val="accent1"/>
+          </a:lnRef>
+          <a:fillRef idx="3">
+            <a:schemeClr val="accent1"/>
+          </a:fillRef>
+          <a:effectRef idx="2">
+            <a:schemeClr val="accent1"/>
+          </a:effectRef>
+          <a:fontRef idx="minor">
+            <a:schemeClr val="lt1"/>
+          </a:fontRef>
+        </p:style>
+        <p:txBody>
+          <a:bodyPr rtlCol="0" anchor="ctr" tIns="0" bIns="0"/>
+          <a:lstStyle/>
+          <a:p>
+            <a:pPr algn="ctr">
+              <a:defRPr sz="1100" b="0">
+                <a:solidFill>
+                  <a:srgbClr val="0A2373"/>
+                </a:solidFill>
+                <a:latin typeface="Lato"/>
+              </a:defRPr>
+            </a:pPr>
+            <a:r>
+              <a:t>2  Forecast levers</a:t>
+            </a:r>
+          </a:p>
+        </p:txBody>
+      </p:sp>
+      <p:sp>
+        <p:nvSpPr>
+          <p:cNvPr id="15" name="Chevron 14">
+            <a:hlinkClick action="ppaction://hlinksldjump" r:id="rId4"/>
+          </p:cNvPr>
+          <p:cNvSpPr/>
+          <p:nvPr/>
+        </p:nvSpPr>
+        <p:spPr>
+          <a:xfrm>
+            <a:off x="4718304" y="73152"/>
+            <a:ext cx="2075688" cy="384048"/>
+          </a:xfrm>
+          <a:prstGeom prst="chevron">
+            <a:avLst>
+              <a:gd name="adj" fmla="val 12000"/>
+            </a:avLst>
+          </a:prstGeom>
+          <a:solidFill>
+            <a:srgbClr val="0A2373"/>
+          </a:solidFill>
+          <a:ln>
+            <a:noFill/>
+          </a:ln>
+        </p:spPr>
+        <p:style>
+          <a:lnRef idx="1">
+            <a:schemeClr val="accent1"/>
+          </a:lnRef>
+          <a:fillRef idx="3">
+            <a:schemeClr val="accent1"/>
+          </a:fillRef>
+          <a:effectRef idx="2">
+            <a:schemeClr val="accent1"/>
+          </a:effectRef>
+          <a:fontRef idx="minor">
+            <a:schemeClr val="lt1"/>
+          </a:fontRef>
+        </p:style>
+        <p:txBody>
+          <a:bodyPr rtlCol="0" anchor="ctr" tIns="0" bIns="0"/>
+          <a:lstStyle/>
+          <a:p>
+            <a:pPr algn="ctr">
+              <a:defRPr sz="1100" b="1">
+                <a:solidFill>
+                  <a:srgbClr val="FFFFFF"/>
+                </a:solidFill>
+                <a:latin typeface="Lato"/>
+              </a:defRPr>
+            </a:pPr>
+            <a:r>
+              <a:t>3  Sector baselines</a:t>
+            </a:r>
+          </a:p>
+        </p:txBody>
+      </p:sp>
+      <p:sp>
+        <p:nvSpPr>
+          <p:cNvPr id="16" name="Chevron 15">
+            <a:hlinkClick action="ppaction://hlinksldjump" r:id="rId5"/>
+          </p:cNvPr>
+          <p:cNvSpPr/>
+          <p:nvPr/>
+        </p:nvSpPr>
+        <p:spPr>
+          <a:xfrm>
+            <a:off x="6848856" y="73152"/>
+            <a:ext cx="2075688" cy="384048"/>
+          </a:xfrm>
+          <a:prstGeom prst="chevron">
+            <a:avLst>
+              <a:gd name="adj" fmla="val 12000"/>
+            </a:avLst>
+          </a:prstGeom>
+          <a:solidFill>
+            <a:srgbClr val="EEEEEE"/>
+          </a:solidFill>
+          <a:ln>
+            <a:noFill/>
+          </a:ln>
+        </p:spPr>
+        <p:style>
+          <a:lnRef idx="1">
+            <a:schemeClr val="accent1"/>
+          </a:lnRef>
+          <a:fillRef idx="3">
+            <a:schemeClr val="accent1"/>
+          </a:fillRef>
+          <a:effectRef idx="2">
+            <a:schemeClr val="accent1"/>
+          </a:effectRef>
+          <a:fontRef idx="minor">
+            <a:schemeClr val="lt1"/>
+          </a:fontRef>
+        </p:style>
+        <p:txBody>
+          <a:bodyPr rtlCol="0" anchor="ctr" tIns="0" bIns="0"/>
+          <a:lstStyle/>
+          <a:p>
+            <a:pPr algn="ctr">
+              <a:defRPr sz="1100" b="0">
+                <a:solidFill>
+                  <a:srgbClr val="0A2373"/>
+                </a:solidFill>
+                <a:latin typeface="Lato"/>
+              </a:defRPr>
+            </a:pPr>
+            <a:r>
+              <a:t>4  Tank handling</a:t>
+            </a:r>
+          </a:p>
+        </p:txBody>
+      </p:sp>
+      <p:sp>
+        <p:nvSpPr>
+          <p:cNvPr id="17" name="Chevron 16">
+            <a:hlinkClick action="ppaction://hlinksldjump" r:id="rId6"/>
+          </p:cNvPr>
+          <p:cNvSpPr/>
+          <p:nvPr/>
+        </p:nvSpPr>
+        <p:spPr>
+          <a:xfrm>
+            <a:off x="8979408" y="73152"/>
+            <a:ext cx="2075688" cy="384048"/>
+          </a:xfrm>
+          <a:prstGeom prst="chevron">
+            <a:avLst>
+              <a:gd name="adj" fmla="val 12000"/>
+            </a:avLst>
+          </a:prstGeom>
+          <a:solidFill>
+            <a:srgbClr val="EEEEEE"/>
+          </a:solidFill>
+          <a:ln>
+            <a:noFill/>
+          </a:ln>
+        </p:spPr>
+        <p:style>
+          <a:lnRef idx="1">
+            <a:schemeClr val="accent1"/>
+          </a:lnRef>
+          <a:fillRef idx="3">
+            <a:schemeClr val="accent1"/>
+          </a:fillRef>
+          <a:effectRef idx="2">
+            <a:schemeClr val="accent1"/>
+          </a:effectRef>
+          <a:fontRef idx="minor">
+            <a:schemeClr val="lt1"/>
+          </a:fontRef>
+        </p:style>
+        <p:txBody>
+          <a:bodyPr rtlCol="0" anchor="ctr" tIns="0" bIns="0"/>
+          <a:lstStyle/>
+          <a:p>
+            <a:pPr algn="ctr">
+              <a:defRPr sz="1100" b="0">
+                <a:solidFill>
+                  <a:srgbClr val="0A2373"/>
+                </a:solidFill>
+                <a:latin typeface="Lato"/>
+              </a:defRPr>
+            </a:pPr>
+            <a:r>
+              <a:t>5  Hand-back</a:t>
+            </a:r>
+          </a:p>
+        </p:txBody>
+      </p:sp>
+    </p:spTree>
+  </p:cSld>
+  <p:clrMapOvr>
+    <a:masterClrMapping/>
+  </p:clrMapOvr>
+</p:sld>
+</file>
+
+<file path=ppt/slides/slide13.xml><?xml version="1.0" encoding="utf-8"?>
+<p:sld xmlns:a="http://schemas.openxmlformats.org/drawingml/2006/main" xmlns:p="http://schemas.openxmlformats.org/presentationml/2006/main" xmlns:r="http://schemas.openxmlformats.org/officeDocument/2006/relationships">
+  <p:cSld>
+    <p:spTree>
+      <p:nvGrpSpPr>
+        <p:cNvPr id="1" name=""/>
+        <p:cNvGrpSpPr/>
+        <p:nvPr/>
+      </p:nvGrpSpPr>
+      <p:grpSpPr/>
+      <p:sp>
+        <p:nvSpPr>
+          <p:cNvPr id="2" name="Title 1"/>
+          <p:cNvSpPr>
+            <a:spLocks noGrp="1"/>
+          </p:cNvSpPr>
+          <p:nvPr>
+            <p:ph type="title"/>
+          </p:nvPr>
+        </p:nvSpPr>
+        <p:spPr/>
+        <p:txBody>
+          <a:bodyPr/>
+          <a:lstStyle/>
+          <a:p>
+            <a:r>
+              <a:t>Diesel for power from 2031: 20 to 4,224 million litres a year, depending on gas</a:t>
+            </a:r>
+          </a:p>
+        </p:txBody>
+      </p:sp>
+      <p:sp>
+        <p:nvSpPr>
+          <p:cNvPr id="3" name="TextBox 2"/>
+          <p:cNvSpPr txBox="1"/>
+          <p:nvPr/>
+        </p:nvSpPr>
+        <p:spPr>
+          <a:xfrm>
+            <a:off x="457200" y="1627632"/>
+            <a:ext cx="10652760" cy="274320"/>
+          </a:xfrm>
+          <a:prstGeom prst="rect">
+            <a:avLst/>
+          </a:prstGeom>
+          <a:noFill/>
+        </p:spPr>
+        <p:txBody>
+          <a:bodyPr wrap="square" lIns="22860" rIns="22860" tIns="0" bIns="0">
+            <a:spAutoFit/>
+          </a:bodyPr>
+          <a:lstStyle/>
+          <a:p>
+            <a:pPr>
+              <a:spcAft>
+                <a:spcPts val="300"/>
+              </a:spcAft>
+              <a:defRPr sz="1300" b="1">
+                <a:solidFill>
+                  <a:srgbClr val="11151A"/>
+                </a:solidFill>
+                <a:latin typeface="Lato"/>
+              </a:defRPr>
+            </a:pPr>
+            <a:r>
+              <a:t>Three cases for Nigel and Henry to confirm | million litres a year | the model has 3,581 for 2024</a:t>
+            </a:r>
+          </a:p>
+        </p:txBody>
+      </p:sp>
+      <p:cxnSp>
+        <p:nvCxnSpPr>
+          <p:cNvPr id="4" name="Connector 3"/>
+          <p:cNvCxnSpPr/>
+          <p:nvPr/>
+        </p:nvCxnSpPr>
+        <p:spPr>
+          <a:xfrm>
+            <a:off x="457200" y="1920240"/>
+            <a:ext cx="10652760" cy="0"/>
+          </a:xfrm>
+          <a:prstGeom prst="line">
+            <a:avLst/>
+          </a:prstGeom>
+          <a:ln w="7620">
+            <a:solidFill>
+              <a:srgbClr val="A0A0A0"/>
+            </a:solidFill>
+          </a:ln>
+        </p:spPr>
+        <p:style>
+          <a:lnRef idx="2">
+            <a:schemeClr val="accent1"/>
+          </a:lnRef>
+          <a:fillRef idx="0">
+            <a:schemeClr val="accent1"/>
+          </a:fillRef>
+          <a:effectRef idx="1">
+            <a:schemeClr val="accent1"/>
+          </a:effectRef>
+          <a:fontRef idx="minor">
+            <a:schemeClr val="tx1"/>
+          </a:fontRef>
+        </p:style>
+      </p:cxnSp>
+      <p:sp>
+        <p:nvSpPr>
+          <p:cNvPr id="5" name="TextBox 4"/>
+          <p:cNvSpPr txBox="1"/>
+          <p:nvPr/>
+        </p:nvSpPr>
+        <p:spPr>
+          <a:xfrm>
+            <a:off x="457200" y="6547104"/>
+            <a:ext cx="9692640" cy="182880"/>
+          </a:xfrm>
+          <a:prstGeom prst="rect">
+            <a:avLst/>
+          </a:prstGeom>
+          <a:noFill/>
+        </p:spPr>
+        <p:txBody>
+          <a:bodyPr wrap="square" lIns="22860" rIns="22860" tIns="0" bIns="0">
+            <a:spAutoFit/>
+          </a:bodyPr>
+          <a:lstStyle/>
+          <a:p>
+            <a:pPr>
+              <a:spcAft>
+                <a:spcPts val="300"/>
+              </a:spcAft>
+              <a:defRPr sz="800" b="0">
+                <a:solidFill>
+                  <a:srgbClr val="11151A"/>
+                </a:solidFill>
+                <a:latin typeface="Lato"/>
+              </a:defRPr>
+            </a:pPr>
+            <a:r>
+              <a:t>Source: power_fleet_diesel.csv and the Power fleet sheet of the workshop workbook, manish-branch; Eskom fact sheet GX 0001 (July 2024) and the sources named in the file.</a:t>
+            </a:r>
+          </a:p>
+        </p:txBody>
+      </p:sp>
+      <p:sp>
+        <p:nvSpPr>
+          <p:cNvPr id="6" name="TextBox 5"/>
+          <p:cNvSpPr txBox="1"/>
+          <p:nvPr/>
+        </p:nvSpPr>
+        <p:spPr>
+          <a:xfrm>
+            <a:off x="457200" y="6711696"/>
+            <a:ext cx="2011680" cy="128016"/>
+          </a:xfrm>
+          <a:prstGeom prst="rect">
+            <a:avLst/>
+          </a:prstGeom>
+          <a:noFill/>
+        </p:spPr>
+        <p:txBody>
+          <a:bodyPr wrap="square" lIns="22860" rIns="22860" tIns="0" bIns="0">
+            <a:spAutoFit/>
+          </a:bodyPr>
+          <a:lstStyle/>
+          <a:p>
+            <a:pPr>
+              <a:spcAft>
+                <a:spcPts val="300"/>
+              </a:spcAft>
+              <a:defRPr sz="700" b="0">
+                <a:solidFill>
+                  <a:srgbClr val="11151A"/>
+                </a:solidFill>
+                <a:latin typeface="Lato"/>
+              </a:defRPr>
+            </a:pPr>
+            <a:r>
+              <a:t>Strictly Confidential</a:t>
+            </a:r>
+          </a:p>
+        </p:txBody>
+      </p:sp>
+      <p:graphicFrame>
+        <p:nvGraphicFramePr>
+          <p:cNvPr id="7" name="Chart 6"/>
+          <p:cNvGraphicFramePr>
+            <a:graphicFrameLocks noGrp="1"/>
+          </p:cNvGraphicFramePr>
+          <p:nvPr/>
+        </p:nvGraphicFramePr>
+        <p:xfrm>
+          <a:off x="457200" y="2011680"/>
+          <a:ext cx="5120640" cy="3566160"/>
+        </p:xfrm>
+        <a:graphic>
+          <a:graphicData uri="http://schemas.openxmlformats.org/drawingml/2006/chart">
+            <c:chart xmlns:c="http://schemas.openxmlformats.org/drawingml/2006/chart" r:id="rId2"/>
+          </a:graphicData>
+        </a:graphic>
+      </p:graphicFrame>
+      <p:graphicFrame>
+        <p:nvGraphicFramePr>
+          <p:cNvPr id="8" name="Table 7"/>
+          <p:cNvGraphicFramePr>
+            <a:graphicFrameLocks noGrp="1"/>
+          </p:cNvGraphicFramePr>
+          <p:nvPr/>
+        </p:nvGraphicFramePr>
+        <p:xfrm>
+          <a:off x="5715000" y="2029968"/>
+          <a:ext cx="5394960" cy="3474720"/>
+        </p:xfrm>
+        <a:graphic>
+          <a:graphicData uri="http://schemas.openxmlformats.org/drawingml/2006/table">
+            <a:tbl>
+              <a:tblPr firstRow="0" bandRow="0"/>
+              <a:tblGrid>
+                <a:gridCol w="1828800"/>
+                <a:gridCol w="1005840"/>
+                <a:gridCol w="1188720"/>
+                <a:gridCol w="1371600"/>
+              </a:tblGrid>
+              <a:tr h="579120">
+                <a:tc>
+                  <a:txBody>
+                    <a:bodyPr/>
+                    <a:lstStyle/>
+                    <a:p>
+                      <a:pPr>
+                        <a:spcAft>
+                          <a:spcPts val="100"/>
+                        </a:spcAft>
+                        <a:defRPr sz="950" b="1">
+                          <a:solidFill>
+                            <a:srgbClr val="0A2373"/>
+                          </a:solidFill>
+                          <a:latin typeface="Lato"/>
+                        </a:defRPr>
+                      </a:pPr>
+                    </a:p>
+                  </a:txBody>
+                  <a:tcPr marL="64008" marR="64008" marT="54864" marB="27432" anchor="t">
+                    <a:lnL w="0">
+                      <a:noFill/>
+                    </a:lnL>
+                    <a:lnR w="0">
+                      <a:noFill/>
+                    </a:lnR>
+                    <a:lnT w="0">
+                      <a:noFill/>
+                    </a:lnT>
+                    <a:lnB w="5080">
+                      <a:solidFill>
+                        <a:srgbClr val="B8B8B8"/>
+                      </a:solidFill>
+                    </a:lnB>
+                    <a:solidFill>
+                      <a:srgbClr val="FFFFFF"/>
+                    </a:solidFill>
+                  </a:tcPr>
+                </a:tc>
+                <a:tc>
+                  <a:txBody>
+                    <a:bodyPr/>
+                    <a:lstStyle/>
+                    <a:p>
+                      <a:pPr>
+                        <a:spcAft>
+                          <a:spcPts val="100"/>
+                        </a:spcAft>
+                        <a:defRPr sz="950" b="1">
+                          <a:solidFill>
+                            <a:srgbClr val="11151A"/>
+                          </a:solidFill>
+                          <a:latin typeface="Lato"/>
+                        </a:defRPr>
+                      </a:pPr>
+                      <a:r>
+                        <a:t>Low</a:t>
+                      </a:r>
+                    </a:p>
+                  </a:txBody>
+                  <a:tcPr marL="64008" marR="64008" marT="54864" marB="27432" anchor="t">
+                    <a:lnL w="0">
+                      <a:noFill/>
+                    </a:lnL>
+                    <a:lnR w="0">
+                      <a:noFill/>
+                    </a:lnR>
+                    <a:lnT w="0">
+                      <a:noFill/>
+                    </a:lnT>
+                    <a:lnB w="5080">
+                      <a:solidFill>
+                        <a:srgbClr val="B8B8B8"/>
+                      </a:solidFill>
+                    </a:lnB>
+                    <a:solidFill>
+                      <a:srgbClr val="FFFFFF"/>
+                    </a:solidFill>
+                  </a:tcPr>
+                </a:tc>
+                <a:tc>
+                  <a:txBody>
+                    <a:bodyPr/>
+                    <a:lstStyle/>
+                    <a:p>
+                      <a:pPr>
+                        <a:spcAft>
+                          <a:spcPts val="100"/>
+                        </a:spcAft>
+                        <a:defRPr sz="950" b="1">
+                          <a:solidFill>
+                            <a:srgbClr val="11151A"/>
+                          </a:solidFill>
+                          <a:latin typeface="Lato"/>
+                        </a:defRPr>
+                      </a:pPr>
+                      <a:r>
+                        <a:t>Medium</a:t>
+                      </a:r>
+                    </a:p>
+                  </a:txBody>
+                  <a:tcPr marL="64008" marR="64008" marT="54864" marB="27432" anchor="t">
+                    <a:lnL w="0">
+                      <a:noFill/>
+                    </a:lnL>
+                    <a:lnR w="0">
+                      <a:noFill/>
+                    </a:lnR>
+                    <a:lnT w="0">
+                      <a:noFill/>
+                    </a:lnT>
+                    <a:lnB w="5080">
+                      <a:solidFill>
+                        <a:srgbClr val="B8B8B8"/>
+                      </a:solidFill>
+                    </a:lnB>
+                    <a:solidFill>
+                      <a:srgbClr val="FFFFFF"/>
+                    </a:solidFill>
+                  </a:tcPr>
+                </a:tc>
+                <a:tc>
+                  <a:txBody>
+                    <a:bodyPr/>
+                    <a:lstStyle/>
+                    <a:p>
+                      <a:pPr>
+                        <a:spcAft>
+                          <a:spcPts val="100"/>
+                        </a:spcAft>
+                        <a:defRPr sz="950" b="1">
+                          <a:solidFill>
+                            <a:srgbClr val="11151A"/>
+                          </a:solidFill>
+                          <a:latin typeface="Lato"/>
+                        </a:defRPr>
+                      </a:pPr>
+                      <a:r>
+                        <a:t>High</a:t>
+                      </a:r>
+                    </a:p>
+                  </a:txBody>
+                  <a:tcPr marL="64008" marR="64008" marT="54864" marB="27432" anchor="t">
+                    <a:lnL w="0">
+                      <a:noFill/>
+                    </a:lnL>
+                    <a:lnR w="0">
+                      <a:noFill/>
+                    </a:lnR>
+                    <a:lnT w="0">
+                      <a:noFill/>
+                    </a:lnT>
+                    <a:lnB w="5080">
+                      <a:solidFill>
+                        <a:srgbClr val="B8B8B8"/>
+                      </a:solidFill>
+                    </a:lnB>
+                    <a:solidFill>
+                      <a:srgbClr val="FFFFFF"/>
+                    </a:solidFill>
+                  </a:tcPr>
+                </a:tc>
+              </a:tr>
+              <a:tr h="579120">
+                <a:tc>
+                  <a:txBody>
+                    <a:bodyPr/>
+                    <a:lstStyle/>
+                    <a:p>
+                      <a:pPr>
+                        <a:spcAft>
+                          <a:spcPts val="100"/>
+                        </a:spcAft>
+                        <a:defRPr sz="950" b="1">
+                          <a:solidFill>
+                            <a:srgbClr val="0A2373"/>
+                          </a:solidFill>
+                          <a:latin typeface="Lato"/>
+                        </a:defRPr>
+                      </a:pPr>
+                      <a:r>
+                        <a:t>Avon and Dedisa after 2030-2031</a:t>
+                      </a:r>
+                    </a:p>
+                  </a:txBody>
+                  <a:tcPr marL="64008" marR="64008" marT="54864" marB="27432" anchor="t">
+                    <a:lnL w="0">
+                      <a:noFill/>
+                    </a:lnL>
+                    <a:lnR w="0">
+                      <a:noFill/>
+                    </a:lnR>
+                    <a:lnT w="0">
+                      <a:noFill/>
+                    </a:lnT>
+                    <a:lnB w="5080">
+                      <a:solidFill>
+                        <a:srgbClr val="B8B8B8"/>
+                      </a:solidFill>
+                    </a:lnB>
+                    <a:solidFill>
+                      <a:srgbClr val="FFFFFF"/>
+                    </a:solidFill>
+                  </a:tcPr>
+                </a:tc>
+                <a:tc>
+                  <a:txBody>
+                    <a:bodyPr/>
+                    <a:lstStyle/>
+                    <a:p>
+                      <a:pPr>
+                        <a:spcAft>
+                          <a:spcPts val="100"/>
+                        </a:spcAft>
+                        <a:defRPr sz="950" b="0">
+                          <a:solidFill>
+                            <a:srgbClr val="11151A"/>
+                          </a:solidFill>
+                          <a:latin typeface="Lato"/>
+                        </a:defRPr>
+                      </a:pPr>
+                      <a:r>
+                        <a:t>Stop</a:t>
+                      </a:r>
+                    </a:p>
+                  </a:txBody>
+                  <a:tcPr marL="64008" marR="64008" marT="54864" marB="27432" anchor="t">
+                    <a:lnL w="0">
+                      <a:noFill/>
+                    </a:lnL>
+                    <a:lnR w="0">
+                      <a:noFill/>
+                    </a:lnR>
+                    <a:lnT w="0">
+                      <a:noFill/>
+                    </a:lnT>
+                    <a:lnB w="5080">
+                      <a:solidFill>
+                        <a:srgbClr val="B8B8B8"/>
+                      </a:solidFill>
+                    </a:lnB>
+                    <a:solidFill>
+                      <a:srgbClr val="FFFFFF"/>
+                    </a:solidFill>
+                  </a:tcPr>
+                </a:tc>
+                <a:tc>
+                  <a:txBody>
+                    <a:bodyPr/>
+                    <a:lstStyle/>
+                    <a:p>
+                      <a:pPr>
+                        <a:spcAft>
+                          <a:spcPts val="100"/>
+                        </a:spcAft>
+                        <a:defRPr sz="950" b="0">
+                          <a:solidFill>
+                            <a:srgbClr val="11151A"/>
+                          </a:solidFill>
+                          <a:latin typeface="Lato"/>
+                        </a:defRPr>
+                      </a:pPr>
+                      <a:r>
+                        <a:t>Continue</a:t>
+                      </a:r>
+                    </a:p>
+                  </a:txBody>
+                  <a:tcPr marL="64008" marR="64008" marT="54864" marB="27432" anchor="t">
+                    <a:lnL w="0">
+                      <a:noFill/>
+                    </a:lnL>
+                    <a:lnR w="0">
+                      <a:noFill/>
+                    </a:lnR>
+                    <a:lnT w="0">
+                      <a:noFill/>
+                    </a:lnT>
+                    <a:lnB w="5080">
+                      <a:solidFill>
+                        <a:srgbClr val="B8B8B8"/>
+                      </a:solidFill>
+                    </a:lnB>
+                    <a:solidFill>
+                      <a:srgbClr val="FFFFFF"/>
+                    </a:solidFill>
+                  </a:tcPr>
+                </a:tc>
+                <a:tc>
+                  <a:txBody>
+                    <a:bodyPr/>
+                    <a:lstStyle/>
+                    <a:p>
+                      <a:pPr>
+                        <a:spcAft>
+                          <a:spcPts val="100"/>
+                        </a:spcAft>
+                        <a:defRPr sz="950" b="0">
+                          <a:solidFill>
+                            <a:srgbClr val="11151A"/>
+                          </a:solidFill>
+                          <a:latin typeface="Lato"/>
+                        </a:defRPr>
+                      </a:pPr>
+                      <a:r>
+                        <a:t>Continue</a:t>
+                      </a:r>
+                    </a:p>
+                  </a:txBody>
+                  <a:tcPr marL="64008" marR="64008" marT="54864" marB="27432" anchor="t">
+                    <a:lnL w="0">
+                      <a:noFill/>
+                    </a:lnL>
+                    <a:lnR w="0">
+                      <a:noFill/>
+                    </a:lnR>
+                    <a:lnT w="0">
+                      <a:noFill/>
+                    </a:lnT>
+                    <a:lnB w="5080">
+                      <a:solidFill>
+                        <a:srgbClr val="B8B8B8"/>
+                      </a:solidFill>
+                    </a:lnB>
+                    <a:solidFill>
+                      <a:srgbClr val="FFFFFF"/>
+                    </a:solidFill>
+                  </a:tcPr>
+                </a:tc>
+              </a:tr>
+              <a:tr h="579120">
+                <a:tc>
+                  <a:txBody>
+                    <a:bodyPr/>
+                    <a:lstStyle/>
+                    <a:p>
+                      <a:pPr>
+                        <a:spcAft>
+                          <a:spcPts val="100"/>
+                        </a:spcAft>
+                        <a:defRPr sz="950" b="1">
+                          <a:solidFill>
+                            <a:srgbClr val="0A2373"/>
+                          </a:solidFill>
+                          <a:latin typeface="Lato"/>
+                        </a:defRPr>
+                      </a:pPr>
+                      <a:r>
+                        <a:t>Ankerlig and Gourikwa</a:t>
+                      </a:r>
+                    </a:p>
+                  </a:txBody>
+                  <a:tcPr marL="64008" marR="64008" marT="54864" marB="27432" anchor="t">
+                    <a:lnL w="0">
+                      <a:noFill/>
+                    </a:lnL>
+                    <a:lnR w="0">
+                      <a:noFill/>
+                    </a:lnR>
+                    <a:lnT w="0">
+                      <a:noFill/>
+                    </a:lnT>
+                    <a:lnB w="5080">
+                      <a:solidFill>
+                        <a:srgbClr val="B8B8B8"/>
+                      </a:solidFill>
+                    </a:lnB>
+                    <a:solidFill>
+                      <a:srgbClr val="FFFFFF"/>
+                    </a:solidFill>
+                  </a:tcPr>
+                </a:tc>
+                <a:tc>
+                  <a:txBody>
+                    <a:bodyPr/>
+                    <a:lstStyle/>
+                    <a:p>
+                      <a:pPr>
+                        <a:spcAft>
+                          <a:spcPts val="100"/>
+                        </a:spcAft>
+                        <a:defRPr sz="950" b="0">
+                          <a:solidFill>
+                            <a:srgbClr val="11151A"/>
+                          </a:solidFill>
+                          <a:latin typeface="Lato"/>
+                        </a:defRPr>
+                      </a:pPr>
+                      <a:r>
+                        <a:t>Gas from 2028</a:t>
+                      </a:r>
+                    </a:p>
+                  </a:txBody>
+                  <a:tcPr marL="64008" marR="64008" marT="54864" marB="27432" anchor="t">
+                    <a:lnL w="0">
+                      <a:noFill/>
+                    </a:lnL>
+                    <a:lnR w="0">
+                      <a:noFill/>
+                    </a:lnR>
+                    <a:lnT w="0">
+                      <a:noFill/>
+                    </a:lnT>
+                    <a:lnB w="5080">
+                      <a:solidFill>
+                        <a:srgbClr val="B8B8B8"/>
+                      </a:solidFill>
+                    </a:lnB>
+                    <a:solidFill>
+                      <a:srgbClr val="FFFFFF"/>
+                    </a:solidFill>
+                  </a:tcPr>
+                </a:tc>
+                <a:tc>
+                  <a:txBody>
+                    <a:bodyPr/>
+                    <a:lstStyle/>
+                    <a:p>
+                      <a:pPr>
+                        <a:spcAft>
+                          <a:spcPts val="100"/>
+                        </a:spcAft>
+                        <a:defRPr sz="950" b="0">
+                          <a:solidFill>
+                            <a:srgbClr val="11151A"/>
+                          </a:solidFill>
+                          <a:latin typeface="Lato"/>
+                        </a:defRPr>
+                      </a:pPr>
+                      <a:r>
+                        <a:t>Gas from 2028</a:t>
+                      </a:r>
+                    </a:p>
+                  </a:txBody>
+                  <a:tcPr marL="64008" marR="64008" marT="54864" marB="27432" anchor="t">
+                    <a:lnL w="0">
+                      <a:noFill/>
+                    </a:lnL>
+                    <a:lnR w="0">
+                      <a:noFill/>
+                    </a:lnR>
+                    <a:lnT w="0">
+                      <a:noFill/>
+                    </a:lnT>
+                    <a:lnB w="5080">
+                      <a:solidFill>
+                        <a:srgbClr val="B8B8B8"/>
+                      </a:solidFill>
+                    </a:lnB>
+                    <a:solidFill>
+                      <a:srgbClr val="FFFFFF"/>
+                    </a:solidFill>
+                  </a:tcPr>
+                </a:tc>
+                <a:tc>
+                  <a:txBody>
+                    <a:bodyPr/>
+                    <a:lstStyle/>
+                    <a:p>
+                      <a:pPr>
+                        <a:spcAft>
+                          <a:spcPts val="100"/>
+                        </a:spcAft>
+                        <a:defRPr sz="950" b="0">
+                          <a:solidFill>
+                            <a:srgbClr val="11151A"/>
+                          </a:solidFill>
+                          <a:latin typeface="Lato"/>
+                        </a:defRPr>
+                      </a:pPr>
+                      <a:r>
+                        <a:t>Diesel throughout</a:t>
+                      </a:r>
+                    </a:p>
+                  </a:txBody>
+                  <a:tcPr marL="64008" marR="64008" marT="54864" marB="27432" anchor="t">
+                    <a:lnL w="0">
+                      <a:noFill/>
+                    </a:lnL>
+                    <a:lnR w="0">
+                      <a:noFill/>
+                    </a:lnR>
+                    <a:lnT w="0">
+                      <a:noFill/>
+                    </a:lnT>
+                    <a:lnB w="5080">
+                      <a:solidFill>
+                        <a:srgbClr val="B8B8B8"/>
+                      </a:solidFill>
+                    </a:lnB>
+                    <a:solidFill>
+                      <a:srgbClr val="FFFFFF"/>
+                    </a:solidFill>
+                  </a:tcPr>
+                </a:tc>
+              </a:tr>
+              <a:tr h="579120">
+                <a:tc>
+                  <a:txBody>
+                    <a:bodyPr/>
+                    <a:lstStyle/>
+                    <a:p>
+                      <a:pPr>
+                        <a:spcAft>
+                          <a:spcPts val="100"/>
+                        </a:spcAft>
+                        <a:defRPr sz="950" b="1">
+                          <a:solidFill>
+                            <a:srgbClr val="0A2373"/>
+                          </a:solidFill>
+                          <a:latin typeface="Lato"/>
+                        </a:defRPr>
+                      </a:pPr>
+                      <a:r>
+                        <a:t>Gas turbines at the five coal sites, 2030</a:t>
+                      </a:r>
+                    </a:p>
+                  </a:txBody>
+                  <a:tcPr marL="64008" marR="64008" marT="54864" marB="27432" anchor="t">
+                    <a:lnL w="0">
+                      <a:noFill/>
+                    </a:lnL>
+                    <a:lnR w="0">
+                      <a:noFill/>
+                    </a:lnR>
+                    <a:lnT w="0">
+                      <a:noFill/>
+                    </a:lnT>
+                    <a:lnB w="5080">
+                      <a:solidFill>
+                        <a:srgbClr val="B8B8B8"/>
+                      </a:solidFill>
+                    </a:lnB>
+                    <a:solidFill>
+                      <a:srgbClr val="FFFFFF"/>
+                    </a:solidFill>
+                  </a:tcPr>
+                </a:tc>
+                <a:tc>
+                  <a:txBody>
+                    <a:bodyPr/>
+                    <a:lstStyle/>
+                    <a:p>
+                      <a:pPr>
+                        <a:spcAft>
+                          <a:spcPts val="100"/>
+                        </a:spcAft>
+                        <a:defRPr sz="950" b="0">
+                          <a:solidFill>
+                            <a:srgbClr val="11151A"/>
+                          </a:solidFill>
+                          <a:latin typeface="Lato"/>
+                        </a:defRPr>
+                      </a:pPr>
+                      <a:r>
+                        <a:t>None</a:t>
+                      </a:r>
+                    </a:p>
+                  </a:txBody>
+                  <a:tcPr marL="64008" marR="64008" marT="54864" marB="27432" anchor="t">
+                    <a:lnL w="0">
+                      <a:noFill/>
+                    </a:lnL>
+                    <a:lnR w="0">
+                      <a:noFill/>
+                    </a:lnR>
+                    <a:lnT w="0">
+                      <a:noFill/>
+                    </a:lnT>
+                    <a:lnB w="5080">
+                      <a:solidFill>
+                        <a:srgbClr val="B8B8B8"/>
+                      </a:solidFill>
+                    </a:lnB>
+                    <a:solidFill>
+                      <a:srgbClr val="FFFFFF"/>
+                    </a:solidFill>
+                  </a:tcPr>
+                </a:tc>
+                <a:tc>
+                  <a:txBody>
+                    <a:bodyPr/>
+                    <a:lstStyle/>
+                    <a:p>
+                      <a:pPr>
+                        <a:spcAft>
+                          <a:spcPts val="100"/>
+                        </a:spcAft>
+                        <a:defRPr sz="950" b="0">
+                          <a:solidFill>
+                            <a:srgbClr val="11151A"/>
+                          </a:solidFill>
+                          <a:latin typeface="Lato"/>
+                        </a:defRPr>
+                      </a:pPr>
+                      <a:r>
+                        <a:t>3,000 MW on gas, 10% of output on diesel</a:t>
+                      </a:r>
+                    </a:p>
+                  </a:txBody>
+                  <a:tcPr marL="64008" marR="64008" marT="54864" marB="27432" anchor="t">
+                    <a:lnL w="0">
+                      <a:noFill/>
+                    </a:lnL>
+                    <a:lnR w="0">
+                      <a:noFill/>
+                    </a:lnR>
+                    <a:lnT w="0">
+                      <a:noFill/>
+                    </a:lnT>
+                    <a:lnB w="5080">
+                      <a:solidFill>
+                        <a:srgbClr val="B8B8B8"/>
+                      </a:solidFill>
+                    </a:lnB>
+                    <a:solidFill>
+                      <a:srgbClr val="FFFFFF"/>
+                    </a:solidFill>
+                  </a:tcPr>
+                </a:tc>
+                <a:tc>
+                  <a:txBody>
+                    <a:bodyPr/>
+                    <a:lstStyle/>
+                    <a:p>
+                      <a:pPr>
+                        <a:spcAft>
+                          <a:spcPts val="100"/>
+                        </a:spcAft>
+                        <a:defRPr sz="950" b="0">
+                          <a:solidFill>
+                            <a:srgbClr val="11151A"/>
+                          </a:solidFill>
+                          <a:latin typeface="Lato"/>
+                        </a:defRPr>
+                      </a:pPr>
+                      <a:r>
+                        <a:t>6,000 MW, no gas: diesel peakers</a:t>
+                      </a:r>
+                    </a:p>
+                  </a:txBody>
+                  <a:tcPr marL="64008" marR="64008" marT="54864" marB="27432" anchor="t">
+                    <a:lnL w="0">
+                      <a:noFill/>
+                    </a:lnL>
+                    <a:lnR w="0">
+                      <a:noFill/>
+                    </a:lnR>
+                    <a:lnT w="0">
+                      <a:noFill/>
+                    </a:lnT>
+                    <a:lnB w="5080">
+                      <a:solidFill>
+                        <a:srgbClr val="B8B8B8"/>
+                      </a:solidFill>
+                    </a:lnB>
+                    <a:solidFill>
+                      <a:srgbClr val="FFFFFF"/>
+                    </a:solidFill>
+                  </a:tcPr>
+                </a:tc>
+              </a:tr>
+              <a:tr h="579120">
+                <a:tc>
+                  <a:txBody>
+                    <a:bodyPr/>
+                    <a:lstStyle/>
+                    <a:p>
+                      <a:pPr>
+                        <a:spcAft>
+                          <a:spcPts val="100"/>
+                        </a:spcAft>
+                        <a:defRPr sz="950" b="1">
+                          <a:solidFill>
+                            <a:srgbClr val="0A2373"/>
+                          </a:solidFill>
+                          <a:latin typeface="Lato"/>
+                        </a:defRPr>
+                      </a:pPr>
+                      <a:r>
+                        <a:t>Peaker load factor</a:t>
+                      </a:r>
+                    </a:p>
+                  </a:txBody>
+                  <a:tcPr marL="64008" marR="64008" marT="54864" marB="27432" anchor="t">
+                    <a:lnL w="0">
+                      <a:noFill/>
+                    </a:lnL>
+                    <a:lnR w="0">
+                      <a:noFill/>
+                    </a:lnR>
+                    <a:lnT w="0">
+                      <a:noFill/>
+                    </a:lnT>
+                    <a:lnB w="5080">
+                      <a:solidFill>
+                        <a:srgbClr val="B8B8B8"/>
+                      </a:solidFill>
+                    </a:lnB>
+                    <a:solidFill>
+                      <a:srgbClr val="FFFFFF"/>
+                    </a:solidFill>
+                  </a:tcPr>
+                </a:tc>
+                <a:tc>
+                  <a:txBody>
+                    <a:bodyPr/>
+                    <a:lstStyle/>
+                    <a:p>
+                      <a:pPr>
+                        <a:spcAft>
+                          <a:spcPts val="100"/>
+                        </a:spcAft>
+                        <a:defRPr sz="950" b="0">
+                          <a:solidFill>
+                            <a:srgbClr val="11151A"/>
+                          </a:solidFill>
+                          <a:latin typeface="Lato"/>
+                        </a:defRPr>
+                      </a:pPr>
+                      <a:r>
+                        <a:t>3.6%</a:t>
+                      </a:r>
+                    </a:p>
+                  </a:txBody>
+                  <a:tcPr marL="64008" marR="64008" marT="54864" marB="27432" anchor="t">
+                    <a:lnL w="0">
+                      <a:noFill/>
+                    </a:lnL>
+                    <a:lnR w="0">
+                      <a:noFill/>
+                    </a:lnR>
+                    <a:lnT w="0">
+                      <a:noFill/>
+                    </a:lnT>
+                    <a:lnB w="5080">
+                      <a:solidFill>
+                        <a:srgbClr val="B8B8B8"/>
+                      </a:solidFill>
+                    </a:lnB>
+                    <a:solidFill>
+                      <a:srgbClr val="FFFFFF"/>
+                    </a:solidFill>
+                  </a:tcPr>
+                </a:tc>
+                <a:tc>
+                  <a:txBody>
+                    <a:bodyPr/>
+                    <a:lstStyle/>
+                    <a:p>
+                      <a:pPr>
+                        <a:spcAft>
+                          <a:spcPts val="100"/>
+                        </a:spcAft>
+                        <a:defRPr sz="950" b="0">
+                          <a:solidFill>
+                            <a:srgbClr val="11151A"/>
+                          </a:solidFill>
+                          <a:latin typeface="Lato"/>
+                        </a:defRPr>
+                      </a:pPr>
+                      <a:r>
+                        <a:t>9.4%</a:t>
+                      </a:r>
+                    </a:p>
+                  </a:txBody>
+                  <a:tcPr marL="64008" marR="64008" marT="54864" marB="27432" anchor="t">
+                    <a:lnL w="0">
+                      <a:noFill/>
+                    </a:lnL>
+                    <a:lnR w="0">
+                      <a:noFill/>
+                    </a:lnR>
+                    <a:lnT w="0">
+                      <a:noFill/>
+                    </a:lnT>
+                    <a:lnB w="5080">
+                      <a:solidFill>
+                        <a:srgbClr val="B8B8B8"/>
+                      </a:solidFill>
+                    </a:lnB>
+                    <a:solidFill>
+                      <a:srgbClr val="FFFFFF"/>
+                    </a:solidFill>
+                  </a:tcPr>
+                </a:tc>
+                <a:tc>
+                  <a:txBody>
+                    <a:bodyPr/>
+                    <a:lstStyle/>
+                    <a:p>
+                      <a:pPr>
+                        <a:spcAft>
+                          <a:spcPts val="100"/>
+                        </a:spcAft>
+                        <a:defRPr sz="950" b="0">
+                          <a:solidFill>
+                            <a:srgbClr val="11151A"/>
+                          </a:solidFill>
+                          <a:latin typeface="Lato"/>
+                        </a:defRPr>
+                      </a:pPr>
+                      <a:r>
+                        <a:t>17.1%</a:t>
+                      </a:r>
+                    </a:p>
+                  </a:txBody>
+                  <a:tcPr marL="64008" marR="64008" marT="54864" marB="27432" anchor="t">
+                    <a:lnL w="0">
+                      <a:noFill/>
+                    </a:lnL>
+                    <a:lnR w="0">
+                      <a:noFill/>
+                    </a:lnR>
+                    <a:lnT w="0">
+                      <a:noFill/>
+                    </a:lnT>
+                    <a:lnB w="5080">
+                      <a:solidFill>
+                        <a:srgbClr val="B8B8B8"/>
+                      </a:solidFill>
+                    </a:lnB>
+                    <a:solidFill>
+                      <a:srgbClr val="FFFFFF"/>
+                    </a:solidFill>
+                  </a:tcPr>
+                </a:tc>
+              </a:tr>
+              <a:tr h="579120">
+                <a:tc>
+                  <a:txBody>
+                    <a:bodyPr/>
+                    <a:lstStyle/>
+                    <a:p>
+                      <a:pPr>
+                        <a:spcAft>
+                          <a:spcPts val="100"/>
+                        </a:spcAft>
+                        <a:defRPr sz="950" b="1">
+                          <a:solidFill>
+                            <a:srgbClr val="0A2373"/>
+                          </a:solidFill>
+                          <a:latin typeface="Lato"/>
+                        </a:defRPr>
+                      </a:pPr>
+                      <a:r>
+                        <a:t>2025 / 2030 / 2035</a:t>
+                      </a:r>
+                    </a:p>
+                  </a:txBody>
+                  <a:tcPr marL="64008" marR="64008" marT="54864" marB="27432" anchor="t">
+                    <a:lnL w="0">
+                      <a:noFill/>
+                    </a:lnL>
+                    <a:lnR w="0">
+                      <a:noFill/>
+                    </a:lnR>
+                    <a:lnT w="0">
+                      <a:noFill/>
+                    </a:lnT>
+                    <a:lnB w="5080">
+                      <a:solidFill>
+                        <a:srgbClr val="B8B8B8"/>
+                      </a:solidFill>
+                    </a:lnB>
+                    <a:solidFill>
+                      <a:srgbClr val="FFFFFF"/>
+                    </a:solidFill>
+                  </a:tcPr>
+                </a:tc>
+                <a:tc>
+                  <a:txBody>
+                    <a:bodyPr/>
+                    <a:lstStyle/>
+                    <a:p>
+                      <a:pPr>
+                        <a:spcAft>
+                          <a:spcPts val="100"/>
+                        </a:spcAft>
+                        <a:defRPr sz="950" b="0">
+                          <a:solidFill>
+                            <a:srgbClr val="11151A"/>
+                          </a:solidFill>
+                          <a:latin typeface="Lato"/>
+                        </a:defRPr>
+                      </a:pPr>
+                      <a:r>
+                        <a:t>301 / 86 / 20</a:t>
+                      </a:r>
+                    </a:p>
+                  </a:txBody>
+                  <a:tcPr marL="64008" marR="64008" marT="54864" marB="27432" anchor="t">
+                    <a:lnL w="0">
+                      <a:noFill/>
+                    </a:lnL>
+                    <a:lnR w="0">
+                      <a:noFill/>
+                    </a:lnR>
+                    <a:lnT w="0">
+                      <a:noFill/>
+                    </a:lnT>
+                    <a:lnB w="5080">
+                      <a:solidFill>
+                        <a:srgbClr val="B8B8B8"/>
+                      </a:solidFill>
+                    </a:lnB>
+                    <a:solidFill>
+                      <a:srgbClr val="FFFFFF"/>
+                    </a:solidFill>
+                  </a:tcPr>
+                </a:tc>
+                <a:tc>
+                  <a:txBody>
+                    <a:bodyPr/>
+                    <a:lstStyle/>
+                    <a:p>
+                      <a:pPr>
+                        <a:spcAft>
+                          <a:spcPts val="100"/>
+                        </a:spcAft>
+                        <a:defRPr sz="950" b="0">
+                          <a:solidFill>
+                            <a:srgbClr val="11151A"/>
+                          </a:solidFill>
+                          <a:latin typeface="Lato"/>
+                        </a:defRPr>
+                      </a:pPr>
+                      <a:r>
+                        <a:t>792 / 637 / 637</a:t>
+                      </a:r>
+                    </a:p>
+                  </a:txBody>
+                  <a:tcPr marL="64008" marR="64008" marT="54864" marB="27432" anchor="t">
+                    <a:lnL w="0">
+                      <a:noFill/>
+                    </a:lnL>
+                    <a:lnR w="0">
+                      <a:noFill/>
+                    </a:lnR>
+                    <a:lnT w="0">
+                      <a:noFill/>
+                    </a:lnT>
+                    <a:lnB w="5080">
+                      <a:solidFill>
+                        <a:srgbClr val="B8B8B8"/>
+                      </a:solidFill>
+                    </a:lnB>
+                    <a:solidFill>
+                      <a:srgbClr val="FFFFFF"/>
+                    </a:solidFill>
+                  </a:tcPr>
+                </a:tc>
+                <a:tc>
+                  <a:txBody>
+                    <a:bodyPr/>
+                    <a:lstStyle/>
+                    <a:p>
+                      <a:pPr>
+                        <a:spcAft>
+                          <a:spcPts val="100"/>
+                        </a:spcAft>
+                        <a:defRPr sz="950" b="0">
+                          <a:solidFill>
+                            <a:srgbClr val="11151A"/>
+                          </a:solidFill>
+                          <a:latin typeface="Lato"/>
+                        </a:defRPr>
+                      </a:pPr>
+                      <a:r>
+                        <a:t>1,435 / 4,224 / 4,224</a:t>
+                      </a:r>
+                    </a:p>
+                  </a:txBody>
+                  <a:tcPr marL="64008" marR="64008" marT="54864" marB="27432" anchor="t">
+                    <a:lnL w="0">
+                      <a:noFill/>
+                    </a:lnL>
+                    <a:lnR w="0">
+                      <a:noFill/>
+                    </a:lnR>
+                    <a:lnT w="0">
+                      <a:noFill/>
+                    </a:lnT>
+                    <a:lnB w="5080">
+                      <a:solidFill>
+                        <a:srgbClr val="B8B8B8"/>
+                      </a:solidFill>
+                    </a:lnB>
+                    <a:solidFill>
+                      <a:srgbClr val="FFFFFF"/>
+                    </a:solidFill>
+                  </a:tcPr>
+                </a:tc>
+              </a:tr>
+            </a:tbl>
+          </a:graphicData>
+        </a:graphic>
+      </p:graphicFrame>
+      <p:sp>
+        <p:nvSpPr>
+          <p:cNvPr id="9" name="TextBox 8"/>
+          <p:cNvSpPr txBox="1"/>
+          <p:nvPr/>
+        </p:nvSpPr>
+        <p:spPr>
+          <a:xfrm>
+            <a:off x="457200" y="5669280"/>
+            <a:ext cx="10652760" cy="548640"/>
+          </a:xfrm>
+          <a:prstGeom prst="rect">
+            <a:avLst/>
+          </a:prstGeom>
+          <a:noFill/>
+        </p:spPr>
+        <p:txBody>
+          <a:bodyPr wrap="square" lIns="22860" rIns="22860" tIns="0" bIns="0">
+            <a:spAutoFit/>
+          </a:bodyPr>
+          <a:lstStyle/>
+          <a:p>
+            <a:pPr>
+              <a:spcAft>
+                <a:spcPts val="300"/>
+              </a:spcAft>
+              <a:defRPr sz="1100" b="1">
+                <a:solidFill>
+                  <a:srgbClr val="0A2373"/>
+                </a:solidFill>
+                <a:latin typeface="Lato"/>
+              </a:defRPr>
+            </a:pPr>
+            <a:r>
+              <a:t>Estimated burn was 1,594 million litres in the year to March 2024 and 334 in the year to March 2026. The high case rests on two unsourced assumptions: that the gas turbines are sited at the five stations, and that no gas reaches them.</a:t>
+            </a:r>
+          </a:p>
+        </p:txBody>
+      </p:sp>
+      <p:sp>
+        <p:nvSpPr>
+          <p:cNvPr id="10" name="Chevron 9">
+            <a:hlinkClick action="ppaction://hlinksldjump" r:id="rId3"/>
+          </p:cNvPr>
+          <p:cNvSpPr/>
+          <p:nvPr/>
+        </p:nvSpPr>
+        <p:spPr>
+          <a:xfrm>
+            <a:off x="457200" y="73152"/>
+            <a:ext cx="2075688" cy="384048"/>
+          </a:xfrm>
+          <a:prstGeom prst="chevron">
+            <a:avLst>
+              <a:gd name="adj" fmla="val 12000"/>
+            </a:avLst>
+          </a:prstGeom>
+          <a:solidFill>
+            <a:srgbClr val="EEEEEE"/>
+          </a:solidFill>
+          <a:ln>
+            <a:noFill/>
+          </a:ln>
+        </p:spPr>
+        <p:style>
+          <a:lnRef idx="1">
+            <a:schemeClr val="accent1"/>
+          </a:lnRef>
+          <a:fillRef idx="3">
+            <a:schemeClr val="accent1"/>
+          </a:fillRef>
+          <a:effectRef idx="2">
+            <a:schemeClr val="accent1"/>
+          </a:effectRef>
+          <a:fontRef idx="minor">
+            <a:schemeClr val="lt1"/>
+          </a:fontRef>
+        </p:style>
+        <p:txBody>
+          <a:bodyPr rtlCol="0" anchor="ctr" tIns="0" bIns="0"/>
+          <a:lstStyle/>
+          <a:p>
+            <a:pPr algn="ctr">
+              <a:defRPr sz="1100" b="0">
+                <a:solidFill>
+                  <a:srgbClr val="0A2373"/>
+                </a:solidFill>
+                <a:latin typeface="Lato"/>
+              </a:defRPr>
+            </a:pPr>
+            <a:r>
+              <a:t>1  National balance</a:t>
+            </a:r>
+          </a:p>
+        </p:txBody>
+      </p:sp>
+      <p:sp>
+        <p:nvSpPr>
+          <p:cNvPr id="11" name="Chevron 10">
+            <a:hlinkClick action="ppaction://hlinksldjump" r:id="rId4"/>
+          </p:cNvPr>
+          <p:cNvSpPr/>
+          <p:nvPr/>
+        </p:nvSpPr>
+        <p:spPr>
+          <a:xfrm>
+            <a:off x="2587752" y="73152"/>
+            <a:ext cx="2075688" cy="384048"/>
+          </a:xfrm>
+          <a:prstGeom prst="chevron">
+            <a:avLst>
+              <a:gd name="adj" fmla="val 12000"/>
+            </a:avLst>
+          </a:prstGeom>
+          <a:solidFill>
+            <a:srgbClr val="EEEEEE"/>
+          </a:solidFill>
+          <a:ln>
+            <a:noFill/>
+          </a:ln>
+        </p:spPr>
+        <p:style>
+          <a:lnRef idx="1">
+            <a:schemeClr val="accent1"/>
+          </a:lnRef>
+          <a:fillRef idx="3">
+            <a:schemeClr val="accent1"/>
+          </a:fillRef>
+          <a:effectRef idx="2">
+            <a:schemeClr val="accent1"/>
+          </a:effectRef>
+          <a:fontRef idx="minor">
+            <a:schemeClr val="lt1"/>
+          </a:fontRef>
+        </p:style>
+        <p:txBody>
+          <a:bodyPr rtlCol="0" anchor="ctr" tIns="0" bIns="0"/>
+          <a:lstStyle/>
+          <a:p>
+            <a:pPr algn="ctr">
+              <a:defRPr sz="1100" b="0">
+                <a:solidFill>
+                  <a:srgbClr val="0A2373"/>
+                </a:solidFill>
+                <a:latin typeface="Lato"/>
+              </a:defRPr>
+            </a:pPr>
+            <a:r>
+              <a:t>2  Forecast levers</a:t>
+            </a:r>
+          </a:p>
+        </p:txBody>
+      </p:sp>
+      <p:sp>
+        <p:nvSpPr>
+          <p:cNvPr id="12" name="Chevron 11">
+            <a:hlinkClick action="ppaction://hlinksldjump" r:id="rId5"/>
+          </p:cNvPr>
+          <p:cNvSpPr/>
+          <p:nvPr/>
+        </p:nvSpPr>
+        <p:spPr>
+          <a:xfrm>
+            <a:off x="4718304" y="73152"/>
+            <a:ext cx="2075688" cy="384048"/>
+          </a:xfrm>
+          <a:prstGeom prst="chevron">
+            <a:avLst>
+              <a:gd name="adj" fmla="val 12000"/>
+            </a:avLst>
+          </a:prstGeom>
+          <a:solidFill>
+            <a:srgbClr val="0A2373"/>
+          </a:solidFill>
+          <a:ln>
+            <a:noFill/>
+          </a:ln>
+        </p:spPr>
+        <p:style>
+          <a:lnRef idx="1">
+            <a:schemeClr val="accent1"/>
+          </a:lnRef>
+          <a:fillRef idx="3">
+            <a:schemeClr val="accent1"/>
+          </a:fillRef>
+          <a:effectRef idx="2">
+            <a:schemeClr val="accent1"/>
+          </a:effectRef>
+          <a:fontRef idx="minor">
+            <a:schemeClr val="lt1"/>
+          </a:fontRef>
+        </p:style>
+        <p:txBody>
+          <a:bodyPr rtlCol="0" anchor="ctr" tIns="0" bIns="0"/>
+          <a:lstStyle/>
+          <a:p>
+            <a:pPr algn="ctr">
+              <a:defRPr sz="1100" b="1">
+                <a:solidFill>
+                  <a:srgbClr val="FFFFFF"/>
+                </a:solidFill>
+                <a:latin typeface="Lato"/>
+              </a:defRPr>
+            </a:pPr>
+            <a:r>
+              <a:t>3  Sector baselines</a:t>
+            </a:r>
+          </a:p>
+        </p:txBody>
+      </p:sp>
+      <p:sp>
+        <p:nvSpPr>
+          <p:cNvPr id="13" name="Chevron 12">
+            <a:hlinkClick action="ppaction://hlinksldjump" r:id="rId6"/>
+          </p:cNvPr>
+          <p:cNvSpPr/>
+          <p:nvPr/>
+        </p:nvSpPr>
+        <p:spPr>
+          <a:xfrm>
+            <a:off x="6848856" y="73152"/>
+            <a:ext cx="2075688" cy="384048"/>
+          </a:xfrm>
+          <a:prstGeom prst="chevron">
+            <a:avLst>
+              <a:gd name="adj" fmla="val 12000"/>
+            </a:avLst>
+          </a:prstGeom>
+          <a:solidFill>
+            <a:srgbClr val="EEEEEE"/>
+          </a:solidFill>
+          <a:ln>
+            <a:noFill/>
+          </a:ln>
+        </p:spPr>
+        <p:style>
+          <a:lnRef idx="1">
+            <a:schemeClr val="accent1"/>
+          </a:lnRef>
+          <a:fillRef idx="3">
+            <a:schemeClr val="accent1"/>
+          </a:fillRef>
+          <a:effectRef idx="2">
+            <a:schemeClr val="accent1"/>
+          </a:effectRef>
+          <a:fontRef idx="minor">
+            <a:schemeClr val="lt1"/>
+          </a:fontRef>
+        </p:style>
+        <p:txBody>
+          <a:bodyPr rtlCol="0" anchor="ctr" tIns="0" bIns="0"/>
+          <a:lstStyle/>
+          <a:p>
+            <a:pPr algn="ctr">
+              <a:defRPr sz="1100" b="0">
+                <a:solidFill>
+                  <a:srgbClr val="0A2373"/>
+                </a:solidFill>
+                <a:latin typeface="Lato"/>
+              </a:defRPr>
+            </a:pPr>
+            <a:r>
+              <a:t>4  Tank handling</a:t>
+            </a:r>
+          </a:p>
+        </p:txBody>
+      </p:sp>
+      <p:sp>
+        <p:nvSpPr>
+          <p:cNvPr id="14" name="Chevron 13">
+            <a:hlinkClick action="ppaction://hlinksldjump" r:id="rId7"/>
+          </p:cNvPr>
+          <p:cNvSpPr/>
+          <p:nvPr/>
+        </p:nvSpPr>
+        <p:spPr>
+          <a:xfrm>
+            <a:off x="8979408" y="73152"/>
+            <a:ext cx="2075688" cy="384048"/>
+          </a:xfrm>
+          <a:prstGeom prst="chevron">
+            <a:avLst>
+              <a:gd name="adj" fmla="val 12000"/>
+            </a:avLst>
+          </a:prstGeom>
+          <a:solidFill>
+            <a:srgbClr val="EEEEEE"/>
+          </a:solidFill>
+          <a:ln>
+            <a:noFill/>
+          </a:ln>
+        </p:spPr>
+        <p:style>
+          <a:lnRef idx="1">
+            <a:schemeClr val="accent1"/>
+          </a:lnRef>
+          <a:fillRef idx="3">
+            <a:schemeClr val="accent1"/>
+          </a:fillRef>
+          <a:effectRef idx="2">
+            <a:schemeClr val="accent1"/>
+          </a:effectRef>
+          <a:fontRef idx="minor">
+            <a:schemeClr val="lt1"/>
+          </a:fontRef>
+        </p:style>
+        <p:txBody>
+          <a:bodyPr rtlCol="0" anchor="ctr" tIns="0" bIns="0"/>
+          <a:lstStyle/>
+          <a:p>
+            <a:pPr algn="ctr">
+              <a:defRPr sz="1100" b="0">
+                <a:solidFill>
+                  <a:srgbClr val="0A2373"/>
+                </a:solidFill>
+                <a:latin typeface="Lato"/>
+              </a:defRPr>
+            </a:pPr>
+            <a:r>
+              <a:t>5  Hand-back</a:t>
+            </a:r>
+          </a:p>
+        </p:txBody>
+      </p:sp>
+    </p:spTree>
+  </p:cSld>
+  <p:clrMapOvr>
+    <a:masterClrMapping/>
+  </p:clrMapOvr>
+</p:sld>
+</file>
+
+<file path=ppt/slides/slide14.xml><?xml version="1.0" encoding="utf-8"?>
+<p:sld xmlns:a="http://schemas.openxmlformats.org/drawingml/2006/main" xmlns:p="http://schemas.openxmlformats.org/presentationml/2006/main" xmlns:r="http://schemas.openxmlformats.org/officeDocument/2006/relationships">
+  <p:cSld>
+    <p:spTree>
+      <p:nvGrpSpPr>
+        <p:cNvPr id="1" name=""/>
+        <p:cNvGrpSpPr/>
+        <p:nvPr/>
+      </p:nvGrpSpPr>
+      <p:grpSpPr/>
+      <p:sp>
+        <p:nvSpPr>
+          <p:cNvPr id="2" name="Title 1"/>
+          <p:cNvSpPr>
+            <a:spLocks noGrp="1"/>
+          </p:cNvSpPr>
+          <p:nvPr>
+            <p:ph type="title"/>
+          </p:nvPr>
+        </p:nvSpPr>
+        <p:spPr/>
+        <p:txBody>
+          <a:bodyPr/>
+          <a:lstStyle/>
+          <a:p>
+            <a:r>
               <a:t>Lesedi: eight loading bays cap the high case near 2.4 turns a month, not 3</a:t>
             </a:r>
           </a:p>
@@ -9577,7 +14301,7 @@
 </p:sld>
 </file>
 
-<file path=ppt/slides/slide13.xml><?xml version="1.0" encoding="utf-8"?>
+<file path=ppt/slides/slide15.xml><?xml version="1.0" encoding="utf-8"?>
 <p:sld xmlns:a="http://schemas.openxmlformats.org/drawingml/2006/main" xmlns:p="http://schemas.openxmlformats.org/presentationml/2006/main" xmlns:r="http://schemas.openxmlformats.org/officeDocument/2006/relationships">
   <p:cSld>
     <p:spTree>
@@ -11446,7 +16170,7 @@
 </p:sld>
 </file>
 
-<file path=ppt/slides/slide14.xml><?xml version="1.0" encoding="utf-8"?>
+<file path=ppt/slides/slide16.xml><?xml version="1.0" encoding="utf-8"?>
 <p:sld xmlns:a="http://schemas.openxmlformats.org/drawingml/2006/main" xmlns:p="http://schemas.openxmlformats.org/presentationml/2006/main" xmlns:r="http://schemas.openxmlformats.org/officeDocument/2006/relationships">
   <p:cSld>
     <p:spTree>
@@ -12983,7 +17707,7 @@
 </p:sld>
 </file>
 
-<file path=ppt/slides/slide15.xml><?xml version="1.0" encoding="utf-8"?>
+<file path=ppt/slides/slide17.xml><?xml version="1.0" encoding="utf-8"?>
 <p:sld xmlns:a="http://schemas.openxmlformats.org/drawingml/2006/main" xmlns:p="http://schemas.openxmlformats.org/presentationml/2006/main" xmlns:r="http://schemas.openxmlformats.org/officeDocument/2006/relationships">
   <p:cSld>
     <p:spTree>
@@ -14859,7 +19583,7 @@
 </p:sld>
 </file>
 
-<file path=ppt/slides/slide16.xml><?xml version="1.0" encoding="utf-8"?>
+<file path=ppt/slides/slide18.xml><?xml version="1.0" encoding="utf-8"?>
 <p:sld xmlns:a="http://schemas.openxmlformats.org/drawingml/2006/main" xmlns:p="http://schemas.openxmlformats.org/presentationml/2006/main" xmlns:r="http://schemas.openxmlformats.org/officeDocument/2006/relationships">
   <p:cSld>
     <p:spTree>

--- a/pptx/output/delivered/supporting/Vopak_Manish_Handback_2026_10_07.pptx
+++ b/pptx/output/delivered/supporting/Vopak_Manish_Handback_2026_10_07.pptx
@@ -362,9 +362,6 @@
                 <c:pt idx="9">
                   <c:v>5.548194912</c:v>
                 </c:pt>
-                <c:pt idx="10">
-                  <c:v>5.947890582</c:v>
-                </c:pt>
               </c:numCache>
             </c:numRef>
           </c:val>
@@ -379,7 +376,7 @@
               <c:strCache>
                 <c:ptCount val="1"/>
                 <c:pt idx="0">
-                  <c:v>Reported production (to 2021)</c:v>
+                  <c:v>Reported production</c:v>
                 </c:pt>
               </c:strCache>
             </c:strRef>
@@ -476,6 +473,15 @@
                 </c:pt>
                 <c:pt idx="7">
                   <c:v>6.351306667</c:v>
+                </c:pt>
+                <c:pt idx="8">
+                  <c:v>6.6384163</c:v>
+                </c:pt>
+                <c:pt idx="9">
+                  <c:v>8.5228008</c:v>
+                </c:pt>
+                <c:pt idx="10">
+                  <c:v>7.3410227</c:v>
                 </c:pt>
               </c:numCache>
             </c:numRef>
@@ -711,9 +717,6 @@
                 <c:pt idx="9">
                   <c:v>0.926913773</c:v>
                 </c:pt>
-                <c:pt idx="10">
-                  <c:v>1.737287544</c:v>
-                </c:pt>
               </c:numCache>
             </c:numRef>
           </c:val>
@@ -728,7 +731,7 @@
               <c:strCache>
                 <c:ptCount val="1"/>
                 <c:pt idx="0">
-                  <c:v>Reported production (to 2021)</c:v>
+                  <c:v>Reported production</c:v>
                 </c:pt>
               </c:strCache>
             </c:strRef>
@@ -825,6 +828,15 @@
                 </c:pt>
                 <c:pt idx="7">
                   <c:v>5.314964286</c:v>
+                </c:pt>
+                <c:pt idx="8">
+                  <c:v>4.1109234</c:v>
+                </c:pt>
+                <c:pt idx="9">
+                  <c:v>5.1875654</c:v>
+                </c:pt>
+                <c:pt idx="10">
+                  <c:v>3.8927492</c:v>
                 </c:pt>
               </c:numCache>
             </c:numRef>
@@ -17305,7 +17317,7 @@
                         </a:defRPr>
                       </a:pPr>
                       <a:r>
-                        <a:t>This deck, the hand-back note, a 22-item decision log, the workshop workbook with history from 2012, and 288 figures in the current pack checked with none differing</a:t>
+                        <a:t>This deck, the hand-back note, a 23-item decision log, the workshop workbook with history from 2012, and 288 figures in the current pack checked with none differing</a:t>
                       </a:r>
                     </a:p>
                   </a:txBody>
@@ -17409,7 +17421,7 @@
               </a:defRPr>
             </a:pPr>
             <a:r>
-              <a:t>New evidence today: Road Accident Fund accounts give 24.4 bn litres of petrol and diesel levied in the year to March 2025, against 20.8 recorded as sold, and show volumes rising where FIASA shows a fall.</a:t>
+              <a:t>New evidence: Road Accident Fund accounts give 24.3 bn litres of petrol and diesel levied in the year to March 2024, against 21.9 recorded as sold in calendar 2023, and 24.4 bn in the year to March 2025.</a:t>
             </a:r>
           </a:p>
         </p:txBody>
@@ -17733,7 +17745,7 @@
           <a:lstStyle/>
           <a:p>
             <a:r>
-              <a:t>Decision log: 3 ready, 9 proposed, 10 unresolved</a:t>
+              <a:t>Decision log: 3 ready, 11 proposed, 9 unresolved</a:t>
             </a:r>
           </a:p>
         </p:txBody>
@@ -17772,7 +17784,7 @@
               </a:defRPr>
             </a:pPr>
             <a:r>
-              <a:t>Decisions for Nigel | the 10 that are unresolved, with the analyst's proposal | full log in the csv</a:t>
+              <a:t>Decisions for Nigel | the 9 that are unresolved, with the analyst's proposal | full log in the csv</a:t>
             </a:r>
           </a:p>
         </p:txBody>
@@ -17911,7 +17923,7 @@
                 <a:gridCol w="5257800"/>
                 <a:gridCol w="2560320"/>
               </a:tblGrid>
-              <a:tr h="390698">
+              <a:tr h="429768">
                 <a:tc>
                   <a:txBody>
                     <a:bodyPr/>
@@ -18036,7 +18048,7 @@
                   </a:tcPr>
                 </a:tc>
               </a:tr>
-              <a:tr h="390698">
+              <a:tr h="429768">
                 <a:tc>
                   <a:txBody>
                     <a:bodyPr/>
@@ -18054,7 +18066,7 @@
                         </a:defRPr>
                       </a:pPr>
                       <a:r>
-                        <a:t>D01  Which 2024 national sales figure to use</a:t>
+                        <a:t>D05  Treatment of the 2014 and 2018 provincial differences</a:t>
                       </a:r>
                     </a:p>
                   </a:txBody>
@@ -18095,7 +18107,7 @@
                         </a:defRPr>
                       </a:pPr>
                       <a:r>
-                        <a:t>Department has published nothing after 2023. FIASA 2025 edition: petrol 9.03, diesel 11.73 bn litres; FIASA 2024 edition: 8.76 and 11.81. Road Accident Fund levy shows volumes up 0.7%, not down 5%</a:t>
+                        <a:t>Provincial sum is above the national file by 0.13-0.14 bn litres in 2014; 2018 quarter 1 district sheet is missing districts</a:t>
                       </a:r>
                     </a:p>
                   </a:txBody>
@@ -18136,7 +18148,7 @@
                         </a:defRPr>
                       </a:pPr>
                       <a:r>
-                        <a:t>Start the forecast from 2023; carry 2024 as unverified</a:t>
+                        <a:t>National file stands; both records kept</a:t>
                       </a:r>
                     </a:p>
                   </a:txBody>
@@ -18161,7 +18173,7 @@
                   </a:tcPr>
                 </a:tc>
               </a:tr>
-              <a:tr h="390698">
+              <a:tr h="429768">
                 <a:tc>
                   <a:txBody>
                     <a:bodyPr/>
@@ -18179,7 +18191,7 @@
                         </a:defRPr>
                       </a:pPr>
                       <a:r>
-                        <a:t>D05  Treatment of the 2014 and 2018 provincial differences</a:t>
+                        <a:t>D08  Secunda utilisation</a:t>
                       </a:r>
                     </a:p>
                   </a:txBody>
@@ -18220,7 +18232,7 @@
                         </a:defRPr>
                       </a:pPr>
                       <a:r>
-                        <a:t>Provincial sum is above the national file by 0.13-0.14 bn litres in 2014; 2018 quarter 1 district sheet is missing districts</a:t>
+                        <a:t>Capacity corrected to 150 thousand barrels a day with utilisation re-based so output is unchanged; model gives 62 for 2024, Sasol reports 80</a:t>
                       </a:r>
                     </a:p>
                   </a:txBody>
@@ -18261,7 +18273,7 @@
                         </a:defRPr>
                       </a:pPr>
                       <a:r>
-                        <a:t>National file stands; both records kept</a:t>
+                        <a:t>Raise utilisation to match reported output</a:t>
                       </a:r>
                     </a:p>
                   </a:txBody>
@@ -18286,7 +18298,7 @@
                   </a:tcPr>
                 </a:tc>
               </a:tr>
-              <a:tr h="390698">
+              <a:tr h="429768">
                 <a:tc>
                   <a:txBody>
                     <a:bodyPr/>
@@ -18304,7 +18316,7 @@
                         </a:defRPr>
                       </a:pPr>
                       <a:r>
-                        <a:t>D08  Secunda utilisation</a:t>
+                        <a:t>D09  Reference case</a:t>
                       </a:r>
                     </a:p>
                   </a:txBody>
@@ -18345,7 +18357,7 @@
                         </a:defRPr>
                       </a:pPr>
                       <a:r>
-                        <a:t>Capacity corrected to 150 thousand barrels a day with utilisation re-based so output is unchanged; model gives 62 for 2024, Sasol reports 80</a:t>
+                        <a:t>No medium case is agreed; medium values are proposals</a:t>
                       </a:r>
                     </a:p>
                   </a:txBody>
@@ -18386,7 +18398,7 @@
                         </a:defRPr>
                       </a:pPr>
                       <a:r>
-                        <a:t>Raise utilisation to match reported output</a:t>
+                        <a:t>Agree after the ranges</a:t>
                       </a:r>
                     </a:p>
                   </a:txBody>
@@ -18411,7 +18423,7 @@
                   </a:tcPr>
                 </a:tc>
               </a:tr>
-              <a:tr h="390698">
+              <a:tr h="429768">
                 <a:tc>
                   <a:txBody>
                     <a:bodyPr/>
@@ -18429,7 +18441,7 @@
                         </a:defRPr>
                       </a:pPr>
                       <a:r>
-                        <a:t>D09  Reference case</a:t>
+                        <a:t>D11  Power generation starting value</a:t>
                       </a:r>
                     </a:p>
                   </a:txBody>
@@ -18470,7 +18482,7 @@
                         </a:defRPr>
                       </a:pPr>
                       <a:r>
-                        <a:t>No medium case is agreed; medium values are proposals</a:t>
+                        <a:t>Model has 3.58 bn litres for 2024; Eskom reports 0.68-0.94 and all plants about 1.6 in the peak year</a:t>
                       </a:r>
                     </a:p>
                   </a:txBody>
@@ -18511,7 +18523,7 @@
                         </a:defRPr>
                       </a:pPr>
                       <a:r>
-                        <a:t>Agree after the ranges</a:t>
+                        <a:t>Recalibrate to reported burn at 0.31 litres per kWh</a:t>
                       </a:r>
                     </a:p>
                   </a:txBody>
@@ -18536,7 +18548,7 @@
                   </a:tcPr>
                 </a:tc>
               </a:tr>
-              <a:tr h="390698">
+              <a:tr h="429768">
                 <a:tc>
                   <a:txBody>
                     <a:bodyPr/>
@@ -18554,7 +18566,7 @@
                         </a:defRPr>
                       </a:pPr>
                       <a:r>
-                        <a:t>D11  Power generation starting value</a:t>
+                        <a:t>D12  Allowance for on-road use inside agriculture and mining diesel</a:t>
                       </a:r>
                     </a:p>
                   </a:txBody>
@@ -18595,7 +18607,7 @@
                         </a:defRPr>
                       </a:pPr>
                       <a:r>
-                        <a:t>Model has 3.58 bn litres for 2024; Eskom reports 0.68-0.94 and all plants about 1.6 in the peak year</a:t>
+                        <a:t>No published source sizes it; 20% would be about 0.47 bn litres; Road Accident Fund rebates cover 1.46 bn litres across all rebated sectors</a:t>
                       </a:r>
                     </a:p>
                   </a:txBody>
@@ -18636,7 +18648,7 @@
                         </a:defRPr>
                       </a:pPr>
                       <a:r>
-                        <a:t>Recalibrate to reported burn at 0.31 litres per kWh</a:t>
+                        <a:t>None applied; ask SARS for refund data by sector</a:t>
                       </a:r>
                     </a:p>
                   </a:txBody>
@@ -18661,7 +18673,7 @@
                   </a:tcPr>
                 </a:tc>
               </a:tr>
-              <a:tr h="390698">
+              <a:tr h="429768">
                 <a:tc>
                   <a:txBody>
                     <a:bodyPr/>
@@ -18679,7 +18691,7 @@
                         </a:defRPr>
                       </a:pPr>
                       <a:r>
-                        <a:t>D12  Allowance for on-road use inside agriculture and mining diesel</a:t>
+                        <a:t>D13  Whether ships' diesel sits inside the inland diesel total</a:t>
                       </a:r>
                     </a:p>
                   </a:txBody>
@@ -18720,7 +18732,7 @@
                         </a:defRPr>
                       </a:pPr>
                       <a:r>
-                        <a:t>No published source sizes it; 20% would be about 0.47 bn litres; Road Accident Fund rebates cover 1.46 bn litres across all rebated sectors</a:t>
+                        <a:t>Model carries 0.77 bn litres of marine gas oil; no observed figure</a:t>
                       </a:r>
                     </a:p>
                   </a:txBody>
@@ -18761,7 +18773,7 @@
                         </a:defRPr>
                       </a:pPr>
                       <a:r>
-                        <a:t>None applied; ask SARS for refund data by sector</a:t>
+                        <a:t>Decide scope before reconciling to sales</a:t>
                       </a:r>
                     </a:p>
                   </a:txBody>
@@ -18786,7 +18798,7 @@
                   </a:tcPr>
                 </a:tc>
               </a:tr>
-              <a:tr h="390698">
+              <a:tr h="429768">
                 <a:tc>
                   <a:txBody>
                     <a:bodyPr/>
@@ -18804,7 +18816,7 @@
                         </a:defRPr>
                       </a:pPr>
                       <a:r>
-                        <a:t>D13  Whether ships' diesel sits inside the inland diesel total</a:t>
+                        <a:t>D17  Send the data request to Vopak</a:t>
                       </a:r>
                     </a:p>
                   </a:txBody>
@@ -18845,7 +18857,7 @@
                         </a:defRPr>
                       </a:pPr>
                       <a:r>
-                        <a:t>Model carries 0.77 bn litres of marine gas oil; no observed figure</a:t>
+                        <a:t>Eight values marked to confirm with client; Vopak's website publishes no operating data</a:t>
                       </a:r>
                     </a:p>
                   </a:txBody>
@@ -18886,7 +18898,7 @@
                         </a:defRPr>
                       </a:pPr>
                       <a:r>
-                        <a:t>Decide scope before reconciling to sales</a:t>
+                        <a:t>Send now</a:t>
                       </a:r>
                     </a:p>
                   </a:txBody>
@@ -18911,7 +18923,7 @@
                   </a:tcPr>
                 </a:tc>
               </a:tr>
-              <a:tr h="390698">
+              <a:tr h="429768">
                 <a:tc>
                   <a:txBody>
                     <a:bodyPr/>
@@ -18929,7 +18941,7 @@
                         </a:defRPr>
                       </a:pPr>
                       <a:r>
-                        <a:t>D17  Send the data request to Vopak</a:t>
+                        <a:t>D21  Marine baseline elasticities and road parameters</a:t>
                       </a:r>
                     </a:p>
                   </a:txBody>
@@ -18970,7 +18982,7 @@
                         </a:defRPr>
                       </a:pPr>
                       <a:r>
-                        <a:t>Eight values marked to confirm with client; Vopak's website publishes no operating data</a:t>
+                        <a:t>Carried over from 6 October; no new evidence</a:t>
                       </a:r>
                     </a:p>
                   </a:txBody>
@@ -19011,7 +19023,7 @@
                         </a:defRPr>
                       </a:pPr>
                       <a:r>
-                        <a:t>Send now</a:t>
+                        <a:t>Unchanged</a:t>
                       </a:r>
                     </a:p>
                   </a:txBody>
@@ -19036,132 +19048,7 @@
                   </a:tcPr>
                 </a:tc>
               </a:tr>
-              <a:tr h="390698">
-                <a:tc>
-                  <a:txBody>
-                    <a:bodyPr/>
-                    <a:lstStyle/>
-                    <a:p>
-                      <a:pPr>
-                        <a:spcAft>
-                          <a:spcPts val="100"/>
-                        </a:spcAft>
-                        <a:defRPr sz="800" b="1">
-                          <a:solidFill>
-                            <a:srgbClr val="0A2373"/>
-                          </a:solidFill>
-                          <a:latin typeface="Lato"/>
-                        </a:defRPr>
-                      </a:pPr>
-                      <a:r>
-                        <a:t>D21  Marine baseline elasticities and road parameters</a:t>
-                      </a:r>
-                    </a:p>
-                  </a:txBody>
-                  <a:tcPr marL="64008" marR="64008" marT="54864" marB="27432" anchor="t">
-                    <a:lnL w="0">
-                      <a:noFill/>
-                    </a:lnL>
-                    <a:lnR w="0">
-                      <a:noFill/>
-                    </a:lnR>
-                    <a:lnT w="0">
-                      <a:noFill/>
-                    </a:lnT>
-                    <a:lnB w="5080">
-                      <a:solidFill>
-                        <a:srgbClr val="B8B8B8"/>
-                      </a:solidFill>
-                    </a:lnB>
-                    <a:solidFill>
-                      <a:srgbClr val="FFFFFF"/>
-                    </a:solidFill>
-                  </a:tcPr>
-                </a:tc>
-                <a:tc>
-                  <a:txBody>
-                    <a:bodyPr/>
-                    <a:lstStyle/>
-                    <a:p>
-                      <a:pPr>
-                        <a:spcAft>
-                          <a:spcPts val="100"/>
-                        </a:spcAft>
-                        <a:defRPr sz="800" b="0">
-                          <a:solidFill>
-                            <a:srgbClr val="11151A"/>
-                          </a:solidFill>
-                          <a:latin typeface="Lato"/>
-                        </a:defRPr>
-                      </a:pPr>
-                      <a:r>
-                        <a:t>Carried over from 6 October; no new evidence</a:t>
-                      </a:r>
-                    </a:p>
-                  </a:txBody>
-                  <a:tcPr marL="64008" marR="64008" marT="54864" marB="27432" anchor="t">
-                    <a:lnL w="0">
-                      <a:noFill/>
-                    </a:lnL>
-                    <a:lnR w="0">
-                      <a:noFill/>
-                    </a:lnR>
-                    <a:lnT w="0">
-                      <a:noFill/>
-                    </a:lnT>
-                    <a:lnB w="5080">
-                      <a:solidFill>
-                        <a:srgbClr val="B8B8B8"/>
-                      </a:solidFill>
-                    </a:lnB>
-                    <a:solidFill>
-                      <a:srgbClr val="FFFFFF"/>
-                    </a:solidFill>
-                  </a:tcPr>
-                </a:tc>
-                <a:tc>
-                  <a:txBody>
-                    <a:bodyPr/>
-                    <a:lstStyle/>
-                    <a:p>
-                      <a:pPr>
-                        <a:spcAft>
-                          <a:spcPts val="100"/>
-                        </a:spcAft>
-                        <a:defRPr sz="800" b="0">
-                          <a:solidFill>
-                            <a:srgbClr val="11151A"/>
-                          </a:solidFill>
-                          <a:latin typeface="Lato"/>
-                        </a:defRPr>
-                      </a:pPr>
-                      <a:r>
-                        <a:t>Unchanged</a:t>
-                      </a:r>
-                    </a:p>
-                  </a:txBody>
-                  <a:tcPr marL="64008" marR="64008" marT="54864" marB="27432" anchor="t">
-                    <a:lnL w="0">
-                      <a:noFill/>
-                    </a:lnL>
-                    <a:lnR w="0">
-                      <a:noFill/>
-                    </a:lnR>
-                    <a:lnT w="0">
-                      <a:noFill/>
-                    </a:lnT>
-                    <a:lnB w="5080">
-                      <a:solidFill>
-                        <a:srgbClr val="B8B8B8"/>
-                      </a:solidFill>
-                    </a:lnB>
-                    <a:solidFill>
-                      <a:srgbClr val="FFFFFF"/>
-                    </a:solidFill>
-                  </a:tcPr>
-                </a:tc>
-              </a:tr>
-              <a:tr h="390700">
+              <a:tr h="429768">
                 <a:tc>
                   <a:txBody>
                     <a:bodyPr/>
@@ -20697,7 +20584,7 @@
               </a:defRPr>
             </a:pPr>
             <a:r>
-              <a:t>One change to an existing sheet: source selection for 2022 and 2023 is set to the department instead of FIASA. 2024 stays on FIASA, unverified. 2025 has no national sales figure from any source.</a:t>
+              <a:t>One change to an existing sheet: source selection for 2022 and 2023 is set to the department instead of FIASA. The added sheets use no FIASA figure; 2024 on Nigel's own sheet is still set to FIASA, for him to decide.</a:t>
             </a:r>
           </a:p>
         </p:txBody>
@@ -21021,7 +20908,7 @@
           <a:lstStyle/>
           <a:p>
             <a:r>
-              <a:t>On customs trade, 2024 petrol and diesel sales exceed net imports by 7.7 bn litres</a:t>
+              <a:t>On customs trade, 2023 petrol and diesel sales exceed net imports by 6.5 bn litres</a:t>
             </a:r>
           </a:p>
         </p:txBody>
@@ -23600,7 +23487,7 @@
                         </a:defRPr>
                       </a:pPr>
                       <a:r>
-                        <a:t>9.03</a:t>
+                        <a:t>—</a:t>
                       </a:r>
                     </a:p>
                   </a:txBody>
@@ -23723,7 +23610,7 @@
                         </a:defRPr>
                       </a:pPr>
                       <a:r>
-                        <a:t>5.95</a:t>
+                        <a:t>—</a:t>
                       </a:r>
                     </a:p>
                   </a:txBody>
@@ -23764,7 +23651,7 @@
                         </a:defRPr>
                       </a:pPr>
                       <a:r>
-                        <a:t>11.73</a:t>
+                        <a:t>—</a:t>
                       </a:r>
                     </a:p>
                   </a:txBody>
@@ -23887,7 +23774,7 @@
                         </a:defRPr>
                       </a:pPr>
                       <a:r>
-                        <a:t>1.74</a:t>
+                        <a:t>—</a:t>
                       </a:r>
                     </a:p>
                   </a:txBody>
@@ -24337,7 +24224,7 @@
               </a:defRPr>
             </a:pPr>
             <a:r>
-              <a:t>Sales: department to 2023; 2024 is FIASA's figure and is unverified; none yet for 2025. Rebuilt by one command from registered inputs; a test checks every year against the customs extract.</a:t>
+              <a:t>Sales: department, which has published to 2023; 2024 and 2025 are blank. FIASA is not used. Rebuilt by one command from registered inputs; a test checks every year against the customs extract.</a:t>
             </a:r>
           </a:p>
         </p:txBody>
@@ -25065,7 +24952,7 @@
                         </a:defRPr>
                       </a:pPr>
                       <a:r>
-                        <a:t>FIASA 2025 edition, p.47: petrol 9.03, diesel 11.73. FIASA 2024 edition, p.32: 8.76 and 11.81. JODI: 10.14 and 10.04 (lowest reliability code). Department: not published. Road Accident Fund levy: 24.4 bn litres for both fuels in the year to March 2025, up 0.7%, against 20.76 here.</a:t>
+                        <a:t>FIASA 2025 edition, p.47: petrol 9.03, diesel 11.73. FIASA 2024 edition, p.32: 8.76 and 11.81. JODI: 10.14 and 10.04 (lowest reliability code). Department: not published. Road Accident Fund levy: 24.4 bn litres for both fuels in the year to March 2025, up 0.7%.</a:t>
                       </a:r>
                     </a:p>
                   </a:txBody>
@@ -25106,7 +24993,7 @@
                         </a:defRPr>
                       </a:pPr>
                       <a:r>
-                        <a:t>FIASA 2025 edition, flagged unverified</a:t>
+                        <a:t>None. 2024 is left blank; FIASA is not used</a:t>
                       </a:r>
                     </a:p>
                   </a:txBody>
@@ -25147,7 +25034,7 @@
                         </a:defRPr>
                       </a:pPr>
                       <a:r>
-                        <a:t>Nigel: agree the 2024 sales source</a:t>
+                        <a:t>Nigel: note</a:t>
                       </a:r>
                     </a:p>
                   </a:txBody>
@@ -25874,7 +25761,7 @@
               </a:defRPr>
             </a:pPr>
             <a:r>
-              <a:t>In the other years from 2014, customs and FIASA differ by 0.2 bn litres or less; the full list is in the balance note. Before 2014 customs is in kilograms or mixed units, so FIASA is used.</a:t>
+              <a:t>In the other years from 2014, customs and FIASA differ by 0.2 bn litres or less; the full list is in the balance note. Before 2014 customs is in kilograms or mixed units, so no trade figure is selected.</a:t>
             </a:r>
           </a:p>
         </p:txBody>
@@ -26198,7 +26085,7 @@
           <a:lstStyle/>
           <a:p>
             <a:r>
-              <a:t>Production after 2021 and stock changes are missing, so the balance is not closed</a:t>
+              <a:t>Reported production now runs to 2024; stock change is still missing</a:t>
             </a:r>
           </a:p>
         </p:txBody>
@@ -26237,7 +26124,7 @@
               </a:defRPr>
             </a:pPr>
             <a:r>
-              <a:t>Missing production and stocks | sales less net imports against production reported in the energy balance</a:t>
+              <a:t>Production and stocks | sales less net imports against reported production | billion litres</a:t>
             </a:r>
           </a:p>
         </p:txBody>
@@ -26412,7 +26299,7 @@
                 <a:gridCol w="1645920"/>
                 <a:gridCol w="1188720"/>
               </a:tblGrid>
-              <a:tr h="845820">
+              <a:tr h="676656">
                 <a:tc>
                   <a:txBody>
                     <a:bodyPr/>
@@ -26430,7 +26317,7 @@
                         </a:defRPr>
                       </a:pPr>
                       <a:r>
-                        <a:t>Missing</a:t>
+                        <a:t>Line</a:t>
                       </a:r>
                     </a:p>
                   </a:txBody>
@@ -26537,7 +26424,7 @@
                   </a:tcPr>
                 </a:tc>
               </a:tr>
-              <a:tr h="845820">
+              <a:tr h="676656">
                 <a:tc>
                   <a:txBody>
                     <a:bodyPr/>
@@ -26555,7 +26442,7 @@
                         </a:defRPr>
                       </a:pPr>
                       <a:r>
-                        <a:t>Production by product, 2022 on</a:t>
+                        <a:t>Production to 2021</a:t>
                       </a:r>
                     </a:p>
                   </a:txBody>
@@ -26596,7 +26483,7 @@
                         </a:defRPr>
                       </a:pPr>
                       <a:r>
-                        <a:t>Sasol, year to June 2024: Secunda 29.1 and Natref 17.8 million barrels. Glencore, calendar 2024: Astron 166,204 billion Btu.</a:t>
+                        <a:t>Department energy balances</a:t>
                       </a:r>
                     </a:p>
                   </a:txBody>
@@ -26637,7 +26524,7 @@
                         </a:defRPr>
                       </a:pPr>
                       <a:r>
-                        <a:t>All refined products; fiscal against calendar years; Natref is Sasol's share only</a:t>
+                        <a:t>None published after 2021</a:t>
                       </a:r>
                     </a:p>
                   </a:txBody>
@@ -26662,7 +26549,7 @@
                   </a:tcPr>
                 </a:tc>
               </a:tr>
-              <a:tr h="845820">
+              <a:tr h="676656">
                 <a:tc>
                   <a:txBody>
                     <a:bodyPr/>
@@ -26680,7 +26567,7 @@
                         </a:defRPr>
                       </a:pPr>
                       <a:r>
-                        <a:t>Stock changes</a:t>
+                        <a:t>Production 2022-2024</a:t>
                       </a:r>
                     </a:p>
                   </a:txBody>
@@ -26721,7 +26608,7 @@
                         </a:defRPr>
                       </a:pPr>
                       <a:r>
-                        <a:t>JODI monthly stocks, 2023 and 2024</a:t>
+                        <a:t>Refinery output South Africa reports to the JODI oil database. Diesel is within 4% of the energy balance in 2017-2021.</a:t>
                       </a:r>
                     </a:p>
                   </a:txBody>
@@ -26762,7 +26649,7 @@
                         </a:defRPr>
                       </a:pPr>
                       <a:r>
-                        <a:t>Lowest reliability code; not usable as it stands</a:t>
+                        <a:t>Lowest JODI reliability code; petrol is 12-24% above the energy balance; decision D23</a:t>
                       </a:r>
                     </a:p>
                   </a:txBody>
@@ -26787,7 +26674,7 @@
                   </a:tcPr>
                 </a:tc>
               </a:tr>
-              <a:tr h="845820">
+              <a:tr h="676656">
                 <a:tc>
                   <a:txBody>
                     <a:bodyPr/>
@@ -26805,7 +26692,7 @@
                         </a:defRPr>
                       </a:pPr>
                       <a:r>
-                        <a:t>Sales coverage</a:t>
+                        <a:t>Stock change</a:t>
                       </a:r>
                     </a:p>
                   </a:txBody>
@@ -26846,7 +26733,7 @@
                         </a:defRPr>
                       </a:pPr>
                       <a:r>
-                        <a:t>SARS fuel levy volumes, round figures in media releases</a:t>
+                        <a:t>JODI reports one</a:t>
                       </a:r>
                     </a:p>
                   </a:txBody>
@@ -26887,7 +26774,132 @@
                         </a:defRPr>
                       </a:pPr>
                       <a:r>
-                        <a:t>Period is assumed; indicative only</a:t>
+                        <a:t>Does not agree with its own closing stock; not used</a:t>
+                      </a:r>
+                    </a:p>
+                  </a:txBody>
+                  <a:tcPr marL="64008" marR="64008" marT="54864" marB="27432" anchor="t">
+                    <a:lnL w="0">
+                      <a:noFill/>
+                    </a:lnL>
+                    <a:lnR w="0">
+                      <a:noFill/>
+                    </a:lnR>
+                    <a:lnT w="0">
+                      <a:noFill/>
+                    </a:lnT>
+                    <a:lnB w="5080">
+                      <a:solidFill>
+                        <a:srgbClr val="B8B8B8"/>
+                      </a:solidFill>
+                    </a:lnB>
+                    <a:solidFill>
+                      <a:srgbClr val="FFFFFF"/>
+                    </a:solidFill>
+                  </a:tcPr>
+                </a:tc>
+              </a:tr>
+              <a:tr h="676656">
+                <a:tc>
+                  <a:txBody>
+                    <a:bodyPr/>
+                    <a:lstStyle/>
+                    <a:p>
+                      <a:pPr>
+                        <a:spcAft>
+                          <a:spcPts val="100"/>
+                        </a:spcAft>
+                        <a:defRPr sz="950" b="1">
+                          <a:solidFill>
+                            <a:srgbClr val="0A2373"/>
+                          </a:solidFill>
+                          <a:latin typeface="Lato"/>
+                        </a:defRPr>
+                      </a:pPr>
+                      <a:r>
+                        <a:t>Sales after 2023</a:t>
+                      </a:r>
+                    </a:p>
+                  </a:txBody>
+                  <a:tcPr marL="64008" marR="64008" marT="54864" marB="27432" anchor="t">
+                    <a:lnL w="0">
+                      <a:noFill/>
+                    </a:lnL>
+                    <a:lnR w="0">
+                      <a:noFill/>
+                    </a:lnR>
+                    <a:lnT w="0">
+                      <a:noFill/>
+                    </a:lnT>
+                    <a:lnB w="5080">
+                      <a:solidFill>
+                        <a:srgbClr val="B8B8B8"/>
+                      </a:solidFill>
+                    </a:lnB>
+                    <a:solidFill>
+                      <a:srgbClr val="FFFFFF"/>
+                    </a:solidFill>
+                  </a:tcPr>
+                </a:tc>
+                <a:tc>
+                  <a:txBody>
+                    <a:bodyPr/>
+                    <a:lstStyle/>
+                    <a:p>
+                      <a:pPr>
+                        <a:spcAft>
+                          <a:spcPts val="100"/>
+                        </a:spcAft>
+                        <a:defRPr sz="950" b="0">
+                          <a:solidFill>
+                            <a:srgbClr val="11151A"/>
+                          </a:solidFill>
+                          <a:latin typeface="Lato"/>
+                        </a:defRPr>
+                      </a:pPr>
+                      <a:r>
+                        <a:t>None from the department</a:t>
+                      </a:r>
+                    </a:p>
+                  </a:txBody>
+                  <a:tcPr marL="64008" marR="64008" marT="54864" marB="27432" anchor="t">
+                    <a:lnL w="0">
+                      <a:noFill/>
+                    </a:lnL>
+                    <a:lnR w="0">
+                      <a:noFill/>
+                    </a:lnR>
+                    <a:lnT w="0">
+                      <a:noFill/>
+                    </a:lnT>
+                    <a:lnB w="5080">
+                      <a:solidFill>
+                        <a:srgbClr val="B8B8B8"/>
+                      </a:solidFill>
+                    </a:lnB>
+                    <a:solidFill>
+                      <a:srgbClr val="FFFFFF"/>
+                    </a:solidFill>
+                  </a:tcPr>
+                </a:tc>
+                <a:tc>
+                  <a:txBody>
+                    <a:bodyPr/>
+                    <a:lstStyle/>
+                    <a:p>
+                      <a:pPr>
+                        <a:spcAft>
+                          <a:spcPts val="100"/>
+                        </a:spcAft>
+                        <a:defRPr sz="950" b="0">
+                          <a:solidFill>
+                            <a:srgbClr val="11151A"/>
+                          </a:solidFill>
+                          <a:latin typeface="Lato"/>
+                        </a:defRPr>
+                      </a:pPr>
+                      <a:r>
+                        <a:t>FIASA is not used; 2024 and 2025 are blank</a:t>
                       </a:r>
                     </a:p>
                   </a:txBody>
@@ -26950,7 +26962,7 @@
               </a:defRPr>
             </a:pPr>
             <a:r>
-              <a:t>A diesel gap of 3 to 4 bn litres a year remains a hypothesis to test. It is not added to demand. Needed to close: output by product and plant, a stock series, and matched periods.</a:t>
+              <a:t>Diesel: production plus net imports is 1.2, 2.5 and 4.3 bn litres above recorded sales in 2021 to 2023. A hypothesis to test; it is not added to demand.</a:t>
             </a:r>
           </a:p>
         </p:txBody>

--- a/pptx/output/delivered/supporting/Vopak_Manish_Handback_2026_10_07.pptx
+++ b/pptx/output/delivered/supporting/Vopak_Manish_Handback_2026_10_07.pptx
@@ -376,7 +376,7 @@
               <c:strCache>
                 <c:ptCount val="1"/>
                 <c:pt idx="0">
-                  <c:v>Reported production</c:v>
+                  <c:v>Production, energy balance (to 2021)</c:v>
                 </c:pt>
               </c:strCache>
             </c:strRef>
@@ -473,15 +473,6 @@
                 </c:pt>
                 <c:pt idx="7">
                   <c:v>6.351306667</c:v>
-                </c:pt>
-                <c:pt idx="8">
-                  <c:v>6.6384163</c:v>
-                </c:pt>
-                <c:pt idx="9">
-                  <c:v>8.5228008</c:v>
-                </c:pt>
-                <c:pt idx="10">
-                  <c:v>7.3410227</c:v>
                 </c:pt>
               </c:numCache>
             </c:numRef>
@@ -731,7 +722,7 @@
               <c:strCache>
                 <c:ptCount val="1"/>
                 <c:pt idx="0">
-                  <c:v>Reported production</c:v>
+                  <c:v>Production, energy balance (to 2021)</c:v>
                 </c:pt>
               </c:strCache>
             </c:strRef>
@@ -828,15 +819,6 @@
                 </c:pt>
                 <c:pt idx="7">
                   <c:v>5.314964286</c:v>
-                </c:pt>
-                <c:pt idx="8">
-                  <c:v>4.1109234</c:v>
-                </c:pt>
-                <c:pt idx="9">
-                  <c:v>5.1875654</c:v>
-                </c:pt>
-                <c:pt idx="10">
-                  <c:v>3.8927492</c:v>
                 </c:pt>
               </c:numCache>
             </c:numRef>
@@ -26085,7 +26067,7 @@
           <a:lstStyle/>
           <a:p>
             <a:r>
-              <a:t>Reported production now runs to 2024; stock change is still missing</a:t>
+              <a:t>Production is published to 2021 and sales to 2023; stocks are not published</a:t>
             </a:r>
           </a:p>
         </p:txBody>
@@ -26124,7 +26106,7 @@
               </a:defRPr>
             </a:pPr>
             <a:r>
-              <a:t>Production and stocks | sales less net imports against reported production | billion litres</a:t>
+              <a:t>Production and stocks | sales less net imports against production in the energy balance | billion litres</a:t>
             </a:r>
           </a:p>
         </p:txBody>
@@ -26299,7 +26281,7 @@
                 <a:gridCol w="1645920"/>
                 <a:gridCol w="1188720"/>
               </a:tblGrid>
-              <a:tr h="676656">
+              <a:tr h="563880">
                 <a:tc>
                   <a:txBody>
                     <a:bodyPr/>
@@ -26424,7 +26406,7 @@
                   </a:tcPr>
                 </a:tc>
               </a:tr>
-              <a:tr h="676656">
+              <a:tr h="563880">
                 <a:tc>
                   <a:txBody>
                     <a:bodyPr/>
@@ -26442,7 +26424,7 @@
                         </a:defRPr>
                       </a:pPr>
                       <a:r>
-                        <a:t>Production to 2021</a:t>
+                        <a:t>Production</a:t>
                       </a:r>
                     </a:p>
                   </a:txBody>
@@ -26483,7 +26465,7 @@
                         </a:defRPr>
                       </a:pPr>
                       <a:r>
-                        <a:t>Department energy balances</a:t>
+                        <a:t>Department energy balances, 2007-2021; fifteen files, downloaded again and matched</a:t>
                       </a:r>
                     </a:p>
                   </a:txBody>
@@ -26524,7 +26506,7 @@
                         </a:defRPr>
                       </a:pPr>
                       <a:r>
-                        <a:t>None published after 2021</a:t>
+                        <a:t>None published after 2021; 2022 on is blank</a:t>
                       </a:r>
                     </a:p>
                   </a:txBody>
@@ -26549,7 +26531,7 @@
                   </a:tcPr>
                 </a:tc>
               </a:tr>
-              <a:tr h="676656">
+              <a:tr h="563880">
                 <a:tc>
                   <a:txBody>
                     <a:bodyPr/>
@@ -26567,7 +26549,7 @@
                         </a:defRPr>
                       </a:pPr>
                       <a:r>
-                        <a:t>Production 2022-2024</a:t>
+                        <a:t>Sales</a:t>
                       </a:r>
                     </a:p>
                   </a:txBody>
@@ -26608,7 +26590,7 @@
                         </a:defRPr>
                       </a:pPr>
                       <a:r>
-                        <a:t>Refinery output South Africa reports to the JODI oil database. Diesel is within 4% of the energy balance in 2017-2021.</a:t>
+                        <a:t>Department national sales, to 2023</a:t>
                       </a:r>
                     </a:p>
                   </a:txBody>
@@ -26649,7 +26631,7 @@
                         </a:defRPr>
                       </a:pPr>
                       <a:r>
-                        <a:t>Lowest JODI reliability code; petrol is 12-24% above the energy balance; decision D23</a:t>
+                        <a:t>2024 and 2025 are blank</a:t>
                       </a:r>
                     </a:p>
                   </a:txBody>
@@ -26674,7 +26656,7 @@
                   </a:tcPr>
                 </a:tc>
               </a:tr>
-              <a:tr h="676656">
+              <a:tr h="563880">
                 <a:tc>
                   <a:txBody>
                     <a:bodyPr/>
@@ -26692,6 +26674,131 @@
                         </a:defRPr>
                       </a:pPr>
                       <a:r>
+                        <a:t>Imports, exports</a:t>
+                      </a:r>
+                    </a:p>
+                  </a:txBody>
+                  <a:tcPr marL="64008" marR="64008" marT="54864" marB="27432" anchor="t">
+                    <a:lnL w="0">
+                      <a:noFill/>
+                    </a:lnL>
+                    <a:lnR w="0">
+                      <a:noFill/>
+                    </a:lnR>
+                    <a:lnT w="0">
+                      <a:noFill/>
+                    </a:lnT>
+                    <a:lnB w="5080">
+                      <a:solidFill>
+                        <a:srgbClr val="B8B8B8"/>
+                      </a:solidFill>
+                    </a:lnB>
+                    <a:solidFill>
+                      <a:srgbClr val="FFFFFF"/>
+                    </a:solidFill>
+                  </a:tcPr>
+                </a:tc>
+                <a:tc>
+                  <a:txBody>
+                    <a:bodyPr/>
+                    <a:lstStyle/>
+                    <a:p>
+                      <a:pPr>
+                        <a:spcAft>
+                          <a:spcPts val="100"/>
+                        </a:spcAft>
+                        <a:defRPr sz="950" b="0">
+                          <a:solidFill>
+                            <a:srgbClr val="11151A"/>
+                          </a:solidFill>
+                          <a:latin typeface="Lato"/>
+                        </a:defRPr>
+                      </a:pPr>
+                      <a:r>
+                        <a:t>SARS customs, 2014-2025</a:t>
+                      </a:r>
+                    </a:p>
+                  </a:txBody>
+                  <a:tcPr marL="64008" marR="64008" marT="54864" marB="27432" anchor="t">
+                    <a:lnL w="0">
+                      <a:noFill/>
+                    </a:lnL>
+                    <a:lnR w="0">
+                      <a:noFill/>
+                    </a:lnR>
+                    <a:lnT w="0">
+                      <a:noFill/>
+                    </a:lnT>
+                    <a:lnB w="5080">
+                      <a:solidFill>
+                        <a:srgbClr val="B8B8B8"/>
+                      </a:solidFill>
+                    </a:lnB>
+                    <a:solidFill>
+                      <a:srgbClr val="FFFFFF"/>
+                    </a:solidFill>
+                  </a:tcPr>
+                </a:tc>
+                <a:tc>
+                  <a:txBody>
+                    <a:bodyPr/>
+                    <a:lstStyle/>
+                    <a:p>
+                      <a:pPr>
+                        <a:spcAft>
+                          <a:spcPts val="100"/>
+                        </a:spcAft>
+                        <a:defRPr sz="950" b="0">
+                          <a:solidFill>
+                            <a:srgbClr val="11151A"/>
+                          </a:solidFill>
+                          <a:latin typeface="Lato"/>
+                        </a:defRPr>
+                      </a:pPr>
+                      <a:r>
+                        <a:t>In kilograms before 2014</a:t>
+                      </a:r>
+                    </a:p>
+                  </a:txBody>
+                  <a:tcPr marL="64008" marR="64008" marT="54864" marB="27432" anchor="t">
+                    <a:lnL w="0">
+                      <a:noFill/>
+                    </a:lnL>
+                    <a:lnR w="0">
+                      <a:noFill/>
+                    </a:lnR>
+                    <a:lnT w="0">
+                      <a:noFill/>
+                    </a:lnT>
+                    <a:lnB w="5080">
+                      <a:solidFill>
+                        <a:srgbClr val="B8B8B8"/>
+                      </a:solidFill>
+                    </a:lnB>
+                    <a:solidFill>
+                      <a:srgbClr val="FFFFFF"/>
+                    </a:solidFill>
+                  </a:tcPr>
+                </a:tc>
+              </a:tr>
+              <a:tr h="563880">
+                <a:tc>
+                  <a:txBody>
+                    <a:bodyPr/>
+                    <a:lstStyle/>
+                    <a:p>
+                      <a:pPr>
+                        <a:spcAft>
+                          <a:spcPts val="100"/>
+                        </a:spcAft>
+                        <a:defRPr sz="950" b="1">
+                          <a:solidFill>
+                            <a:srgbClr val="0A2373"/>
+                          </a:solidFill>
+                          <a:latin typeface="Lato"/>
+                        </a:defRPr>
+                      </a:pPr>
+                      <a:r>
                         <a:t>Stock change</a:t>
                       </a:r>
                     </a:p>
@@ -26733,7 +26840,7 @@
                         </a:defRPr>
                       </a:pPr>
                       <a:r>
-                        <a:t>JODI reports one</a:t>
+                        <a:t>None</a:t>
                       </a:r>
                     </a:p>
                   </a:txBody>
@@ -26774,7 +26881,7 @@
                         </a:defRPr>
                       </a:pPr>
                       <a:r>
-                        <a:t>Does not agree with its own closing stock; not used</a:t>
+                        <a:t>No series is published</a:t>
                       </a:r>
                     </a:p>
                   </a:txBody>
@@ -26799,7 +26906,7 @@
                   </a:tcPr>
                 </a:tc>
               </a:tr>
-              <a:tr h="676656">
+              <a:tr h="563880">
                 <a:tc>
                   <a:txBody>
                     <a:bodyPr/>
@@ -26817,7 +26924,7 @@
                         </a:defRPr>
                       </a:pPr>
                       <a:r>
-                        <a:t>Sales after 2023</a:t>
+                        <a:t>Not used</a:t>
                       </a:r>
                     </a:p>
                   </a:txBody>
@@ -26858,7 +26965,7 @@
                         </a:defRPr>
                       </a:pPr>
                       <a:r>
-                        <a:t>None from the department</a:t>
+                        <a:t>FIASA and JODI</a:t>
                       </a:r>
                     </a:p>
                   </a:txBody>
@@ -26899,7 +27006,7 @@
                         </a:defRPr>
                       </a:pPr>
                       <a:r>
-                        <a:t>FIASA is not used; 2024 and 2025 are blank</a:t>
+                        <a:t>Kept as comparison rows only</a:t>
                       </a:r>
                     </a:p>
                   </a:txBody>
@@ -26962,7 +27069,7 @@
               </a:defRPr>
             </a:pPr>
             <a:r>
-              <a:t>Diesel: production plus net imports is 1.2, 2.5 and 4.3 bn litres above recorded sales in 2021 to 2023. A hypothesis to test; it is not added to demand.</a:t>
+              <a:t>Matched years are 2014 to 2021. Supply and recorded sales agree within 0.9 bn litres except diesel in 2021, where supply is 1.2 bn litres higher. Not added to demand.</a:t>
             </a:r>
           </a:p>
         </p:txBody>

--- a/pptx/output/delivered/supporting/Vopak_Manish_Handback_2026_10_07.pptx
+++ b/pptx/output/delivered/supporting/Vopak_Manish_Handback_2026_10_07.pptx
@@ -333,19 +333,19 @@
                 <c:formatCode>General</c:formatCode>
                 <c:ptCount val="11"/>
                 <c:pt idx="0">
-                  <c:v>10.729528751</c:v>
+                  <c:v>10.869985937</c:v>
                 </c:pt>
                 <c:pt idx="1">
-                  <c:v>10.691734654</c:v>
+                  <c:v>10.685679706</c:v>
                 </c:pt>
                 <c:pt idx="2">
                   <c:v>11.223942785</c:v>
                 </c:pt>
                 <c:pt idx="3">
-                  <c:v>10.135812655</c:v>
+                  <c:v>10.135540679</c:v>
                 </c:pt>
                 <c:pt idx="4">
-                  <c:v>10.446909538</c:v>
+                  <c:v>10.234278234</c:v>
                 </c:pt>
                 <c:pt idx="5">
                   <c:v>10.470524002</c:v>
@@ -679,19 +679,19 @@
                 <c:formatCode>General</c:formatCode>
                 <c:ptCount val="11"/>
                 <c:pt idx="0">
-                  <c:v>9.11707366</c:v>
+                  <c:v>9.245440187</c:v>
                 </c:pt>
                 <c:pt idx="1">
-                  <c:v>8.682215257</c:v>
+                  <c:v>8.654227364</c:v>
                 </c:pt>
                 <c:pt idx="2">
                   <c:v>9.543684503</c:v>
                 </c:pt>
                 <c:pt idx="3">
-                  <c:v>7.892459337</c:v>
+                  <c:v>7.890364359</c:v>
                 </c:pt>
                 <c:pt idx="4">
-                  <c:v>8.997854948</c:v>
+                  <c:v>8.777731054</c:v>
                 </c:pt>
                 <c:pt idx="5">
                   <c:v>9.059736436</c:v>
@@ -700,7 +700,7 @@
                   <c:v>5.788786832</c:v>
                 </c:pt>
                 <c:pt idx="7">
-                  <c:v>4.07787555</c:v>
+                  <c:v>4.077110815</c:v>
                 </c:pt>
                 <c:pt idx="8">
                   <c:v>1.652268839</c:v>
@@ -18089,7 +18089,7 @@
                         </a:defRPr>
                       </a:pPr>
                       <a:r>
-                        <a:t>Provincial sum is above the national file by 0.13-0.14 bn litres in 2014; 2018 quarter 1 district sheet is missing districts</a:t>
+                        <a:t>Provincial sum is above the national file by 0.13-0.14 bn litres in 2014; below it by 0.21-0.22 in 2018, where the quarter 1 district sheet is missing districts. From 8 October the provincial data is the main series and is used as published</a:t>
                       </a:r>
                     </a:p>
                   </a:txBody>
@@ -18130,7 +18130,7 @@
                         </a:defRPr>
                       </a:pPr>
                       <a:r>
-                        <a:t>National file stands; both records kept</a:t>
+                        <a:t>Provincial figures stand as published; or scale the one faulty quarter in each year to the national total</a:t>
                       </a:r>
                     </a:p>
                   </a:txBody>
@@ -24206,7 +24206,7 @@
               </a:defRPr>
             </a:pPr>
             <a:r>
-              <a:t>Sales: department, which has published to 2023; 2024 and 2025 are blank. FIASA is not used. Rebuilt by one command from registered inputs; a test checks every year against the customs extract.</a:t>
+              <a:t>Sales: department provincial data added up, 2013-2022; department national total for 2023; 2024 and 2025 blank. FIASA and JODI are not used. Rebuilt by one command from registered inputs; a test checks every year against the customs extract.</a:t>
             </a:r>
           </a:p>
         </p:txBody>

--- a/pptx/output/delivered/supporting/Vopak_Manish_Handback_2026_10_07.pptx
+++ b/pptx/output/delivered/supporting/Vopak_Manish_Handback_2026_10_07.pptx
@@ -1059,7 +1059,7 @@
                   <c:v>118.29500612066454</c:v>
                 </c:pt>
                 <c:pt idx="8">
-                  <c:v>85.63567939376274</c:v>
+                  <c:v>20.317025939959194</c:v>
                 </c:pt>
                 <c:pt idx="9">
                   <c:v>20.317025939959194</c:v>
@@ -9119,7 +9119,7 @@
                         </a:defRPr>
                       </a:pPr>
                       <a:r>
-                        <a:t>Agreement with Eskom ends July 2031</a:t>
+                        <a:t>Contract ends in 2030 (system operator)</a:t>
                       </a:r>
                     </a:p>
                   </a:txBody>
@@ -9285,7 +9285,7 @@
                         </a:defRPr>
                       </a:pPr>
                       <a:r>
-                        <a:t>Agreement with Eskom ends October 2030</a:t>
+                        <a:t>Contract ends in 2030 (system operator)</a:t>
                       </a:r>
                     </a:p>
                   </a:txBody>
@@ -11278,7 +11278,7 @@
                         </a:defRPr>
                       </a:pPr>
                       <a:r>
-                        <a:t>Avon and Dedisa after 2030-2031</a:t>
+                        <a:t>Avon and Dedisa after 2030</a:t>
                       </a:r>
                     </a:p>
                   </a:txBody>
@@ -11983,7 +11983,7 @@
                         </a:defRPr>
                       </a:pPr>
                       <a:r>
-                        <a:t>301 / 86 / 20</a:t>
+                        <a:t>301 / 20 / 20</a:t>
                       </a:r>
                     </a:p>
                   </a:txBody>
